--- a/docs/webinar/E2E-5/E2E-5-diapositivas.pptx
+++ b/docs/webinar/E2E-5/E2E-5-diapositivas.pptx
@@ -151,12 +151,12 @@
   <p:extLst>
     <p:ext uri="{521415D9-36F7-43E2-AB2F-B90AF26B5E84}">
       <p14:sectionLst xmlns:p14="http://schemas.microsoft.com/office/powerpoint/2010/main">
-        <p14:section name="Portada" id="{35a43879-6371-b284-a8f4-b7142b9a64d0}">
+        <p14:section name="Portada" id="{c01523e6-cf1e-7fcb-a8fd-bf2484ad6fbd}">
           <p14:sldIdLst>
             <p14:sldId id="256"/>
           </p14:sldIdLst>
         </p14:section>
-        <p14:section name="Clase 1 · ¿Vale la pena?" id="{ed24e8ab-7025-5890-6fc3-655d9112fa9f}">
+        <p14:section name="Clase 1 · ¿Vale la pena?" id="{845fbb53-330b-f741-e33f-0e0f6cd52541}">
           <p14:sldIdLst>
             <p14:sldId id="257"/>
             <p14:sldId id="258"/>
@@ -181,7 +181,7 @@
             <p14:sldId id="277"/>
           </p14:sldIdLst>
         </p14:section>
-        <p14:section name="Clase 2 · Diseñar el proyecto" id="{e257480e-f3c8-defd-148a-19765bcc2d3f}">
+        <p14:section name="Clase 2 · Diseñar el proyecto" id="{d98e1cbb-2301-3c2a-db0f-8d228accb979}">
           <p14:sldIdLst>
             <p14:sldId id="278"/>
             <p14:sldId id="279"/>
@@ -206,7 +206,7 @@
             <p14:sldId id="298"/>
           </p14:sldIdLst>
         </p14:section>
-        <p14:section name="Glosario" id="{7bacb0f6-69f2-5842-13f2-f83b1f07d171}">
+        <p14:section name="Glosario" id="{014c4920-5556-18e7-640f-0ac0efc26fe6}">
           <p14:sldIdLst>
             <p14:sldId id="299"/>
             <p14:sldId id="300"/>

--- a/docs/webinar/E2E-5/E2E-5-diapositivas.pptx
+++ b/docs/webinar/E2E-5/E2E-5-diapositivas.pptx
@@ -50,9 +50,10 @@
     <p:sldId id="298" r:id="rId44"/>
     <p:sldId id="299" r:id="rId45"/>
     <p:sldId id="300" r:id="rId46"/>
+    <p:sldId id="301" r:id="rId47"/>
   </p:sldIdLst>
   <p:notesMasterIdLst>
-    <p:notesMasterId r:id="rId47"/>
+    <p:notesMasterId r:id="rId48"/>
   </p:notesMasterIdLst>
   <p:sldSz cx="12192000" cy="6858000"/>
   <p:notesSz cx="6858000" cy="12192000"/>
@@ -151,12 +152,12 @@
   <p:extLst>
     <p:ext uri="{521415D9-36F7-43E2-AB2F-B90AF26B5E84}">
       <p14:sectionLst xmlns:p14="http://schemas.microsoft.com/office/powerpoint/2010/main">
-        <p14:section name="Portada" id="{c01523e6-cf1e-7fcb-a8fd-bf2484ad6fbd}">
+        <p14:section name="Portada" id="{7dcd44dd-db12-1189-9e51-1052d42ed0a2}">
           <p14:sldIdLst>
             <p14:sldId id="256"/>
           </p14:sldIdLst>
         </p14:section>
-        <p14:section name="Clase 1 · ¿Vale la pena?" id="{845fbb53-330b-f741-e33f-0e0f6cd52541}">
+        <p14:section name="Clase 1 · ¿Vale la pena?" id="{91d5651e-44b9-6f06-ff7d-a0174ef16b43}">
           <p14:sldIdLst>
             <p14:sldId id="257"/>
             <p14:sldId id="258"/>
@@ -181,7 +182,7 @@
             <p14:sldId id="277"/>
           </p14:sldIdLst>
         </p14:section>
-        <p14:section name="Clase 2 · Diseñar el proyecto" id="{d98e1cbb-2301-3c2a-db0f-8d228accb979}">
+        <p14:section name="Clase 2 · Diseñar el proyecto" id="{769d58cc-4d62-7660-4de4-b6063533edd2}">
           <p14:sldIdLst>
             <p14:sldId id="278"/>
             <p14:sldId id="279"/>
@@ -206,10 +207,11 @@
             <p14:sldId id="298"/>
           </p14:sldIdLst>
         </p14:section>
-        <p14:section name="Glosario" id="{014c4920-5556-18e7-640f-0ac0efc26fe6}">
+        <p14:section name="Glosario" id="{fe8c2029-411e-4eb7-4176-18af0cf3151b}">
           <p14:sldIdLst>
             <p14:sldId id="299"/>
             <p14:sldId id="300"/>
+            <p14:sldId id="301"/>
           </p14:sldIdLst>
         </p14:section>
       </p14:sectionLst>
@@ -1584,7 +1586,7 @@
           <a:p>
             <a:r>
               <a:rPr lang="en-US" dirty="0"/>
-              <a:t>Clase 1 (90 minutos): ¿Vale la pena?. Objetivos: Armar un mapa de supuestos y elegir dónde invertir primero en aprender; Diseñar un experimento barato con criterio previo y llevar el resultado al caso; Comparar opciones contra no hacer nada con VAN, TIR, repago y punto de equilibrio; Elegir el enfoque de entrega por entregable con criterios y contrastarlo con un mapa de Wardley.</a:t>
+              <a:t>Clase 1 (90 minutos): ¿Vale la pena?. Objetivos: Partir de las lecciones aprobadas de otros proyectos y armar un mapa de supuestos para elegir dónde invertir primero en aprender; Diseñar un experimento barato con criterio previo y llevar el resultado al caso; Comparar opciones contra no hacer nada con VAN, TIR, repago y punto de equilibrio; Elegir el enfoque de entrega por entregable con criterios y contrastarlo con un mapa de Wardley.</a:t>
             </a:r>
             <a:endParaRPr lang="en-US" dirty="0"/>
           </a:p>
@@ -1936,7 +1938,7 @@
           <a:p>
             <a:r>
               <a:rPr lang="en-US" dirty="0"/>
-              <a:t>Clase 2 (90 minutos): Diseñar el proyecto. Objetivos: Definir beneficios con dueño, línea base y fecha; Separar contingencia, reserva de gestión y presupuesto de cambio; Adaptar la formalidad de la gestión al contexto; Llevar el proyecto a autorizar-proyecto sin hipótesis ocultas: validar o aceptar por escrito (P-11).</a:t>
+              <a:t>Clase 2 (90 minutos): Diseñar el proyecto. Objetivos: Definir beneficios con dueño, línea base y fecha; Separar contingencia, reserva de gestión y presupuesto de cambio; Adaptar la formalidad de la gestión al contexto; Mapear cada requisito a la persona de usuario que lo pide, lo usa o lo aprovecha (STK-13); Llevar el proyecto a autorizar-proyecto sin hipótesis ocultas: validar o aceptar por escrito (P-11).</a:t>
             </a:r>
             <a:endParaRPr lang="en-US" dirty="0"/>
           </a:p>
@@ -2288,7 +2290,7 @@
           <a:p>
             <a:r>
               <a:rPr lang="en-US" dirty="0"/>
-              <a:t>Es la salida de estado.py contexto, acotada a 2.000 caracteres y con ids. Nadie retoma el proyecto con lo que recordaba: retoma con lo que dicen los registros.</a:t>
+              <a:t>Son las salidas de estado.py contexto (acotada a 2.000 caracteres, con ids) y de estado.py radar --linea, que el hook agrega a cada sesión. Nada que decidir todavía: se vigilan los dos supuestos en validación, S-003 (2027-01-14) y S-006 (2027-01-29). La línea no corre la verificación de la puerta; el detalle (estado.py radar) la suma. Próxima puerta: autorizar-proyecto. Nadie retoma el proyecto con lo que recordaba.</a:t>
             </a:r>
             <a:endParaRPr lang="en-US" dirty="0"/>
           </a:p>
@@ -2376,7 +2378,7 @@
           <a:p>
             <a:r>
               <a:rPr lang="en-US" dirty="0"/>
-              <a:t>Primero el contexto de sesión; después la verificación, que muestra el código de cada hallazgo. La tabla de la siguiente diapositiva es la lista de trabajo de la iniciación.</a:t>
+              <a:t>Primero el contexto de sesión y la línea del radar; después la verificación, que muestra el código de cada hallazgo. La tabla de la siguiente diapositiva es la lista de trabajo de la iniciación.</a:t>
             </a:r>
             <a:endParaRPr lang="en-US" dirty="0"/>
           </a:p>
@@ -2904,7 +2906,7 @@
           <a:p>
             <a:r>
               <a:rPr lang="en-US" dirty="0"/>
-              <a:t>La adaptación queda en el PID, sección 8. Cada fila dice qué se adaptó, cómo y por qué. Eso es lo que la junta aprueba junto con los enfoques. Antes de la adaptación, lo que pide la puerta en organización (breve; E2E-3 lo desarrolla): junta completa con ejecutiva, usuaria sénior y proveedor sénior; 7 interesados en la matriz (2 de cerca, 3 satisfechos, 2 informados); RACI de 18 filas en 4 elementos, una A por elemento, sobre productos de la WBS y REQ-006.</a:t>
+              <a:t>La adaptación queda en el PID, sección 8. Cada fila dice qué se adaptó, cómo y por qué. Eso es lo que la junta aprueba junto con los enfoques. Lo que pide la puerta en organización (paso 10) (breve; E2E-3 lo desarrolla): junta completa con ejecutiva, usuaria sénior y proveedor sénior; 7 interesados en la matriz (2 de cerca, 3 satisfechos, 2 informados); RACI de 18 filas en 4 elementos, una A por elemento, sobre productos de la WBS y REQ-006.</a:t>
             </a:r>
             <a:endParaRPr lang="en-US" dirty="0"/>
           </a:p>
@@ -2992,7 +2994,7 @@
           <a:p>
             <a:r>
               <a:rPr lang="en-US" dirty="0"/>
-              <a:t>Los tres diseños salen de las tablas del paquete: perfiles de pm-mandato-y-brief, formatos de PID de pm-acta-constitucion y enfoques de una página de pm-enfoques-gestion. Cada uno se creó como proyecto aparte y las cifras se leen de su estado.json.</a:t>
+              <a:t>Paso 10b. Prompt: «¿Quiénes van a usar o pedir lo que estamos por construir? Proponé personas desde el recorrido del paciente y el mandato…». interesados.py personas candidatos propone una, el paciente que agenda por teléfono; Inés Ferrer la confirma y se agregan la recepcionista del call center (supuesto a validar) y el paciente mayor de 65 (evidencia: la lección L-001). La sanidad da STK-13: REQ-006, Must, sin persona; nadie lo usa, lo aprovecha el paciente, y el aviso se resuelve. Resultado: los 4 Must con persona; REQ-003 sirve a las tres. Una persona no es un interesado: cada una se ancla al interesado que la representa (ST-006, ST-005).</a:t>
             </a:r>
             <a:endParaRPr lang="en-US" dirty="0"/>
           </a:p>
@@ -3080,7 +3082,7 @@
           <a:p>
             <a:r>
               <a:rPr lang="en-US" dirty="0"/>
-              <a:t>El regulado pide 16 artefactos y 7 tolerancias; el pequeño, 7 y 2; el ágil, 12 artefactos con enfoques más cortos. El diseño real del caso es un cuarto punto: híbrido con 3 etapas.</a:t>
+              <a:t>Paso 16b, contraste con la variante a. personas candidatos --desde bmad lee UJ-1…3 (solo lectura) y propone a Marta, Diego y Lucía con la cita prd.md:línea y los FR de cada recorrido; Martín Suárez confirma y mapea los FR sin recorrido: FR-8 a Diego y a Lucía, FR-12 a Diego como beneficiario, y Lucía pide la bandeja única (FR-9). Los 12 FR tienen persona. El PRD no prioriza: STK-13 empieza a vigilar cuando el backlog fija MoSCoW (E2E-4). El recorrido de UJ-2 se siembra con --persona PU-002 (paso 17).</a:t>
             </a:r>
             <a:endParaRPr lang="en-US" dirty="0"/>
           </a:p>
@@ -3168,7 +3170,7 @@
           <a:p>
             <a:r>
               <a:rPr lang="en-US" dirty="0"/>
-              <a:t>Dos salidas legítimas: validar o aceptar. La aceptación es una decisión de nivel junta que cita el id y dice que lo acepta; la verificación la muestra como aviso con la D-### y el riesgo R-003 cubre el efecto.</a:t>
+              <a:t>Los tres diseños salen de las tablas del paquete: perfiles de pm-mandato-y-brief, formatos de PID de pm-acta-constitucion y enfoques de una página de pm-enfoques-gestion. Cada uno se creó como proyecto aparte y las cifras se leen de su estado.json.</a:t>
             </a:r>
             <a:endParaRPr lang="en-US" dirty="0"/>
           </a:p>
@@ -3256,7 +3258,7 @@
           <a:p>
             <a:r>
               <a:rPr lang="en-US" dirty="0"/>
-              <a:t>Sanidad al 2027-01-14 en 0 avisos; verificación con 1 bloqueo (L-01: la lista, que se arma en la junta) y la condición P-11. Después del segundo prompt: S-003 validado, D-009 y el aviso P-11 con S-006 (D-009); la puerta queda aprobada (D-010) y el resumen dice Autorizado: sí.</a:t>
+              <a:t>El regulado pide 16 artefactos y 7 tolerancias; el pequeño, 7 y 2; el ágil, 12 artefactos con enfoques más cortos. El diseño real del caso es un cuarto punto: híbrido con 3 etapas. Preguntá a la sala qué diseño le corresponde a su proyecto y qué dejaría de escribir: depende del riesgo, el costo y los interesados, no del gusto del equipo; nunca se dejan las decisiones de la junta, las tolerancias de tiempo y costo ni quién libera cada reserva. Lo trabajan en la parte B del ejercicio.</a:t>
             </a:r>
             <a:endParaRPr lang="en-US" dirty="0"/>
           </a:p>
@@ -3344,7 +3346,7 @@
           <a:p>
             <a:r>
               <a:rPr lang="en-US" dirty="0"/>
-              <a:t>Respuesta esperada: depende del riesgo, el costo y los interesados, no del gusto del equipo. Lo que nunca se deja: las decisiones de la junta, las tolerancias de tiempo y costo y quién libera cada reserva.</a:t>
+              <a:t>Dos salidas legítimas: validar o aceptar. La aceptación es una decisión de nivel junta que cita el id y dice que lo acepta; la verificación la muestra como aviso con la D-### y el riesgo R-003 cubre el efecto.</a:t>
             </a:r>
             <a:endParaRPr lang="en-US" dirty="0"/>
           </a:p>
@@ -3432,7 +3434,7 @@
           <a:p>
             <a:r>
               <a:rPr lang="en-US" dirty="0"/>
-              <a:t>VAN 263.229 con el presupuesto real (TIR 51,1 %), 4 de 4 supuestos críticos tratados (2 validados, 1 ajustado, 1 aceptado con D-009), presupuesto autorizado 179.340, enfoque híbrido, tolerancia de costo ±10 % y la puerta aprobada el 2027-01-15 con P-11 en aviso. La tarjeta de la puerta sale de puertas.py verificar --json.</a:t>
+              <a:t>Sanidad al 2027-01-14 en 0 avisos; verificación con 1 bloqueo (L-01: la lista, que se arma en la junta) y la condición P-11. Después del segundo prompt: S-003 validado, D-009 y el aviso P-11 con S-006 (D-009); la puerta queda aprobada (D-010) y el resumen dice Autorizado: sí.</a:t>
             </a:r>
             <a:endParaRPr lang="en-US" dirty="0"/>
           </a:p>
@@ -3608,7 +3610,7 @@
           <a:p>
             <a:r>
               <a:rPr lang="en-US" dirty="0"/>
-              <a:t>mapas.py tablero dibuja los dos mapas del paso 5b en SVG propio, sin mmdc, con los vínculos de los pasos 6 y 9. Avisos MAP vigentes: 0. La agenda clínica, con inercia, muestra «inercia → R-001»; cada dolor del paciente tiene su tratamiento: P1 → S-001, P4 → S-002, P5 → REQ-003 y REQ-005. Los ids enlazan a la tabla de vínculos con estado y responsable. La variante con BMAD termina igual (g5-tablero-mapas-bmad.png).</a:t>
+              <a:t>VAN 263.229 con el presupuesto real (TIR 51,1 %), 4 de 4 supuestos críticos tratados (2 validados, 1 ajustado, 1 aceptado con D-009), presupuesto autorizado 179.340, enfoque híbrido, tolerancia de costo ±10 % y la puerta aprobada el 2027-01-15 con P-11 en aviso. La tarjeta de la puerta sale de puertas.py verificar --json. El tablero de mapas (g5-tablero-mapas.png, paso 14) cierra igual: 0 avisos MAP, la agenda con «inercia → R-001», cada dolor del paciente con su tratamiento y las lecciones L-002 y L-003 en accionada-proyecto entre los vínculos citados.</a:t>
             </a:r>
             <a:endParaRPr lang="en-US" dirty="0"/>
           </a:p>
@@ -3696,7 +3698,7 @@
           <a:p>
             <a:r>
               <a:rPr lang="en-US" dirty="0"/>
-              <a:t>Lo que la junta aceptó y los riesgos que cubren el proyecto siguen bajo control continuo. Sin nadie que se acuerde: la sanidad lo muestra el primer día después de la fecha.</a:t>
+              <a:t>Prompt: «Corré la sanidad al 2027-02-01. ¿Qué tengo que decidir, escalar y desbloquear hoy?». pm-orquestador corre estado.py radar --corte 2027-02-01, de solo lectura: cada ítem con su regla, responsable y siguiente paso, en un orden reproducible. Escalar una excepción no corresponde: nada fuera de tolerancia ni presupuesto agotado; la opción es el highlight. Lo que la junta aceptó sigue bajo control continuo sin que nadie tenga que acordarse.</a:t>
             </a:r>
             <a:endParaRPr lang="en-US" dirty="0"/>
           </a:p>
@@ -3784,7 +3786,7 @@
           <a:p>
             <a:r>
               <a:rPr lang="en-US" dirty="0"/>
-              <a:t>La hoja está en ejercicio.md. Si alguien no tiene reserva de gestión, que lo anote: es un hallazgo, no un error del ejercicio.</a:t>
+              <a:t>La hoja está en ejercicio.md; al terminar, cada uno autoevalúa con los criterios de la hoja. Si alguien no tiene reserva de gestión, que lo anote: es un hallazgo, no un error del ejercicio. Lo mismo un Must sin persona.</a:t>
             </a:r>
             <a:endParaRPr lang="en-US" dirty="0"/>
           </a:p>
@@ -3960,7 +3962,7 @@
           <a:p>
             <a:r>
               <a:rPr lang="en-US" dirty="0"/>
-              <a:t>Glosario del caso E2E-5: 25 términos, página 1 de 2.</a:t>
+              <a:t>Glosario del caso E2E-5: 25 términos, página 1 de 3.</a:t>
             </a:r>
             <a:endParaRPr lang="en-US" dirty="0"/>
           </a:p>
@@ -4048,7 +4050,7 @@
           <a:p>
             <a:r>
               <a:rPr lang="en-US" dirty="0"/>
-              <a:t>Glosario del caso E2E-5: 25 términos, página 2 de 2.</a:t>
+              <a:t>Glosario del caso E2E-5: 25 términos, página 2 de 3.</a:t>
             </a:r>
             <a:endParaRPr lang="en-US" dirty="0"/>
           </a:p>
@@ -4072,6 +4074,94 @@
             <a:fld id="{F7021451-1387-4CA6-816F-3879F97B5CBC}" type="slidenum">
               <a:rPr lang="en-US"/>
               <a:t>45</a:t>
+            </a:fld>
+            <a:endParaRPr lang="en-US"/>
+          </a:p>
+        </p:txBody>
+      </p:sp>
+    </p:spTree>
+    <p:extLst>
+      <p:ext uri="{BB962C8B-B14F-4D97-AF65-F5344CB8AC3E}">
+        <p14:creationId xmlns:p14="http://schemas.microsoft.com/office/powerpoint/2010/main" val="1024086991"/>
+      </p:ext>
+    </p:extLst>
+  </p:cSld>
+  <p:clrMapOvr>
+    <a:masterClrMapping/>
+  </p:clrMapOvr>
+</p:notes>
+</file>
+
+<file path=ppt/notesSlides/notesSlide46.xml><?xml version="1.0" encoding="utf-8"?>
+<p:notes xmlns:a="http://schemas.openxmlformats.org/drawingml/2006/main" xmlns:r="http://schemas.openxmlformats.org/officeDocument/2006/relationships" xmlns:p="http://schemas.openxmlformats.org/presentationml/2006/main">
+  <p:cSld>
+    <p:spTree>
+      <p:nvGrpSpPr>
+        <p:cNvPr id="1" name=""/>
+        <p:cNvGrpSpPr/>
+        <p:nvPr/>
+      </p:nvGrpSpPr>
+      <p:grpSpPr>
+        <a:xfrm>
+          <a:off x="0" y="0"/>
+          <a:ext cx="0" cy="0"/>
+          <a:chOff x="0" y="0"/>
+          <a:chExt cx="0" cy="0"/>
+        </a:xfrm>
+      </p:grpSpPr>
+      <p:sp>
+        <p:nvSpPr>
+          <p:cNvPr id="2" name="Slide Image Placeholder 1"/>
+          <p:cNvSpPr>
+            <a:spLocks noGrp="1" noRot="1" noChangeAspect="1"/>
+          </p:cNvSpPr>
+          <p:nvPr>
+            <p:ph type="sldImg"/>
+          </p:nvPr>
+        </p:nvSpPr>
+        <p:spPr/>
+      </p:sp>
+      <p:sp>
+        <p:nvSpPr>
+          <p:cNvPr id="3" name="Notes Placeholder 2"/>
+          <p:cNvSpPr>
+            <a:spLocks noGrp="1"/>
+          </p:cNvSpPr>
+          <p:nvPr>
+            <p:ph type="body" idx="1"/>
+          </p:nvPr>
+        </p:nvSpPr>
+        <p:spPr/>
+        <p:txBody>
+          <a:bodyPr/>
+          <a:lstStyle/>
+          <a:p>
+            <a:r>
+              <a:rPr lang="en-US" dirty="0"/>
+              <a:t>Glosario del caso E2E-5: 25 términos, página 3 de 3.</a:t>
+            </a:r>
+            <a:endParaRPr lang="en-US" dirty="0"/>
+          </a:p>
+        </p:txBody>
+      </p:sp>
+      <p:sp>
+        <p:nvSpPr>
+          <p:cNvPr id="4" name="Slide Number Placeholder 3"/>
+          <p:cNvSpPr>
+            <a:spLocks noGrp="1"/>
+          </p:cNvSpPr>
+          <p:nvPr>
+            <p:ph type="sldNum" sz="quarter" idx="10"/>
+          </p:nvPr>
+        </p:nvSpPr>
+        <p:spPr/>
+        <p:txBody>
+          <a:bodyPr/>
+          <a:lstStyle/>
+          <a:p>
+            <a:fld id="{F7021451-1387-4CA6-816F-3879F97B5CBC}" type="slidenum">
+              <a:rPr lang="en-US"/>
+              <a:t>46</a:t>
             </a:fld>
             <a:endParaRPr lang="en-US"/>
           </a:p>
@@ -4224,7 +4314,7 @@
           <a:p>
             <a:r>
               <a:rPr lang="en-US" dirty="0"/>
-              <a:t>Todo el escenario es ficticio. Los datos de la red vienen del mandato (paso 1). La base de comparación de las opciones es seguir igual: 43.200 turnos perdidos por año.</a:t>
+              <a:t>Todo el escenario es ficticio. Ejecutiva Carmen Olivera, gestor Pablo Rinaldi. Los datos de la red vienen del mandato (paso 1). Las lecciones salen del índice que exportó la PMO: lecciones.py buscar devuelve 3 de 4 aprobadas que coinciden (una sin aprobar no aparece) y, con la confirmación de Pablo, incorporar las registra como L-001 a L-003 con su origen; en el paso 6 quedan accionadas en el brief. La base de comparación de las opciones es seguir igual: 43.200 turnos perdidos por año.</a:t>
             </a:r>
             <a:endParaRPr lang="en-US" dirty="0"/>
           </a:p>
@@ -4719,7 +4809,7 @@
                   <a:srgbClr val="D6E4F0"/>
                 </a:solidFill>
               </a:rPr>
-              <a:t>pm-method 2.3.0 · Webinar E2E-5 · Clase 1</a:t>
+              <a:t>pm-method 2.4.0 · Webinar E2E-5 · Clase 1</a:t>
             </a:r>
             <a:endParaRPr lang="en-US" sz="1000" dirty="0"/>
           </a:p>
@@ -4959,7 +5049,7 @@
                   <a:srgbClr val="696969"/>
                 </a:solidFill>
               </a:rPr>
-              <a:t>pm-method 2.3.0 · Webinar E2E-5 · Clase 2</a:t>
+              <a:t>pm-method 2.4.0 · Webinar E2E-5 · Clase 2</a:t>
             </a:r>
             <a:endParaRPr lang="en-US" sz="1000" dirty="0"/>
           </a:p>
@@ -5177,7 +5267,7 @@
                   <a:srgbClr val="D6E4F0"/>
                 </a:solidFill>
               </a:rPr>
-              <a:t>pm-method 2.3.0 · Webinar E2E-5 · Clase 2</a:t>
+              <a:t>pm-method 2.4.0 · Webinar E2E-5 · Clase 2</a:t>
             </a:r>
             <a:endParaRPr lang="en-US" sz="1000" dirty="0"/>
           </a:p>
@@ -5395,7 +5485,7 @@
                   <a:srgbClr val="D6E4F0"/>
                 </a:solidFill>
               </a:rPr>
-              <a:t>pm-method 2.3.0 · Webinar E2E-5 · Clase 2</a:t>
+              <a:t>pm-method 2.4.0 · Webinar E2E-5 · Clase 2</a:t>
             </a:r>
             <a:endParaRPr lang="en-US" sz="1000" dirty="0"/>
           </a:p>
@@ -5613,7 +5703,7 @@
                   <a:srgbClr val="D6E4F0"/>
                 </a:solidFill>
               </a:rPr>
-              <a:t>pm-method 2.3.0 · Webinar E2E-5 · Clase 2</a:t>
+              <a:t>pm-method 2.4.0 · Webinar E2E-5 · Clase 2</a:t>
             </a:r>
             <a:endParaRPr lang="en-US" sz="1000" dirty="0"/>
           </a:p>
@@ -5789,7 +5879,7 @@
                   <a:srgbClr val="D6E4F0"/>
                 </a:solidFill>
               </a:rPr>
-              <a:t>pm-method 2.3.0 · Webinar E2E-5</a:t>
+              <a:t>pm-method 2.4.0 · Webinar E2E-5</a:t>
             </a:r>
             <a:endParaRPr lang="en-US" sz="1000" dirty="0"/>
           </a:p>
@@ -5984,7 +6074,7 @@
                   <a:srgbClr val="696969"/>
                 </a:solidFill>
               </a:rPr>
-              <a:t>pm-method 2.3.0 · Webinar E2E-5</a:t>
+              <a:t>pm-method 2.4.0 · Webinar E2E-5</a:t>
             </a:r>
             <a:endParaRPr lang="en-US" sz="1000" dirty="0"/>
           </a:p>
@@ -6202,7 +6292,7 @@
                   <a:srgbClr val="D6E4F0"/>
                 </a:solidFill>
               </a:rPr>
-              <a:t>pm-method 2.3.0 · Webinar E2E-5</a:t>
+              <a:t>pm-method 2.4.0 · Webinar E2E-5</a:t>
             </a:r>
             <a:endParaRPr lang="en-US" sz="1000" dirty="0"/>
           </a:p>
@@ -6420,7 +6510,7 @@
                   <a:srgbClr val="D6E4F0"/>
                 </a:solidFill>
               </a:rPr>
-              <a:t>pm-method 2.3.0 · Webinar E2E-5</a:t>
+              <a:t>pm-method 2.4.0 · Webinar E2E-5</a:t>
             </a:r>
             <a:endParaRPr lang="en-US" sz="1000" dirty="0"/>
           </a:p>
@@ -6638,7 +6728,7 @@
                   <a:srgbClr val="D6E4F0"/>
                 </a:solidFill>
               </a:rPr>
-              <a:t>pm-method 2.3.0 · Webinar E2E-5</a:t>
+              <a:t>pm-method 2.4.0 · Webinar E2E-5</a:t>
             </a:r>
             <a:endParaRPr lang="en-US" sz="1000" dirty="0"/>
           </a:p>
@@ -6878,7 +6968,7 @@
                   <a:srgbClr val="696969"/>
                 </a:solidFill>
               </a:rPr>
-              <a:t>pm-method 2.3.0 · Webinar E2E-5 · Clase 1</a:t>
+              <a:t>pm-method 2.4.0 · Webinar E2E-5 · Clase 1</a:t>
             </a:r>
             <a:endParaRPr lang="en-US" sz="1000" dirty="0"/>
           </a:p>
@@ -7096,7 +7186,7 @@
                   <a:srgbClr val="D6E4F0"/>
                 </a:solidFill>
               </a:rPr>
-              <a:t>pm-method 2.3.0 · Webinar E2E-5 · Clase 1</a:t>
+              <a:t>pm-method 2.4.0 · Webinar E2E-5 · Clase 1</a:t>
             </a:r>
             <a:endParaRPr lang="en-US" sz="1000" dirty="0"/>
           </a:p>
@@ -7314,7 +7404,7 @@
                   <a:srgbClr val="D6E4F0"/>
                 </a:solidFill>
               </a:rPr>
-              <a:t>pm-method 2.3.0 · Webinar E2E-5 · Clase 1</a:t>
+              <a:t>pm-method 2.4.0 · Webinar E2E-5 · Clase 1</a:t>
             </a:r>
             <a:endParaRPr lang="en-US" sz="1000" dirty="0"/>
           </a:p>
@@ -7758,7 +7848,7 @@
                 <a:ea typeface="Arial" pitchFamily="34" charset="-122"/>
                 <a:cs typeface="Arial" pitchFamily="34" charset="-120"/>
               </a:rPr>
-              <a:t>Webinar · pm-method 2.3.0 · E2E-5</a:t>
+              <a:t>Webinar · pm-method 2.4.0 · E2E-5</a:t>
             </a:r>
             <a:endParaRPr lang="en-US" sz="1600" dirty="0"/>
           </a:p>
@@ -13112,7 +13202,7 @@
                 <a:ea typeface="Arial" pitchFamily="34" charset="-122"/>
                 <a:cs typeface="Arial" pitchFamily="34" charset="-120"/>
               </a:rPr>
-              <a:t>Armar un mapa de supuestos y elegir dónde invertir primero en aprender</a:t>
+              <a:t>Partir de las lecciones aprobadas de otros proyectos y armar un mapa de supuestos para elegir dónde invertir primero en aprender</a:t>
             </a:r>
             <a:endParaRPr lang="en-US" sz="1600" dirty="0"/>
           </a:p>
@@ -15952,11 +16042,11 @@
         <p:spPr>
           <a:xfrm>
             <a:off x="548640" y="2743200"/>
-            <a:ext cx="11091672" cy="772668"/>
+            <a:ext cx="11091672" cy="592531"/>
           </a:xfrm>
           <a:prstGeom prst="roundRect">
             <a:avLst>
-              <a:gd name="adj" fmla="val 11834"/>
+              <a:gd name="adj" fmla="val 15432"/>
             </a:avLst>
           </a:prstGeom>
           <a:solidFill>
@@ -15979,7 +16069,7 @@
         <p:spPr>
           <a:xfrm>
             <a:off x="685800" y="2743200"/>
-            <a:ext cx="411480" cy="772668"/>
+            <a:ext cx="411480" cy="592531"/>
           </a:xfrm>
           <a:prstGeom prst="rect">
             <a:avLst/>
@@ -16018,7 +16108,7 @@
         <p:spPr>
           <a:xfrm>
             <a:off x="1234440" y="2779776"/>
-            <a:ext cx="10268712" cy="699516"/>
+            <a:ext cx="10268712" cy="519379"/>
           </a:xfrm>
           <a:prstGeom prst="rect">
             <a:avLst/>
@@ -16034,7 +16124,7 @@
               <a:buNone/>
             </a:pPr>
             <a:r>
-              <a:rPr lang="en-US" sz="1800" dirty="0">
+              <a:rPr lang="en-US" sz="1600" dirty="0">
                 <a:solidFill>
                   <a:srgbClr val="FFFFFF"/>
                 </a:solidFill>
@@ -16056,12 +16146,12 @@
         </p:nvSpPr>
         <p:spPr>
           <a:xfrm>
-            <a:off x="548640" y="3643884"/>
-            <a:ext cx="11091672" cy="772668"/>
+            <a:off x="548640" y="3463747"/>
+            <a:ext cx="11091672" cy="592531"/>
           </a:xfrm>
           <a:prstGeom prst="roundRect">
             <a:avLst>
-              <a:gd name="adj" fmla="val 11834"/>
+              <a:gd name="adj" fmla="val 15432"/>
             </a:avLst>
           </a:prstGeom>
           <a:solidFill>
@@ -16083,8 +16173,8 @@
         </p:nvSpPr>
         <p:spPr>
           <a:xfrm>
-            <a:off x="685800" y="3643884"/>
-            <a:ext cx="411480" cy="772668"/>
+            <a:off x="685800" y="3463747"/>
+            <a:ext cx="411480" cy="592531"/>
           </a:xfrm>
           <a:prstGeom prst="rect">
             <a:avLst/>
@@ -16122,8 +16212,8 @@
         </p:nvSpPr>
         <p:spPr>
           <a:xfrm>
-            <a:off x="1234440" y="3680460"/>
-            <a:ext cx="10268712" cy="699516"/>
+            <a:off x="1234440" y="3500323"/>
+            <a:ext cx="10268712" cy="519379"/>
           </a:xfrm>
           <a:prstGeom prst="rect">
             <a:avLst/>
@@ -16139,7 +16229,7 @@
               <a:buNone/>
             </a:pPr>
             <a:r>
-              <a:rPr lang="en-US" sz="1800" dirty="0">
+              <a:rPr lang="en-US" sz="1600" dirty="0">
                 <a:solidFill>
                   <a:srgbClr val="FFFFFF"/>
                 </a:solidFill>
@@ -16161,12 +16251,12 @@
         </p:nvSpPr>
         <p:spPr>
           <a:xfrm>
-            <a:off x="548640" y="4544568"/>
-            <a:ext cx="11091672" cy="772668"/>
+            <a:off x="548640" y="4184294"/>
+            <a:ext cx="11091672" cy="592531"/>
           </a:xfrm>
           <a:prstGeom prst="roundRect">
             <a:avLst>
-              <a:gd name="adj" fmla="val 11834"/>
+              <a:gd name="adj" fmla="val 15432"/>
             </a:avLst>
           </a:prstGeom>
           <a:solidFill>
@@ -16188,8 +16278,8 @@
         </p:nvSpPr>
         <p:spPr>
           <a:xfrm>
-            <a:off x="685800" y="4544568"/>
-            <a:ext cx="411480" cy="772668"/>
+            <a:off x="685800" y="4184294"/>
+            <a:ext cx="411480" cy="592531"/>
           </a:xfrm>
           <a:prstGeom prst="rect">
             <a:avLst/>
@@ -16227,8 +16317,8 @@
         </p:nvSpPr>
         <p:spPr>
           <a:xfrm>
-            <a:off x="1234440" y="4581144"/>
-            <a:ext cx="10268712" cy="699516"/>
+            <a:off x="1234440" y="4220870"/>
+            <a:ext cx="10268712" cy="519379"/>
           </a:xfrm>
           <a:prstGeom prst="rect">
             <a:avLst/>
@@ -16244,7 +16334,7 @@
               <a:buNone/>
             </a:pPr>
             <a:r>
-              <a:rPr lang="en-US" sz="1800" dirty="0">
+              <a:rPr lang="en-US" sz="1600" dirty="0">
                 <a:solidFill>
                   <a:srgbClr val="FFFFFF"/>
                 </a:solidFill>
@@ -16266,12 +16356,12 @@
         </p:nvSpPr>
         <p:spPr>
           <a:xfrm>
-            <a:off x="548640" y="5445252"/>
-            <a:ext cx="11091672" cy="772668"/>
+            <a:off x="548640" y="4904842"/>
+            <a:ext cx="11091672" cy="592531"/>
           </a:xfrm>
           <a:prstGeom prst="roundRect">
             <a:avLst>
-              <a:gd name="adj" fmla="val 11834"/>
+              <a:gd name="adj" fmla="val 15432"/>
             </a:avLst>
           </a:prstGeom>
           <a:solidFill>
@@ -16293,8 +16383,8 @@
         </p:nvSpPr>
         <p:spPr>
           <a:xfrm>
-            <a:off x="685800" y="5445252"/>
-            <a:ext cx="411480" cy="772668"/>
+            <a:off x="685800" y="4904842"/>
+            <a:ext cx="411480" cy="592531"/>
           </a:xfrm>
           <a:prstGeom prst="rect">
             <a:avLst/>
@@ -16332,8 +16422,8 @@
         </p:nvSpPr>
         <p:spPr>
           <a:xfrm>
-            <a:off x="1234440" y="5481828"/>
-            <a:ext cx="10268712" cy="699516"/>
+            <a:off x="1234440" y="4941418"/>
+            <a:ext cx="10268712" cy="519379"/>
           </a:xfrm>
           <a:prstGeom prst="rect">
             <a:avLst/>
@@ -16349,7 +16439,112 @@
               <a:buNone/>
             </a:pPr>
             <a:r>
-              <a:rPr lang="en-US" sz="1800" dirty="0">
+              <a:rPr lang="en-US" sz="1600" dirty="0">
+                <a:solidFill>
+                  <a:srgbClr val="FFFFFF"/>
+                </a:solidFill>
+                <a:latin typeface="Arial" pitchFamily="34" charset="0"/>
+                <a:ea typeface="Arial" pitchFamily="34" charset="-122"/>
+                <a:cs typeface="Arial" pitchFamily="34" charset="-120"/>
+              </a:rPr>
+              <a:t>Mapear cada requisito a la persona de usuario que lo pide, lo usa o lo aprovecha (STK-13)</a:t>
+            </a:r>
+            <a:endParaRPr lang="en-US" sz="1600" dirty="0"/>
+          </a:p>
+        </p:txBody>
+      </p:sp>
+      <p:sp>
+        <p:nvSpPr>
+          <p:cNvPr id="17" name="Shape 15"/>
+          <p:cNvSpPr/>
+          <p:nvPr/>
+        </p:nvSpPr>
+        <p:spPr>
+          <a:xfrm>
+            <a:off x="548640" y="5625389"/>
+            <a:ext cx="11091672" cy="592531"/>
+          </a:xfrm>
+          <a:prstGeom prst="roundRect">
+            <a:avLst>
+              <a:gd name="adj" fmla="val 15432"/>
+            </a:avLst>
+          </a:prstGeom>
+          <a:solidFill>
+            <a:srgbClr val="173D66"/>
+          </a:solidFill>
+          <a:ln w="12700">
+            <a:solidFill>
+              <a:srgbClr val="173D66"/>
+            </a:solidFill>
+            <a:prstDash val="solid"/>
+          </a:ln>
+        </p:spPr>
+      </p:sp>
+      <p:sp>
+        <p:nvSpPr>
+          <p:cNvPr id="18" name="Text 16"/>
+          <p:cNvSpPr txBox="1"/>
+          <p:nvPr/>
+        </p:nvSpPr>
+        <p:spPr>
+          <a:xfrm>
+            <a:off x="685800" y="5625389"/>
+            <a:ext cx="411480" cy="592531"/>
+          </a:xfrm>
+          <a:prstGeom prst="rect">
+            <a:avLst/>
+          </a:prstGeom>
+          <a:noFill/>
+          <a:ln/>
+        </p:spPr>
+        <p:txBody>
+          <a:bodyPr wrap="square" lIns="0" tIns="0" rIns="0" bIns="0" rtlCol="0" anchor="ctr"/>
+          <a:lstStyle/>
+          <a:p>
+            <a:pPr indent="0" marL="0">
+              <a:buNone/>
+            </a:pPr>
+            <a:r>
+              <a:rPr lang="en-US" sz="2000" b="1" dirty="0">
+                <a:solidFill>
+                  <a:srgbClr val="9FD0F0"/>
+                </a:solidFill>
+                <a:latin typeface="Arial" pitchFamily="34" charset="0"/>
+                <a:ea typeface="Arial" pitchFamily="34" charset="-122"/>
+                <a:cs typeface="Arial" pitchFamily="34" charset="-120"/>
+              </a:rPr>
+              <a:t>5</a:t>
+            </a:r>
+            <a:endParaRPr lang="en-US" sz="2000" dirty="0"/>
+          </a:p>
+        </p:txBody>
+      </p:sp>
+      <p:sp>
+        <p:nvSpPr>
+          <p:cNvPr id="19" name="Text 17"/>
+          <p:cNvSpPr txBox="1"/>
+          <p:nvPr/>
+        </p:nvSpPr>
+        <p:spPr>
+          <a:xfrm>
+            <a:off x="1234440" y="5661965"/>
+            <a:ext cx="10268712" cy="519379"/>
+          </a:xfrm>
+          <a:prstGeom prst="rect">
+            <a:avLst/>
+          </a:prstGeom>
+          <a:noFill/>
+          <a:ln/>
+        </p:spPr>
+        <p:txBody>
+          <a:bodyPr wrap="square" lIns="0" tIns="0" rIns="0" bIns="0" rtlCol="0" anchor="ctr"/>
+          <a:lstStyle/>
+          <a:p>
+            <a:pPr indent="0" marL="0">
+              <a:buNone/>
+            </a:pPr>
+            <a:r>
+              <a:rPr lang="en-US" sz="1600" dirty="0">
                 <a:solidFill>
                   <a:srgbClr val="FFFFFF"/>
                 </a:solidFill>
@@ -18133,7 +18328,7 @@
                 <a:ea typeface="Arial" pitchFamily="34" charset="-122"/>
                 <a:cs typeface="Arial" pitchFamily="34" charset="-120"/>
               </a:rPr>
-              <a:t>El hook de inicio agrega el contexto de estado.json y los registros</a:t>
+              <a:t>El hook de inicio agrega el contexto y la línea del radar</a:t>
             </a:r>
             <a:endParaRPr lang="en-US" sz="1600" dirty="0"/>
           </a:p>
@@ -18397,7 +18592,7 @@
                 <a:ea typeface="Arial" pitchFamily="34" charset="-122"/>
                 <a:cs typeface="Arial" pitchFamily="34" charset="-120"/>
               </a:rPr>
-              <a:t>Próxima puerta: autorizar-proyecto</a:t>
+              <a:t>Radar: decidir 0 · escalar 0 · desbloquear 0 · vigilar 2 (S-003)</a:t>
             </a:r>
             <a:endParaRPr lang="en-US" sz="1600" dirty="0"/>
           </a:p>
@@ -22549,6 +22744,330 @@
                 <a:ea typeface="Arial" pitchFamily="34" charset="-122"/>
                 <a:cs typeface="Arial" pitchFamily="34" charset="-120"/>
               </a:rPr>
+              <a:t>Para quién es cada requisito: capacidad × persona</a:t>
+            </a:r>
+            <a:endParaRPr lang="en-US" sz="2400" dirty="0"/>
+          </a:p>
+        </p:txBody>
+      </p:sp>
+      <p:pic>
+        <p:nvPicPr>
+          <p:cNvPr id="3" name="Image 0" descr="Para quién es cada requisito: capacidad × persona">    </p:cNvPr>
+          <p:cNvPicPr>
+            <a:picLocks noChangeAspect="1"/>
+          </p:cNvPicPr>
+          <p:nvPr/>
+        </p:nvPicPr>
+        <p:blipFill>
+          <a:blip r:embed="rId1"/>
+          <a:stretch>
+            <a:fillRect/>
+          </a:stretch>
+        </p:blipFill>
+        <p:spPr>
+          <a:xfrm>
+            <a:off x="1705356" y="1280160"/>
+            <a:ext cx="8778240" cy="4937760"/>
+          </a:xfrm>
+          <a:prstGeom prst="rect">
+            <a:avLst/>
+          </a:prstGeom>
+        </p:spPr>
+      </p:pic>
+      <p:sp>
+        <p:nvSpPr>
+          <p:cNvPr id="4" name="Shape 1"/>
+          <p:cNvSpPr/>
+          <p:nvPr/>
+        </p:nvSpPr>
+        <p:spPr>
+          <a:xfrm>
+            <a:off x="1705356" y="1280160"/>
+            <a:ext cx="8778240" cy="4937760"/>
+          </a:xfrm>
+          <a:prstGeom prst="rect">
+            <a:avLst/>
+          </a:prstGeom>
+          <a:solidFill>
+            <a:srgbClr val="FFFFFF">
+              <a:alpha val="0"/>
+            </a:srgbClr>
+          </a:solidFill>
+          <a:ln w="9525">
+            <a:solidFill>
+              <a:srgbClr val="E2E2E6"/>
+            </a:solidFill>
+            <a:prstDash val="solid"/>
+          </a:ln>
+        </p:spPr>
+      </p:sp>
+      <p:sp>
+        <p:nvSpPr>
+          <p:cNvPr id="25" name="Slide Number Placeholder 0"/>
+          <p:cNvSpPr>
+            <a:spLocks noGrp="1"/>
+          </p:cNvSpPr>
+          <p:nvPr>
+            <p:ph type="sldNum" sz="quarter" idx="4294967295"/>
+          </p:nvPr>
+        </p:nvSpPr>
+        <p:spPr>
+          <a:xfrm>
+            <a:off x="11091672" y="6419088"/>
+            <a:ext cx="640080" cy="274320"/>
+          </a:xfrm>
+          <a:prstGeom prst="rect">
+            <a:avLst/>
+          </a:prstGeom>
+          <a:extLst>
+            <a:ext uri="{C572A759-6A51-4108-AA02-DFA0A04FC94B}">
+              <ma14:wrappingTextBoxFlag xmlns:ma14="http://schemas.microsoft.com/office/mac/drawingml/2011/main" val="0"/>
+            </a:ext>
+          </a:extLst>
+        </p:spPr>
+        <p:txBody>
+          <a:bodyPr lIns="0" tIns="0" rIns="0" bIns="0"/>
+          <a:lstStyle>
+            <a:lvl1pPr>
+              <a:defRPr sz="1000">
+                <a:solidFill>
+                  <a:srgbClr val="696969"/>
+                </a:solidFill>
+              </a:defRPr>
+            </a:lvl1pPr>
+          </a:lstStyle>
+          <a:p>
+            <a:pPr algn="r"/>
+            <a:fld id="{F7021451-1387-4CA6-816F-3879F97B5CBC}" type="slidenum">
+              <a:rPr b="0" lang="en-US"/>
+              <a:t>34</a:t>
+            </a:fld>
+            <a:endParaRPr lang="en-US"/>
+          </a:p>
+        </p:txBody>
+      </p:sp>
+    </p:spTree>
+  </p:cSld>
+  <p:clrMapOvr>
+    <a:masterClrMapping/>
+  </p:clrMapOvr>
+</p:sld>
+</file>
+
+<file path=ppt/slides/slide35.xml><?xml version="1.0" encoding="utf-8"?>
+<p:sld xmlns:a="http://schemas.openxmlformats.org/drawingml/2006/main" xmlns:r="http://schemas.openxmlformats.org/officeDocument/2006/relationships" xmlns:p="http://schemas.openxmlformats.org/presentationml/2006/main">
+  <p:cSld name="Slide 35">
+    <p:spTree>
+      <p:nvGrpSpPr>
+        <p:cNvPr id="1" name=""/>
+        <p:cNvGrpSpPr/>
+        <p:nvPr/>
+      </p:nvGrpSpPr>
+      <p:grpSpPr>
+        <a:xfrm>
+          <a:off x="0" y="0"/>
+          <a:ext cx="0" cy="0"/>
+          <a:chOff x="0" y="0"/>
+          <a:chExt cx="0" cy="0"/>
+        </a:xfrm>
+      </p:grpSpPr>
+      <p:sp>
+        <p:nvSpPr>
+          <p:cNvPr id="2" name="Text 3"/>
+          <p:cNvSpPr/>
+          <p:nvPr>
+            <p:ph idx="103" type="title" hasCustomPrompt="1"/>
+          </p:nvPr>
+        </p:nvSpPr>
+        <p:spPr>
+          <a:xfrm>
+            <a:off x="658368" y="365760"/>
+            <a:ext cx="9244584" cy="713232"/>
+          </a:xfrm>
+          <a:prstGeom prst="rect">
+            <a:avLst/>
+          </a:prstGeom>
+          <a:noFill/>
+          <a:ln/>
+        </p:spPr>
+        <p:txBody>
+          <a:bodyPr wrap="square" lIns="0" tIns="0" rIns="0" bIns="0" rtlCol="0" anchor="ctr"/>
+          <a:lstStyle/>
+          <a:p>
+            <a:pPr algn="l" indent="0" marL="0">
+              <a:buNone/>
+            </a:pPr>
+            <a:r>
+              <a:rPr lang="en-US" sz="2400" b="1" dirty="0">
+                <a:solidFill>
+                  <a:srgbClr val="FFFFFF"/>
+                </a:solidFill>
+                <a:latin typeface="Arial" pitchFamily="34" charset="0"/>
+                <a:ea typeface="Arial" pitchFamily="34" charset="-122"/>
+                <a:cs typeface="Arial" pitchFamily="34" charset="-120"/>
+              </a:rPr>
+              <a:t>Con BMAD, las personas salen de los recorridos del PRD</a:t>
+            </a:r>
+            <a:endParaRPr lang="en-US" sz="2400" dirty="0"/>
+          </a:p>
+        </p:txBody>
+      </p:sp>
+      <p:pic>
+        <p:nvPicPr>
+          <p:cNvPr id="3" name="Image 0" descr="Con BMAD, las personas salen de los recorridos del PRD">    </p:cNvPr>
+          <p:cNvPicPr>
+            <a:picLocks noChangeAspect="1"/>
+          </p:cNvPicPr>
+          <p:nvPr/>
+        </p:nvPicPr>
+        <p:blipFill>
+          <a:blip r:embed="rId1"/>
+          <a:stretch>
+            <a:fillRect/>
+          </a:stretch>
+        </p:blipFill>
+        <p:spPr>
+          <a:xfrm>
+            <a:off x="1705356" y="1280160"/>
+            <a:ext cx="8778240" cy="4937760"/>
+          </a:xfrm>
+          <a:prstGeom prst="rect">
+            <a:avLst/>
+          </a:prstGeom>
+        </p:spPr>
+      </p:pic>
+      <p:sp>
+        <p:nvSpPr>
+          <p:cNvPr id="4" name="Shape 1"/>
+          <p:cNvSpPr/>
+          <p:nvPr/>
+        </p:nvSpPr>
+        <p:spPr>
+          <a:xfrm>
+            <a:off x="1705356" y="1280160"/>
+            <a:ext cx="8778240" cy="4937760"/>
+          </a:xfrm>
+          <a:prstGeom prst="rect">
+            <a:avLst/>
+          </a:prstGeom>
+          <a:solidFill>
+            <a:srgbClr val="FFFFFF">
+              <a:alpha val="0"/>
+            </a:srgbClr>
+          </a:solidFill>
+          <a:ln w="9525">
+            <a:solidFill>
+              <a:srgbClr val="E2E2E6"/>
+            </a:solidFill>
+            <a:prstDash val="solid"/>
+          </a:ln>
+        </p:spPr>
+      </p:sp>
+      <p:sp>
+        <p:nvSpPr>
+          <p:cNvPr id="25" name="Slide Number Placeholder 0"/>
+          <p:cNvSpPr>
+            <a:spLocks noGrp="1"/>
+          </p:cNvSpPr>
+          <p:nvPr>
+            <p:ph type="sldNum" sz="quarter" idx="4294967295"/>
+          </p:nvPr>
+        </p:nvSpPr>
+        <p:spPr>
+          <a:xfrm>
+            <a:off x="11091672" y="6419088"/>
+            <a:ext cx="640080" cy="274320"/>
+          </a:xfrm>
+          <a:prstGeom prst="rect">
+            <a:avLst/>
+          </a:prstGeom>
+          <a:extLst>
+            <a:ext uri="{C572A759-6A51-4108-AA02-DFA0A04FC94B}">
+              <ma14:wrappingTextBoxFlag xmlns:ma14="http://schemas.microsoft.com/office/mac/drawingml/2011/main" val="0"/>
+            </a:ext>
+          </a:extLst>
+        </p:spPr>
+        <p:txBody>
+          <a:bodyPr lIns="0" tIns="0" rIns="0" bIns="0"/>
+          <a:lstStyle>
+            <a:lvl1pPr>
+              <a:defRPr sz="1000">
+                <a:solidFill>
+                  <a:srgbClr val="696969"/>
+                </a:solidFill>
+              </a:defRPr>
+            </a:lvl1pPr>
+          </a:lstStyle>
+          <a:p>
+            <a:pPr algn="r"/>
+            <a:fld id="{F7021451-1387-4CA6-816F-3879F97B5CBC}" type="slidenum">
+              <a:rPr b="0" lang="en-US"/>
+              <a:t>35</a:t>
+            </a:fld>
+            <a:endParaRPr lang="en-US"/>
+          </a:p>
+        </p:txBody>
+      </p:sp>
+    </p:spTree>
+  </p:cSld>
+  <p:clrMapOvr>
+    <a:masterClrMapping/>
+  </p:clrMapOvr>
+</p:sld>
+</file>
+
+<file path=ppt/slides/slide36.xml><?xml version="1.0" encoding="utf-8"?>
+<p:sld xmlns:a="http://schemas.openxmlformats.org/drawingml/2006/main" xmlns:r="http://schemas.openxmlformats.org/officeDocument/2006/relationships" xmlns:p="http://schemas.openxmlformats.org/presentationml/2006/main">
+  <p:cSld name="Slide 36">
+    <p:spTree>
+      <p:nvGrpSpPr>
+        <p:cNvPr id="1" name=""/>
+        <p:cNvGrpSpPr/>
+        <p:nvPr/>
+      </p:nvGrpSpPr>
+      <p:grpSpPr>
+        <a:xfrm>
+          <a:off x="0" y="0"/>
+          <a:ext cx="0" cy="0"/>
+          <a:chOff x="0" y="0"/>
+          <a:chExt cx="0" cy="0"/>
+        </a:xfrm>
+      </p:grpSpPr>
+      <p:sp>
+        <p:nvSpPr>
+          <p:cNvPr id="2" name="Text 3"/>
+          <p:cNvSpPr/>
+          <p:nvPr>
+            <p:ph idx="103" type="title" hasCustomPrompt="1"/>
+          </p:nvPr>
+        </p:nvSpPr>
+        <p:spPr>
+          <a:xfrm>
+            <a:off x="658368" y="365760"/>
+            <a:ext cx="9244584" cy="713232"/>
+          </a:xfrm>
+          <a:prstGeom prst="rect">
+            <a:avLst/>
+          </a:prstGeom>
+          <a:noFill/>
+          <a:ln/>
+        </p:spPr>
+        <p:txBody>
+          <a:bodyPr wrap="square" lIns="0" tIns="0" rIns="0" bIns="0" rtlCol="0" anchor="ctr"/>
+          <a:lstStyle/>
+          <a:p>
+            <a:pPr algn="l" indent="0" marL="0">
+              <a:buNone/>
+            </a:pPr>
+            <a:r>
+              <a:rPr lang="en-US" sz="2400" b="1" dirty="0">
+                <a:solidFill>
+                  <a:srgbClr val="FFFFFF"/>
+                </a:solidFill>
+                <a:latin typeface="Arial" pitchFamily="34" charset="0"/>
+                <a:ea typeface="Arial" pitchFamily="34" charset="-122"/>
+                <a:cs typeface="Arial" pitchFamily="34" charset="-120"/>
+              </a:rPr>
               <a:t>Bloque C: el mismo proyecto, tres diseños</a:t>
             </a:r>
             <a:endParaRPr lang="en-US" sz="2400" dirty="0"/>
@@ -22557,7 +23076,7 @@
       </p:sp>
       <p:graphicFrame>
         <p:nvGraphicFramePr>
-          <p:cNvPr id="35" name="Table 0"/>
+          <p:cNvPr id="37" name="Table 0"/>
           <p:cNvGraphicFramePr>
             <a:graphicFrameLocks noGrp="1"/>
           </p:cNvGraphicFramePr>
@@ -24259,939 +24778,6 @@
             <a:pPr algn="r"/>
             <a:fld id="{F7021451-1387-4CA6-816F-3879F97B5CBC}" type="slidenum">
               <a:rPr b="0" lang="en-US"/>
-              <a:t>34</a:t>
-            </a:fld>
-            <a:endParaRPr lang="en-US"/>
-          </a:p>
-        </p:txBody>
-      </p:sp>
-    </p:spTree>
-  </p:cSld>
-  <p:clrMapOvr>
-    <a:masterClrMapping/>
-  </p:clrMapOvr>
-</p:sld>
-</file>
-
-<file path=ppt/slides/slide35.xml><?xml version="1.0" encoding="utf-8"?>
-<p:sld xmlns:a="http://schemas.openxmlformats.org/drawingml/2006/main" xmlns:r="http://schemas.openxmlformats.org/officeDocument/2006/relationships" xmlns:p="http://schemas.openxmlformats.org/presentationml/2006/main">
-  <p:cSld name="Slide 35">
-    <p:spTree>
-      <p:nvGrpSpPr>
-        <p:cNvPr id="1" name=""/>
-        <p:cNvGrpSpPr/>
-        <p:nvPr/>
-      </p:nvGrpSpPr>
-      <p:grpSpPr>
-        <a:xfrm>
-          <a:off x="0" y="0"/>
-          <a:ext cx="0" cy="0"/>
-          <a:chOff x="0" y="0"/>
-          <a:chExt cx="0" cy="0"/>
-        </a:xfrm>
-      </p:grpSpPr>
-      <p:sp>
-        <p:nvSpPr>
-          <p:cNvPr id="2" name="Text 3"/>
-          <p:cNvSpPr/>
-          <p:nvPr>
-            <p:ph idx="103" type="title" hasCustomPrompt="1"/>
-          </p:nvPr>
-        </p:nvSpPr>
-        <p:spPr>
-          <a:xfrm>
-            <a:off x="658368" y="365760"/>
-            <a:ext cx="9244584" cy="713232"/>
-          </a:xfrm>
-          <a:prstGeom prst="rect">
-            <a:avLst/>
-          </a:prstGeom>
-          <a:noFill/>
-          <a:ln/>
-        </p:spPr>
-        <p:txBody>
-          <a:bodyPr wrap="square" lIns="0" tIns="0" rIns="0" bIns="0" rtlCol="0" anchor="ctr"/>
-          <a:lstStyle/>
-          <a:p>
-            <a:pPr algn="l" indent="0" marL="0">
-              <a:buNone/>
-            </a:pPr>
-            <a:r>
-              <a:rPr lang="en-US" sz="2400" b="1" dirty="0">
-                <a:solidFill>
-                  <a:srgbClr val="FFFFFF"/>
-                </a:solidFill>
-                <a:latin typeface="Arial" pitchFamily="34" charset="0"/>
-                <a:ea typeface="Arial" pitchFamily="34" charset="-122"/>
-                <a:cs typeface="Arial" pitchFamily="34" charset="-120"/>
-              </a:rPr>
-              <a:t>El ágil aligera documentos, no puertas</a:t>
-            </a:r>
-            <a:endParaRPr lang="en-US" sz="2400" dirty="0"/>
-          </a:p>
-        </p:txBody>
-      </p:sp>
-      <p:pic>
-        <p:nvPicPr>
-          <p:cNvPr id="3" name="Image 0" descr="El ágil aligera documentos, no puertas">    </p:cNvPr>
-          <p:cNvPicPr>
-            <a:picLocks noChangeAspect="1"/>
-          </p:cNvPicPr>
-          <p:nvPr/>
-        </p:nvPicPr>
-        <p:blipFill>
-          <a:blip r:embed="rId1"/>
-          <a:stretch>
-            <a:fillRect/>
-          </a:stretch>
-        </p:blipFill>
-        <p:spPr>
-          <a:xfrm>
-            <a:off x="1705356" y="1280160"/>
-            <a:ext cx="8778240" cy="4937760"/>
-          </a:xfrm>
-          <a:prstGeom prst="rect">
-            <a:avLst/>
-          </a:prstGeom>
-        </p:spPr>
-      </p:pic>
-      <p:sp>
-        <p:nvSpPr>
-          <p:cNvPr id="4" name="Shape 1"/>
-          <p:cNvSpPr/>
-          <p:nvPr/>
-        </p:nvSpPr>
-        <p:spPr>
-          <a:xfrm>
-            <a:off x="1705356" y="1280160"/>
-            <a:ext cx="8778240" cy="4937760"/>
-          </a:xfrm>
-          <a:prstGeom prst="rect">
-            <a:avLst/>
-          </a:prstGeom>
-          <a:solidFill>
-            <a:srgbClr val="FFFFFF">
-              <a:alpha val="0"/>
-            </a:srgbClr>
-          </a:solidFill>
-          <a:ln w="9525">
-            <a:solidFill>
-              <a:srgbClr val="E2E2E6"/>
-            </a:solidFill>
-            <a:prstDash val="solid"/>
-          </a:ln>
-        </p:spPr>
-      </p:sp>
-      <p:sp>
-        <p:nvSpPr>
-          <p:cNvPr id="25" name="Slide Number Placeholder 0"/>
-          <p:cNvSpPr>
-            <a:spLocks noGrp="1"/>
-          </p:cNvSpPr>
-          <p:nvPr>
-            <p:ph type="sldNum" sz="quarter" idx="4294967295"/>
-          </p:nvPr>
-        </p:nvSpPr>
-        <p:spPr>
-          <a:xfrm>
-            <a:off x="11091672" y="6419088"/>
-            <a:ext cx="640080" cy="274320"/>
-          </a:xfrm>
-          <a:prstGeom prst="rect">
-            <a:avLst/>
-          </a:prstGeom>
-          <a:extLst>
-            <a:ext uri="{C572A759-6A51-4108-AA02-DFA0A04FC94B}">
-              <ma14:wrappingTextBoxFlag xmlns:ma14="http://schemas.microsoft.com/office/mac/drawingml/2011/main" val="0"/>
-            </a:ext>
-          </a:extLst>
-        </p:spPr>
-        <p:txBody>
-          <a:bodyPr lIns="0" tIns="0" rIns="0" bIns="0"/>
-          <a:lstStyle>
-            <a:lvl1pPr>
-              <a:defRPr sz="1000">
-                <a:solidFill>
-                  <a:srgbClr val="696969"/>
-                </a:solidFill>
-              </a:defRPr>
-            </a:lvl1pPr>
-          </a:lstStyle>
-          <a:p>
-            <a:pPr algn="r"/>
-            <a:fld id="{F7021451-1387-4CA6-816F-3879F97B5CBC}" type="slidenum">
-              <a:rPr b="0" lang="en-US"/>
-              <a:t>35</a:t>
-            </a:fld>
-            <a:endParaRPr lang="en-US"/>
-          </a:p>
-        </p:txBody>
-      </p:sp>
-    </p:spTree>
-  </p:cSld>
-  <p:clrMapOvr>
-    <a:masterClrMapping/>
-  </p:clrMapOvr>
-</p:sld>
-</file>
-
-<file path=ppt/slides/slide36.xml><?xml version="1.0" encoding="utf-8"?>
-<p:sld xmlns:a="http://schemas.openxmlformats.org/drawingml/2006/main" xmlns:r="http://schemas.openxmlformats.org/officeDocument/2006/relationships" xmlns:p="http://schemas.openxmlformats.org/presentationml/2006/main">
-  <p:cSld name="Slide 36">
-    <p:spTree>
-      <p:nvGrpSpPr>
-        <p:cNvPr id="1" name=""/>
-        <p:cNvGrpSpPr/>
-        <p:nvPr/>
-      </p:nvGrpSpPr>
-      <p:grpSpPr>
-        <a:xfrm>
-          <a:off x="0" y="0"/>
-          <a:ext cx="0" cy="0"/>
-          <a:chOff x="0" y="0"/>
-          <a:chExt cx="0" cy="0"/>
-        </a:xfrm>
-      </p:grpSpPr>
-      <p:sp>
-        <p:nvSpPr>
-          <p:cNvPr id="2" name="Text 3"/>
-          <p:cNvSpPr/>
-          <p:nvPr>
-            <p:ph idx="103" type="title" hasCustomPrompt="1"/>
-          </p:nvPr>
-        </p:nvSpPr>
-        <p:spPr>
-          <a:xfrm>
-            <a:off x="658368" y="365760"/>
-            <a:ext cx="9244584" cy="713232"/>
-          </a:xfrm>
-          <a:prstGeom prst="rect">
-            <a:avLst/>
-          </a:prstGeom>
-          <a:noFill/>
-          <a:ln/>
-        </p:spPr>
-        <p:txBody>
-          <a:bodyPr wrap="square" lIns="0" tIns="0" rIns="0" bIns="0" rtlCol="0" anchor="ctr"/>
-          <a:lstStyle/>
-          <a:p>
-            <a:pPr algn="l" indent="0" marL="0">
-              <a:buNone/>
-            </a:pPr>
-            <a:r>
-              <a:rPr lang="en-US" sz="2400" b="1" dirty="0">
-                <a:solidFill>
-                  <a:srgbClr val="FFFFFF"/>
-                </a:solidFill>
-                <a:latin typeface="Arial" pitchFamily="34" charset="0"/>
-                <a:ea typeface="Arial" pitchFamily="34" charset="-122"/>
-                <a:cs typeface="Arial" pitchFamily="34" charset="-120"/>
-              </a:rPr>
-              <a:t>P-11: invertir sobre hipótesis</a:t>
-            </a:r>
-            <a:endParaRPr lang="en-US" sz="2400" dirty="0"/>
-          </a:p>
-        </p:txBody>
-      </p:sp>
-      <p:sp>
-        <p:nvSpPr>
-          <p:cNvPr id="3" name="Shape 1"/>
-          <p:cNvSpPr/>
-          <p:nvPr/>
-        </p:nvSpPr>
-        <p:spPr>
-          <a:xfrm>
-            <a:off x="457200" y="1280160"/>
-            <a:ext cx="11274552" cy="870509"/>
-          </a:xfrm>
-          <a:prstGeom prst="roundRect">
-            <a:avLst>
-              <a:gd name="adj" fmla="val 10504"/>
-            </a:avLst>
-          </a:prstGeom>
-          <a:solidFill>
-            <a:srgbClr val="E9F1F8"/>
-          </a:solidFill>
-          <a:ln w="12700">
-            <a:solidFill>
-              <a:srgbClr val="E9F1F8"/>
-            </a:solidFill>
-            <a:prstDash val="solid"/>
-          </a:ln>
-        </p:spPr>
-      </p:sp>
-      <p:sp>
-        <p:nvSpPr>
-          <p:cNvPr id="4" name="Shape 2"/>
-          <p:cNvSpPr/>
-          <p:nvPr/>
-        </p:nvSpPr>
-        <p:spPr>
-          <a:xfrm>
-            <a:off x="621792" y="1486814"/>
-            <a:ext cx="457200" cy="457200"/>
-          </a:xfrm>
-          <a:prstGeom prst="roundRect">
-            <a:avLst>
-              <a:gd name="adj" fmla="val 16000"/>
-            </a:avLst>
-          </a:prstGeom>
-          <a:solidFill>
-            <a:srgbClr val="00629B"/>
-          </a:solidFill>
-          <a:ln w="12700">
-            <a:solidFill>
-              <a:srgbClr val="00629B"/>
-            </a:solidFill>
-            <a:prstDash val="solid"/>
-          </a:ln>
-        </p:spPr>
-      </p:sp>
-      <p:sp>
-        <p:nvSpPr>
-          <p:cNvPr id="5" name="Text 3"/>
-          <p:cNvSpPr txBox="1"/>
-          <p:nvPr/>
-        </p:nvSpPr>
-        <p:spPr>
-          <a:xfrm>
-            <a:off x="621792" y="1486814"/>
-            <a:ext cx="457200" cy="457200"/>
-          </a:xfrm>
-          <a:prstGeom prst="rect">
-            <a:avLst/>
-          </a:prstGeom>
-          <a:noFill/>
-          <a:ln/>
-        </p:spPr>
-        <p:txBody>
-          <a:bodyPr wrap="square" lIns="0" tIns="0" rIns="0" bIns="0" rtlCol="0" anchor="ctr"/>
-          <a:lstStyle/>
-          <a:p>
-            <a:pPr algn="ctr" indent="0" marL="0">
-              <a:buNone/>
-            </a:pPr>
-            <a:r>
-              <a:rPr lang="en-US" sz="1600" b="1" dirty="0">
-                <a:solidFill>
-                  <a:srgbClr val="FFFFFF"/>
-                </a:solidFill>
-                <a:latin typeface="Arial" pitchFamily="34" charset="0"/>
-                <a:ea typeface="Arial" pitchFamily="34" charset="-122"/>
-                <a:cs typeface="Arial" pitchFamily="34" charset="-120"/>
-              </a:rPr>
-              <a:t>1</a:t>
-            </a:r>
-            <a:endParaRPr lang="en-US" sz="1600" dirty="0"/>
-          </a:p>
-        </p:txBody>
-      </p:sp>
-      <p:sp>
-        <p:nvSpPr>
-          <p:cNvPr id="6" name="Text 4"/>
-          <p:cNvSpPr txBox="1"/>
-          <p:nvPr/>
-        </p:nvSpPr>
-        <p:spPr>
-          <a:xfrm>
-            <a:off x="1280160" y="1335024"/>
-            <a:ext cx="10222992" cy="760781"/>
-          </a:xfrm>
-          <a:prstGeom prst="rect">
-            <a:avLst/>
-          </a:prstGeom>
-          <a:noFill/>
-          <a:ln/>
-        </p:spPr>
-        <p:txBody>
-          <a:bodyPr wrap="square" lIns="0" tIns="0" rIns="0" bIns="0" rtlCol="0" anchor="ctr"/>
-          <a:lstStyle/>
-          <a:p>
-            <a:pPr indent="0" marL="0">
-              <a:buNone/>
-            </a:pPr>
-            <a:r>
-              <a:rPr lang="en-US" sz="2000" dirty="0">
-                <a:solidFill>
-                  <a:srgbClr val="272425"/>
-                </a:solidFill>
-                <a:latin typeface="Arial" pitchFamily="34" charset="0"/>
-                <a:ea typeface="Arial" pitchFamily="34" charset="-122"/>
-                <a:cs typeface="Arial" pitchFamily="34" charset="-120"/>
-              </a:rPr>
-              <a:t>Condición de autorizar-proyecto, no bloqueo</a:t>
-            </a:r>
-            <a:endParaRPr lang="en-US" sz="1600" dirty="0"/>
-          </a:p>
-        </p:txBody>
-      </p:sp>
-      <p:sp>
-        <p:nvSpPr>
-          <p:cNvPr id="7" name="Shape 5"/>
-          <p:cNvSpPr/>
-          <p:nvPr/>
-        </p:nvSpPr>
-        <p:spPr>
-          <a:xfrm>
-            <a:off x="457200" y="2296973"/>
-            <a:ext cx="11274552" cy="870509"/>
-          </a:xfrm>
-          <a:prstGeom prst="roundRect">
-            <a:avLst>
-              <a:gd name="adj" fmla="val 10504"/>
-            </a:avLst>
-          </a:prstGeom>
-          <a:solidFill>
-            <a:srgbClr val="F4F6F8"/>
-          </a:solidFill>
-          <a:ln w="12700">
-            <a:solidFill>
-              <a:srgbClr val="F4F6F8"/>
-            </a:solidFill>
-            <a:prstDash val="solid"/>
-          </a:ln>
-        </p:spPr>
-      </p:sp>
-      <p:sp>
-        <p:nvSpPr>
-          <p:cNvPr id="8" name="Shape 6"/>
-          <p:cNvSpPr/>
-          <p:nvPr/>
-        </p:nvSpPr>
-        <p:spPr>
-          <a:xfrm>
-            <a:off x="621792" y="2503627"/>
-            <a:ext cx="457200" cy="457200"/>
-          </a:xfrm>
-          <a:prstGeom prst="roundRect">
-            <a:avLst>
-              <a:gd name="adj" fmla="val 16000"/>
-            </a:avLst>
-          </a:prstGeom>
-          <a:solidFill>
-            <a:srgbClr val="00629B"/>
-          </a:solidFill>
-          <a:ln w="12700">
-            <a:solidFill>
-              <a:srgbClr val="00629B"/>
-            </a:solidFill>
-            <a:prstDash val="solid"/>
-          </a:ln>
-        </p:spPr>
-      </p:sp>
-      <p:sp>
-        <p:nvSpPr>
-          <p:cNvPr id="9" name="Text 7"/>
-          <p:cNvSpPr txBox="1"/>
-          <p:nvPr/>
-        </p:nvSpPr>
-        <p:spPr>
-          <a:xfrm>
-            <a:off x="621792" y="2503627"/>
-            <a:ext cx="457200" cy="457200"/>
-          </a:xfrm>
-          <a:prstGeom prst="rect">
-            <a:avLst/>
-          </a:prstGeom>
-          <a:noFill/>
-          <a:ln/>
-        </p:spPr>
-        <p:txBody>
-          <a:bodyPr wrap="square" lIns="0" tIns="0" rIns="0" bIns="0" rtlCol="0" anchor="ctr"/>
-          <a:lstStyle/>
-          <a:p>
-            <a:pPr algn="ctr" indent="0" marL="0">
-              <a:buNone/>
-            </a:pPr>
-            <a:r>
-              <a:rPr lang="en-US" sz="1600" b="1" dirty="0">
-                <a:solidFill>
-                  <a:srgbClr val="FFFFFF"/>
-                </a:solidFill>
-                <a:latin typeface="Arial" pitchFamily="34" charset="0"/>
-                <a:ea typeface="Arial" pitchFamily="34" charset="-122"/>
-                <a:cs typeface="Arial" pitchFamily="34" charset="-120"/>
-              </a:rPr>
-              <a:t>2</a:t>
-            </a:r>
-            <a:endParaRPr lang="en-US" sz="1600" dirty="0"/>
-          </a:p>
-        </p:txBody>
-      </p:sp>
-      <p:sp>
-        <p:nvSpPr>
-          <p:cNvPr id="10" name="Text 8"/>
-          <p:cNvSpPr txBox="1"/>
-          <p:nvPr/>
-        </p:nvSpPr>
-        <p:spPr>
-          <a:xfrm>
-            <a:off x="1280160" y="2351837"/>
-            <a:ext cx="10222992" cy="760781"/>
-          </a:xfrm>
-          <a:prstGeom prst="rect">
-            <a:avLst/>
-          </a:prstGeom>
-          <a:noFill/>
-          <a:ln/>
-        </p:spPr>
-        <p:txBody>
-          <a:bodyPr wrap="square" lIns="0" tIns="0" rIns="0" bIns="0" rtlCol="0" anchor="ctr"/>
-          <a:lstStyle/>
-          <a:p>
-            <a:pPr indent="0" marL="0">
-              <a:buNone/>
-            </a:pPr>
-            <a:r>
-              <a:rPr lang="en-US" sz="2000" dirty="0">
-                <a:solidFill>
-                  <a:srgbClr val="272425"/>
-                </a:solidFill>
-                <a:latin typeface="Arial" pitchFamily="34" charset="0"/>
-                <a:ea typeface="Arial" pitchFamily="34" charset="-122"/>
-                <a:cs typeface="Arial" pitchFamily="34" charset="-120"/>
-              </a:rPr>
-              <a:t>Al 2027-01-14: S-003 y S-006 sin validar</a:t>
-            </a:r>
-            <a:endParaRPr lang="en-US" sz="1600" dirty="0"/>
-          </a:p>
-        </p:txBody>
-      </p:sp>
-      <p:sp>
-        <p:nvSpPr>
-          <p:cNvPr id="11" name="Shape 9"/>
-          <p:cNvSpPr/>
-          <p:nvPr/>
-        </p:nvSpPr>
-        <p:spPr>
-          <a:xfrm>
-            <a:off x="457200" y="3313786"/>
-            <a:ext cx="11274552" cy="870509"/>
-          </a:xfrm>
-          <a:prstGeom prst="roundRect">
-            <a:avLst>
-              <a:gd name="adj" fmla="val 10504"/>
-            </a:avLst>
-          </a:prstGeom>
-          <a:solidFill>
-            <a:srgbClr val="E9F1F8"/>
-          </a:solidFill>
-          <a:ln w="12700">
-            <a:solidFill>
-              <a:srgbClr val="E9F1F8"/>
-            </a:solidFill>
-            <a:prstDash val="solid"/>
-          </a:ln>
-        </p:spPr>
-      </p:sp>
-      <p:sp>
-        <p:nvSpPr>
-          <p:cNvPr id="12" name="Shape 10"/>
-          <p:cNvSpPr/>
-          <p:nvPr/>
-        </p:nvSpPr>
-        <p:spPr>
-          <a:xfrm>
-            <a:off x="621792" y="3520440"/>
-            <a:ext cx="457200" cy="457200"/>
-          </a:xfrm>
-          <a:prstGeom prst="roundRect">
-            <a:avLst>
-              <a:gd name="adj" fmla="val 16000"/>
-            </a:avLst>
-          </a:prstGeom>
-          <a:solidFill>
-            <a:srgbClr val="00629B"/>
-          </a:solidFill>
-          <a:ln w="12700">
-            <a:solidFill>
-              <a:srgbClr val="00629B"/>
-            </a:solidFill>
-            <a:prstDash val="solid"/>
-          </a:ln>
-        </p:spPr>
-      </p:sp>
-      <p:sp>
-        <p:nvSpPr>
-          <p:cNvPr id="13" name="Text 11"/>
-          <p:cNvSpPr txBox="1"/>
-          <p:nvPr/>
-        </p:nvSpPr>
-        <p:spPr>
-          <a:xfrm>
-            <a:off x="621792" y="3520440"/>
-            <a:ext cx="457200" cy="457200"/>
-          </a:xfrm>
-          <a:prstGeom prst="rect">
-            <a:avLst/>
-          </a:prstGeom>
-          <a:noFill/>
-          <a:ln/>
-        </p:spPr>
-        <p:txBody>
-          <a:bodyPr wrap="square" lIns="0" tIns="0" rIns="0" bIns="0" rtlCol="0" anchor="ctr"/>
-          <a:lstStyle/>
-          <a:p>
-            <a:pPr algn="ctr" indent="0" marL="0">
-              <a:buNone/>
-            </a:pPr>
-            <a:r>
-              <a:rPr lang="en-US" sz="1600" b="1" dirty="0">
-                <a:solidFill>
-                  <a:srgbClr val="FFFFFF"/>
-                </a:solidFill>
-                <a:latin typeface="Arial" pitchFamily="34" charset="0"/>
-                <a:ea typeface="Arial" pitchFamily="34" charset="-122"/>
-                <a:cs typeface="Arial" pitchFamily="34" charset="-120"/>
-              </a:rPr>
-              <a:t>3</a:t>
-            </a:r>
-            <a:endParaRPr lang="en-US" sz="1600" dirty="0"/>
-          </a:p>
-        </p:txBody>
-      </p:sp>
-      <p:sp>
-        <p:nvSpPr>
-          <p:cNvPr id="14" name="Text 12"/>
-          <p:cNvSpPr txBox="1"/>
-          <p:nvPr/>
-        </p:nvSpPr>
-        <p:spPr>
-          <a:xfrm>
-            <a:off x="1280160" y="3368650"/>
-            <a:ext cx="10222992" cy="760781"/>
-          </a:xfrm>
-          <a:prstGeom prst="rect">
-            <a:avLst/>
-          </a:prstGeom>
-          <a:noFill/>
-          <a:ln/>
-        </p:spPr>
-        <p:txBody>
-          <a:bodyPr wrap="square" lIns="0" tIns="0" rIns="0" bIns="0" rtlCol="0" anchor="ctr"/>
-          <a:lstStyle/>
-          <a:p>
-            <a:pPr indent="0" marL="0">
-              <a:buNone/>
-            </a:pPr>
-            <a:r>
-              <a:rPr lang="en-US" sz="2000" dirty="0">
-                <a:solidFill>
-                  <a:srgbClr val="272425"/>
-                </a:solidFill>
-                <a:latin typeface="Arial" pitchFamily="34" charset="0"/>
-                <a:ea typeface="Arial" pitchFamily="34" charset="-122"/>
-                <a:cs typeface="Arial" pitchFamily="34" charset="-120"/>
-              </a:rPr>
-              <a:t>S-003: prueba técnica 50 de 50, 1,4 s: validado</a:t>
-            </a:r>
-            <a:endParaRPr lang="en-US" sz="1600" dirty="0"/>
-          </a:p>
-        </p:txBody>
-      </p:sp>
-      <p:sp>
-        <p:nvSpPr>
-          <p:cNvPr id="15" name="Shape 13"/>
-          <p:cNvSpPr/>
-          <p:nvPr/>
-        </p:nvSpPr>
-        <p:spPr>
-          <a:xfrm>
-            <a:off x="457200" y="4330598"/>
-            <a:ext cx="11274552" cy="870509"/>
-          </a:xfrm>
-          <a:prstGeom prst="roundRect">
-            <a:avLst>
-              <a:gd name="adj" fmla="val 10504"/>
-            </a:avLst>
-          </a:prstGeom>
-          <a:solidFill>
-            <a:srgbClr val="F4F6F8"/>
-          </a:solidFill>
-          <a:ln w="12700">
-            <a:solidFill>
-              <a:srgbClr val="F4F6F8"/>
-            </a:solidFill>
-            <a:prstDash val="solid"/>
-          </a:ln>
-        </p:spPr>
-      </p:sp>
-      <p:sp>
-        <p:nvSpPr>
-          <p:cNvPr id="16" name="Shape 14"/>
-          <p:cNvSpPr/>
-          <p:nvPr/>
-        </p:nvSpPr>
-        <p:spPr>
-          <a:xfrm>
-            <a:off x="621792" y="4537253"/>
-            <a:ext cx="457200" cy="457200"/>
-          </a:xfrm>
-          <a:prstGeom prst="roundRect">
-            <a:avLst>
-              <a:gd name="adj" fmla="val 16000"/>
-            </a:avLst>
-          </a:prstGeom>
-          <a:solidFill>
-            <a:srgbClr val="00629B"/>
-          </a:solidFill>
-          <a:ln w="12700">
-            <a:solidFill>
-              <a:srgbClr val="00629B"/>
-            </a:solidFill>
-            <a:prstDash val="solid"/>
-          </a:ln>
-        </p:spPr>
-      </p:sp>
-      <p:sp>
-        <p:nvSpPr>
-          <p:cNvPr id="17" name="Text 15"/>
-          <p:cNvSpPr txBox="1"/>
-          <p:nvPr/>
-        </p:nvSpPr>
-        <p:spPr>
-          <a:xfrm>
-            <a:off x="621792" y="4537253"/>
-            <a:ext cx="457200" cy="457200"/>
-          </a:xfrm>
-          <a:prstGeom prst="rect">
-            <a:avLst/>
-          </a:prstGeom>
-          <a:noFill/>
-          <a:ln/>
-        </p:spPr>
-        <p:txBody>
-          <a:bodyPr wrap="square" lIns="0" tIns="0" rIns="0" bIns="0" rtlCol="0" anchor="ctr"/>
-          <a:lstStyle/>
-          <a:p>
-            <a:pPr algn="ctr" indent="0" marL="0">
-              <a:buNone/>
-            </a:pPr>
-            <a:r>
-              <a:rPr lang="en-US" sz="1600" b="1" dirty="0">
-                <a:solidFill>
-                  <a:srgbClr val="FFFFFF"/>
-                </a:solidFill>
-                <a:latin typeface="Arial" pitchFamily="34" charset="0"/>
-                <a:ea typeface="Arial" pitchFamily="34" charset="-122"/>
-                <a:cs typeface="Arial" pitchFamily="34" charset="-120"/>
-              </a:rPr>
-              <a:t>4</a:t>
-            </a:r>
-            <a:endParaRPr lang="en-US" sz="1600" dirty="0"/>
-          </a:p>
-        </p:txBody>
-      </p:sp>
-      <p:sp>
-        <p:nvSpPr>
-          <p:cNvPr id="18" name="Text 16"/>
-          <p:cNvSpPr txBox="1"/>
-          <p:nvPr/>
-        </p:nvSpPr>
-        <p:spPr>
-          <a:xfrm>
-            <a:off x="1280160" y="4385462"/>
-            <a:ext cx="10222992" cy="760781"/>
-          </a:xfrm>
-          <a:prstGeom prst="rect">
-            <a:avLst/>
-          </a:prstGeom>
-          <a:noFill/>
-          <a:ln/>
-        </p:spPr>
-        <p:txBody>
-          <a:bodyPr wrap="square" lIns="0" tIns="0" rIns="0" bIns="0" rtlCol="0" anchor="ctr"/>
-          <a:lstStyle/>
-          <a:p>
-            <a:pPr indent="0" marL="0">
-              <a:buNone/>
-            </a:pPr>
-            <a:r>
-              <a:rPr lang="en-US" sz="2000" dirty="0">
-                <a:solidFill>
-                  <a:srgbClr val="272425"/>
-                </a:solidFill>
-                <a:latin typeface="Arial" pitchFamily="34" charset="0"/>
-                <a:ea typeface="Arial" pitchFamily="34" charset="-122"/>
-                <a:cs typeface="Arial" pitchFamily="34" charset="-120"/>
-              </a:rPr>
-              <a:t>S-006: la junta lo acepta por escrito (D-009)</a:t>
-            </a:r>
-            <a:endParaRPr lang="en-US" sz="1600" dirty="0"/>
-          </a:p>
-        </p:txBody>
-      </p:sp>
-      <p:sp>
-        <p:nvSpPr>
-          <p:cNvPr id="19" name="Shape 17"/>
-          <p:cNvSpPr/>
-          <p:nvPr/>
-        </p:nvSpPr>
-        <p:spPr>
-          <a:xfrm>
-            <a:off x="457200" y="5347411"/>
-            <a:ext cx="11274552" cy="870509"/>
-          </a:xfrm>
-          <a:prstGeom prst="roundRect">
-            <a:avLst>
-              <a:gd name="adj" fmla="val 10504"/>
-            </a:avLst>
-          </a:prstGeom>
-          <a:solidFill>
-            <a:srgbClr val="E9F1F8"/>
-          </a:solidFill>
-          <a:ln w="12700">
-            <a:solidFill>
-              <a:srgbClr val="E9F1F8"/>
-            </a:solidFill>
-            <a:prstDash val="solid"/>
-          </a:ln>
-        </p:spPr>
-      </p:sp>
-      <p:sp>
-        <p:nvSpPr>
-          <p:cNvPr id="20" name="Shape 18"/>
-          <p:cNvSpPr/>
-          <p:nvPr/>
-        </p:nvSpPr>
-        <p:spPr>
-          <a:xfrm>
-            <a:off x="621792" y="5554066"/>
-            <a:ext cx="457200" cy="457200"/>
-          </a:xfrm>
-          <a:prstGeom prst="roundRect">
-            <a:avLst>
-              <a:gd name="adj" fmla="val 16000"/>
-            </a:avLst>
-          </a:prstGeom>
-          <a:solidFill>
-            <a:srgbClr val="00629B"/>
-          </a:solidFill>
-          <a:ln w="12700">
-            <a:solidFill>
-              <a:srgbClr val="00629B"/>
-            </a:solidFill>
-            <a:prstDash val="solid"/>
-          </a:ln>
-        </p:spPr>
-      </p:sp>
-      <p:sp>
-        <p:nvSpPr>
-          <p:cNvPr id="21" name="Text 19"/>
-          <p:cNvSpPr txBox="1"/>
-          <p:nvPr/>
-        </p:nvSpPr>
-        <p:spPr>
-          <a:xfrm>
-            <a:off x="621792" y="5554066"/>
-            <a:ext cx="457200" cy="457200"/>
-          </a:xfrm>
-          <a:prstGeom prst="rect">
-            <a:avLst/>
-          </a:prstGeom>
-          <a:noFill/>
-          <a:ln/>
-        </p:spPr>
-        <p:txBody>
-          <a:bodyPr wrap="square" lIns="0" tIns="0" rIns="0" bIns="0" rtlCol="0" anchor="ctr"/>
-          <a:lstStyle/>
-          <a:p>
-            <a:pPr algn="ctr" indent="0" marL="0">
-              <a:buNone/>
-            </a:pPr>
-            <a:r>
-              <a:rPr lang="en-US" sz="1600" b="1" dirty="0">
-                <a:solidFill>
-                  <a:srgbClr val="FFFFFF"/>
-                </a:solidFill>
-                <a:latin typeface="Arial" pitchFamily="34" charset="0"/>
-                <a:ea typeface="Arial" pitchFamily="34" charset="-122"/>
-                <a:cs typeface="Arial" pitchFamily="34" charset="-120"/>
-              </a:rPr>
-              <a:t>5</a:t>
-            </a:r>
-            <a:endParaRPr lang="en-US" sz="1600" dirty="0"/>
-          </a:p>
-        </p:txBody>
-      </p:sp>
-      <p:sp>
-        <p:nvSpPr>
-          <p:cNvPr id="22" name="Text 20"/>
-          <p:cNvSpPr txBox="1"/>
-          <p:nvPr/>
-        </p:nvSpPr>
-        <p:spPr>
-          <a:xfrm>
-            <a:off x="1280160" y="5402275"/>
-            <a:ext cx="10222992" cy="760781"/>
-          </a:xfrm>
-          <a:prstGeom prst="rect">
-            <a:avLst/>
-          </a:prstGeom>
-          <a:noFill/>
-          <a:ln/>
-        </p:spPr>
-        <p:txBody>
-          <a:bodyPr wrap="square" lIns="0" tIns="0" rIns="0" bIns="0" rtlCol="0" anchor="ctr"/>
-          <a:lstStyle/>
-          <a:p>
-            <a:pPr indent="0" marL="0">
-              <a:buNone/>
-            </a:pPr>
-            <a:r>
-              <a:rPr lang="en-US" sz="2000" dirty="0">
-                <a:solidFill>
-                  <a:srgbClr val="272425"/>
-                </a:solidFill>
-                <a:latin typeface="Arial" pitchFamily="34" charset="0"/>
-                <a:ea typeface="Arial" pitchFamily="34" charset="-122"/>
-                <a:cs typeface="Arial" pitchFamily="34" charset="-120"/>
-              </a:rPr>
-              <a:t>P-11 pasa a aviso; S-006 sigue abierto</a:t>
-            </a:r>
-            <a:endParaRPr lang="en-US" sz="1600" dirty="0"/>
-          </a:p>
-        </p:txBody>
-      </p:sp>
-      <p:sp>
-        <p:nvSpPr>
-          <p:cNvPr id="25" name="Slide Number Placeholder 0"/>
-          <p:cNvSpPr>
-            <a:spLocks noGrp="1"/>
-          </p:cNvSpPr>
-          <p:nvPr>
-            <p:ph type="sldNum" sz="quarter" idx="4294967295"/>
-          </p:nvPr>
-        </p:nvSpPr>
-        <p:spPr>
-          <a:xfrm>
-            <a:off x="11091672" y="6419088"/>
-            <a:ext cx="640080" cy="274320"/>
-          </a:xfrm>
-          <a:prstGeom prst="rect">
-            <a:avLst/>
-          </a:prstGeom>
-          <a:extLst>
-            <a:ext uri="{C572A759-6A51-4108-AA02-DFA0A04FC94B}">
-              <ma14:wrappingTextBoxFlag xmlns:ma14="http://schemas.microsoft.com/office/mac/drawingml/2011/main" val="0"/>
-            </a:ext>
-          </a:extLst>
-        </p:spPr>
-        <p:txBody>
-          <a:bodyPr lIns="0" tIns="0" rIns="0" bIns="0"/>
-          <a:lstStyle>
-            <a:lvl1pPr>
-              <a:defRPr sz="1000">
-                <a:solidFill>
-                  <a:srgbClr val="696969"/>
-                </a:solidFill>
-              </a:defRPr>
-            </a:lvl1pPr>
-          </a:lstStyle>
-          <a:p>
-            <a:pPr algn="r"/>
-            <a:fld id="{F7021451-1387-4CA6-816F-3879F97B5CBC}" type="slidenum">
-              <a:rPr b="0" lang="en-US"/>
               <a:t>36</a:t>
             </a:fld>
             <a:endParaRPr lang="en-US"/>
@@ -25258,116 +24844,62 @@
                 <a:ea typeface="Arial" pitchFamily="34" charset="-122"/>
                 <a:cs typeface="Arial" pitchFamily="34" charset="-120"/>
               </a:rPr>
-              <a:t>En vivo · paso 13: PID, P-11 y la puerta</a:t>
+              <a:t>El ágil aligera documentos, no puertas</a:t>
             </a:r>
             <a:endParaRPr lang="en-US" sz="2400" dirty="0"/>
           </a:p>
         </p:txBody>
       </p:sp>
-      <p:sp>
-        <p:nvSpPr>
-          <p:cNvPr id="3" name="Text 1"/>
-          <p:cNvSpPr txBox="1"/>
-          <p:nvPr/>
-        </p:nvSpPr>
-        <p:spPr>
-          <a:xfrm>
-            <a:off x="457200" y="1280160"/>
-            <a:ext cx="5486400" cy="292608"/>
+      <p:pic>
+        <p:nvPicPr>
+          <p:cNvPr id="3" name="Image 0" descr="El ágil aligera documentos, no puertas">    </p:cNvPr>
+          <p:cNvPicPr>
+            <a:picLocks noChangeAspect="1"/>
+          </p:cNvPicPr>
+          <p:nvPr/>
+        </p:nvPicPr>
+        <p:blipFill>
+          <a:blip r:embed="rId1"/>
+          <a:stretch>
+            <a:fillRect/>
+          </a:stretch>
+        </p:blipFill>
+        <p:spPr>
+          <a:xfrm>
+            <a:off x="1705356" y="1280160"/>
+            <a:ext cx="8778240" cy="4937760"/>
           </a:xfrm>
           <a:prstGeom prst="rect">
             <a:avLst/>
           </a:prstGeom>
-          <a:noFill/>
-          <a:ln/>
-        </p:spPr>
-        <p:txBody>
-          <a:bodyPr wrap="square" lIns="0" tIns="0" rIns="0" bIns="0" rtlCol="0" anchor="t"/>
-          <a:lstStyle/>
-          <a:p>
-            <a:pPr indent="0" marL="0">
-              <a:buNone/>
-            </a:pPr>
-            <a:r>
-              <a:rPr lang="en-US" sz="1300" b="1" dirty="0">
-                <a:solidFill>
-                  <a:srgbClr val="696969"/>
-                </a:solidFill>
-                <a:latin typeface="Arial" pitchFamily="34" charset="0"/>
-                <a:ea typeface="Arial" pitchFamily="34" charset="-122"/>
-                <a:cs typeface="Arial" pitchFamily="34" charset="-120"/>
-              </a:rPr>
-              <a:t>Prompt · escribilo tal cual</a:t>
-            </a:r>
-            <a:endParaRPr lang="en-US" sz="1300" dirty="0"/>
-          </a:p>
-        </p:txBody>
-      </p:sp>
-      <p:sp>
-        <p:nvSpPr>
-          <p:cNvPr id="4" name="Shape 2"/>
+        </p:spPr>
+      </p:pic>
+      <p:sp>
+        <p:nvSpPr>
+          <p:cNvPr id="4" name="Shape 1"/>
           <p:cNvSpPr/>
           <p:nvPr/>
         </p:nvSpPr>
         <p:spPr>
           <a:xfrm>
-            <a:off x="457200" y="1627632"/>
-            <a:ext cx="11274552" cy="1186434"/>
-          </a:xfrm>
-          <a:prstGeom prst="roundRect">
-            <a:avLst>
-              <a:gd name="adj" fmla="val 6166"/>
-            </a:avLst>
+            <a:off x="1705356" y="1280160"/>
+            <a:ext cx="8778240" cy="4937760"/>
+          </a:xfrm>
+          <a:prstGeom prst="rect">
+            <a:avLst/>
           </a:prstGeom>
           <a:solidFill>
-            <a:srgbClr val="0F2238"/>
+            <a:srgbClr val="FFFFFF">
+              <a:alpha val="0"/>
+            </a:srgbClr>
           </a:solidFill>
-          <a:ln w="12700">
+          <a:ln w="9525">
             <a:solidFill>
-              <a:srgbClr val="0F2238"/>
+              <a:srgbClr val="E2E2E6"/>
             </a:solidFill>
             <a:prstDash val="solid"/>
           </a:ln>
         </p:spPr>
-      </p:sp>
-      <p:sp>
-        <p:nvSpPr>
-          <p:cNvPr id="5" name="Text 3"/>
-          <p:cNvSpPr txBox="1"/>
-          <p:nvPr/>
-        </p:nvSpPr>
-        <p:spPr>
-          <a:xfrm>
-            <a:off x="685800" y="1792224"/>
-            <a:ext cx="10817352" cy="857250"/>
-          </a:xfrm>
-          <a:prstGeom prst="rect">
-            <a:avLst/>
-          </a:prstGeom>
-          <a:noFill/>
-          <a:ln/>
-        </p:spPr>
-        <p:txBody>
-          <a:bodyPr wrap="square" lIns="0" tIns="0" rIns="0" bIns="0" rtlCol="0" anchor="ctr"/>
-          <a:lstStyle/>
-          <a:p>
-            <a:pPr indent="0" marL="0">
-              <a:buNone/>
-            </a:pPr>
-            <a:r>
-              <a:rPr lang="en-US" sz="1800" dirty="0">
-                <a:solidFill>
-                  <a:srgbClr val="E8EEF5"/>
-                </a:solidFill>
-                <a:latin typeface="Courier New" pitchFamily="34" charset="0"/>
-                <a:ea typeface="Courier New" pitchFamily="34" charset="-122"/>
-                <a:cs typeface="Courier New" pitchFamily="34" charset="-120"/>
-              </a:rPr>
-              <a:t>Ensamblá el PID con los controles y la sección de adaptación, registrá el plan de proyecto dentro del PID y el plan de la etapa 2, corré la sanidad al 2027-01-14 y verificá la puerta autorizar-proyecto.</a:t>
-            </a:r>
-            <a:endParaRPr lang="en-US" sz="1800" dirty="0"/>
-          </a:p>
-        </p:txBody>
       </p:sp>
       <p:sp>
         <p:nvSpPr>
@@ -25441,16 +24973,16 @@
       </p:grpSpPr>
       <p:sp>
         <p:nvSpPr>
-          <p:cNvPr id="2" name="Text 2"/>
+          <p:cNvPr id="2" name="Text 3"/>
           <p:cNvSpPr/>
           <p:nvPr>
-            <p:ph idx="102" type="title" hasCustomPrompt="1"/>
+            <p:ph idx="103" type="title" hasCustomPrompt="1"/>
           </p:nvPr>
         </p:nvSpPr>
         <p:spPr>
           <a:xfrm>
-            <a:off x="548640" y="365760"/>
-            <a:ext cx="9445752" cy="713232"/>
+            <a:off x="658368" y="365760"/>
+            <a:ext cx="9244584" cy="713232"/>
           </a:xfrm>
           <a:prstGeom prst="rect">
             <a:avLst/>
@@ -25466,71 +24998,7 @@
               <a:buNone/>
             </a:pPr>
             <a:r>
-              <a:rPr lang="en-US" sz="2200" b="1" dirty="0">
-                <a:solidFill>
-                  <a:srgbClr val="9FD0F0"/>
-                </a:solidFill>
-                <a:latin typeface="Arial" pitchFamily="34" charset="0"/>
-                <a:ea typeface="Arial" pitchFamily="34" charset="-122"/>
-                <a:cs typeface="Arial" pitchFamily="34" charset="-120"/>
-              </a:rPr>
-              <a:t>Discusión</a:t>
-            </a:r>
-            <a:endParaRPr lang="en-US" sz="2200" dirty="0"/>
-          </a:p>
-        </p:txBody>
-      </p:sp>
-      <p:sp>
-        <p:nvSpPr>
-          <p:cNvPr id="3" name="Shape 1"/>
-          <p:cNvSpPr/>
-          <p:nvPr/>
-        </p:nvSpPr>
-        <p:spPr>
-          <a:xfrm>
-            <a:off x="548640" y="3131820"/>
-            <a:ext cx="1188720" cy="1188720"/>
-          </a:xfrm>
-          <a:prstGeom prst="ellipse">
-            <a:avLst/>
-          </a:prstGeom>
-          <a:solidFill>
-            <a:srgbClr val="B5651D"/>
-          </a:solidFill>
-          <a:ln w="12700">
-            <a:solidFill>
-              <a:srgbClr val="B5651D"/>
-            </a:solidFill>
-            <a:prstDash val="solid"/>
-          </a:ln>
-        </p:spPr>
-      </p:sp>
-      <p:sp>
-        <p:nvSpPr>
-          <p:cNvPr id="4" name="Text 2"/>
-          <p:cNvSpPr txBox="1"/>
-          <p:nvPr/>
-        </p:nvSpPr>
-        <p:spPr>
-          <a:xfrm>
-            <a:off x="548640" y="3131820"/>
-            <a:ext cx="1188720" cy="1188720"/>
-          </a:xfrm>
-          <a:prstGeom prst="rect">
-            <a:avLst/>
-          </a:prstGeom>
-          <a:noFill/>
-          <a:ln/>
-        </p:spPr>
-        <p:txBody>
-          <a:bodyPr wrap="square" lIns="0" tIns="0" rIns="0" bIns="0" rtlCol="0" anchor="ctr"/>
-          <a:lstStyle/>
-          <a:p>
-            <a:pPr algn="ctr" indent="0" marL="0">
-              <a:buNone/>
-            </a:pPr>
-            <a:r>
-              <a:rPr lang="en-US" sz="5400" b="1" dirty="0">
+              <a:rPr lang="en-US" sz="2400" b="1" dirty="0">
                 <a:solidFill>
                   <a:srgbClr val="FFFFFF"/>
                 </a:solidFill>
@@ -25538,11 +25006,65 @@
                 <a:ea typeface="Arial" pitchFamily="34" charset="-122"/>
                 <a:cs typeface="Arial" pitchFamily="34" charset="-120"/>
               </a:rPr>
-              <a:t>?</a:t>
+              <a:t>P-11: invertir sobre hipótesis</a:t>
             </a:r>
-            <a:endParaRPr lang="en-US" sz="5400" dirty="0"/>
-          </a:p>
-        </p:txBody>
+            <a:endParaRPr lang="en-US" sz="2400" dirty="0"/>
+          </a:p>
+        </p:txBody>
+      </p:sp>
+      <p:sp>
+        <p:nvSpPr>
+          <p:cNvPr id="3" name="Shape 1"/>
+          <p:cNvSpPr/>
+          <p:nvPr/>
+        </p:nvSpPr>
+        <p:spPr>
+          <a:xfrm>
+            <a:off x="457200" y="1280160"/>
+            <a:ext cx="11274552" cy="870509"/>
+          </a:xfrm>
+          <a:prstGeom prst="roundRect">
+            <a:avLst>
+              <a:gd name="adj" fmla="val 10504"/>
+            </a:avLst>
+          </a:prstGeom>
+          <a:solidFill>
+            <a:srgbClr val="E9F1F8"/>
+          </a:solidFill>
+          <a:ln w="12700">
+            <a:solidFill>
+              <a:srgbClr val="E9F1F8"/>
+            </a:solidFill>
+            <a:prstDash val="solid"/>
+          </a:ln>
+        </p:spPr>
+      </p:sp>
+      <p:sp>
+        <p:nvSpPr>
+          <p:cNvPr id="4" name="Shape 2"/>
+          <p:cNvSpPr/>
+          <p:nvPr/>
+        </p:nvSpPr>
+        <p:spPr>
+          <a:xfrm>
+            <a:off x="621792" y="1486814"/>
+            <a:ext cx="457200" cy="457200"/>
+          </a:xfrm>
+          <a:prstGeom prst="roundRect">
+            <a:avLst>
+              <a:gd name="adj" fmla="val 16000"/>
+            </a:avLst>
+          </a:prstGeom>
+          <a:solidFill>
+            <a:srgbClr val="00629B"/>
+          </a:solidFill>
+          <a:ln w="12700">
+            <a:solidFill>
+              <a:srgbClr val="00629B"/>
+            </a:solidFill>
+            <a:prstDash val="solid"/>
+          </a:ln>
+        </p:spPr>
       </p:sp>
       <p:sp>
         <p:nvSpPr>
@@ -25552,8 +25074,8 @@
         </p:nvSpPr>
         <p:spPr>
           <a:xfrm>
-            <a:off x="2103120" y="1417320"/>
-            <a:ext cx="9537192" cy="4617720"/>
+            <a:off x="621792" y="1486814"/>
+            <a:ext cx="457200" cy="457200"/>
           </a:xfrm>
           <a:prstGeom prst="rect">
             <a:avLst/>
@@ -25565,11 +25087,11 @@
           <a:bodyPr wrap="square" lIns="0" tIns="0" rIns="0" bIns="0" rtlCol="0" anchor="ctr"/>
           <a:lstStyle/>
           <a:p>
-            <a:pPr indent="0" marL="0">
+            <a:pPr algn="ctr" indent="0" marL="0">
               <a:buNone/>
             </a:pPr>
             <a:r>
-              <a:rPr lang="en-US" sz="3200" b="1" dirty="0">
+              <a:rPr lang="en-US" sz="1600" b="1" dirty="0">
                 <a:solidFill>
                   <a:srgbClr val="FFFFFF"/>
                 </a:solidFill>
@@ -25577,7 +25099,574 @@
                 <a:ea typeface="Arial" pitchFamily="34" charset="-122"/>
                 <a:cs typeface="Arial" pitchFamily="34" charset="-120"/>
               </a:rPr>
-              <a:t>¿Qué diseño le corresponde a tu proyecto: pequeño, regulado, ágil o híbrido? ¿Qué dejarías de escribir y qué no?</a:t>
+              <a:t>1</a:t>
+            </a:r>
+            <a:endParaRPr lang="en-US" sz="1600" dirty="0"/>
+          </a:p>
+        </p:txBody>
+      </p:sp>
+      <p:sp>
+        <p:nvSpPr>
+          <p:cNvPr id="6" name="Text 4"/>
+          <p:cNvSpPr txBox="1"/>
+          <p:nvPr/>
+        </p:nvSpPr>
+        <p:spPr>
+          <a:xfrm>
+            <a:off x="1280160" y="1335024"/>
+            <a:ext cx="10222992" cy="760781"/>
+          </a:xfrm>
+          <a:prstGeom prst="rect">
+            <a:avLst/>
+          </a:prstGeom>
+          <a:noFill/>
+          <a:ln/>
+        </p:spPr>
+        <p:txBody>
+          <a:bodyPr wrap="square" lIns="0" tIns="0" rIns="0" bIns="0" rtlCol="0" anchor="ctr"/>
+          <a:lstStyle/>
+          <a:p>
+            <a:pPr indent="0" marL="0">
+              <a:buNone/>
+            </a:pPr>
+            <a:r>
+              <a:rPr lang="en-US" sz="2000" dirty="0">
+                <a:solidFill>
+                  <a:srgbClr val="272425"/>
+                </a:solidFill>
+                <a:latin typeface="Arial" pitchFamily="34" charset="0"/>
+                <a:ea typeface="Arial" pitchFamily="34" charset="-122"/>
+                <a:cs typeface="Arial" pitchFamily="34" charset="-120"/>
+              </a:rPr>
+              <a:t>Condición de autorizar-proyecto, no bloqueo</a:t>
+            </a:r>
+            <a:endParaRPr lang="en-US" sz="1600" dirty="0"/>
+          </a:p>
+        </p:txBody>
+      </p:sp>
+      <p:sp>
+        <p:nvSpPr>
+          <p:cNvPr id="7" name="Shape 5"/>
+          <p:cNvSpPr/>
+          <p:nvPr/>
+        </p:nvSpPr>
+        <p:spPr>
+          <a:xfrm>
+            <a:off x="457200" y="2296973"/>
+            <a:ext cx="11274552" cy="870509"/>
+          </a:xfrm>
+          <a:prstGeom prst="roundRect">
+            <a:avLst>
+              <a:gd name="adj" fmla="val 10504"/>
+            </a:avLst>
+          </a:prstGeom>
+          <a:solidFill>
+            <a:srgbClr val="F4F6F8"/>
+          </a:solidFill>
+          <a:ln w="12700">
+            <a:solidFill>
+              <a:srgbClr val="F4F6F8"/>
+            </a:solidFill>
+            <a:prstDash val="solid"/>
+          </a:ln>
+        </p:spPr>
+      </p:sp>
+      <p:sp>
+        <p:nvSpPr>
+          <p:cNvPr id="8" name="Shape 6"/>
+          <p:cNvSpPr/>
+          <p:nvPr/>
+        </p:nvSpPr>
+        <p:spPr>
+          <a:xfrm>
+            <a:off x="621792" y="2503627"/>
+            <a:ext cx="457200" cy="457200"/>
+          </a:xfrm>
+          <a:prstGeom prst="roundRect">
+            <a:avLst>
+              <a:gd name="adj" fmla="val 16000"/>
+            </a:avLst>
+          </a:prstGeom>
+          <a:solidFill>
+            <a:srgbClr val="00629B"/>
+          </a:solidFill>
+          <a:ln w="12700">
+            <a:solidFill>
+              <a:srgbClr val="00629B"/>
+            </a:solidFill>
+            <a:prstDash val="solid"/>
+          </a:ln>
+        </p:spPr>
+      </p:sp>
+      <p:sp>
+        <p:nvSpPr>
+          <p:cNvPr id="9" name="Text 7"/>
+          <p:cNvSpPr txBox="1"/>
+          <p:nvPr/>
+        </p:nvSpPr>
+        <p:spPr>
+          <a:xfrm>
+            <a:off x="621792" y="2503627"/>
+            <a:ext cx="457200" cy="457200"/>
+          </a:xfrm>
+          <a:prstGeom prst="rect">
+            <a:avLst/>
+          </a:prstGeom>
+          <a:noFill/>
+          <a:ln/>
+        </p:spPr>
+        <p:txBody>
+          <a:bodyPr wrap="square" lIns="0" tIns="0" rIns="0" bIns="0" rtlCol="0" anchor="ctr"/>
+          <a:lstStyle/>
+          <a:p>
+            <a:pPr algn="ctr" indent="0" marL="0">
+              <a:buNone/>
+            </a:pPr>
+            <a:r>
+              <a:rPr lang="en-US" sz="1600" b="1" dirty="0">
+                <a:solidFill>
+                  <a:srgbClr val="FFFFFF"/>
+                </a:solidFill>
+                <a:latin typeface="Arial" pitchFamily="34" charset="0"/>
+                <a:ea typeface="Arial" pitchFamily="34" charset="-122"/>
+                <a:cs typeface="Arial" pitchFamily="34" charset="-120"/>
+              </a:rPr>
+              <a:t>2</a:t>
+            </a:r>
+            <a:endParaRPr lang="en-US" sz="1600" dirty="0"/>
+          </a:p>
+        </p:txBody>
+      </p:sp>
+      <p:sp>
+        <p:nvSpPr>
+          <p:cNvPr id="10" name="Text 8"/>
+          <p:cNvSpPr txBox="1"/>
+          <p:nvPr/>
+        </p:nvSpPr>
+        <p:spPr>
+          <a:xfrm>
+            <a:off x="1280160" y="2351837"/>
+            <a:ext cx="10222992" cy="760781"/>
+          </a:xfrm>
+          <a:prstGeom prst="rect">
+            <a:avLst/>
+          </a:prstGeom>
+          <a:noFill/>
+          <a:ln/>
+        </p:spPr>
+        <p:txBody>
+          <a:bodyPr wrap="square" lIns="0" tIns="0" rIns="0" bIns="0" rtlCol="0" anchor="ctr"/>
+          <a:lstStyle/>
+          <a:p>
+            <a:pPr indent="0" marL="0">
+              <a:buNone/>
+            </a:pPr>
+            <a:r>
+              <a:rPr lang="en-US" sz="2000" dirty="0">
+                <a:solidFill>
+                  <a:srgbClr val="272425"/>
+                </a:solidFill>
+                <a:latin typeface="Arial" pitchFamily="34" charset="0"/>
+                <a:ea typeface="Arial" pitchFamily="34" charset="-122"/>
+                <a:cs typeface="Arial" pitchFamily="34" charset="-120"/>
+              </a:rPr>
+              <a:t>Al 2027-01-14: S-003 y S-006 sin validar</a:t>
+            </a:r>
+            <a:endParaRPr lang="en-US" sz="1600" dirty="0"/>
+          </a:p>
+        </p:txBody>
+      </p:sp>
+      <p:sp>
+        <p:nvSpPr>
+          <p:cNvPr id="11" name="Shape 9"/>
+          <p:cNvSpPr/>
+          <p:nvPr/>
+        </p:nvSpPr>
+        <p:spPr>
+          <a:xfrm>
+            <a:off x="457200" y="3313786"/>
+            <a:ext cx="11274552" cy="870509"/>
+          </a:xfrm>
+          <a:prstGeom prst="roundRect">
+            <a:avLst>
+              <a:gd name="adj" fmla="val 10504"/>
+            </a:avLst>
+          </a:prstGeom>
+          <a:solidFill>
+            <a:srgbClr val="E9F1F8"/>
+          </a:solidFill>
+          <a:ln w="12700">
+            <a:solidFill>
+              <a:srgbClr val="E9F1F8"/>
+            </a:solidFill>
+            <a:prstDash val="solid"/>
+          </a:ln>
+        </p:spPr>
+      </p:sp>
+      <p:sp>
+        <p:nvSpPr>
+          <p:cNvPr id="12" name="Shape 10"/>
+          <p:cNvSpPr/>
+          <p:nvPr/>
+        </p:nvSpPr>
+        <p:spPr>
+          <a:xfrm>
+            <a:off x="621792" y="3520440"/>
+            <a:ext cx="457200" cy="457200"/>
+          </a:xfrm>
+          <a:prstGeom prst="roundRect">
+            <a:avLst>
+              <a:gd name="adj" fmla="val 16000"/>
+            </a:avLst>
+          </a:prstGeom>
+          <a:solidFill>
+            <a:srgbClr val="00629B"/>
+          </a:solidFill>
+          <a:ln w="12700">
+            <a:solidFill>
+              <a:srgbClr val="00629B"/>
+            </a:solidFill>
+            <a:prstDash val="solid"/>
+          </a:ln>
+        </p:spPr>
+      </p:sp>
+      <p:sp>
+        <p:nvSpPr>
+          <p:cNvPr id="13" name="Text 11"/>
+          <p:cNvSpPr txBox="1"/>
+          <p:nvPr/>
+        </p:nvSpPr>
+        <p:spPr>
+          <a:xfrm>
+            <a:off x="621792" y="3520440"/>
+            <a:ext cx="457200" cy="457200"/>
+          </a:xfrm>
+          <a:prstGeom prst="rect">
+            <a:avLst/>
+          </a:prstGeom>
+          <a:noFill/>
+          <a:ln/>
+        </p:spPr>
+        <p:txBody>
+          <a:bodyPr wrap="square" lIns="0" tIns="0" rIns="0" bIns="0" rtlCol="0" anchor="ctr"/>
+          <a:lstStyle/>
+          <a:p>
+            <a:pPr algn="ctr" indent="0" marL="0">
+              <a:buNone/>
+            </a:pPr>
+            <a:r>
+              <a:rPr lang="en-US" sz="1600" b="1" dirty="0">
+                <a:solidFill>
+                  <a:srgbClr val="FFFFFF"/>
+                </a:solidFill>
+                <a:latin typeface="Arial" pitchFamily="34" charset="0"/>
+                <a:ea typeface="Arial" pitchFamily="34" charset="-122"/>
+                <a:cs typeface="Arial" pitchFamily="34" charset="-120"/>
+              </a:rPr>
+              <a:t>3</a:t>
+            </a:r>
+            <a:endParaRPr lang="en-US" sz="1600" dirty="0"/>
+          </a:p>
+        </p:txBody>
+      </p:sp>
+      <p:sp>
+        <p:nvSpPr>
+          <p:cNvPr id="14" name="Text 12"/>
+          <p:cNvSpPr txBox="1"/>
+          <p:nvPr/>
+        </p:nvSpPr>
+        <p:spPr>
+          <a:xfrm>
+            <a:off x="1280160" y="3368650"/>
+            <a:ext cx="10222992" cy="760781"/>
+          </a:xfrm>
+          <a:prstGeom prst="rect">
+            <a:avLst/>
+          </a:prstGeom>
+          <a:noFill/>
+          <a:ln/>
+        </p:spPr>
+        <p:txBody>
+          <a:bodyPr wrap="square" lIns="0" tIns="0" rIns="0" bIns="0" rtlCol="0" anchor="ctr"/>
+          <a:lstStyle/>
+          <a:p>
+            <a:pPr indent="0" marL="0">
+              <a:buNone/>
+            </a:pPr>
+            <a:r>
+              <a:rPr lang="en-US" sz="2000" dirty="0">
+                <a:solidFill>
+                  <a:srgbClr val="272425"/>
+                </a:solidFill>
+                <a:latin typeface="Arial" pitchFamily="34" charset="0"/>
+                <a:ea typeface="Arial" pitchFamily="34" charset="-122"/>
+                <a:cs typeface="Arial" pitchFamily="34" charset="-120"/>
+              </a:rPr>
+              <a:t>S-003: prueba técnica 50 de 50, 1,4 s: validado</a:t>
+            </a:r>
+            <a:endParaRPr lang="en-US" sz="1600" dirty="0"/>
+          </a:p>
+        </p:txBody>
+      </p:sp>
+      <p:sp>
+        <p:nvSpPr>
+          <p:cNvPr id="15" name="Shape 13"/>
+          <p:cNvSpPr/>
+          <p:nvPr/>
+        </p:nvSpPr>
+        <p:spPr>
+          <a:xfrm>
+            <a:off x="457200" y="4330598"/>
+            <a:ext cx="11274552" cy="870509"/>
+          </a:xfrm>
+          <a:prstGeom prst="roundRect">
+            <a:avLst>
+              <a:gd name="adj" fmla="val 10504"/>
+            </a:avLst>
+          </a:prstGeom>
+          <a:solidFill>
+            <a:srgbClr val="F4F6F8"/>
+          </a:solidFill>
+          <a:ln w="12700">
+            <a:solidFill>
+              <a:srgbClr val="F4F6F8"/>
+            </a:solidFill>
+            <a:prstDash val="solid"/>
+          </a:ln>
+        </p:spPr>
+      </p:sp>
+      <p:sp>
+        <p:nvSpPr>
+          <p:cNvPr id="16" name="Shape 14"/>
+          <p:cNvSpPr/>
+          <p:nvPr/>
+        </p:nvSpPr>
+        <p:spPr>
+          <a:xfrm>
+            <a:off x="621792" y="4537253"/>
+            <a:ext cx="457200" cy="457200"/>
+          </a:xfrm>
+          <a:prstGeom prst="roundRect">
+            <a:avLst>
+              <a:gd name="adj" fmla="val 16000"/>
+            </a:avLst>
+          </a:prstGeom>
+          <a:solidFill>
+            <a:srgbClr val="00629B"/>
+          </a:solidFill>
+          <a:ln w="12700">
+            <a:solidFill>
+              <a:srgbClr val="00629B"/>
+            </a:solidFill>
+            <a:prstDash val="solid"/>
+          </a:ln>
+        </p:spPr>
+      </p:sp>
+      <p:sp>
+        <p:nvSpPr>
+          <p:cNvPr id="17" name="Text 15"/>
+          <p:cNvSpPr txBox="1"/>
+          <p:nvPr/>
+        </p:nvSpPr>
+        <p:spPr>
+          <a:xfrm>
+            <a:off x="621792" y="4537253"/>
+            <a:ext cx="457200" cy="457200"/>
+          </a:xfrm>
+          <a:prstGeom prst="rect">
+            <a:avLst/>
+          </a:prstGeom>
+          <a:noFill/>
+          <a:ln/>
+        </p:spPr>
+        <p:txBody>
+          <a:bodyPr wrap="square" lIns="0" tIns="0" rIns="0" bIns="0" rtlCol="0" anchor="ctr"/>
+          <a:lstStyle/>
+          <a:p>
+            <a:pPr algn="ctr" indent="0" marL="0">
+              <a:buNone/>
+            </a:pPr>
+            <a:r>
+              <a:rPr lang="en-US" sz="1600" b="1" dirty="0">
+                <a:solidFill>
+                  <a:srgbClr val="FFFFFF"/>
+                </a:solidFill>
+                <a:latin typeface="Arial" pitchFamily="34" charset="0"/>
+                <a:ea typeface="Arial" pitchFamily="34" charset="-122"/>
+                <a:cs typeface="Arial" pitchFamily="34" charset="-120"/>
+              </a:rPr>
+              <a:t>4</a:t>
+            </a:r>
+            <a:endParaRPr lang="en-US" sz="1600" dirty="0"/>
+          </a:p>
+        </p:txBody>
+      </p:sp>
+      <p:sp>
+        <p:nvSpPr>
+          <p:cNvPr id="18" name="Text 16"/>
+          <p:cNvSpPr txBox="1"/>
+          <p:nvPr/>
+        </p:nvSpPr>
+        <p:spPr>
+          <a:xfrm>
+            <a:off x="1280160" y="4385462"/>
+            <a:ext cx="10222992" cy="760781"/>
+          </a:xfrm>
+          <a:prstGeom prst="rect">
+            <a:avLst/>
+          </a:prstGeom>
+          <a:noFill/>
+          <a:ln/>
+        </p:spPr>
+        <p:txBody>
+          <a:bodyPr wrap="square" lIns="0" tIns="0" rIns="0" bIns="0" rtlCol="0" anchor="ctr"/>
+          <a:lstStyle/>
+          <a:p>
+            <a:pPr indent="0" marL="0">
+              <a:buNone/>
+            </a:pPr>
+            <a:r>
+              <a:rPr lang="en-US" sz="2000" dirty="0">
+                <a:solidFill>
+                  <a:srgbClr val="272425"/>
+                </a:solidFill>
+                <a:latin typeface="Arial" pitchFamily="34" charset="0"/>
+                <a:ea typeface="Arial" pitchFamily="34" charset="-122"/>
+                <a:cs typeface="Arial" pitchFamily="34" charset="-120"/>
+              </a:rPr>
+              <a:t>S-006: la junta lo acepta por escrito (D-009)</a:t>
+            </a:r>
+            <a:endParaRPr lang="en-US" sz="1600" dirty="0"/>
+          </a:p>
+        </p:txBody>
+      </p:sp>
+      <p:sp>
+        <p:nvSpPr>
+          <p:cNvPr id="19" name="Shape 17"/>
+          <p:cNvSpPr/>
+          <p:nvPr/>
+        </p:nvSpPr>
+        <p:spPr>
+          <a:xfrm>
+            <a:off x="457200" y="5347411"/>
+            <a:ext cx="11274552" cy="870509"/>
+          </a:xfrm>
+          <a:prstGeom prst="roundRect">
+            <a:avLst>
+              <a:gd name="adj" fmla="val 10504"/>
+            </a:avLst>
+          </a:prstGeom>
+          <a:solidFill>
+            <a:srgbClr val="E9F1F8"/>
+          </a:solidFill>
+          <a:ln w="12700">
+            <a:solidFill>
+              <a:srgbClr val="E9F1F8"/>
+            </a:solidFill>
+            <a:prstDash val="solid"/>
+          </a:ln>
+        </p:spPr>
+      </p:sp>
+      <p:sp>
+        <p:nvSpPr>
+          <p:cNvPr id="20" name="Shape 18"/>
+          <p:cNvSpPr/>
+          <p:nvPr/>
+        </p:nvSpPr>
+        <p:spPr>
+          <a:xfrm>
+            <a:off x="621792" y="5554066"/>
+            <a:ext cx="457200" cy="457200"/>
+          </a:xfrm>
+          <a:prstGeom prst="roundRect">
+            <a:avLst>
+              <a:gd name="adj" fmla="val 16000"/>
+            </a:avLst>
+          </a:prstGeom>
+          <a:solidFill>
+            <a:srgbClr val="00629B"/>
+          </a:solidFill>
+          <a:ln w="12700">
+            <a:solidFill>
+              <a:srgbClr val="00629B"/>
+            </a:solidFill>
+            <a:prstDash val="solid"/>
+          </a:ln>
+        </p:spPr>
+      </p:sp>
+      <p:sp>
+        <p:nvSpPr>
+          <p:cNvPr id="21" name="Text 19"/>
+          <p:cNvSpPr txBox="1"/>
+          <p:nvPr/>
+        </p:nvSpPr>
+        <p:spPr>
+          <a:xfrm>
+            <a:off x="621792" y="5554066"/>
+            <a:ext cx="457200" cy="457200"/>
+          </a:xfrm>
+          <a:prstGeom prst="rect">
+            <a:avLst/>
+          </a:prstGeom>
+          <a:noFill/>
+          <a:ln/>
+        </p:spPr>
+        <p:txBody>
+          <a:bodyPr wrap="square" lIns="0" tIns="0" rIns="0" bIns="0" rtlCol="0" anchor="ctr"/>
+          <a:lstStyle/>
+          <a:p>
+            <a:pPr algn="ctr" indent="0" marL="0">
+              <a:buNone/>
+            </a:pPr>
+            <a:r>
+              <a:rPr lang="en-US" sz="1600" b="1" dirty="0">
+                <a:solidFill>
+                  <a:srgbClr val="FFFFFF"/>
+                </a:solidFill>
+                <a:latin typeface="Arial" pitchFamily="34" charset="0"/>
+                <a:ea typeface="Arial" pitchFamily="34" charset="-122"/>
+                <a:cs typeface="Arial" pitchFamily="34" charset="-120"/>
+              </a:rPr>
+              <a:t>5</a:t>
+            </a:r>
+            <a:endParaRPr lang="en-US" sz="1600" dirty="0"/>
+          </a:p>
+        </p:txBody>
+      </p:sp>
+      <p:sp>
+        <p:nvSpPr>
+          <p:cNvPr id="22" name="Text 20"/>
+          <p:cNvSpPr txBox="1"/>
+          <p:nvPr/>
+        </p:nvSpPr>
+        <p:spPr>
+          <a:xfrm>
+            <a:off x="1280160" y="5402275"/>
+            <a:ext cx="10222992" cy="760781"/>
+          </a:xfrm>
+          <a:prstGeom prst="rect">
+            <a:avLst/>
+          </a:prstGeom>
+          <a:noFill/>
+          <a:ln/>
+        </p:spPr>
+        <p:txBody>
+          <a:bodyPr wrap="square" lIns="0" tIns="0" rIns="0" bIns="0" rtlCol="0" anchor="ctr"/>
+          <a:lstStyle/>
+          <a:p>
+            <a:pPr indent="0" marL="0">
+              <a:buNone/>
+            </a:pPr>
+            <a:r>
+              <a:rPr lang="en-US" sz="2000" dirty="0">
+                <a:solidFill>
+                  <a:srgbClr val="272425"/>
+                </a:solidFill>
+                <a:latin typeface="Arial" pitchFamily="34" charset="0"/>
+                <a:ea typeface="Arial" pitchFamily="34" charset="-122"/>
+                <a:cs typeface="Arial" pitchFamily="34" charset="-120"/>
+              </a:rPr>
+              <a:t>P-11 pasa a aviso; S-006 sigue abierto</a:t>
             </a:r>
             <a:endParaRPr lang="en-US" sz="1600" dirty="0"/>
           </a:p>
@@ -25613,7 +25702,7 @@
             <a:lvl1pPr>
               <a:defRPr sz="1000">
                 <a:solidFill>
-                  <a:srgbClr val="D6E4F0"/>
+                  <a:srgbClr val="696969"/>
                 </a:solidFill>
               </a:defRPr>
             </a:lvl1pPr>
@@ -25688,62 +25777,116 @@
                 <a:ea typeface="Arial" pitchFamily="34" charset="-122"/>
                 <a:cs typeface="Arial" pitchFamily="34" charset="-120"/>
               </a:rPr>
-              <a:t>Proyecto autorizado: el tablero de una página</a:t>
+              <a:t>En vivo · paso 13: PID, P-11 y la puerta</a:t>
             </a:r>
             <a:endParaRPr lang="en-US" sz="2400" dirty="0"/>
           </a:p>
         </p:txBody>
       </p:sp>
-      <p:pic>
-        <p:nvPicPr>
-          <p:cNvPr id="3" name="Image 0" descr="Proyecto autorizado: el tablero de una página">    </p:cNvPr>
-          <p:cNvPicPr>
-            <a:picLocks noChangeAspect="1"/>
-          </p:cNvPicPr>
-          <p:nvPr/>
-        </p:nvPicPr>
-        <p:blipFill>
-          <a:blip r:embed="rId1"/>
-          <a:stretch>
-            <a:fillRect/>
-          </a:stretch>
-        </p:blipFill>
-        <p:spPr>
-          <a:xfrm>
-            <a:off x="1705356" y="1280160"/>
-            <a:ext cx="8778240" cy="4937760"/>
+      <p:sp>
+        <p:nvSpPr>
+          <p:cNvPr id="3" name="Text 1"/>
+          <p:cNvSpPr txBox="1"/>
+          <p:nvPr/>
+        </p:nvSpPr>
+        <p:spPr>
+          <a:xfrm>
+            <a:off x="457200" y="1280160"/>
+            <a:ext cx="5486400" cy="292608"/>
           </a:xfrm>
           <a:prstGeom prst="rect">
             <a:avLst/>
           </a:prstGeom>
-        </p:spPr>
-      </p:pic>
-      <p:sp>
-        <p:nvSpPr>
-          <p:cNvPr id="4" name="Shape 1"/>
+          <a:noFill/>
+          <a:ln/>
+        </p:spPr>
+        <p:txBody>
+          <a:bodyPr wrap="square" lIns="0" tIns="0" rIns="0" bIns="0" rtlCol="0" anchor="t"/>
+          <a:lstStyle/>
+          <a:p>
+            <a:pPr indent="0" marL="0">
+              <a:buNone/>
+            </a:pPr>
+            <a:r>
+              <a:rPr lang="en-US" sz="1300" b="1" dirty="0">
+                <a:solidFill>
+                  <a:srgbClr val="696969"/>
+                </a:solidFill>
+                <a:latin typeface="Arial" pitchFamily="34" charset="0"/>
+                <a:ea typeface="Arial" pitchFamily="34" charset="-122"/>
+                <a:cs typeface="Arial" pitchFamily="34" charset="-120"/>
+              </a:rPr>
+              <a:t>Prompt · escribilo tal cual</a:t>
+            </a:r>
+            <a:endParaRPr lang="en-US" sz="1300" dirty="0"/>
+          </a:p>
+        </p:txBody>
+      </p:sp>
+      <p:sp>
+        <p:nvSpPr>
+          <p:cNvPr id="4" name="Shape 2"/>
           <p:cNvSpPr/>
           <p:nvPr/>
         </p:nvSpPr>
         <p:spPr>
           <a:xfrm>
-            <a:off x="1705356" y="1280160"/>
-            <a:ext cx="8778240" cy="4937760"/>
-          </a:xfrm>
-          <a:prstGeom prst="rect">
-            <a:avLst/>
+            <a:off x="457200" y="1627632"/>
+            <a:ext cx="11274552" cy="1186434"/>
+          </a:xfrm>
+          <a:prstGeom prst="roundRect">
+            <a:avLst>
+              <a:gd name="adj" fmla="val 6166"/>
+            </a:avLst>
           </a:prstGeom>
           <a:solidFill>
-            <a:srgbClr val="FFFFFF">
-              <a:alpha val="0"/>
-            </a:srgbClr>
+            <a:srgbClr val="0F2238"/>
           </a:solidFill>
-          <a:ln w="9525">
+          <a:ln w="12700">
             <a:solidFill>
-              <a:srgbClr val="E2E2E6"/>
+              <a:srgbClr val="0F2238"/>
             </a:solidFill>
             <a:prstDash val="solid"/>
           </a:ln>
         </p:spPr>
+      </p:sp>
+      <p:sp>
+        <p:nvSpPr>
+          <p:cNvPr id="5" name="Text 3"/>
+          <p:cNvSpPr txBox="1"/>
+          <p:nvPr/>
+        </p:nvSpPr>
+        <p:spPr>
+          <a:xfrm>
+            <a:off x="685800" y="1792224"/>
+            <a:ext cx="10817352" cy="857250"/>
+          </a:xfrm>
+          <a:prstGeom prst="rect">
+            <a:avLst/>
+          </a:prstGeom>
+          <a:noFill/>
+          <a:ln/>
+        </p:spPr>
+        <p:txBody>
+          <a:bodyPr wrap="square" lIns="0" tIns="0" rIns="0" bIns="0" rtlCol="0" anchor="ctr"/>
+          <a:lstStyle/>
+          <a:p>
+            <a:pPr indent="0" marL="0">
+              <a:buNone/>
+            </a:pPr>
+            <a:r>
+              <a:rPr lang="en-US" sz="1800" dirty="0">
+                <a:solidFill>
+                  <a:srgbClr val="E8EEF5"/>
+                </a:solidFill>
+                <a:latin typeface="Courier New" pitchFamily="34" charset="0"/>
+                <a:ea typeface="Courier New" pitchFamily="34" charset="-122"/>
+                <a:cs typeface="Courier New" pitchFamily="34" charset="-120"/>
+              </a:rPr>
+              <a:t>Ensamblá el PID con los controles y la sección de adaptación, registrá el plan de proyecto dentro del PID y el plan de la etapa 2, corré la sanidad al 2027-01-14 y verificá la puerta autorizar-proyecto.</a:t>
+            </a:r>
+            <a:endParaRPr lang="en-US" sz="1800" dirty="0"/>
+          </a:p>
+        </p:txBody>
       </p:sp>
       <p:sp>
         <p:nvSpPr>
@@ -26291,7 +26434,7 @@
                 <a:ea typeface="Arial" pitchFamily="34" charset="-122"/>
                 <a:cs typeface="Arial" pitchFamily="34" charset="-120"/>
               </a:rPr>
-              <a:t>Los mapas, tratados, en su tablero</a:t>
+              <a:t>Proyecto autorizado: el tablero de una página</a:t>
             </a:r>
             <a:endParaRPr lang="en-US" sz="2400" dirty="0"/>
           </a:p>
@@ -26299,7 +26442,7 @@
       </p:sp>
       <p:pic>
         <p:nvPicPr>
-          <p:cNvPr id="3" name="Image 0" descr="Los mapas, tratados, en su tablero">    </p:cNvPr>
+          <p:cNvPr id="3" name="Image 0" descr="Proyecto autorizado: el tablero de una página">    </p:cNvPr>
           <p:cNvPicPr>
             <a:picLocks noChangeAspect="1"/>
           </p:cNvPicPr>
@@ -26453,7 +26596,7 @@
                 <a:ea typeface="Arial" pitchFamily="34" charset="-122"/>
                 <a:cs typeface="Arial" pitchFamily="34" charset="-120"/>
               </a:rPr>
-              <a:t>Aceptar no es olvidar: la sanidad al 2027-02-01</a:t>
+              <a:t>Aceptar no es olvidar: el radar al 2027-02-01</a:t>
             </a:r>
             <a:endParaRPr lang="en-US" sz="2400" dirty="0"/>
           </a:p>
@@ -26717,7 +26860,7 @@
                 <a:ea typeface="Arial" pitchFamily="34" charset="-122"/>
                 <a:cs typeface="Arial" pitchFamily="34" charset="-120"/>
               </a:rPr>
-              <a:t>SUP-02: S-006 con la fecha límite vencida</a:t>
+              <a:t>Sanidad: SUP-02 por S-006 y REG-09 por R-001, R-002 y R-003</a:t>
             </a:r>
             <a:endParaRPr lang="en-US" sz="1600" dirty="0"/>
           </a:p>
@@ -26849,7 +26992,7 @@
                 <a:ea typeface="Arial" pitchFamily="34" charset="-122"/>
                 <a:cs typeface="Arial" pitchFamily="34" charset="-120"/>
               </a:rPr>
-              <a:t>REG-09: R-001, R-002 y R-003 con la revisión vencida</a:t>
+              <a:t>Radar: 1 decidir · 0 escalar · 0 desbloquear · 4 vigilar</a:t>
             </a:r>
             <a:endParaRPr lang="en-US" sz="1600" dirty="0"/>
           </a:p>
@@ -26981,7 +27124,7 @@
                 <a:ea typeface="Arial" pitchFamily="34" charset="-122"/>
                 <a:cs typeface="Arial" pitchFamily="34" charset="-120"/>
               </a:rPr>
-              <a:t>Cada aviso nombra al propietario y la acción</a:t>
+              <a:t>Hoy: decidir S-006 (Carmen Olivera): seguir, cambiar o detener</a:t>
             </a:r>
             <a:endParaRPr lang="en-US" sz="1600" dirty="0"/>
           </a:p>
@@ -27113,7 +27256,7 @@
                 <a:ea typeface="Arial" pitchFamily="34" charset="-122"/>
                 <a:cs typeface="Arial" pitchFamily="34" charset="-120"/>
               </a:rPr>
-              <a:t>El contexto de sesión sigue listando S-006</a:t>
+              <a:t>Vigilar: tres revisiones vencidas y 2 bloqueos de autorizar-etapa</a:t>
             </a:r>
             <a:endParaRPr lang="en-US" sz="1600" dirty="0"/>
           </a:p>
@@ -27749,7 +27892,7 @@
                 <a:ea typeface="Arial" pitchFamily="34" charset="-122"/>
                 <a:cs typeface="Arial" pitchFamily="34" charset="-120"/>
               </a:rPr>
-              <a:t>Autoevaluá con los criterios de la hoja</a:t>
+              <a:t>Dos personas de usuario y los Must de cada una</a:t>
             </a:r>
             <a:endParaRPr lang="en-US" sz="1600" dirty="0"/>
           </a:p>
@@ -27993,7 +28136,7 @@
                 <a:ea typeface="Arial" pitchFamily="34" charset="-122"/>
                 <a:cs typeface="Arial" pitchFamily="34" charset="-120"/>
               </a:rPr>
-              <a:t>Adaptar es decidir cuánta formalidad y escribir por qué</a:t>
+              <a:t>Adaptar es decidir cuánta formalidad y escribir por qué; cada Must, con su persona</a:t>
             </a:r>
             <a:endParaRPr lang="en-US" sz="1600" dirty="0"/>
           </a:p>
@@ -28030,7 +28173,7 @@
                 <a:ea typeface="Arial" pitchFamily="34" charset="-122"/>
                 <a:cs typeface="Arial" pitchFamily="34" charset="-120"/>
               </a:rPr>
-              <a:t>Nadie invierte sobre una hipótesis sin saberlo (P-11)</a:t>
+              <a:t>Nadie invierte sobre una hipótesis sin saberlo (P-11), y el radar dice qué decidir hoy</a:t>
             </a:r>
             <a:endParaRPr lang="en-US" sz="1600" dirty="0"/>
           </a:p>
@@ -28178,7 +28321,7 @@
                 <a:ea typeface="Arial" pitchFamily="34" charset="-122"/>
                 <a:cs typeface="Arial" pitchFamily="34" charset="-120"/>
               </a:rPr>
-              <a:t>Glosario (1/2)</a:t>
+              <a:t>Glosario (1/3)</a:t>
             </a:r>
             <a:endParaRPr lang="en-US" sz="2400" dirty="0"/>
           </a:p>
@@ -28504,144 +28647,6 @@
                           <a:ea typeface="Arial" pitchFamily="34" charset="-122"/>
                           <a:cs typeface="Arial" pitchFamily="34" charset="-120"/>
                         </a:rPr>
-                        <a:t>BAC</a:t>
-                      </a:r>
-                      <a:endParaRPr lang="en-US" sz="1200" dirty="0">
-                        <a:latin typeface="Arial" charset="0"/>
-                        <a:ea typeface="Arial" charset="0"/>
-                        <a:cs typeface="Arial" charset="0"/>
-                      </a:endParaRPr>
-                    </a:p>
-                  </a:txBody>
-                  <a:tcPr marL="54864" marR="54864" marT="54864" marB="54864" anchor="t">
-                    <a:lnL w="9525" cap="flat" cmpd="sng" algn="ctr">
-                      <a:solidFill>
-                        <a:srgbClr val="E2E2E6"/>
-                      </a:solidFill>
-                      <a:prstDash val="solid"/>
-                      <a:round/>
-                      <a:headEnd type="none" w="med" len="med"/>
-                      <a:tailEnd type="none" w="med" len="med"/>
-                    </a:lnL>
-                    <a:lnR w="9525" cap="flat" cmpd="sng" algn="ctr">
-                      <a:solidFill>
-                        <a:srgbClr val="E2E2E6"/>
-                      </a:solidFill>
-                      <a:prstDash val="solid"/>
-                      <a:round/>
-                      <a:headEnd type="none" w="med" len="med"/>
-                      <a:tailEnd type="none" w="med" len="med"/>
-                    </a:lnR>
-                    <a:lnT w="9525" cap="flat" cmpd="sng" algn="ctr">
-                      <a:solidFill>
-                        <a:srgbClr val="E2E2E6"/>
-                      </a:solidFill>
-                      <a:prstDash val="solid"/>
-                      <a:round/>
-                      <a:headEnd type="none" w="med" len="med"/>
-                      <a:tailEnd type="none" w="med" len="med"/>
-                    </a:lnT>
-                    <a:lnB w="9525" cap="flat" cmpd="sng" algn="ctr">
-                      <a:solidFill>
-                        <a:srgbClr val="E2E2E6"/>
-                      </a:solidFill>
-                      <a:prstDash val="solid"/>
-                      <a:round/>
-                      <a:headEnd type="none" w="med" len="med"/>
-                      <a:tailEnd type="none" w="med" len="med"/>
-                    </a:lnB>
-                    <a:solidFill>
-                      <a:srgbClr val="FFFFFF"/>
-                    </a:solidFill>
-                  </a:tcPr>
-                </a:tc>
-                <a:tc>
-                  <a:txBody>
-                    <a:bodyPr/>
-                    <a:lstStyle/>
-                    <a:p>
-                      <a:pPr indent="0" marL="0">
-                        <a:buNone/>
-                      </a:pPr>
-                      <a:r>
-                        <a:rPr lang="en-US" sz="1200" dirty="0">
-                          <a:solidFill>
-                            <a:srgbClr val="272425"/>
-                          </a:solidFill>
-                          <a:latin typeface="Arial" pitchFamily="34" charset="0"/>
-                          <a:ea typeface="Arial" pitchFamily="34" charset="-122"/>
-                          <a:cs typeface="Arial" pitchFamily="34" charset="-120"/>
-                        </a:rPr>
-                        <a:t>Presupuesto a la conclusión: paquetes base más contingencia.</a:t>
-                      </a:r>
-                      <a:endParaRPr lang="en-US" sz="1200" dirty="0">
-                        <a:latin typeface="Arial" charset="0"/>
-                        <a:ea typeface="Arial" charset="0"/>
-                        <a:cs typeface="Arial" charset="0"/>
-                      </a:endParaRPr>
-                    </a:p>
-                  </a:txBody>
-                  <a:tcPr marL="54864" marR="54864" marT="54864" marB="54864" anchor="t">
-                    <a:lnL w="9525" cap="flat" cmpd="sng" algn="ctr">
-                      <a:solidFill>
-                        <a:srgbClr val="E2E2E6"/>
-                      </a:solidFill>
-                      <a:prstDash val="solid"/>
-                      <a:round/>
-                      <a:headEnd type="none" w="med" len="med"/>
-                      <a:tailEnd type="none" w="med" len="med"/>
-                    </a:lnL>
-                    <a:lnR w="9525" cap="flat" cmpd="sng" algn="ctr">
-                      <a:solidFill>
-                        <a:srgbClr val="E2E2E6"/>
-                      </a:solidFill>
-                      <a:prstDash val="solid"/>
-                      <a:round/>
-                      <a:headEnd type="none" w="med" len="med"/>
-                      <a:tailEnd type="none" w="med" len="med"/>
-                    </a:lnR>
-                    <a:lnT w="9525" cap="flat" cmpd="sng" algn="ctr">
-                      <a:solidFill>
-                        <a:srgbClr val="E2E2E6"/>
-                      </a:solidFill>
-                      <a:prstDash val="solid"/>
-                      <a:round/>
-                      <a:headEnd type="none" w="med" len="med"/>
-                      <a:tailEnd type="none" w="med" len="med"/>
-                    </a:lnT>
-                    <a:lnB w="9525" cap="flat" cmpd="sng" algn="ctr">
-                      <a:solidFill>
-                        <a:srgbClr val="E2E2E6"/>
-                      </a:solidFill>
-                      <a:prstDash val="solid"/>
-                      <a:round/>
-                      <a:headEnd type="none" w="med" len="med"/>
-                      <a:tailEnd type="none" w="med" len="med"/>
-                    </a:lnB>
-                    <a:solidFill>
-                      <a:srgbClr val="FFFFFF"/>
-                    </a:solidFill>
-                  </a:tcPr>
-                </a:tc>
-              </a:tr>
-              <a:tr h="0">
-                <a:tc>
-                  <a:txBody>
-                    <a:bodyPr/>
-                    <a:lstStyle/>
-                    <a:p>
-                      <a:pPr indent="0" marL="0">
-                        <a:buNone/>
-                      </a:pPr>
-                      <a:r>
-                        <a:rPr lang="en-US" sz="1200" b="1" dirty="0">
-                          <a:solidFill>
-                            <a:srgbClr val="002855"/>
-                          </a:solidFill>
-                          <a:latin typeface="Arial" pitchFamily="34" charset="0"/>
-                          <a:ea typeface="Arial" pitchFamily="34" charset="-122"/>
-                          <a:cs typeface="Arial" pitchFamily="34" charset="-120"/>
-                        </a:rPr>
                         <a:t>Business case</a:t>
                       </a:r>
                       <a:endParaRPr lang="en-US" sz="1200" dirty="0">
@@ -28689,7 +28694,7 @@
                       <a:tailEnd type="none" w="med" len="med"/>
                     </a:lnB>
                     <a:solidFill>
-                      <a:srgbClr val="F4F6F8"/>
+                      <a:srgbClr val="FFFFFF"/>
                     </a:solidFill>
                   </a:tcPr>
                 </a:tc>
@@ -28757,144 +28762,6 @@
                       <a:tailEnd type="none" w="med" len="med"/>
                     </a:lnB>
                     <a:solidFill>
-                      <a:srgbClr val="F4F6F8"/>
-                    </a:solidFill>
-                  </a:tcPr>
-                </a:tc>
-              </a:tr>
-              <a:tr h="0">
-                <a:tc>
-                  <a:txBody>
-                    <a:bodyPr/>
-                    <a:lstStyle/>
-                    <a:p>
-                      <a:pPr indent="0" marL="0">
-                        <a:buNone/>
-                      </a:pPr>
-                      <a:r>
-                        <a:rPr lang="en-US" sz="1200" b="1" dirty="0">
-                          <a:solidFill>
-                            <a:srgbClr val="002855"/>
-                          </a:solidFill>
-                          <a:latin typeface="Arial" pitchFamily="34" charset="0"/>
-                          <a:ea typeface="Arial" pitchFamily="34" charset="-122"/>
-                          <a:cs typeface="Arial" pitchFamily="34" charset="-120"/>
-                        </a:rPr>
-                        <a:t>Contexto de sesión</a:t>
-                      </a:r>
-                      <a:endParaRPr lang="en-US" sz="1200" dirty="0">
-                        <a:latin typeface="Arial" charset="0"/>
-                        <a:ea typeface="Arial" charset="0"/>
-                        <a:cs typeface="Arial" charset="0"/>
-                      </a:endParaRPr>
-                    </a:p>
-                  </a:txBody>
-                  <a:tcPr marL="54864" marR="54864" marT="54864" marB="54864" anchor="t">
-                    <a:lnL w="9525" cap="flat" cmpd="sng" algn="ctr">
-                      <a:solidFill>
-                        <a:srgbClr val="E2E2E6"/>
-                      </a:solidFill>
-                      <a:prstDash val="solid"/>
-                      <a:round/>
-                      <a:headEnd type="none" w="med" len="med"/>
-                      <a:tailEnd type="none" w="med" len="med"/>
-                    </a:lnL>
-                    <a:lnR w="9525" cap="flat" cmpd="sng" algn="ctr">
-                      <a:solidFill>
-                        <a:srgbClr val="E2E2E6"/>
-                      </a:solidFill>
-                      <a:prstDash val="solid"/>
-                      <a:round/>
-                      <a:headEnd type="none" w="med" len="med"/>
-                      <a:tailEnd type="none" w="med" len="med"/>
-                    </a:lnR>
-                    <a:lnT w="9525" cap="flat" cmpd="sng" algn="ctr">
-                      <a:solidFill>
-                        <a:srgbClr val="E2E2E6"/>
-                      </a:solidFill>
-                      <a:prstDash val="solid"/>
-                      <a:round/>
-                      <a:headEnd type="none" w="med" len="med"/>
-                      <a:tailEnd type="none" w="med" len="med"/>
-                    </a:lnT>
-                    <a:lnB w="9525" cap="flat" cmpd="sng" algn="ctr">
-                      <a:solidFill>
-                        <a:srgbClr val="E2E2E6"/>
-                      </a:solidFill>
-                      <a:prstDash val="solid"/>
-                      <a:round/>
-                      <a:headEnd type="none" w="med" len="med"/>
-                      <a:tailEnd type="none" w="med" len="med"/>
-                    </a:lnB>
-                    <a:solidFill>
-                      <a:srgbClr val="FFFFFF"/>
-                    </a:solidFill>
-                  </a:tcPr>
-                </a:tc>
-                <a:tc>
-                  <a:txBody>
-                    <a:bodyPr/>
-                    <a:lstStyle/>
-                    <a:p>
-                      <a:pPr indent="0" marL="0">
-                        <a:buNone/>
-                      </a:pPr>
-                      <a:r>
-                        <a:rPr lang="en-US" sz="1200" dirty="0">
-                          <a:solidFill>
-                            <a:srgbClr val="272425"/>
-                          </a:solidFill>
-                          <a:latin typeface="Arial" pitchFamily="34" charset="0"/>
-                          <a:ea typeface="Arial" pitchFamily="34" charset="-122"/>
-                          <a:cs typeface="Arial" pitchFamily="34" charset="-120"/>
-                        </a:rPr>
-                        <a:t>Resumen de estado.json y los registros que el hook de inicio agrega al abrir Claude Code; manda sobre la memoria.</a:t>
-                      </a:r>
-                      <a:endParaRPr lang="en-US" sz="1200" dirty="0">
-                        <a:latin typeface="Arial" charset="0"/>
-                        <a:ea typeface="Arial" charset="0"/>
-                        <a:cs typeface="Arial" charset="0"/>
-                      </a:endParaRPr>
-                    </a:p>
-                  </a:txBody>
-                  <a:tcPr marL="54864" marR="54864" marT="54864" marB="54864" anchor="t">
-                    <a:lnL w="9525" cap="flat" cmpd="sng" algn="ctr">
-                      <a:solidFill>
-                        <a:srgbClr val="E2E2E6"/>
-                      </a:solidFill>
-                      <a:prstDash val="solid"/>
-                      <a:round/>
-                      <a:headEnd type="none" w="med" len="med"/>
-                      <a:tailEnd type="none" w="med" len="med"/>
-                    </a:lnL>
-                    <a:lnR w="9525" cap="flat" cmpd="sng" algn="ctr">
-                      <a:solidFill>
-                        <a:srgbClr val="E2E2E6"/>
-                      </a:solidFill>
-                      <a:prstDash val="solid"/>
-                      <a:round/>
-                      <a:headEnd type="none" w="med" len="med"/>
-                      <a:tailEnd type="none" w="med" len="med"/>
-                    </a:lnR>
-                    <a:lnT w="9525" cap="flat" cmpd="sng" algn="ctr">
-                      <a:solidFill>
-                        <a:srgbClr val="E2E2E6"/>
-                      </a:solidFill>
-                      <a:prstDash val="solid"/>
-                      <a:round/>
-                      <a:headEnd type="none" w="med" len="med"/>
-                      <a:tailEnd type="none" w="med" len="med"/>
-                    </a:lnT>
-                    <a:lnB w="9525" cap="flat" cmpd="sng" algn="ctr">
-                      <a:solidFill>
-                        <a:srgbClr val="E2E2E6"/>
-                      </a:solidFill>
-                      <a:prstDash val="solid"/>
-                      <a:round/>
-                      <a:headEnd type="none" w="med" len="med"/>
-                      <a:tailEnd type="none" w="med" len="med"/>
-                    </a:lnB>
-                    <a:solidFill>
                       <a:srgbClr val="FFFFFF"/>
                     </a:solidFill>
                   </a:tcPr>
@@ -28918,7 +28785,7 @@
                           <a:ea typeface="Arial" pitchFamily="34" charset="-122"/>
                           <a:cs typeface="Arial" pitchFamily="34" charset="-120"/>
                         </a:rPr>
-                        <a:t>Contingencia</a:t>
+                        <a:t>Contexto de sesión y radar</a:t>
                       </a:r>
                       <a:endParaRPr lang="en-US" sz="1200" dirty="0">
                         <a:latin typeface="Arial" charset="0"/>
@@ -28986,7 +28853,7 @@
                           <a:ea typeface="Arial" pitchFamily="34" charset="-122"/>
                           <a:cs typeface="Arial" pitchFamily="34" charset="-120"/>
                         </a:rPr>
-                        <a:t>Reserva para riesgos identificados (EMV más costo de las respuestas); forma parte del BAC.</a:t>
+                        <a:t>Resumen de estado.json y los registros que el hook de inicio agrega al abrir Claude Code (manda sobre la memoria), con una línea del radar: qué decidir, escalar, desbloquear y vigilar, con responsable y siguiente paso.</a:t>
                       </a:r>
                       <a:endParaRPr lang="en-US" sz="1200" dirty="0">
                         <a:latin typeface="Arial" charset="0"/>
@@ -29056,7 +28923,7 @@
                           <a:ea typeface="Arial" pitchFamily="34" charset="-122"/>
                           <a:cs typeface="Arial" pitchFamily="34" charset="-120"/>
                         </a:rPr>
-                        <a:t>Descripción del producto del proyecto</a:t>
+                        <a:t>Contingencia y BAC</a:t>
                       </a:r>
                       <a:endParaRPr lang="en-US" sz="1200" dirty="0">
                         <a:latin typeface="Arial" charset="0"/>
@@ -29124,7 +28991,7 @@
                           <a:ea typeface="Arial" pitchFamily="34" charset="-122"/>
                           <a:cs typeface="Arial" pitchFamily="34" charset="-120"/>
                         </a:rPr>
-                        <a:t>Propósito, productos mayores, criterios de aceptación y tolerancias de calidad del producto final.</a:t>
+                        <a:t>Contingencia: reserva para riesgos identificados (EMV más costo de las respuestas). BAC, presupuesto a la conclusión: paquetes base más contingencia.</a:t>
                       </a:r>
                       <a:endParaRPr lang="en-US" sz="1200" dirty="0">
                         <a:latin typeface="Arial" charset="0"/>
@@ -29172,144 +29039,6 @@
                     </a:lnB>
                     <a:solidFill>
                       <a:srgbClr val="FFFFFF"/>
-                    </a:solidFill>
-                  </a:tcPr>
-                </a:tc>
-              </a:tr>
-              <a:tr h="0">
-                <a:tc>
-                  <a:txBody>
-                    <a:bodyPr/>
-                    <a:lstStyle/>
-                    <a:p>
-                      <a:pPr indent="0" marL="0">
-                        <a:buNone/>
-                      </a:pPr>
-                      <a:r>
-                        <a:rPr lang="en-US" sz="1200" b="1" dirty="0">
-                          <a:solidFill>
-                            <a:srgbClr val="002855"/>
-                          </a:solidFill>
-                          <a:latin typeface="Arial" pitchFamily="34" charset="0"/>
-                          <a:ea typeface="Arial" pitchFamily="34" charset="-122"/>
-                          <a:cs typeface="Arial" pitchFamily="34" charset="-120"/>
-                        </a:rPr>
-                        <a:t>Deseabilidad, viabilidad, factibilidad</a:t>
-                      </a:r>
-                      <a:endParaRPr lang="en-US" sz="1200" dirty="0">
-                        <a:latin typeface="Arial" charset="0"/>
-                        <a:ea typeface="Arial" charset="0"/>
-                        <a:cs typeface="Arial" charset="0"/>
-                      </a:endParaRPr>
-                    </a:p>
-                  </a:txBody>
-                  <a:tcPr marL="54864" marR="54864" marT="54864" marB="54864" anchor="t">
-                    <a:lnL w="9525" cap="flat" cmpd="sng" algn="ctr">
-                      <a:solidFill>
-                        <a:srgbClr val="E2E2E6"/>
-                      </a:solidFill>
-                      <a:prstDash val="solid"/>
-                      <a:round/>
-                      <a:headEnd type="none" w="med" len="med"/>
-                      <a:tailEnd type="none" w="med" len="med"/>
-                    </a:lnL>
-                    <a:lnR w="9525" cap="flat" cmpd="sng" algn="ctr">
-                      <a:solidFill>
-                        <a:srgbClr val="E2E2E6"/>
-                      </a:solidFill>
-                      <a:prstDash val="solid"/>
-                      <a:round/>
-                      <a:headEnd type="none" w="med" len="med"/>
-                      <a:tailEnd type="none" w="med" len="med"/>
-                    </a:lnR>
-                    <a:lnT w="9525" cap="flat" cmpd="sng" algn="ctr">
-                      <a:solidFill>
-                        <a:srgbClr val="E2E2E6"/>
-                      </a:solidFill>
-                      <a:prstDash val="solid"/>
-                      <a:round/>
-                      <a:headEnd type="none" w="med" len="med"/>
-                      <a:tailEnd type="none" w="med" len="med"/>
-                    </a:lnT>
-                    <a:lnB w="9525" cap="flat" cmpd="sng" algn="ctr">
-                      <a:solidFill>
-                        <a:srgbClr val="E2E2E6"/>
-                      </a:solidFill>
-                      <a:prstDash val="solid"/>
-                      <a:round/>
-                      <a:headEnd type="none" w="med" len="med"/>
-                      <a:tailEnd type="none" w="med" len="med"/>
-                    </a:lnB>
-                    <a:solidFill>
-                      <a:srgbClr val="F4F6F8"/>
-                    </a:solidFill>
-                  </a:tcPr>
-                </a:tc>
-                <a:tc>
-                  <a:txBody>
-                    <a:bodyPr/>
-                    <a:lstStyle/>
-                    <a:p>
-                      <a:pPr indent="0" marL="0">
-                        <a:buNone/>
-                      </a:pPr>
-                      <a:r>
-                        <a:rPr lang="en-US" sz="1200" dirty="0">
-                          <a:solidFill>
-                            <a:srgbClr val="272425"/>
-                          </a:solidFill>
-                          <a:latin typeface="Arial" pitchFamily="34" charset="0"/>
-                          <a:ea typeface="Arial" pitchFamily="34" charset="-122"/>
-                          <a:cs typeface="Arial" pitchFamily="34" charset="-120"/>
-                        </a:rPr>
-                        <a:t>Las tres familias de supuestos: ¿lo van a usar?, ¿cierra?, ¿se puede construir y operar?</a:t>
-                      </a:r>
-                      <a:endParaRPr lang="en-US" sz="1200" dirty="0">
-                        <a:latin typeface="Arial" charset="0"/>
-                        <a:ea typeface="Arial" charset="0"/>
-                        <a:cs typeface="Arial" charset="0"/>
-                      </a:endParaRPr>
-                    </a:p>
-                  </a:txBody>
-                  <a:tcPr marL="54864" marR="54864" marT="54864" marB="54864" anchor="t">
-                    <a:lnL w="9525" cap="flat" cmpd="sng" algn="ctr">
-                      <a:solidFill>
-                        <a:srgbClr val="E2E2E6"/>
-                      </a:solidFill>
-                      <a:prstDash val="solid"/>
-                      <a:round/>
-                      <a:headEnd type="none" w="med" len="med"/>
-                      <a:tailEnd type="none" w="med" len="med"/>
-                    </a:lnL>
-                    <a:lnR w="9525" cap="flat" cmpd="sng" algn="ctr">
-                      <a:solidFill>
-                        <a:srgbClr val="E2E2E6"/>
-                      </a:solidFill>
-                      <a:prstDash val="solid"/>
-                      <a:round/>
-                      <a:headEnd type="none" w="med" len="med"/>
-                      <a:tailEnd type="none" w="med" len="med"/>
-                    </a:lnR>
-                    <a:lnT w="9525" cap="flat" cmpd="sng" algn="ctr">
-                      <a:solidFill>
-                        <a:srgbClr val="E2E2E6"/>
-                      </a:solidFill>
-                      <a:prstDash val="solid"/>
-                      <a:round/>
-                      <a:headEnd type="none" w="med" len="med"/>
-                      <a:tailEnd type="none" w="med" len="med"/>
-                    </a:lnT>
-                    <a:lnB w="9525" cap="flat" cmpd="sng" algn="ctr">
-                      <a:solidFill>
-                        <a:srgbClr val="E2E2E6"/>
-                      </a:solidFill>
-                      <a:prstDash val="solid"/>
-                      <a:round/>
-                      <a:headEnd type="none" w="med" len="med"/>
-                      <a:tailEnd type="none" w="med" len="med"/>
-                    </a:lnB>
-                    <a:solidFill>
-                      <a:srgbClr val="F4F6F8"/>
                     </a:solidFill>
                   </a:tcPr>
                 </a:tc>
@@ -29500,6 +29229,282 @@
                           <a:ea typeface="Arial" pitchFamily="34" charset="-122"/>
                           <a:cs typeface="Arial" pitchFamily="34" charset="-120"/>
                         </a:rPr>
+                        <a:t>Descripción del producto del proyecto</a:t>
+                      </a:r>
+                      <a:endParaRPr lang="en-US" sz="1200" dirty="0">
+                        <a:latin typeface="Arial" charset="0"/>
+                        <a:ea typeface="Arial" charset="0"/>
+                        <a:cs typeface="Arial" charset="0"/>
+                      </a:endParaRPr>
+                    </a:p>
+                  </a:txBody>
+                  <a:tcPr marL="54864" marR="54864" marT="54864" marB="54864" anchor="t">
+                    <a:lnL w="9525" cap="flat" cmpd="sng" algn="ctr">
+                      <a:solidFill>
+                        <a:srgbClr val="E2E2E6"/>
+                      </a:solidFill>
+                      <a:prstDash val="solid"/>
+                      <a:round/>
+                      <a:headEnd type="none" w="med" len="med"/>
+                      <a:tailEnd type="none" w="med" len="med"/>
+                    </a:lnL>
+                    <a:lnR w="9525" cap="flat" cmpd="sng" algn="ctr">
+                      <a:solidFill>
+                        <a:srgbClr val="E2E2E6"/>
+                      </a:solidFill>
+                      <a:prstDash val="solid"/>
+                      <a:round/>
+                      <a:headEnd type="none" w="med" len="med"/>
+                      <a:tailEnd type="none" w="med" len="med"/>
+                    </a:lnR>
+                    <a:lnT w="9525" cap="flat" cmpd="sng" algn="ctr">
+                      <a:solidFill>
+                        <a:srgbClr val="E2E2E6"/>
+                      </a:solidFill>
+                      <a:prstDash val="solid"/>
+                      <a:round/>
+                      <a:headEnd type="none" w="med" len="med"/>
+                      <a:tailEnd type="none" w="med" len="med"/>
+                    </a:lnT>
+                    <a:lnB w="9525" cap="flat" cmpd="sng" algn="ctr">
+                      <a:solidFill>
+                        <a:srgbClr val="E2E2E6"/>
+                      </a:solidFill>
+                      <a:prstDash val="solid"/>
+                      <a:round/>
+                      <a:headEnd type="none" w="med" len="med"/>
+                      <a:tailEnd type="none" w="med" len="med"/>
+                    </a:lnB>
+                    <a:solidFill>
+                      <a:srgbClr val="F4F6F8"/>
+                    </a:solidFill>
+                  </a:tcPr>
+                </a:tc>
+                <a:tc>
+                  <a:txBody>
+                    <a:bodyPr/>
+                    <a:lstStyle/>
+                    <a:p>
+                      <a:pPr indent="0" marL="0">
+                        <a:buNone/>
+                      </a:pPr>
+                      <a:r>
+                        <a:rPr lang="en-US" sz="1200" dirty="0">
+                          <a:solidFill>
+                            <a:srgbClr val="272425"/>
+                          </a:solidFill>
+                          <a:latin typeface="Arial" pitchFamily="34" charset="0"/>
+                          <a:ea typeface="Arial" pitchFamily="34" charset="-122"/>
+                          <a:cs typeface="Arial" pitchFamily="34" charset="-120"/>
+                        </a:rPr>
+                        <a:t>Propósito, productos mayores, criterios de aceptación y tolerancias de calidad del producto final.</a:t>
+                      </a:r>
+                      <a:endParaRPr lang="en-US" sz="1200" dirty="0">
+                        <a:latin typeface="Arial" charset="0"/>
+                        <a:ea typeface="Arial" charset="0"/>
+                        <a:cs typeface="Arial" charset="0"/>
+                      </a:endParaRPr>
+                    </a:p>
+                  </a:txBody>
+                  <a:tcPr marL="54864" marR="54864" marT="54864" marB="54864" anchor="t">
+                    <a:lnL w="9525" cap="flat" cmpd="sng" algn="ctr">
+                      <a:solidFill>
+                        <a:srgbClr val="E2E2E6"/>
+                      </a:solidFill>
+                      <a:prstDash val="solid"/>
+                      <a:round/>
+                      <a:headEnd type="none" w="med" len="med"/>
+                      <a:tailEnd type="none" w="med" len="med"/>
+                    </a:lnL>
+                    <a:lnR w="9525" cap="flat" cmpd="sng" algn="ctr">
+                      <a:solidFill>
+                        <a:srgbClr val="E2E2E6"/>
+                      </a:solidFill>
+                      <a:prstDash val="solid"/>
+                      <a:round/>
+                      <a:headEnd type="none" w="med" len="med"/>
+                      <a:tailEnd type="none" w="med" len="med"/>
+                    </a:lnR>
+                    <a:lnT w="9525" cap="flat" cmpd="sng" algn="ctr">
+                      <a:solidFill>
+                        <a:srgbClr val="E2E2E6"/>
+                      </a:solidFill>
+                      <a:prstDash val="solid"/>
+                      <a:round/>
+                      <a:headEnd type="none" w="med" len="med"/>
+                      <a:tailEnd type="none" w="med" len="med"/>
+                    </a:lnT>
+                    <a:lnB w="9525" cap="flat" cmpd="sng" algn="ctr">
+                      <a:solidFill>
+                        <a:srgbClr val="E2E2E6"/>
+                      </a:solidFill>
+                      <a:prstDash val="solid"/>
+                      <a:round/>
+                      <a:headEnd type="none" w="med" len="med"/>
+                      <a:tailEnd type="none" w="med" len="med"/>
+                    </a:lnB>
+                    <a:solidFill>
+                      <a:srgbClr val="F4F6F8"/>
+                    </a:solidFill>
+                  </a:tcPr>
+                </a:tc>
+              </a:tr>
+              <a:tr h="0">
+                <a:tc>
+                  <a:txBody>
+                    <a:bodyPr/>
+                    <a:lstStyle/>
+                    <a:p>
+                      <a:pPr indent="0" marL="0">
+                        <a:buNone/>
+                      </a:pPr>
+                      <a:r>
+                        <a:rPr lang="en-US" sz="1200" b="1" dirty="0">
+                          <a:solidFill>
+                            <a:srgbClr val="002855"/>
+                          </a:solidFill>
+                          <a:latin typeface="Arial" pitchFamily="34" charset="0"/>
+                          <a:ea typeface="Arial" pitchFamily="34" charset="-122"/>
+                          <a:cs typeface="Arial" pitchFamily="34" charset="-120"/>
+                        </a:rPr>
+                        <a:t>Deseabilidad, viabilidad, factibilidad</a:t>
+                      </a:r>
+                      <a:endParaRPr lang="en-US" sz="1200" dirty="0">
+                        <a:latin typeface="Arial" charset="0"/>
+                        <a:ea typeface="Arial" charset="0"/>
+                        <a:cs typeface="Arial" charset="0"/>
+                      </a:endParaRPr>
+                    </a:p>
+                  </a:txBody>
+                  <a:tcPr marL="54864" marR="54864" marT="54864" marB="54864" anchor="t">
+                    <a:lnL w="9525" cap="flat" cmpd="sng" algn="ctr">
+                      <a:solidFill>
+                        <a:srgbClr val="E2E2E6"/>
+                      </a:solidFill>
+                      <a:prstDash val="solid"/>
+                      <a:round/>
+                      <a:headEnd type="none" w="med" len="med"/>
+                      <a:tailEnd type="none" w="med" len="med"/>
+                    </a:lnL>
+                    <a:lnR w="9525" cap="flat" cmpd="sng" algn="ctr">
+                      <a:solidFill>
+                        <a:srgbClr val="E2E2E6"/>
+                      </a:solidFill>
+                      <a:prstDash val="solid"/>
+                      <a:round/>
+                      <a:headEnd type="none" w="med" len="med"/>
+                      <a:tailEnd type="none" w="med" len="med"/>
+                    </a:lnR>
+                    <a:lnT w="9525" cap="flat" cmpd="sng" algn="ctr">
+                      <a:solidFill>
+                        <a:srgbClr val="E2E2E6"/>
+                      </a:solidFill>
+                      <a:prstDash val="solid"/>
+                      <a:round/>
+                      <a:headEnd type="none" w="med" len="med"/>
+                      <a:tailEnd type="none" w="med" len="med"/>
+                    </a:lnT>
+                    <a:lnB w="9525" cap="flat" cmpd="sng" algn="ctr">
+                      <a:solidFill>
+                        <a:srgbClr val="E2E2E6"/>
+                      </a:solidFill>
+                      <a:prstDash val="solid"/>
+                      <a:round/>
+                      <a:headEnd type="none" w="med" len="med"/>
+                      <a:tailEnd type="none" w="med" len="med"/>
+                    </a:lnB>
+                    <a:solidFill>
+                      <a:srgbClr val="FFFFFF"/>
+                    </a:solidFill>
+                  </a:tcPr>
+                </a:tc>
+                <a:tc>
+                  <a:txBody>
+                    <a:bodyPr/>
+                    <a:lstStyle/>
+                    <a:p>
+                      <a:pPr indent="0" marL="0">
+                        <a:buNone/>
+                      </a:pPr>
+                      <a:r>
+                        <a:rPr lang="en-US" sz="1200" dirty="0">
+                          <a:solidFill>
+                            <a:srgbClr val="272425"/>
+                          </a:solidFill>
+                          <a:latin typeface="Arial" pitchFamily="34" charset="0"/>
+                          <a:ea typeface="Arial" pitchFamily="34" charset="-122"/>
+                          <a:cs typeface="Arial" pitchFamily="34" charset="-120"/>
+                        </a:rPr>
+                        <a:t>Las tres familias de supuestos: ¿lo van a usar?, ¿cierra?, ¿se puede construir y operar?</a:t>
+                      </a:r>
+                      <a:endParaRPr lang="en-US" sz="1200" dirty="0">
+                        <a:latin typeface="Arial" charset="0"/>
+                        <a:ea typeface="Arial" charset="0"/>
+                        <a:cs typeface="Arial" charset="0"/>
+                      </a:endParaRPr>
+                    </a:p>
+                  </a:txBody>
+                  <a:tcPr marL="54864" marR="54864" marT="54864" marB="54864" anchor="t">
+                    <a:lnL w="9525" cap="flat" cmpd="sng" algn="ctr">
+                      <a:solidFill>
+                        <a:srgbClr val="E2E2E6"/>
+                      </a:solidFill>
+                      <a:prstDash val="solid"/>
+                      <a:round/>
+                      <a:headEnd type="none" w="med" len="med"/>
+                      <a:tailEnd type="none" w="med" len="med"/>
+                    </a:lnL>
+                    <a:lnR w="9525" cap="flat" cmpd="sng" algn="ctr">
+                      <a:solidFill>
+                        <a:srgbClr val="E2E2E6"/>
+                      </a:solidFill>
+                      <a:prstDash val="solid"/>
+                      <a:round/>
+                      <a:headEnd type="none" w="med" len="med"/>
+                      <a:tailEnd type="none" w="med" len="med"/>
+                    </a:lnR>
+                    <a:lnT w="9525" cap="flat" cmpd="sng" algn="ctr">
+                      <a:solidFill>
+                        <a:srgbClr val="E2E2E6"/>
+                      </a:solidFill>
+                      <a:prstDash val="solid"/>
+                      <a:round/>
+                      <a:headEnd type="none" w="med" len="med"/>
+                      <a:tailEnd type="none" w="med" len="med"/>
+                    </a:lnT>
+                    <a:lnB w="9525" cap="flat" cmpd="sng" algn="ctr">
+                      <a:solidFill>
+                        <a:srgbClr val="E2E2E6"/>
+                      </a:solidFill>
+                      <a:prstDash val="solid"/>
+                      <a:round/>
+                      <a:headEnd type="none" w="med" len="med"/>
+                      <a:tailEnd type="none" w="med" len="med"/>
+                    </a:lnB>
+                    <a:solidFill>
+                      <a:srgbClr val="FFFFFF"/>
+                    </a:solidFill>
+                  </a:tcPr>
+                </a:tc>
+              </a:tr>
+              <a:tr h="0">
+                <a:tc>
+                  <a:txBody>
+                    <a:bodyPr/>
+                    <a:lstStyle/>
+                    <a:p>
+                      <a:pPr indent="0" marL="0">
+                        <a:buNone/>
+                      </a:pPr>
+                      <a:r>
+                        <a:rPr lang="en-US" sz="1200" b="1" dirty="0">
+                          <a:solidFill>
+                            <a:srgbClr val="002855"/>
+                          </a:solidFill>
+                          <a:latin typeface="Arial" pitchFamily="34" charset="0"/>
+                          <a:ea typeface="Arial" pitchFamily="34" charset="-122"/>
+                          <a:cs typeface="Arial" pitchFamily="34" charset="-120"/>
+                        </a:rPr>
                         <a:t>Enfoque de beneficios</a:t>
                       </a:r>
                       <a:endParaRPr lang="en-US" sz="1200" dirty="0">
@@ -29896,420 +29901,6 @@
                   </a:tcPr>
                 </a:tc>
               </a:tr>
-              <a:tr h="0">
-                <a:tc>
-                  <a:txBody>
-                    <a:bodyPr/>
-                    <a:lstStyle/>
-                    <a:p>
-                      <a:pPr indent="0" marL="0">
-                        <a:buNone/>
-                      </a:pPr>
-                      <a:r>
-                        <a:rPr lang="en-US" sz="1200" b="1" dirty="0">
-                          <a:solidFill>
-                            <a:srgbClr val="002855"/>
-                          </a:solidFill>
-                          <a:latin typeface="Arial" pitchFamily="34" charset="0"/>
-                          <a:ea typeface="Arial" pitchFamily="34" charset="-122"/>
-                          <a:cs typeface="Arial" pitchFamily="34" charset="-120"/>
-                        </a:rPr>
-                        <a:t>Iniciación (initiating a project)</a:t>
-                      </a:r>
-                      <a:endParaRPr lang="en-US" sz="1200" dirty="0">
-                        <a:latin typeface="Arial" charset="0"/>
-                        <a:ea typeface="Arial" charset="0"/>
-                        <a:cs typeface="Arial" charset="0"/>
-                      </a:endParaRPr>
-                    </a:p>
-                  </a:txBody>
-                  <a:tcPr marL="54864" marR="54864" marT="54864" marB="54864" anchor="t">
-                    <a:lnL w="9525" cap="flat" cmpd="sng" algn="ctr">
-                      <a:solidFill>
-                        <a:srgbClr val="E2E2E6"/>
-                      </a:solidFill>
-                      <a:prstDash val="solid"/>
-                      <a:round/>
-                      <a:headEnd type="none" w="med" len="med"/>
-                      <a:tailEnd type="none" w="med" len="med"/>
-                    </a:lnL>
-                    <a:lnR w="9525" cap="flat" cmpd="sng" algn="ctr">
-                      <a:solidFill>
-                        <a:srgbClr val="E2E2E6"/>
-                      </a:solidFill>
-                      <a:prstDash val="solid"/>
-                      <a:round/>
-                      <a:headEnd type="none" w="med" len="med"/>
-                      <a:tailEnd type="none" w="med" len="med"/>
-                    </a:lnR>
-                    <a:lnT w="9525" cap="flat" cmpd="sng" algn="ctr">
-                      <a:solidFill>
-                        <a:srgbClr val="E2E2E6"/>
-                      </a:solidFill>
-                      <a:prstDash val="solid"/>
-                      <a:round/>
-                      <a:headEnd type="none" w="med" len="med"/>
-                      <a:tailEnd type="none" w="med" len="med"/>
-                    </a:lnT>
-                    <a:lnB w="9525" cap="flat" cmpd="sng" algn="ctr">
-                      <a:solidFill>
-                        <a:srgbClr val="E2E2E6"/>
-                      </a:solidFill>
-                      <a:prstDash val="solid"/>
-                      <a:round/>
-                      <a:headEnd type="none" w="med" len="med"/>
-                      <a:tailEnd type="none" w="med" len="med"/>
-                    </a:lnB>
-                    <a:solidFill>
-                      <a:srgbClr val="FFFFFF"/>
-                    </a:solidFill>
-                  </a:tcPr>
-                </a:tc>
-                <a:tc>
-                  <a:txBody>
-                    <a:bodyPr/>
-                    <a:lstStyle/>
-                    <a:p>
-                      <a:pPr indent="0" marL="0">
-                        <a:buNone/>
-                      </a:pPr>
-                      <a:r>
-                        <a:rPr lang="en-US" sz="1200" dirty="0">
-                          <a:solidFill>
-                            <a:srgbClr val="272425"/>
-                          </a:solidFill>
-                          <a:latin typeface="Arial" pitchFamily="34" charset="0"/>
-                          <a:ea typeface="Arial" pitchFamily="34" charset="-122"/>
-                          <a:cs typeface="Arial" pitchFamily="34" charset="-120"/>
-                        </a:rPr>
-                        <a:t>Primera etapa: diseña el proyecto (caso, planes, enfoques, controles) hasta la puerta autorizar-proyecto.</a:t>
-                      </a:r>
-                      <a:endParaRPr lang="en-US" sz="1200" dirty="0">
-                        <a:latin typeface="Arial" charset="0"/>
-                        <a:ea typeface="Arial" charset="0"/>
-                        <a:cs typeface="Arial" charset="0"/>
-                      </a:endParaRPr>
-                    </a:p>
-                  </a:txBody>
-                  <a:tcPr marL="54864" marR="54864" marT="54864" marB="54864" anchor="t">
-                    <a:lnL w="9525" cap="flat" cmpd="sng" algn="ctr">
-                      <a:solidFill>
-                        <a:srgbClr val="E2E2E6"/>
-                      </a:solidFill>
-                      <a:prstDash val="solid"/>
-                      <a:round/>
-                      <a:headEnd type="none" w="med" len="med"/>
-                      <a:tailEnd type="none" w="med" len="med"/>
-                    </a:lnL>
-                    <a:lnR w="9525" cap="flat" cmpd="sng" algn="ctr">
-                      <a:solidFill>
-                        <a:srgbClr val="E2E2E6"/>
-                      </a:solidFill>
-                      <a:prstDash val="solid"/>
-                      <a:round/>
-                      <a:headEnd type="none" w="med" len="med"/>
-                      <a:tailEnd type="none" w="med" len="med"/>
-                    </a:lnR>
-                    <a:lnT w="9525" cap="flat" cmpd="sng" algn="ctr">
-                      <a:solidFill>
-                        <a:srgbClr val="E2E2E6"/>
-                      </a:solidFill>
-                      <a:prstDash val="solid"/>
-                      <a:round/>
-                      <a:headEnd type="none" w="med" len="med"/>
-                      <a:tailEnd type="none" w="med" len="med"/>
-                    </a:lnT>
-                    <a:lnB w="9525" cap="flat" cmpd="sng" algn="ctr">
-                      <a:solidFill>
-                        <a:srgbClr val="E2E2E6"/>
-                      </a:solidFill>
-                      <a:prstDash val="solid"/>
-                      <a:round/>
-                      <a:headEnd type="none" w="med" len="med"/>
-                      <a:tailEnd type="none" w="med" len="med"/>
-                    </a:lnB>
-                    <a:solidFill>
-                      <a:srgbClr val="FFFFFF"/>
-                    </a:solidFill>
-                  </a:tcPr>
-                </a:tc>
-              </a:tr>
-              <a:tr h="0">
-                <a:tc>
-                  <a:txBody>
-                    <a:bodyPr/>
-                    <a:lstStyle/>
-                    <a:p>
-                      <a:pPr indent="0" marL="0">
-                        <a:buNone/>
-                      </a:pPr>
-                      <a:r>
-                        <a:rPr lang="en-US" sz="1200" b="1" dirty="0">
-                          <a:solidFill>
-                            <a:srgbClr val="002855"/>
-                          </a:solidFill>
-                          <a:latin typeface="Arial" pitchFamily="34" charset="0"/>
-                          <a:ea typeface="Arial" pitchFamily="34" charset="-122"/>
-                          <a:cs typeface="Arial" pitchFamily="34" charset="-120"/>
-                        </a:rPr>
-                        <a:t>Mandato (project mandate)</a:t>
-                      </a:r>
-                      <a:endParaRPr lang="en-US" sz="1200" dirty="0">
-                        <a:latin typeface="Arial" charset="0"/>
-                        <a:ea typeface="Arial" charset="0"/>
-                        <a:cs typeface="Arial" charset="0"/>
-                      </a:endParaRPr>
-                    </a:p>
-                  </a:txBody>
-                  <a:tcPr marL="54864" marR="54864" marT="54864" marB="54864" anchor="t">
-                    <a:lnL w="9525" cap="flat" cmpd="sng" algn="ctr">
-                      <a:solidFill>
-                        <a:srgbClr val="E2E2E6"/>
-                      </a:solidFill>
-                      <a:prstDash val="solid"/>
-                      <a:round/>
-                      <a:headEnd type="none" w="med" len="med"/>
-                      <a:tailEnd type="none" w="med" len="med"/>
-                    </a:lnL>
-                    <a:lnR w="9525" cap="flat" cmpd="sng" algn="ctr">
-                      <a:solidFill>
-                        <a:srgbClr val="E2E2E6"/>
-                      </a:solidFill>
-                      <a:prstDash val="solid"/>
-                      <a:round/>
-                      <a:headEnd type="none" w="med" len="med"/>
-                      <a:tailEnd type="none" w="med" len="med"/>
-                    </a:lnR>
-                    <a:lnT w="9525" cap="flat" cmpd="sng" algn="ctr">
-                      <a:solidFill>
-                        <a:srgbClr val="E2E2E6"/>
-                      </a:solidFill>
-                      <a:prstDash val="solid"/>
-                      <a:round/>
-                      <a:headEnd type="none" w="med" len="med"/>
-                      <a:tailEnd type="none" w="med" len="med"/>
-                    </a:lnT>
-                    <a:lnB w="9525" cap="flat" cmpd="sng" algn="ctr">
-                      <a:solidFill>
-                        <a:srgbClr val="E2E2E6"/>
-                      </a:solidFill>
-                      <a:prstDash val="solid"/>
-                      <a:round/>
-                      <a:headEnd type="none" w="med" len="med"/>
-                      <a:tailEnd type="none" w="med" len="med"/>
-                    </a:lnB>
-                    <a:solidFill>
-                      <a:srgbClr val="F4F6F8"/>
-                    </a:solidFill>
-                  </a:tcPr>
-                </a:tc>
-                <a:tc>
-                  <a:txBody>
-                    <a:bodyPr/>
-                    <a:lstStyle/>
-                    <a:p>
-                      <a:pPr indent="0" marL="0">
-                        <a:buNone/>
-                      </a:pPr>
-                      <a:r>
-                        <a:rPr lang="en-US" sz="1200" dirty="0">
-                          <a:solidFill>
-                            <a:srgbClr val="272425"/>
-                          </a:solidFill>
-                          <a:latin typeface="Arial" pitchFamily="34" charset="0"/>
-                          <a:ea typeface="Arial" pitchFamily="34" charset="-122"/>
-                          <a:cs typeface="Arial" pitchFamily="34" charset="-120"/>
-                        </a:rPr>
-                        <a:t>Pedido que da origen al proyecto, conservado como llegó, con su autoridad emisora.</a:t>
-                      </a:r>
-                      <a:endParaRPr lang="en-US" sz="1200" dirty="0">
-                        <a:latin typeface="Arial" charset="0"/>
-                        <a:ea typeface="Arial" charset="0"/>
-                        <a:cs typeface="Arial" charset="0"/>
-                      </a:endParaRPr>
-                    </a:p>
-                  </a:txBody>
-                  <a:tcPr marL="54864" marR="54864" marT="54864" marB="54864" anchor="t">
-                    <a:lnL w="9525" cap="flat" cmpd="sng" algn="ctr">
-                      <a:solidFill>
-                        <a:srgbClr val="E2E2E6"/>
-                      </a:solidFill>
-                      <a:prstDash val="solid"/>
-                      <a:round/>
-                      <a:headEnd type="none" w="med" len="med"/>
-                      <a:tailEnd type="none" w="med" len="med"/>
-                    </a:lnL>
-                    <a:lnR w="9525" cap="flat" cmpd="sng" algn="ctr">
-                      <a:solidFill>
-                        <a:srgbClr val="E2E2E6"/>
-                      </a:solidFill>
-                      <a:prstDash val="solid"/>
-                      <a:round/>
-                      <a:headEnd type="none" w="med" len="med"/>
-                      <a:tailEnd type="none" w="med" len="med"/>
-                    </a:lnR>
-                    <a:lnT w="9525" cap="flat" cmpd="sng" algn="ctr">
-                      <a:solidFill>
-                        <a:srgbClr val="E2E2E6"/>
-                      </a:solidFill>
-                      <a:prstDash val="solid"/>
-                      <a:round/>
-                      <a:headEnd type="none" w="med" len="med"/>
-                      <a:tailEnd type="none" w="med" len="med"/>
-                    </a:lnT>
-                    <a:lnB w="9525" cap="flat" cmpd="sng" algn="ctr">
-                      <a:solidFill>
-                        <a:srgbClr val="E2E2E6"/>
-                      </a:solidFill>
-                      <a:prstDash val="solid"/>
-                      <a:round/>
-                      <a:headEnd type="none" w="med" len="med"/>
-                      <a:tailEnd type="none" w="med" len="med"/>
-                    </a:lnB>
-                    <a:solidFill>
-                      <a:srgbClr val="F4F6F8"/>
-                    </a:solidFill>
-                  </a:tcPr>
-                </a:tc>
-              </a:tr>
-              <a:tr h="0">
-                <a:tc>
-                  <a:txBody>
-                    <a:bodyPr/>
-                    <a:lstStyle/>
-                    <a:p>
-                      <a:pPr indent="0" marL="0">
-                        <a:buNone/>
-                      </a:pPr>
-                      <a:r>
-                        <a:rPr lang="en-US" sz="1200" b="1" dirty="0">
-                          <a:solidFill>
-                            <a:srgbClr val="002855"/>
-                          </a:solidFill>
-                          <a:latin typeface="Arial" pitchFamily="34" charset="0"/>
-                          <a:ea typeface="Arial" pitchFamily="34" charset="-122"/>
-                          <a:cs typeface="Arial" pitchFamily="34" charset="-120"/>
-                        </a:rPr>
-                        <a:t>Mapa de supuestos</a:t>
-                      </a:r>
-                      <a:endParaRPr lang="en-US" sz="1200" dirty="0">
-                        <a:latin typeface="Arial" charset="0"/>
-                        <a:ea typeface="Arial" charset="0"/>
-                        <a:cs typeface="Arial" charset="0"/>
-                      </a:endParaRPr>
-                    </a:p>
-                  </a:txBody>
-                  <a:tcPr marL="54864" marR="54864" marT="54864" marB="54864" anchor="t">
-                    <a:lnL w="9525" cap="flat" cmpd="sng" algn="ctr">
-                      <a:solidFill>
-                        <a:srgbClr val="E2E2E6"/>
-                      </a:solidFill>
-                      <a:prstDash val="solid"/>
-                      <a:round/>
-                      <a:headEnd type="none" w="med" len="med"/>
-                      <a:tailEnd type="none" w="med" len="med"/>
-                    </a:lnL>
-                    <a:lnR w="9525" cap="flat" cmpd="sng" algn="ctr">
-                      <a:solidFill>
-                        <a:srgbClr val="E2E2E6"/>
-                      </a:solidFill>
-                      <a:prstDash val="solid"/>
-                      <a:round/>
-                      <a:headEnd type="none" w="med" len="med"/>
-                      <a:tailEnd type="none" w="med" len="med"/>
-                    </a:lnR>
-                    <a:lnT w="9525" cap="flat" cmpd="sng" algn="ctr">
-                      <a:solidFill>
-                        <a:srgbClr val="E2E2E6"/>
-                      </a:solidFill>
-                      <a:prstDash val="solid"/>
-                      <a:round/>
-                      <a:headEnd type="none" w="med" len="med"/>
-                      <a:tailEnd type="none" w="med" len="med"/>
-                    </a:lnT>
-                    <a:lnB w="9525" cap="flat" cmpd="sng" algn="ctr">
-                      <a:solidFill>
-                        <a:srgbClr val="E2E2E6"/>
-                      </a:solidFill>
-                      <a:prstDash val="solid"/>
-                      <a:round/>
-                      <a:headEnd type="none" w="med" len="med"/>
-                      <a:tailEnd type="none" w="med" len="med"/>
-                    </a:lnB>
-                    <a:solidFill>
-                      <a:srgbClr val="FFFFFF"/>
-                    </a:solidFill>
-                  </a:tcPr>
-                </a:tc>
-                <a:tc>
-                  <a:txBody>
-                    <a:bodyPr/>
-                    <a:lstStyle/>
-                    <a:p>
-                      <a:pPr indent="0" marL="0">
-                        <a:buNone/>
-                      </a:pPr>
-                      <a:r>
-                        <a:rPr lang="en-US" sz="1200" dirty="0">
-                          <a:solidFill>
-                            <a:srgbClr val="272425"/>
-                          </a:solidFill>
-                          <a:latin typeface="Arial" pitchFamily="34" charset="0"/>
-                          <a:ea typeface="Arial" pitchFamily="34" charset="-122"/>
-                          <a:cs typeface="Arial" pitchFamily="34" charset="-120"/>
-                        </a:rPr>
-                        <a:t>Matriz criticidad × certeza; los supuestos críticos y sin evidencia son hipótesis y se validan primero.</a:t>
-                      </a:r>
-                      <a:endParaRPr lang="en-US" sz="1200" dirty="0">
-                        <a:latin typeface="Arial" charset="0"/>
-                        <a:ea typeface="Arial" charset="0"/>
-                        <a:cs typeface="Arial" charset="0"/>
-                      </a:endParaRPr>
-                    </a:p>
-                  </a:txBody>
-                  <a:tcPr marL="54864" marR="54864" marT="54864" marB="54864" anchor="t">
-                    <a:lnL w="9525" cap="flat" cmpd="sng" algn="ctr">
-                      <a:solidFill>
-                        <a:srgbClr val="E2E2E6"/>
-                      </a:solidFill>
-                      <a:prstDash val="solid"/>
-                      <a:round/>
-                      <a:headEnd type="none" w="med" len="med"/>
-                      <a:tailEnd type="none" w="med" len="med"/>
-                    </a:lnL>
-                    <a:lnR w="9525" cap="flat" cmpd="sng" algn="ctr">
-                      <a:solidFill>
-                        <a:srgbClr val="E2E2E6"/>
-                      </a:solidFill>
-                      <a:prstDash val="solid"/>
-                      <a:round/>
-                      <a:headEnd type="none" w="med" len="med"/>
-                      <a:tailEnd type="none" w="med" len="med"/>
-                    </a:lnR>
-                    <a:lnT w="9525" cap="flat" cmpd="sng" algn="ctr">
-                      <a:solidFill>
-                        <a:srgbClr val="E2E2E6"/>
-                      </a:solidFill>
-                      <a:prstDash val="solid"/>
-                      <a:round/>
-                      <a:headEnd type="none" w="med" len="med"/>
-                      <a:tailEnd type="none" w="med" len="med"/>
-                    </a:lnT>
-                    <a:lnB w="9525" cap="flat" cmpd="sng" algn="ctr">
-                      <a:solidFill>
-                        <a:srgbClr val="E2E2E6"/>
-                      </a:solidFill>
-                      <a:prstDash val="solid"/>
-                      <a:round/>
-                      <a:headEnd type="none" w="med" len="med"/>
-                      <a:tailEnd type="none" w="med" len="med"/>
-                    </a:lnB>
-                    <a:solidFill>
-                      <a:srgbClr val="FFFFFF"/>
-                    </a:solidFill>
-                  </a:tcPr>
-                </a:tc>
-              </a:tr>
             </a:tbl>
           </a:graphicData>
         </a:graphic>
@@ -30419,7 +30010,7 @@
                 <a:ea typeface="Arial" pitchFamily="34" charset="-122"/>
                 <a:cs typeface="Arial" pitchFamily="34" charset="-120"/>
               </a:rPr>
-              <a:t>Glosario (2/2)</a:t>
+              <a:t>Glosario (2/3)</a:t>
             </a:r>
             <a:endParaRPr lang="en-US" sz="2400" dirty="0"/>
           </a:p>
@@ -30607,6 +30198,420 @@
                           <a:ea typeface="Arial" pitchFamily="34" charset="-122"/>
                           <a:cs typeface="Arial" pitchFamily="34" charset="-120"/>
                         </a:rPr>
+                        <a:t>Iniciación (initiating a project)</a:t>
+                      </a:r>
+                      <a:endParaRPr lang="en-US" sz="1200" dirty="0">
+                        <a:latin typeface="Arial" charset="0"/>
+                        <a:ea typeface="Arial" charset="0"/>
+                        <a:cs typeface="Arial" charset="0"/>
+                      </a:endParaRPr>
+                    </a:p>
+                  </a:txBody>
+                  <a:tcPr marL="54864" marR="54864" marT="54864" marB="54864" anchor="t">
+                    <a:lnL w="9525" cap="flat" cmpd="sng" algn="ctr">
+                      <a:solidFill>
+                        <a:srgbClr val="E2E2E6"/>
+                      </a:solidFill>
+                      <a:prstDash val="solid"/>
+                      <a:round/>
+                      <a:headEnd type="none" w="med" len="med"/>
+                      <a:tailEnd type="none" w="med" len="med"/>
+                    </a:lnL>
+                    <a:lnR w="9525" cap="flat" cmpd="sng" algn="ctr">
+                      <a:solidFill>
+                        <a:srgbClr val="E2E2E6"/>
+                      </a:solidFill>
+                      <a:prstDash val="solid"/>
+                      <a:round/>
+                      <a:headEnd type="none" w="med" len="med"/>
+                      <a:tailEnd type="none" w="med" len="med"/>
+                    </a:lnR>
+                    <a:lnT w="9525" cap="flat" cmpd="sng" algn="ctr">
+                      <a:solidFill>
+                        <a:srgbClr val="E2E2E6"/>
+                      </a:solidFill>
+                      <a:prstDash val="solid"/>
+                      <a:round/>
+                      <a:headEnd type="none" w="med" len="med"/>
+                      <a:tailEnd type="none" w="med" len="med"/>
+                    </a:lnT>
+                    <a:lnB w="9525" cap="flat" cmpd="sng" algn="ctr">
+                      <a:solidFill>
+                        <a:srgbClr val="E2E2E6"/>
+                      </a:solidFill>
+                      <a:prstDash val="solid"/>
+                      <a:round/>
+                      <a:headEnd type="none" w="med" len="med"/>
+                      <a:tailEnd type="none" w="med" len="med"/>
+                    </a:lnB>
+                    <a:solidFill>
+                      <a:srgbClr val="F4F6F8"/>
+                    </a:solidFill>
+                  </a:tcPr>
+                </a:tc>
+                <a:tc>
+                  <a:txBody>
+                    <a:bodyPr/>
+                    <a:lstStyle/>
+                    <a:p>
+                      <a:pPr indent="0" marL="0">
+                        <a:buNone/>
+                      </a:pPr>
+                      <a:r>
+                        <a:rPr lang="en-US" sz="1200" dirty="0">
+                          <a:solidFill>
+                            <a:srgbClr val="272425"/>
+                          </a:solidFill>
+                          <a:latin typeface="Arial" pitchFamily="34" charset="0"/>
+                          <a:ea typeface="Arial" pitchFamily="34" charset="-122"/>
+                          <a:cs typeface="Arial" pitchFamily="34" charset="-120"/>
+                        </a:rPr>
+                        <a:t>Primera etapa: diseña el proyecto (caso, planes, enfoques, controles) hasta la puerta autorizar-proyecto.</a:t>
+                      </a:r>
+                      <a:endParaRPr lang="en-US" sz="1200" dirty="0">
+                        <a:latin typeface="Arial" charset="0"/>
+                        <a:ea typeface="Arial" charset="0"/>
+                        <a:cs typeface="Arial" charset="0"/>
+                      </a:endParaRPr>
+                    </a:p>
+                  </a:txBody>
+                  <a:tcPr marL="54864" marR="54864" marT="54864" marB="54864" anchor="t">
+                    <a:lnL w="9525" cap="flat" cmpd="sng" algn="ctr">
+                      <a:solidFill>
+                        <a:srgbClr val="E2E2E6"/>
+                      </a:solidFill>
+                      <a:prstDash val="solid"/>
+                      <a:round/>
+                      <a:headEnd type="none" w="med" len="med"/>
+                      <a:tailEnd type="none" w="med" len="med"/>
+                    </a:lnL>
+                    <a:lnR w="9525" cap="flat" cmpd="sng" algn="ctr">
+                      <a:solidFill>
+                        <a:srgbClr val="E2E2E6"/>
+                      </a:solidFill>
+                      <a:prstDash val="solid"/>
+                      <a:round/>
+                      <a:headEnd type="none" w="med" len="med"/>
+                      <a:tailEnd type="none" w="med" len="med"/>
+                    </a:lnR>
+                    <a:lnT w="9525" cap="flat" cmpd="sng" algn="ctr">
+                      <a:solidFill>
+                        <a:srgbClr val="E2E2E6"/>
+                      </a:solidFill>
+                      <a:prstDash val="solid"/>
+                      <a:round/>
+                      <a:headEnd type="none" w="med" len="med"/>
+                      <a:tailEnd type="none" w="med" len="med"/>
+                    </a:lnT>
+                    <a:lnB w="9525" cap="flat" cmpd="sng" algn="ctr">
+                      <a:solidFill>
+                        <a:srgbClr val="E2E2E6"/>
+                      </a:solidFill>
+                      <a:prstDash val="solid"/>
+                      <a:round/>
+                      <a:headEnd type="none" w="med" len="med"/>
+                      <a:tailEnd type="none" w="med" len="med"/>
+                    </a:lnB>
+                    <a:solidFill>
+                      <a:srgbClr val="F4F6F8"/>
+                    </a:solidFill>
+                  </a:tcPr>
+                </a:tc>
+              </a:tr>
+              <a:tr h="0">
+                <a:tc>
+                  <a:txBody>
+                    <a:bodyPr/>
+                    <a:lstStyle/>
+                    <a:p>
+                      <a:pPr indent="0" marL="0">
+                        <a:buNone/>
+                      </a:pPr>
+                      <a:r>
+                        <a:rPr lang="en-US" sz="1200" b="1" dirty="0">
+                          <a:solidFill>
+                            <a:srgbClr val="002855"/>
+                          </a:solidFill>
+                          <a:latin typeface="Arial" pitchFamily="34" charset="0"/>
+                          <a:ea typeface="Arial" pitchFamily="34" charset="-122"/>
+                          <a:cs typeface="Arial" pitchFamily="34" charset="-120"/>
+                        </a:rPr>
+                        <a:t>Lección previa</a:t>
+                      </a:r>
+                      <a:endParaRPr lang="en-US" sz="1200" dirty="0">
+                        <a:latin typeface="Arial" charset="0"/>
+                        <a:ea typeface="Arial" charset="0"/>
+                        <a:cs typeface="Arial" charset="0"/>
+                      </a:endParaRPr>
+                    </a:p>
+                  </a:txBody>
+                  <a:tcPr marL="54864" marR="54864" marT="54864" marB="54864" anchor="t">
+                    <a:lnL w="9525" cap="flat" cmpd="sng" algn="ctr">
+                      <a:solidFill>
+                        <a:srgbClr val="E2E2E6"/>
+                      </a:solidFill>
+                      <a:prstDash val="solid"/>
+                      <a:round/>
+                      <a:headEnd type="none" w="med" len="med"/>
+                      <a:tailEnd type="none" w="med" len="med"/>
+                    </a:lnL>
+                    <a:lnR w="9525" cap="flat" cmpd="sng" algn="ctr">
+                      <a:solidFill>
+                        <a:srgbClr val="E2E2E6"/>
+                      </a:solidFill>
+                      <a:prstDash val="solid"/>
+                      <a:round/>
+                      <a:headEnd type="none" w="med" len="med"/>
+                      <a:tailEnd type="none" w="med" len="med"/>
+                    </a:lnR>
+                    <a:lnT w="9525" cap="flat" cmpd="sng" algn="ctr">
+                      <a:solidFill>
+                        <a:srgbClr val="E2E2E6"/>
+                      </a:solidFill>
+                      <a:prstDash val="solid"/>
+                      <a:round/>
+                      <a:headEnd type="none" w="med" len="med"/>
+                      <a:tailEnd type="none" w="med" len="med"/>
+                    </a:lnT>
+                    <a:lnB w="9525" cap="flat" cmpd="sng" algn="ctr">
+                      <a:solidFill>
+                        <a:srgbClr val="E2E2E6"/>
+                      </a:solidFill>
+                      <a:prstDash val="solid"/>
+                      <a:round/>
+                      <a:headEnd type="none" w="med" len="med"/>
+                      <a:tailEnd type="none" w="med" len="med"/>
+                    </a:lnB>
+                    <a:solidFill>
+                      <a:srgbClr val="FFFFFF"/>
+                    </a:solidFill>
+                  </a:tcPr>
+                </a:tc>
+                <a:tc>
+                  <a:txBody>
+                    <a:bodyPr/>
+                    <a:lstStyle/>
+                    <a:p>
+                      <a:pPr indent="0" marL="0">
+                        <a:buNone/>
+                      </a:pPr>
+                      <a:r>
+                        <a:rPr lang="en-US" sz="1200" dirty="0">
+                          <a:solidFill>
+                            <a:srgbClr val="272425"/>
+                          </a:solidFill>
+                          <a:latin typeface="Arial" pitchFamily="34" charset="0"/>
+                          <a:ea typeface="Arial" pitchFamily="34" charset="-122"/>
+                          <a:cs typeface="Arial" pitchFamily="34" charset="-120"/>
+                        </a:rPr>
+                        <a:t>Lección aprobada de otro proyecto, buscada en solo lectura e incorporada con su origen; pide un control temprano y se marca accionada-proyecto.</a:t>
+                      </a:r>
+                      <a:endParaRPr lang="en-US" sz="1200" dirty="0">
+                        <a:latin typeface="Arial" charset="0"/>
+                        <a:ea typeface="Arial" charset="0"/>
+                        <a:cs typeface="Arial" charset="0"/>
+                      </a:endParaRPr>
+                    </a:p>
+                  </a:txBody>
+                  <a:tcPr marL="54864" marR="54864" marT="54864" marB="54864" anchor="t">
+                    <a:lnL w="9525" cap="flat" cmpd="sng" algn="ctr">
+                      <a:solidFill>
+                        <a:srgbClr val="E2E2E6"/>
+                      </a:solidFill>
+                      <a:prstDash val="solid"/>
+                      <a:round/>
+                      <a:headEnd type="none" w="med" len="med"/>
+                      <a:tailEnd type="none" w="med" len="med"/>
+                    </a:lnL>
+                    <a:lnR w="9525" cap="flat" cmpd="sng" algn="ctr">
+                      <a:solidFill>
+                        <a:srgbClr val="E2E2E6"/>
+                      </a:solidFill>
+                      <a:prstDash val="solid"/>
+                      <a:round/>
+                      <a:headEnd type="none" w="med" len="med"/>
+                      <a:tailEnd type="none" w="med" len="med"/>
+                    </a:lnR>
+                    <a:lnT w="9525" cap="flat" cmpd="sng" algn="ctr">
+                      <a:solidFill>
+                        <a:srgbClr val="E2E2E6"/>
+                      </a:solidFill>
+                      <a:prstDash val="solid"/>
+                      <a:round/>
+                      <a:headEnd type="none" w="med" len="med"/>
+                      <a:tailEnd type="none" w="med" len="med"/>
+                    </a:lnT>
+                    <a:lnB w="9525" cap="flat" cmpd="sng" algn="ctr">
+                      <a:solidFill>
+                        <a:srgbClr val="E2E2E6"/>
+                      </a:solidFill>
+                      <a:prstDash val="solid"/>
+                      <a:round/>
+                      <a:headEnd type="none" w="med" len="med"/>
+                      <a:tailEnd type="none" w="med" len="med"/>
+                    </a:lnB>
+                    <a:solidFill>
+                      <a:srgbClr val="FFFFFF"/>
+                    </a:solidFill>
+                  </a:tcPr>
+                </a:tc>
+              </a:tr>
+              <a:tr h="0">
+                <a:tc>
+                  <a:txBody>
+                    <a:bodyPr/>
+                    <a:lstStyle/>
+                    <a:p>
+                      <a:pPr indent="0" marL="0">
+                        <a:buNone/>
+                      </a:pPr>
+                      <a:r>
+                        <a:rPr lang="en-US" sz="1200" b="1" dirty="0">
+                          <a:solidFill>
+                            <a:srgbClr val="002855"/>
+                          </a:solidFill>
+                          <a:latin typeface="Arial" pitchFamily="34" charset="0"/>
+                          <a:ea typeface="Arial" pitchFamily="34" charset="-122"/>
+                          <a:cs typeface="Arial" pitchFamily="34" charset="-120"/>
+                        </a:rPr>
+                        <a:t>Mandato (project mandate)</a:t>
+                      </a:r>
+                      <a:endParaRPr lang="en-US" sz="1200" dirty="0">
+                        <a:latin typeface="Arial" charset="0"/>
+                        <a:ea typeface="Arial" charset="0"/>
+                        <a:cs typeface="Arial" charset="0"/>
+                      </a:endParaRPr>
+                    </a:p>
+                  </a:txBody>
+                  <a:tcPr marL="54864" marR="54864" marT="54864" marB="54864" anchor="t">
+                    <a:lnL w="9525" cap="flat" cmpd="sng" algn="ctr">
+                      <a:solidFill>
+                        <a:srgbClr val="E2E2E6"/>
+                      </a:solidFill>
+                      <a:prstDash val="solid"/>
+                      <a:round/>
+                      <a:headEnd type="none" w="med" len="med"/>
+                      <a:tailEnd type="none" w="med" len="med"/>
+                    </a:lnL>
+                    <a:lnR w="9525" cap="flat" cmpd="sng" algn="ctr">
+                      <a:solidFill>
+                        <a:srgbClr val="E2E2E6"/>
+                      </a:solidFill>
+                      <a:prstDash val="solid"/>
+                      <a:round/>
+                      <a:headEnd type="none" w="med" len="med"/>
+                      <a:tailEnd type="none" w="med" len="med"/>
+                    </a:lnR>
+                    <a:lnT w="9525" cap="flat" cmpd="sng" algn="ctr">
+                      <a:solidFill>
+                        <a:srgbClr val="E2E2E6"/>
+                      </a:solidFill>
+                      <a:prstDash val="solid"/>
+                      <a:round/>
+                      <a:headEnd type="none" w="med" len="med"/>
+                      <a:tailEnd type="none" w="med" len="med"/>
+                    </a:lnT>
+                    <a:lnB w="9525" cap="flat" cmpd="sng" algn="ctr">
+                      <a:solidFill>
+                        <a:srgbClr val="E2E2E6"/>
+                      </a:solidFill>
+                      <a:prstDash val="solid"/>
+                      <a:round/>
+                      <a:headEnd type="none" w="med" len="med"/>
+                      <a:tailEnd type="none" w="med" len="med"/>
+                    </a:lnB>
+                    <a:solidFill>
+                      <a:srgbClr val="F4F6F8"/>
+                    </a:solidFill>
+                  </a:tcPr>
+                </a:tc>
+                <a:tc>
+                  <a:txBody>
+                    <a:bodyPr/>
+                    <a:lstStyle/>
+                    <a:p>
+                      <a:pPr indent="0" marL="0">
+                        <a:buNone/>
+                      </a:pPr>
+                      <a:r>
+                        <a:rPr lang="en-US" sz="1200" dirty="0">
+                          <a:solidFill>
+                            <a:srgbClr val="272425"/>
+                          </a:solidFill>
+                          <a:latin typeface="Arial" pitchFamily="34" charset="0"/>
+                          <a:ea typeface="Arial" pitchFamily="34" charset="-122"/>
+                          <a:cs typeface="Arial" pitchFamily="34" charset="-120"/>
+                        </a:rPr>
+                        <a:t>Pedido que da origen al proyecto, conservado como llegó, con su autoridad emisora.</a:t>
+                      </a:r>
+                      <a:endParaRPr lang="en-US" sz="1200" dirty="0">
+                        <a:latin typeface="Arial" charset="0"/>
+                        <a:ea typeface="Arial" charset="0"/>
+                        <a:cs typeface="Arial" charset="0"/>
+                      </a:endParaRPr>
+                    </a:p>
+                  </a:txBody>
+                  <a:tcPr marL="54864" marR="54864" marT="54864" marB="54864" anchor="t">
+                    <a:lnL w="9525" cap="flat" cmpd="sng" algn="ctr">
+                      <a:solidFill>
+                        <a:srgbClr val="E2E2E6"/>
+                      </a:solidFill>
+                      <a:prstDash val="solid"/>
+                      <a:round/>
+                      <a:headEnd type="none" w="med" len="med"/>
+                      <a:tailEnd type="none" w="med" len="med"/>
+                    </a:lnL>
+                    <a:lnR w="9525" cap="flat" cmpd="sng" algn="ctr">
+                      <a:solidFill>
+                        <a:srgbClr val="E2E2E6"/>
+                      </a:solidFill>
+                      <a:prstDash val="solid"/>
+                      <a:round/>
+                      <a:headEnd type="none" w="med" len="med"/>
+                      <a:tailEnd type="none" w="med" len="med"/>
+                    </a:lnR>
+                    <a:lnT w="9525" cap="flat" cmpd="sng" algn="ctr">
+                      <a:solidFill>
+                        <a:srgbClr val="E2E2E6"/>
+                      </a:solidFill>
+                      <a:prstDash val="solid"/>
+                      <a:round/>
+                      <a:headEnd type="none" w="med" len="med"/>
+                      <a:tailEnd type="none" w="med" len="med"/>
+                    </a:lnT>
+                    <a:lnB w="9525" cap="flat" cmpd="sng" algn="ctr">
+                      <a:solidFill>
+                        <a:srgbClr val="E2E2E6"/>
+                      </a:solidFill>
+                      <a:prstDash val="solid"/>
+                      <a:round/>
+                      <a:headEnd type="none" w="med" len="med"/>
+                      <a:tailEnd type="none" w="med" len="med"/>
+                    </a:lnB>
+                    <a:solidFill>
+                      <a:srgbClr val="F4F6F8"/>
+                    </a:solidFill>
+                  </a:tcPr>
+                </a:tc>
+              </a:tr>
+              <a:tr h="0">
+                <a:tc>
+                  <a:txBody>
+                    <a:bodyPr/>
+                    <a:lstStyle/>
+                    <a:p>
+                      <a:pPr indent="0" marL="0">
+                        <a:buNone/>
+                      </a:pPr>
+                      <a:r>
+                        <a:rPr lang="en-US" sz="1200" b="1" dirty="0">
+                          <a:solidFill>
+                            <a:srgbClr val="002855"/>
+                          </a:solidFill>
+                          <a:latin typeface="Arial" pitchFamily="34" charset="0"/>
+                          <a:ea typeface="Arial" pitchFamily="34" charset="-122"/>
+                          <a:cs typeface="Arial" pitchFamily="34" charset="-120"/>
+                        </a:rPr>
                         <a:t>Mapa de Wardley y recorrido del cliente</a:t>
                       </a:r>
                       <a:endParaRPr lang="en-US" sz="1200" dirty="0">
@@ -30654,7 +30659,7 @@
                       <a:tailEnd type="none" w="med" len="med"/>
                     </a:lnB>
                     <a:solidFill>
-                      <a:srgbClr val="F4F6F8"/>
+                      <a:srgbClr val="FFFFFF"/>
                     </a:solidFill>
                   </a:tcPr>
                 </a:tc>
@@ -30722,559 +30727,7 @@
                       <a:tailEnd type="none" w="med" len="med"/>
                     </a:lnB>
                     <a:solidFill>
-                      <a:srgbClr val="F4F6F8"/>
-                    </a:solidFill>
-                  </a:tcPr>
-                </a:tc>
-              </a:tr>
-              <a:tr h="0">
-                <a:tc>
-                  <a:txBody>
-                    <a:bodyPr/>
-                    <a:lstStyle/>
-                    <a:p>
-                      <a:pPr indent="0" marL="0">
-                        <a:buNone/>
-                      </a:pPr>
-                      <a:r>
-                        <a:rPr lang="en-US" sz="1200" b="1" dirty="0">
-                          <a:solidFill>
-                            <a:srgbClr val="002855"/>
-                          </a:solidFill>
-                          <a:latin typeface="Arial" pitchFamily="34" charset="0"/>
-                          <a:ea typeface="Arial" pitchFamily="34" charset="-122"/>
-                          <a:cs typeface="Arial" pitchFamily="34" charset="-120"/>
-                        </a:rPr>
-                        <a:t>Opción 0 y punto de equilibrio</a:t>
-                      </a:r>
-                      <a:endParaRPr lang="en-US" sz="1200" dirty="0">
-                        <a:latin typeface="Arial" charset="0"/>
-                        <a:ea typeface="Arial" charset="0"/>
-                        <a:cs typeface="Arial" charset="0"/>
-                      </a:endParaRPr>
-                    </a:p>
-                  </a:txBody>
-                  <a:tcPr marL="54864" marR="54864" marT="54864" marB="54864" anchor="t">
-                    <a:lnL w="9525" cap="flat" cmpd="sng" algn="ctr">
-                      <a:solidFill>
-                        <a:srgbClr val="E2E2E6"/>
-                      </a:solidFill>
-                      <a:prstDash val="solid"/>
-                      <a:round/>
-                      <a:headEnd type="none" w="med" len="med"/>
-                      <a:tailEnd type="none" w="med" len="med"/>
-                    </a:lnL>
-                    <a:lnR w="9525" cap="flat" cmpd="sng" algn="ctr">
-                      <a:solidFill>
-                        <a:srgbClr val="E2E2E6"/>
-                      </a:solidFill>
-                      <a:prstDash val="solid"/>
-                      <a:round/>
-                      <a:headEnd type="none" w="med" len="med"/>
-                      <a:tailEnd type="none" w="med" len="med"/>
-                    </a:lnR>
-                    <a:lnT w="9525" cap="flat" cmpd="sng" algn="ctr">
-                      <a:solidFill>
-                        <a:srgbClr val="E2E2E6"/>
-                      </a:solidFill>
-                      <a:prstDash val="solid"/>
-                      <a:round/>
-                      <a:headEnd type="none" w="med" len="med"/>
-                      <a:tailEnd type="none" w="med" len="med"/>
-                    </a:lnT>
-                    <a:lnB w="9525" cap="flat" cmpd="sng" algn="ctr">
-                      <a:solidFill>
-                        <a:srgbClr val="E2E2E6"/>
-                      </a:solidFill>
-                      <a:prstDash val="solid"/>
-                      <a:round/>
-                      <a:headEnd type="none" w="med" len="med"/>
-                      <a:tailEnd type="none" w="med" len="med"/>
-                    </a:lnB>
-                    <a:solidFill>
                       <a:srgbClr val="FFFFFF"/>
-                    </a:solidFill>
-                  </a:tcPr>
-                </a:tc>
-                <a:tc>
-                  <a:txBody>
-                    <a:bodyPr/>
-                    <a:lstStyle/>
-                    <a:p>
-                      <a:pPr indent="0" marL="0">
-                        <a:buNone/>
-                      </a:pPr>
-                      <a:r>
-                        <a:rPr lang="en-US" sz="1200" dirty="0">
-                          <a:solidFill>
-                            <a:srgbClr val="272425"/>
-                          </a:solidFill>
-                          <a:latin typeface="Arial" pitchFamily="34" charset="0"/>
-                          <a:ea typeface="Arial" pitchFamily="34" charset="-122"/>
-                          <a:cs typeface="Arial" pitchFamily="34" charset="-120"/>
-                        </a:rPr>
-                        <a:t>Opción 0: no hacer nada distinto, la base de comparación. Punto de equilibrio: cuánto puede caer un beneficio antes de que el VAN llegue a 0.</a:t>
-                      </a:r>
-                      <a:endParaRPr lang="en-US" sz="1200" dirty="0">
-                        <a:latin typeface="Arial" charset="0"/>
-                        <a:ea typeface="Arial" charset="0"/>
-                        <a:cs typeface="Arial" charset="0"/>
-                      </a:endParaRPr>
-                    </a:p>
-                  </a:txBody>
-                  <a:tcPr marL="54864" marR="54864" marT="54864" marB="54864" anchor="t">
-                    <a:lnL w="9525" cap="flat" cmpd="sng" algn="ctr">
-                      <a:solidFill>
-                        <a:srgbClr val="E2E2E6"/>
-                      </a:solidFill>
-                      <a:prstDash val="solid"/>
-                      <a:round/>
-                      <a:headEnd type="none" w="med" len="med"/>
-                      <a:tailEnd type="none" w="med" len="med"/>
-                    </a:lnL>
-                    <a:lnR w="9525" cap="flat" cmpd="sng" algn="ctr">
-                      <a:solidFill>
-                        <a:srgbClr val="E2E2E6"/>
-                      </a:solidFill>
-                      <a:prstDash val="solid"/>
-                      <a:round/>
-                      <a:headEnd type="none" w="med" len="med"/>
-                      <a:tailEnd type="none" w="med" len="med"/>
-                    </a:lnR>
-                    <a:lnT w="9525" cap="flat" cmpd="sng" algn="ctr">
-                      <a:solidFill>
-                        <a:srgbClr val="E2E2E6"/>
-                      </a:solidFill>
-                      <a:prstDash val="solid"/>
-                      <a:round/>
-                      <a:headEnd type="none" w="med" len="med"/>
-                      <a:tailEnd type="none" w="med" len="med"/>
-                    </a:lnT>
-                    <a:lnB w="9525" cap="flat" cmpd="sng" algn="ctr">
-                      <a:solidFill>
-                        <a:srgbClr val="E2E2E6"/>
-                      </a:solidFill>
-                      <a:prstDash val="solid"/>
-                      <a:round/>
-                      <a:headEnd type="none" w="med" len="med"/>
-                      <a:tailEnd type="none" w="med" len="med"/>
-                    </a:lnB>
-                    <a:solidFill>
-                      <a:srgbClr val="FFFFFF"/>
-                    </a:solidFill>
-                  </a:tcPr>
-                </a:tc>
-              </a:tr>
-              <a:tr h="0">
-                <a:tc>
-                  <a:txBody>
-                    <a:bodyPr/>
-                    <a:lstStyle/>
-                    <a:p>
-                      <a:pPr indent="0" marL="0">
-                        <a:buNone/>
-                      </a:pPr>
-                      <a:r>
-                        <a:rPr lang="en-US" sz="1200" b="1" dirty="0">
-                          <a:solidFill>
-                            <a:srgbClr val="002855"/>
-                          </a:solidFill>
-                          <a:latin typeface="Arial" pitchFamily="34" charset="0"/>
-                          <a:ea typeface="Arial" pitchFamily="34" charset="-122"/>
-                          <a:cs typeface="Arial" pitchFamily="34" charset="-120"/>
-                        </a:rPr>
-                        <a:t>Orden de magnitud</a:t>
-                      </a:r>
-                      <a:endParaRPr lang="en-US" sz="1200" dirty="0">
-                        <a:latin typeface="Arial" charset="0"/>
-                        <a:ea typeface="Arial" charset="0"/>
-                        <a:cs typeface="Arial" charset="0"/>
-                      </a:endParaRPr>
-                    </a:p>
-                  </a:txBody>
-                  <a:tcPr marL="54864" marR="54864" marT="54864" marB="54864" anchor="t">
-                    <a:lnL w="9525" cap="flat" cmpd="sng" algn="ctr">
-                      <a:solidFill>
-                        <a:srgbClr val="E2E2E6"/>
-                      </a:solidFill>
-                      <a:prstDash val="solid"/>
-                      <a:round/>
-                      <a:headEnd type="none" w="med" len="med"/>
-                      <a:tailEnd type="none" w="med" len="med"/>
-                    </a:lnL>
-                    <a:lnR w="9525" cap="flat" cmpd="sng" algn="ctr">
-                      <a:solidFill>
-                        <a:srgbClr val="E2E2E6"/>
-                      </a:solidFill>
-                      <a:prstDash val="solid"/>
-                      <a:round/>
-                      <a:headEnd type="none" w="med" len="med"/>
-                      <a:tailEnd type="none" w="med" len="med"/>
-                    </a:lnR>
-                    <a:lnT w="9525" cap="flat" cmpd="sng" algn="ctr">
-                      <a:solidFill>
-                        <a:srgbClr val="E2E2E6"/>
-                      </a:solidFill>
-                      <a:prstDash val="solid"/>
-                      <a:round/>
-                      <a:headEnd type="none" w="med" len="med"/>
-                      <a:tailEnd type="none" w="med" len="med"/>
-                    </a:lnT>
-                    <a:lnB w="9525" cap="flat" cmpd="sng" algn="ctr">
-                      <a:solidFill>
-                        <a:srgbClr val="E2E2E6"/>
-                      </a:solidFill>
-                      <a:prstDash val="solid"/>
-                      <a:round/>
-                      <a:headEnd type="none" w="med" len="med"/>
-                      <a:tailEnd type="none" w="med" len="med"/>
-                    </a:lnB>
-                    <a:solidFill>
-                      <a:srgbClr val="F4F6F8"/>
-                    </a:solidFill>
-                  </a:tcPr>
-                </a:tc>
-                <a:tc>
-                  <a:txBody>
-                    <a:bodyPr/>
-                    <a:lstStyle/>
-                    <a:p>
-                      <a:pPr indent="0" marL="0">
-                        <a:buNone/>
-                      </a:pPr>
-                      <a:r>
-                        <a:rPr lang="en-US" sz="1200" dirty="0">
-                          <a:solidFill>
-                            <a:srgbClr val="272425"/>
-                          </a:solidFill>
-                          <a:latin typeface="Arial" pitchFamily="34" charset="0"/>
-                          <a:ea typeface="Arial" pitchFamily="34" charset="-122"/>
-                          <a:cs typeface="Arial" pitchFamily="34" charset="-120"/>
-                        </a:rPr>
-                        <a:t>Estimación inicial con exactitud de −25 % a +75 %; se refina en la iniciación.</a:t>
-                      </a:r>
-                      <a:endParaRPr lang="en-US" sz="1200" dirty="0">
-                        <a:latin typeface="Arial" charset="0"/>
-                        <a:ea typeface="Arial" charset="0"/>
-                        <a:cs typeface="Arial" charset="0"/>
-                      </a:endParaRPr>
-                    </a:p>
-                  </a:txBody>
-                  <a:tcPr marL="54864" marR="54864" marT="54864" marB="54864" anchor="t">
-                    <a:lnL w="9525" cap="flat" cmpd="sng" algn="ctr">
-                      <a:solidFill>
-                        <a:srgbClr val="E2E2E6"/>
-                      </a:solidFill>
-                      <a:prstDash val="solid"/>
-                      <a:round/>
-                      <a:headEnd type="none" w="med" len="med"/>
-                      <a:tailEnd type="none" w="med" len="med"/>
-                    </a:lnL>
-                    <a:lnR w="9525" cap="flat" cmpd="sng" algn="ctr">
-                      <a:solidFill>
-                        <a:srgbClr val="E2E2E6"/>
-                      </a:solidFill>
-                      <a:prstDash val="solid"/>
-                      <a:round/>
-                      <a:headEnd type="none" w="med" len="med"/>
-                      <a:tailEnd type="none" w="med" len="med"/>
-                    </a:lnR>
-                    <a:lnT w="9525" cap="flat" cmpd="sng" algn="ctr">
-                      <a:solidFill>
-                        <a:srgbClr val="E2E2E6"/>
-                      </a:solidFill>
-                      <a:prstDash val="solid"/>
-                      <a:round/>
-                      <a:headEnd type="none" w="med" len="med"/>
-                      <a:tailEnd type="none" w="med" len="med"/>
-                    </a:lnT>
-                    <a:lnB w="9525" cap="flat" cmpd="sng" algn="ctr">
-                      <a:solidFill>
-                        <a:srgbClr val="E2E2E6"/>
-                      </a:solidFill>
-                      <a:prstDash val="solid"/>
-                      <a:round/>
-                      <a:headEnd type="none" w="med" len="med"/>
-                      <a:tailEnd type="none" w="med" len="med"/>
-                    </a:lnB>
-                    <a:solidFill>
-                      <a:srgbClr val="F4F6F8"/>
-                    </a:solidFill>
-                  </a:tcPr>
-                </a:tc>
-              </a:tr>
-              <a:tr h="0">
-                <a:tc>
-                  <a:txBody>
-                    <a:bodyPr/>
-                    <a:lstStyle/>
-                    <a:p>
-                      <a:pPr indent="0" marL="0">
-                        <a:buNone/>
-                      </a:pPr>
-                      <a:r>
-                        <a:rPr lang="en-US" sz="1200" b="1" dirty="0">
-                          <a:solidFill>
-                            <a:srgbClr val="002855"/>
-                          </a:solidFill>
-                          <a:latin typeface="Arial" pitchFamily="34" charset="0"/>
-                          <a:ea typeface="Arial" pitchFamily="34" charset="-122"/>
-                          <a:cs typeface="Arial" pitchFamily="34" charset="-120"/>
-                        </a:rPr>
-                        <a:t>P-04 y P-11</a:t>
-                      </a:r>
-                      <a:endParaRPr lang="en-US" sz="1200" dirty="0">
-                        <a:latin typeface="Arial" charset="0"/>
-                        <a:ea typeface="Arial" charset="0"/>
-                        <a:cs typeface="Arial" charset="0"/>
-                      </a:endParaRPr>
-                    </a:p>
-                  </a:txBody>
-                  <a:tcPr marL="54864" marR="54864" marT="54864" marB="54864" anchor="t">
-                    <a:lnL w="9525" cap="flat" cmpd="sng" algn="ctr">
-                      <a:solidFill>
-                        <a:srgbClr val="E2E2E6"/>
-                      </a:solidFill>
-                      <a:prstDash val="solid"/>
-                      <a:round/>
-                      <a:headEnd type="none" w="med" len="med"/>
-                      <a:tailEnd type="none" w="med" len="med"/>
-                    </a:lnL>
-                    <a:lnR w="9525" cap="flat" cmpd="sng" algn="ctr">
-                      <a:solidFill>
-                        <a:srgbClr val="E2E2E6"/>
-                      </a:solidFill>
-                      <a:prstDash val="solid"/>
-                      <a:round/>
-                      <a:headEnd type="none" w="med" len="med"/>
-                      <a:tailEnd type="none" w="med" len="med"/>
-                    </a:lnR>
-                    <a:lnT w="9525" cap="flat" cmpd="sng" algn="ctr">
-                      <a:solidFill>
-                        <a:srgbClr val="E2E2E6"/>
-                      </a:solidFill>
-                      <a:prstDash val="solid"/>
-                      <a:round/>
-                      <a:headEnd type="none" w="med" len="med"/>
-                      <a:tailEnd type="none" w="med" len="med"/>
-                    </a:lnT>
-                    <a:lnB w="9525" cap="flat" cmpd="sng" algn="ctr">
-                      <a:solidFill>
-                        <a:srgbClr val="E2E2E6"/>
-                      </a:solidFill>
-                      <a:prstDash val="solid"/>
-                      <a:round/>
-                      <a:headEnd type="none" w="med" len="med"/>
-                      <a:tailEnd type="none" w="med" len="med"/>
-                    </a:lnB>
-                    <a:solidFill>
-                      <a:srgbClr val="FFFFFF"/>
-                    </a:solidFill>
-                  </a:tcPr>
-                </a:tc>
-                <a:tc>
-                  <a:txBody>
-                    <a:bodyPr/>
-                    <a:lstStyle/>
-                    <a:p>
-                      <a:pPr indent="0" marL="0">
-                        <a:buNone/>
-                      </a:pPr>
-                      <a:r>
-                        <a:rPr lang="en-US" sz="1200" dirty="0">
-                          <a:solidFill>
-                            <a:srgbClr val="272425"/>
-                          </a:solidFill>
-                          <a:latin typeface="Arial" pitchFamily="34" charset="0"/>
-                          <a:ea typeface="Arial" pitchFamily="34" charset="-122"/>
-                          <a:cs typeface="Arial" pitchFamily="34" charset="-120"/>
-                        </a:rPr>
-                        <a:t>Controles de autorizar-proyecto: criterios de éxito sin enfoque de beneficios; supuestos críticos sin validar (aviso si la junta los acepta por escrito).</a:t>
-                      </a:r>
-                      <a:endParaRPr lang="en-US" sz="1200" dirty="0">
-                        <a:latin typeface="Arial" charset="0"/>
-                        <a:ea typeface="Arial" charset="0"/>
-                        <a:cs typeface="Arial" charset="0"/>
-                      </a:endParaRPr>
-                    </a:p>
-                  </a:txBody>
-                  <a:tcPr marL="54864" marR="54864" marT="54864" marB="54864" anchor="t">
-                    <a:lnL w="9525" cap="flat" cmpd="sng" algn="ctr">
-                      <a:solidFill>
-                        <a:srgbClr val="E2E2E6"/>
-                      </a:solidFill>
-                      <a:prstDash val="solid"/>
-                      <a:round/>
-                      <a:headEnd type="none" w="med" len="med"/>
-                      <a:tailEnd type="none" w="med" len="med"/>
-                    </a:lnL>
-                    <a:lnR w="9525" cap="flat" cmpd="sng" algn="ctr">
-                      <a:solidFill>
-                        <a:srgbClr val="E2E2E6"/>
-                      </a:solidFill>
-                      <a:prstDash val="solid"/>
-                      <a:round/>
-                      <a:headEnd type="none" w="med" len="med"/>
-                      <a:tailEnd type="none" w="med" len="med"/>
-                    </a:lnR>
-                    <a:lnT w="9525" cap="flat" cmpd="sng" algn="ctr">
-                      <a:solidFill>
-                        <a:srgbClr val="E2E2E6"/>
-                      </a:solidFill>
-                      <a:prstDash val="solid"/>
-                      <a:round/>
-                      <a:headEnd type="none" w="med" len="med"/>
-                      <a:tailEnd type="none" w="med" len="med"/>
-                    </a:lnT>
-                    <a:lnB w="9525" cap="flat" cmpd="sng" algn="ctr">
-                      <a:solidFill>
-                        <a:srgbClr val="E2E2E6"/>
-                      </a:solidFill>
-                      <a:prstDash val="solid"/>
-                      <a:round/>
-                      <a:headEnd type="none" w="med" len="med"/>
-                      <a:tailEnd type="none" w="med" len="med"/>
-                    </a:lnB>
-                    <a:solidFill>
-                      <a:srgbClr val="FFFFFF"/>
-                    </a:solidFill>
-                  </a:tcPr>
-                </a:tc>
-              </a:tr>
-              <a:tr h="0">
-                <a:tc>
-                  <a:txBody>
-                    <a:bodyPr/>
-                    <a:lstStyle/>
-                    <a:p>
-                      <a:pPr indent="0" marL="0">
-                        <a:buNone/>
-                      </a:pPr>
-                      <a:r>
-                        <a:rPr lang="en-US" sz="1200" b="1" dirty="0">
-                          <a:solidFill>
-                            <a:srgbClr val="002855"/>
-                          </a:solidFill>
-                          <a:latin typeface="Arial" pitchFamily="34" charset="0"/>
-                          <a:ea typeface="Arial" pitchFamily="34" charset="-122"/>
-                          <a:cs typeface="Arial" pitchFamily="34" charset="-120"/>
-                        </a:rPr>
-                        <a:t>PID</a:t>
-                      </a:r>
-                      <a:endParaRPr lang="en-US" sz="1200" dirty="0">
-                        <a:latin typeface="Arial" charset="0"/>
-                        <a:ea typeface="Arial" charset="0"/>
-                        <a:cs typeface="Arial" charset="0"/>
-                      </a:endParaRPr>
-                    </a:p>
-                  </a:txBody>
-                  <a:tcPr marL="54864" marR="54864" marT="54864" marB="54864" anchor="t">
-                    <a:lnL w="9525" cap="flat" cmpd="sng" algn="ctr">
-                      <a:solidFill>
-                        <a:srgbClr val="E2E2E6"/>
-                      </a:solidFill>
-                      <a:prstDash val="solid"/>
-                      <a:round/>
-                      <a:headEnd type="none" w="med" len="med"/>
-                      <a:tailEnd type="none" w="med" len="med"/>
-                    </a:lnL>
-                    <a:lnR w="9525" cap="flat" cmpd="sng" algn="ctr">
-                      <a:solidFill>
-                        <a:srgbClr val="E2E2E6"/>
-                      </a:solidFill>
-                      <a:prstDash val="solid"/>
-                      <a:round/>
-                      <a:headEnd type="none" w="med" len="med"/>
-                      <a:tailEnd type="none" w="med" len="med"/>
-                    </a:lnR>
-                    <a:lnT w="9525" cap="flat" cmpd="sng" algn="ctr">
-                      <a:solidFill>
-                        <a:srgbClr val="E2E2E6"/>
-                      </a:solidFill>
-                      <a:prstDash val="solid"/>
-                      <a:round/>
-                      <a:headEnd type="none" w="med" len="med"/>
-                      <a:tailEnd type="none" w="med" len="med"/>
-                    </a:lnT>
-                    <a:lnB w="9525" cap="flat" cmpd="sng" algn="ctr">
-                      <a:solidFill>
-                        <a:srgbClr val="E2E2E6"/>
-                      </a:solidFill>
-                      <a:prstDash val="solid"/>
-                      <a:round/>
-                      <a:headEnd type="none" w="med" len="med"/>
-                      <a:tailEnd type="none" w="med" len="med"/>
-                    </a:lnB>
-                    <a:solidFill>
-                      <a:srgbClr val="F4F6F8"/>
-                    </a:solidFill>
-                  </a:tcPr>
-                </a:tc>
-                <a:tc>
-                  <a:txBody>
-                    <a:bodyPr/>
-                    <a:lstStyle/>
-                    <a:p>
-                      <a:pPr indent="0" marL="0">
-                        <a:buNone/>
-                      </a:pPr>
-                      <a:r>
-                        <a:rPr lang="en-US" sz="1200" dirty="0">
-                          <a:solidFill>
-                            <a:srgbClr val="272425"/>
-                          </a:solidFill>
-                          <a:latin typeface="Arial" pitchFamily="34" charset="0"/>
-                          <a:ea typeface="Arial" pitchFamily="34" charset="-122"/>
-                          <a:cs typeface="Arial" pitchFamily="34" charset="-120"/>
-                        </a:rPr>
-                        <a:t>Documentación de inicio del proyecto: el contrato entre el gestor y la junta.</a:t>
-                      </a:r>
-                      <a:endParaRPr lang="en-US" sz="1200" dirty="0">
-                        <a:latin typeface="Arial" charset="0"/>
-                        <a:ea typeface="Arial" charset="0"/>
-                        <a:cs typeface="Arial" charset="0"/>
-                      </a:endParaRPr>
-                    </a:p>
-                  </a:txBody>
-                  <a:tcPr marL="54864" marR="54864" marT="54864" marB="54864" anchor="t">
-                    <a:lnL w="9525" cap="flat" cmpd="sng" algn="ctr">
-                      <a:solidFill>
-                        <a:srgbClr val="E2E2E6"/>
-                      </a:solidFill>
-                      <a:prstDash val="solid"/>
-                      <a:round/>
-                      <a:headEnd type="none" w="med" len="med"/>
-                      <a:tailEnd type="none" w="med" len="med"/>
-                    </a:lnL>
-                    <a:lnR w="9525" cap="flat" cmpd="sng" algn="ctr">
-                      <a:solidFill>
-                        <a:srgbClr val="E2E2E6"/>
-                      </a:solidFill>
-                      <a:prstDash val="solid"/>
-                      <a:round/>
-                      <a:headEnd type="none" w="med" len="med"/>
-                      <a:tailEnd type="none" w="med" len="med"/>
-                    </a:lnR>
-                    <a:lnT w="9525" cap="flat" cmpd="sng" algn="ctr">
-                      <a:solidFill>
-                        <a:srgbClr val="E2E2E6"/>
-                      </a:solidFill>
-                      <a:prstDash val="solid"/>
-                      <a:round/>
-                      <a:headEnd type="none" w="med" len="med"/>
-                      <a:tailEnd type="none" w="med" len="med"/>
-                    </a:lnT>
-                    <a:lnB w="9525" cap="flat" cmpd="sng" algn="ctr">
-                      <a:solidFill>
-                        <a:srgbClr val="E2E2E6"/>
-                      </a:solidFill>
-                      <a:prstDash val="solid"/>
-                      <a:round/>
-                      <a:headEnd type="none" w="med" len="med"/>
-                      <a:tailEnd type="none" w="med" len="med"/>
-                    </a:lnB>
-                    <a:solidFill>
-                      <a:srgbClr val="F4F6F8"/>
                     </a:solidFill>
                   </a:tcPr>
                 </a:tc>
@@ -31465,6 +30918,975 @@
                           <a:ea typeface="Arial" pitchFamily="34" charset="-122"/>
                           <a:cs typeface="Arial" pitchFamily="34" charset="-120"/>
                         </a:rPr>
+                        <a:t>Opción 0 y punto de equilibrio</a:t>
+                      </a:r>
+                      <a:endParaRPr lang="en-US" sz="1200" dirty="0">
+                        <a:latin typeface="Arial" charset="0"/>
+                        <a:ea typeface="Arial" charset="0"/>
+                        <a:cs typeface="Arial" charset="0"/>
+                      </a:endParaRPr>
+                    </a:p>
+                  </a:txBody>
+                  <a:tcPr marL="54864" marR="54864" marT="54864" marB="54864" anchor="t">
+                    <a:lnL w="9525" cap="flat" cmpd="sng" algn="ctr">
+                      <a:solidFill>
+                        <a:srgbClr val="E2E2E6"/>
+                      </a:solidFill>
+                      <a:prstDash val="solid"/>
+                      <a:round/>
+                      <a:headEnd type="none" w="med" len="med"/>
+                      <a:tailEnd type="none" w="med" len="med"/>
+                    </a:lnL>
+                    <a:lnR w="9525" cap="flat" cmpd="sng" algn="ctr">
+                      <a:solidFill>
+                        <a:srgbClr val="E2E2E6"/>
+                      </a:solidFill>
+                      <a:prstDash val="solid"/>
+                      <a:round/>
+                      <a:headEnd type="none" w="med" len="med"/>
+                      <a:tailEnd type="none" w="med" len="med"/>
+                    </a:lnR>
+                    <a:lnT w="9525" cap="flat" cmpd="sng" algn="ctr">
+                      <a:solidFill>
+                        <a:srgbClr val="E2E2E6"/>
+                      </a:solidFill>
+                      <a:prstDash val="solid"/>
+                      <a:round/>
+                      <a:headEnd type="none" w="med" len="med"/>
+                      <a:tailEnd type="none" w="med" len="med"/>
+                    </a:lnT>
+                    <a:lnB w="9525" cap="flat" cmpd="sng" algn="ctr">
+                      <a:solidFill>
+                        <a:srgbClr val="E2E2E6"/>
+                      </a:solidFill>
+                      <a:prstDash val="solid"/>
+                      <a:round/>
+                      <a:headEnd type="none" w="med" len="med"/>
+                      <a:tailEnd type="none" w="med" len="med"/>
+                    </a:lnB>
+                    <a:solidFill>
+                      <a:srgbClr val="F4F6F8"/>
+                    </a:solidFill>
+                  </a:tcPr>
+                </a:tc>
+                <a:tc>
+                  <a:txBody>
+                    <a:bodyPr/>
+                    <a:lstStyle/>
+                    <a:p>
+                      <a:pPr indent="0" marL="0">
+                        <a:buNone/>
+                      </a:pPr>
+                      <a:r>
+                        <a:rPr lang="en-US" sz="1200" dirty="0">
+                          <a:solidFill>
+                            <a:srgbClr val="272425"/>
+                          </a:solidFill>
+                          <a:latin typeface="Arial" pitchFamily="34" charset="0"/>
+                          <a:ea typeface="Arial" pitchFamily="34" charset="-122"/>
+                          <a:cs typeface="Arial" pitchFamily="34" charset="-120"/>
+                        </a:rPr>
+                        <a:t>Opción 0: no hacer nada distinto, la base de comparación. Punto de equilibrio: cuánto puede caer un beneficio antes de que el VAN llegue a 0.</a:t>
+                      </a:r>
+                      <a:endParaRPr lang="en-US" sz="1200" dirty="0">
+                        <a:latin typeface="Arial" charset="0"/>
+                        <a:ea typeface="Arial" charset="0"/>
+                        <a:cs typeface="Arial" charset="0"/>
+                      </a:endParaRPr>
+                    </a:p>
+                  </a:txBody>
+                  <a:tcPr marL="54864" marR="54864" marT="54864" marB="54864" anchor="t">
+                    <a:lnL w="9525" cap="flat" cmpd="sng" algn="ctr">
+                      <a:solidFill>
+                        <a:srgbClr val="E2E2E6"/>
+                      </a:solidFill>
+                      <a:prstDash val="solid"/>
+                      <a:round/>
+                      <a:headEnd type="none" w="med" len="med"/>
+                      <a:tailEnd type="none" w="med" len="med"/>
+                    </a:lnL>
+                    <a:lnR w="9525" cap="flat" cmpd="sng" algn="ctr">
+                      <a:solidFill>
+                        <a:srgbClr val="E2E2E6"/>
+                      </a:solidFill>
+                      <a:prstDash val="solid"/>
+                      <a:round/>
+                      <a:headEnd type="none" w="med" len="med"/>
+                      <a:tailEnd type="none" w="med" len="med"/>
+                    </a:lnR>
+                    <a:lnT w="9525" cap="flat" cmpd="sng" algn="ctr">
+                      <a:solidFill>
+                        <a:srgbClr val="E2E2E6"/>
+                      </a:solidFill>
+                      <a:prstDash val="solid"/>
+                      <a:round/>
+                      <a:headEnd type="none" w="med" len="med"/>
+                      <a:tailEnd type="none" w="med" len="med"/>
+                    </a:lnT>
+                    <a:lnB w="9525" cap="flat" cmpd="sng" algn="ctr">
+                      <a:solidFill>
+                        <a:srgbClr val="E2E2E6"/>
+                      </a:solidFill>
+                      <a:prstDash val="solid"/>
+                      <a:round/>
+                      <a:headEnd type="none" w="med" len="med"/>
+                      <a:tailEnd type="none" w="med" len="med"/>
+                    </a:lnB>
+                    <a:solidFill>
+                      <a:srgbClr val="F4F6F8"/>
+                    </a:solidFill>
+                  </a:tcPr>
+                </a:tc>
+              </a:tr>
+              <a:tr h="0">
+                <a:tc>
+                  <a:txBody>
+                    <a:bodyPr/>
+                    <a:lstStyle/>
+                    <a:p>
+                      <a:pPr indent="0" marL="0">
+                        <a:buNone/>
+                      </a:pPr>
+                      <a:r>
+                        <a:rPr lang="en-US" sz="1200" b="1" dirty="0">
+                          <a:solidFill>
+                            <a:srgbClr val="002855"/>
+                          </a:solidFill>
+                          <a:latin typeface="Arial" pitchFamily="34" charset="0"/>
+                          <a:ea typeface="Arial" pitchFamily="34" charset="-122"/>
+                          <a:cs typeface="Arial" pitchFamily="34" charset="-120"/>
+                        </a:rPr>
+                        <a:t>Orden de magnitud</a:t>
+                      </a:r>
+                      <a:endParaRPr lang="en-US" sz="1200" dirty="0">
+                        <a:latin typeface="Arial" charset="0"/>
+                        <a:ea typeface="Arial" charset="0"/>
+                        <a:cs typeface="Arial" charset="0"/>
+                      </a:endParaRPr>
+                    </a:p>
+                  </a:txBody>
+                  <a:tcPr marL="54864" marR="54864" marT="54864" marB="54864" anchor="t">
+                    <a:lnL w="9525" cap="flat" cmpd="sng" algn="ctr">
+                      <a:solidFill>
+                        <a:srgbClr val="E2E2E6"/>
+                      </a:solidFill>
+                      <a:prstDash val="solid"/>
+                      <a:round/>
+                      <a:headEnd type="none" w="med" len="med"/>
+                      <a:tailEnd type="none" w="med" len="med"/>
+                    </a:lnL>
+                    <a:lnR w="9525" cap="flat" cmpd="sng" algn="ctr">
+                      <a:solidFill>
+                        <a:srgbClr val="E2E2E6"/>
+                      </a:solidFill>
+                      <a:prstDash val="solid"/>
+                      <a:round/>
+                      <a:headEnd type="none" w="med" len="med"/>
+                      <a:tailEnd type="none" w="med" len="med"/>
+                    </a:lnR>
+                    <a:lnT w="9525" cap="flat" cmpd="sng" algn="ctr">
+                      <a:solidFill>
+                        <a:srgbClr val="E2E2E6"/>
+                      </a:solidFill>
+                      <a:prstDash val="solid"/>
+                      <a:round/>
+                      <a:headEnd type="none" w="med" len="med"/>
+                      <a:tailEnd type="none" w="med" len="med"/>
+                    </a:lnT>
+                    <a:lnB w="9525" cap="flat" cmpd="sng" algn="ctr">
+                      <a:solidFill>
+                        <a:srgbClr val="E2E2E6"/>
+                      </a:solidFill>
+                      <a:prstDash val="solid"/>
+                      <a:round/>
+                      <a:headEnd type="none" w="med" len="med"/>
+                      <a:tailEnd type="none" w="med" len="med"/>
+                    </a:lnB>
+                    <a:solidFill>
+                      <a:srgbClr val="FFFFFF"/>
+                    </a:solidFill>
+                  </a:tcPr>
+                </a:tc>
+                <a:tc>
+                  <a:txBody>
+                    <a:bodyPr/>
+                    <a:lstStyle/>
+                    <a:p>
+                      <a:pPr indent="0" marL="0">
+                        <a:buNone/>
+                      </a:pPr>
+                      <a:r>
+                        <a:rPr lang="en-US" sz="1200" dirty="0">
+                          <a:solidFill>
+                            <a:srgbClr val="272425"/>
+                          </a:solidFill>
+                          <a:latin typeface="Arial" pitchFamily="34" charset="0"/>
+                          <a:ea typeface="Arial" pitchFamily="34" charset="-122"/>
+                          <a:cs typeface="Arial" pitchFamily="34" charset="-120"/>
+                        </a:rPr>
+                        <a:t>Estimación inicial con exactitud de −25 % a +75 %; se refina en la iniciación.</a:t>
+                      </a:r>
+                      <a:endParaRPr lang="en-US" sz="1200" dirty="0">
+                        <a:latin typeface="Arial" charset="0"/>
+                        <a:ea typeface="Arial" charset="0"/>
+                        <a:cs typeface="Arial" charset="0"/>
+                      </a:endParaRPr>
+                    </a:p>
+                  </a:txBody>
+                  <a:tcPr marL="54864" marR="54864" marT="54864" marB="54864" anchor="t">
+                    <a:lnL w="9525" cap="flat" cmpd="sng" algn="ctr">
+                      <a:solidFill>
+                        <a:srgbClr val="E2E2E6"/>
+                      </a:solidFill>
+                      <a:prstDash val="solid"/>
+                      <a:round/>
+                      <a:headEnd type="none" w="med" len="med"/>
+                      <a:tailEnd type="none" w="med" len="med"/>
+                    </a:lnL>
+                    <a:lnR w="9525" cap="flat" cmpd="sng" algn="ctr">
+                      <a:solidFill>
+                        <a:srgbClr val="E2E2E6"/>
+                      </a:solidFill>
+                      <a:prstDash val="solid"/>
+                      <a:round/>
+                      <a:headEnd type="none" w="med" len="med"/>
+                      <a:tailEnd type="none" w="med" len="med"/>
+                    </a:lnR>
+                    <a:lnT w="9525" cap="flat" cmpd="sng" algn="ctr">
+                      <a:solidFill>
+                        <a:srgbClr val="E2E2E6"/>
+                      </a:solidFill>
+                      <a:prstDash val="solid"/>
+                      <a:round/>
+                      <a:headEnd type="none" w="med" len="med"/>
+                      <a:tailEnd type="none" w="med" len="med"/>
+                    </a:lnT>
+                    <a:lnB w="9525" cap="flat" cmpd="sng" algn="ctr">
+                      <a:solidFill>
+                        <a:srgbClr val="E2E2E6"/>
+                      </a:solidFill>
+                      <a:prstDash val="solid"/>
+                      <a:round/>
+                      <a:headEnd type="none" w="med" len="med"/>
+                      <a:tailEnd type="none" w="med" len="med"/>
+                    </a:lnB>
+                    <a:solidFill>
+                      <a:srgbClr val="FFFFFF"/>
+                    </a:solidFill>
+                  </a:tcPr>
+                </a:tc>
+              </a:tr>
+              <a:tr h="0">
+                <a:tc>
+                  <a:txBody>
+                    <a:bodyPr/>
+                    <a:lstStyle/>
+                    <a:p>
+                      <a:pPr indent="0" marL="0">
+                        <a:buNone/>
+                      </a:pPr>
+                      <a:r>
+                        <a:rPr lang="en-US" sz="1200" b="1" dirty="0">
+                          <a:solidFill>
+                            <a:srgbClr val="002855"/>
+                          </a:solidFill>
+                          <a:latin typeface="Arial" pitchFamily="34" charset="0"/>
+                          <a:ea typeface="Arial" pitchFamily="34" charset="-122"/>
+                          <a:cs typeface="Arial" pitchFamily="34" charset="-120"/>
+                        </a:rPr>
+                        <a:t>P-04 y P-11</a:t>
+                      </a:r>
+                      <a:endParaRPr lang="en-US" sz="1200" dirty="0">
+                        <a:latin typeface="Arial" charset="0"/>
+                        <a:ea typeface="Arial" charset="0"/>
+                        <a:cs typeface="Arial" charset="0"/>
+                      </a:endParaRPr>
+                    </a:p>
+                  </a:txBody>
+                  <a:tcPr marL="54864" marR="54864" marT="54864" marB="54864" anchor="t">
+                    <a:lnL w="9525" cap="flat" cmpd="sng" algn="ctr">
+                      <a:solidFill>
+                        <a:srgbClr val="E2E2E6"/>
+                      </a:solidFill>
+                      <a:prstDash val="solid"/>
+                      <a:round/>
+                      <a:headEnd type="none" w="med" len="med"/>
+                      <a:tailEnd type="none" w="med" len="med"/>
+                    </a:lnL>
+                    <a:lnR w="9525" cap="flat" cmpd="sng" algn="ctr">
+                      <a:solidFill>
+                        <a:srgbClr val="E2E2E6"/>
+                      </a:solidFill>
+                      <a:prstDash val="solid"/>
+                      <a:round/>
+                      <a:headEnd type="none" w="med" len="med"/>
+                      <a:tailEnd type="none" w="med" len="med"/>
+                    </a:lnR>
+                    <a:lnT w="9525" cap="flat" cmpd="sng" algn="ctr">
+                      <a:solidFill>
+                        <a:srgbClr val="E2E2E6"/>
+                      </a:solidFill>
+                      <a:prstDash val="solid"/>
+                      <a:round/>
+                      <a:headEnd type="none" w="med" len="med"/>
+                      <a:tailEnd type="none" w="med" len="med"/>
+                    </a:lnT>
+                    <a:lnB w="9525" cap="flat" cmpd="sng" algn="ctr">
+                      <a:solidFill>
+                        <a:srgbClr val="E2E2E6"/>
+                      </a:solidFill>
+                      <a:prstDash val="solid"/>
+                      <a:round/>
+                      <a:headEnd type="none" w="med" len="med"/>
+                      <a:tailEnd type="none" w="med" len="med"/>
+                    </a:lnB>
+                    <a:solidFill>
+                      <a:srgbClr val="F4F6F8"/>
+                    </a:solidFill>
+                  </a:tcPr>
+                </a:tc>
+                <a:tc>
+                  <a:txBody>
+                    <a:bodyPr/>
+                    <a:lstStyle/>
+                    <a:p>
+                      <a:pPr indent="0" marL="0">
+                        <a:buNone/>
+                      </a:pPr>
+                      <a:r>
+                        <a:rPr lang="en-US" sz="1200" dirty="0">
+                          <a:solidFill>
+                            <a:srgbClr val="272425"/>
+                          </a:solidFill>
+                          <a:latin typeface="Arial" pitchFamily="34" charset="0"/>
+                          <a:ea typeface="Arial" pitchFamily="34" charset="-122"/>
+                          <a:cs typeface="Arial" pitchFamily="34" charset="-120"/>
+                        </a:rPr>
+                        <a:t>Controles de autorizar-proyecto: criterios de éxito sin enfoque de beneficios; supuestos críticos sin validar (aviso si la junta los acepta por escrito).</a:t>
+                      </a:r>
+                      <a:endParaRPr lang="en-US" sz="1200" dirty="0">
+                        <a:latin typeface="Arial" charset="0"/>
+                        <a:ea typeface="Arial" charset="0"/>
+                        <a:cs typeface="Arial" charset="0"/>
+                      </a:endParaRPr>
+                    </a:p>
+                  </a:txBody>
+                  <a:tcPr marL="54864" marR="54864" marT="54864" marB="54864" anchor="t">
+                    <a:lnL w="9525" cap="flat" cmpd="sng" algn="ctr">
+                      <a:solidFill>
+                        <a:srgbClr val="E2E2E6"/>
+                      </a:solidFill>
+                      <a:prstDash val="solid"/>
+                      <a:round/>
+                      <a:headEnd type="none" w="med" len="med"/>
+                      <a:tailEnd type="none" w="med" len="med"/>
+                    </a:lnL>
+                    <a:lnR w="9525" cap="flat" cmpd="sng" algn="ctr">
+                      <a:solidFill>
+                        <a:srgbClr val="E2E2E6"/>
+                      </a:solidFill>
+                      <a:prstDash val="solid"/>
+                      <a:round/>
+                      <a:headEnd type="none" w="med" len="med"/>
+                      <a:tailEnd type="none" w="med" len="med"/>
+                    </a:lnR>
+                    <a:lnT w="9525" cap="flat" cmpd="sng" algn="ctr">
+                      <a:solidFill>
+                        <a:srgbClr val="E2E2E6"/>
+                      </a:solidFill>
+                      <a:prstDash val="solid"/>
+                      <a:round/>
+                      <a:headEnd type="none" w="med" len="med"/>
+                      <a:tailEnd type="none" w="med" len="med"/>
+                    </a:lnT>
+                    <a:lnB w="9525" cap="flat" cmpd="sng" algn="ctr">
+                      <a:solidFill>
+                        <a:srgbClr val="E2E2E6"/>
+                      </a:solidFill>
+                      <a:prstDash val="solid"/>
+                      <a:round/>
+                      <a:headEnd type="none" w="med" len="med"/>
+                      <a:tailEnd type="none" w="med" len="med"/>
+                    </a:lnB>
+                    <a:solidFill>
+                      <a:srgbClr val="F4F6F8"/>
+                    </a:solidFill>
+                  </a:tcPr>
+                </a:tc>
+              </a:tr>
+              <a:tr h="0">
+                <a:tc>
+                  <a:txBody>
+                    <a:bodyPr/>
+                    <a:lstStyle/>
+                    <a:p>
+                      <a:pPr indent="0" marL="0">
+                        <a:buNone/>
+                      </a:pPr>
+                      <a:r>
+                        <a:rPr lang="en-US" sz="1200" b="1" dirty="0">
+                          <a:solidFill>
+                            <a:srgbClr val="002855"/>
+                          </a:solidFill>
+                          <a:latin typeface="Arial" pitchFamily="34" charset="0"/>
+                          <a:ea typeface="Arial" pitchFamily="34" charset="-122"/>
+                          <a:cs typeface="Arial" pitchFamily="34" charset="-120"/>
+                        </a:rPr>
+                        <a:t>Persona de usuario</a:t>
+                      </a:r>
+                      <a:endParaRPr lang="en-US" sz="1200" dirty="0">
+                        <a:latin typeface="Arial" charset="0"/>
+                        <a:ea typeface="Arial" charset="0"/>
+                        <a:cs typeface="Arial" charset="0"/>
+                      </a:endParaRPr>
+                    </a:p>
+                  </a:txBody>
+                  <a:tcPr marL="54864" marR="54864" marT="54864" marB="54864" anchor="t">
+                    <a:lnL w="9525" cap="flat" cmpd="sng" algn="ctr">
+                      <a:solidFill>
+                        <a:srgbClr val="E2E2E6"/>
+                      </a:solidFill>
+                      <a:prstDash val="solid"/>
+                      <a:round/>
+                      <a:headEnd type="none" w="med" len="med"/>
+                      <a:tailEnd type="none" w="med" len="med"/>
+                    </a:lnL>
+                    <a:lnR w="9525" cap="flat" cmpd="sng" algn="ctr">
+                      <a:solidFill>
+                        <a:srgbClr val="E2E2E6"/>
+                      </a:solidFill>
+                      <a:prstDash val="solid"/>
+                      <a:round/>
+                      <a:headEnd type="none" w="med" len="med"/>
+                      <a:tailEnd type="none" w="med" len="med"/>
+                    </a:lnR>
+                    <a:lnT w="9525" cap="flat" cmpd="sng" algn="ctr">
+                      <a:solidFill>
+                        <a:srgbClr val="E2E2E6"/>
+                      </a:solidFill>
+                      <a:prstDash val="solid"/>
+                      <a:round/>
+                      <a:headEnd type="none" w="med" len="med"/>
+                      <a:tailEnd type="none" w="med" len="med"/>
+                    </a:lnT>
+                    <a:lnB w="9525" cap="flat" cmpd="sng" algn="ctr">
+                      <a:solidFill>
+                        <a:srgbClr val="E2E2E6"/>
+                      </a:solidFill>
+                      <a:prstDash val="solid"/>
+                      <a:round/>
+                      <a:headEnd type="none" w="med" len="med"/>
+                      <a:tailEnd type="none" w="med" len="med"/>
+                    </a:lnB>
+                    <a:solidFill>
+                      <a:srgbClr val="FFFFFF"/>
+                    </a:solidFill>
+                  </a:tcPr>
+                </a:tc>
+                <a:tc>
+                  <a:txBody>
+                    <a:bodyPr/>
+                    <a:lstStyle/>
+                    <a:p>
+                      <a:pPr indent="0" marL="0">
+                        <a:buNone/>
+                      </a:pPr>
+                      <a:r>
+                        <a:rPr lang="en-US" sz="1200" dirty="0">
+                          <a:solidFill>
+                            <a:srgbClr val="272425"/>
+                          </a:solidFill>
+                          <a:latin typeface="Arial" pitchFamily="34" charset="0"/>
+                          <a:ea typeface="Arial" pitchFamily="34" charset="-122"/>
+                          <a:cs typeface="Arial" pitchFamily="34" charset="-120"/>
+                        </a:rPr>
+                        <a:t>Arquetipo de quien pide, usa o aprovecha una capacidad; no es un interesado, pero se ancla al interesado que la representa (personas.csv).</a:t>
+                      </a:r>
+                      <a:endParaRPr lang="en-US" sz="1200" dirty="0">
+                        <a:latin typeface="Arial" charset="0"/>
+                        <a:ea typeface="Arial" charset="0"/>
+                        <a:cs typeface="Arial" charset="0"/>
+                      </a:endParaRPr>
+                    </a:p>
+                  </a:txBody>
+                  <a:tcPr marL="54864" marR="54864" marT="54864" marB="54864" anchor="t">
+                    <a:lnL w="9525" cap="flat" cmpd="sng" algn="ctr">
+                      <a:solidFill>
+                        <a:srgbClr val="E2E2E6"/>
+                      </a:solidFill>
+                      <a:prstDash val="solid"/>
+                      <a:round/>
+                      <a:headEnd type="none" w="med" len="med"/>
+                      <a:tailEnd type="none" w="med" len="med"/>
+                    </a:lnL>
+                    <a:lnR w="9525" cap="flat" cmpd="sng" algn="ctr">
+                      <a:solidFill>
+                        <a:srgbClr val="E2E2E6"/>
+                      </a:solidFill>
+                      <a:prstDash val="solid"/>
+                      <a:round/>
+                      <a:headEnd type="none" w="med" len="med"/>
+                      <a:tailEnd type="none" w="med" len="med"/>
+                    </a:lnR>
+                    <a:lnT w="9525" cap="flat" cmpd="sng" algn="ctr">
+                      <a:solidFill>
+                        <a:srgbClr val="E2E2E6"/>
+                      </a:solidFill>
+                      <a:prstDash val="solid"/>
+                      <a:round/>
+                      <a:headEnd type="none" w="med" len="med"/>
+                      <a:tailEnd type="none" w="med" len="med"/>
+                    </a:lnT>
+                    <a:lnB w="9525" cap="flat" cmpd="sng" algn="ctr">
+                      <a:solidFill>
+                        <a:srgbClr val="E2E2E6"/>
+                      </a:solidFill>
+                      <a:prstDash val="solid"/>
+                      <a:round/>
+                      <a:headEnd type="none" w="med" len="med"/>
+                      <a:tailEnd type="none" w="med" len="med"/>
+                    </a:lnB>
+                    <a:solidFill>
+                      <a:srgbClr val="FFFFFF"/>
+                    </a:solidFill>
+                  </a:tcPr>
+                </a:tc>
+              </a:tr>
+            </a:tbl>
+          </a:graphicData>
+        </a:graphic>
+      </p:graphicFrame>
+      <p:sp>
+        <p:nvSpPr>
+          <p:cNvPr id="25" name="Slide Number Placeholder 0"/>
+          <p:cNvSpPr>
+            <a:spLocks noGrp="1"/>
+          </p:cNvSpPr>
+          <p:nvPr>
+            <p:ph type="sldNum" sz="quarter" idx="4294967295"/>
+          </p:nvPr>
+        </p:nvSpPr>
+        <p:spPr>
+          <a:xfrm>
+            <a:off x="11091672" y="6419088"/>
+            <a:ext cx="640080" cy="274320"/>
+          </a:xfrm>
+          <a:prstGeom prst="rect">
+            <a:avLst/>
+          </a:prstGeom>
+          <a:extLst>
+            <a:ext uri="{C572A759-6A51-4108-AA02-DFA0A04FC94B}">
+              <ma14:wrappingTextBoxFlag xmlns:ma14="http://schemas.microsoft.com/office/mac/drawingml/2011/main" val="0"/>
+            </a:ext>
+          </a:extLst>
+        </p:spPr>
+        <p:txBody>
+          <a:bodyPr lIns="0" tIns="0" rIns="0" bIns="0"/>
+          <a:lstStyle>
+            <a:lvl1pPr>
+              <a:defRPr sz="1000">
+                <a:solidFill>
+                  <a:srgbClr val="696969"/>
+                </a:solidFill>
+              </a:defRPr>
+            </a:lvl1pPr>
+          </a:lstStyle>
+          <a:p>
+            <a:pPr algn="r"/>
+            <a:fld id="{F7021451-1387-4CA6-816F-3879F97B5CBC}" type="slidenum">
+              <a:rPr b="0" lang="en-US"/>
+              <a:t>45</a:t>
+            </a:fld>
+            <a:endParaRPr lang="en-US"/>
+          </a:p>
+        </p:txBody>
+      </p:sp>
+    </p:spTree>
+  </p:cSld>
+  <p:clrMapOvr>
+    <a:masterClrMapping/>
+  </p:clrMapOvr>
+</p:sld>
+</file>
+
+<file path=ppt/slides/slide46.xml><?xml version="1.0" encoding="utf-8"?>
+<p:sld xmlns:a="http://schemas.openxmlformats.org/drawingml/2006/main" xmlns:r="http://schemas.openxmlformats.org/officeDocument/2006/relationships" xmlns:p="http://schemas.openxmlformats.org/presentationml/2006/main">
+  <p:cSld name="Slide 46">
+    <p:spTree>
+      <p:nvGrpSpPr>
+        <p:cNvPr id="1" name=""/>
+        <p:cNvGrpSpPr/>
+        <p:nvPr/>
+      </p:nvGrpSpPr>
+      <p:grpSpPr>
+        <a:xfrm>
+          <a:off x="0" y="0"/>
+          <a:ext cx="0" cy="0"/>
+          <a:chOff x="0" y="0"/>
+          <a:chExt cx="0" cy="0"/>
+        </a:xfrm>
+      </p:grpSpPr>
+      <p:sp>
+        <p:nvSpPr>
+          <p:cNvPr id="2" name="Text 3"/>
+          <p:cNvSpPr/>
+          <p:nvPr>
+            <p:ph idx="103" type="title" hasCustomPrompt="1"/>
+          </p:nvPr>
+        </p:nvSpPr>
+        <p:spPr>
+          <a:xfrm>
+            <a:off x="658368" y="365760"/>
+            <a:ext cx="9244584" cy="713232"/>
+          </a:xfrm>
+          <a:prstGeom prst="rect">
+            <a:avLst/>
+          </a:prstGeom>
+          <a:noFill/>
+          <a:ln/>
+        </p:spPr>
+        <p:txBody>
+          <a:bodyPr wrap="square" lIns="0" tIns="0" rIns="0" bIns="0" rtlCol="0" anchor="ctr"/>
+          <a:lstStyle/>
+          <a:p>
+            <a:pPr algn="l" indent="0" marL="0">
+              <a:buNone/>
+            </a:pPr>
+            <a:r>
+              <a:rPr lang="en-US" sz="2400" b="1" dirty="0">
+                <a:solidFill>
+                  <a:srgbClr val="FFFFFF"/>
+                </a:solidFill>
+                <a:latin typeface="Arial" pitchFamily="34" charset="0"/>
+                <a:ea typeface="Arial" pitchFamily="34" charset="-122"/>
+                <a:cs typeface="Arial" pitchFamily="34" charset="-120"/>
+              </a:rPr>
+              <a:t>Glosario (3/3)</a:t>
+            </a:r>
+            <a:endParaRPr lang="en-US" sz="2400" dirty="0"/>
+          </a:p>
+        </p:txBody>
+      </p:sp>
+      <p:graphicFrame>
+        <p:nvGraphicFramePr>
+          <p:cNvPr id="47" name="Table 0"/>
+          <p:cNvGraphicFramePr>
+            <a:graphicFrameLocks noGrp="1"/>
+          </p:cNvGraphicFramePr>
+          <p:nvPr>
+            <p:extLst>
+              <p:ext uri="{D42A27DB-BD31-4B8C-83A1-F6EECF244321}">
+                <p14:modId xmlns:p14="http://schemas.microsoft.com/office/powerpoint/2010/main" val="1579011935"/>
+              </p:ext>
+            </p:extLst>
+          </p:nvPr>
+        </p:nvGraphicFramePr>
+        <p:xfrm>
+          <a:off x="457200" y="1280160"/>
+          <a:ext cx="5486400" cy="914400"/>
+        </p:xfrm>
+        <a:graphic>
+          <a:graphicData uri="http://schemas.openxmlformats.org/drawingml/2006/table">
+            <a:tbl>
+              <a:tblPr/>
+              <a:tblGrid>
+                <a:gridCol w="1965960"/>
+                <a:gridCol w="3520440"/>
+              </a:tblGrid>
+              <a:tr h="0">
+                <a:tc>
+                  <a:txBody>
+                    <a:bodyPr/>
+                    <a:lstStyle/>
+                    <a:p>
+                      <a:pPr indent="0" marL="0">
+                        <a:buNone/>
+                      </a:pPr>
+                      <a:r>
+                        <a:rPr lang="en-US" sz="1200" b="1" dirty="0">
+                          <a:solidFill>
+                            <a:srgbClr val="FFFFFF"/>
+                          </a:solidFill>
+                          <a:latin typeface="Arial" pitchFamily="34" charset="0"/>
+                          <a:ea typeface="Arial" pitchFamily="34" charset="-122"/>
+                          <a:cs typeface="Arial" pitchFamily="34" charset="-120"/>
+                        </a:rPr>
+                        <a:t>Término</a:t>
+                      </a:r>
+                      <a:endParaRPr lang="en-US" sz="1200" dirty="0">
+                        <a:latin typeface="Arial" charset="0"/>
+                        <a:ea typeface="Arial" charset="0"/>
+                        <a:cs typeface="Arial" charset="0"/>
+                      </a:endParaRPr>
+                    </a:p>
+                  </a:txBody>
+                  <a:tcPr marL="54864" marR="54864" marT="54864" marB="54864" anchor="ctr">
+                    <a:lnL w="9525" cap="flat" cmpd="sng" algn="ctr">
+                      <a:solidFill>
+                        <a:srgbClr val="E2E2E6"/>
+                      </a:solidFill>
+                      <a:prstDash val="solid"/>
+                      <a:round/>
+                      <a:headEnd type="none" w="med" len="med"/>
+                      <a:tailEnd type="none" w="med" len="med"/>
+                    </a:lnL>
+                    <a:lnR w="9525" cap="flat" cmpd="sng" algn="ctr">
+                      <a:solidFill>
+                        <a:srgbClr val="E2E2E6"/>
+                      </a:solidFill>
+                      <a:prstDash val="solid"/>
+                      <a:round/>
+                      <a:headEnd type="none" w="med" len="med"/>
+                      <a:tailEnd type="none" w="med" len="med"/>
+                    </a:lnR>
+                    <a:lnT w="9525" cap="flat" cmpd="sng" algn="ctr">
+                      <a:solidFill>
+                        <a:srgbClr val="E2E2E6"/>
+                      </a:solidFill>
+                      <a:prstDash val="solid"/>
+                      <a:round/>
+                      <a:headEnd type="none" w="med" len="med"/>
+                      <a:tailEnd type="none" w="med" len="med"/>
+                    </a:lnT>
+                    <a:lnB w="9525" cap="flat" cmpd="sng" algn="ctr">
+                      <a:solidFill>
+                        <a:srgbClr val="E2E2E6"/>
+                      </a:solidFill>
+                      <a:prstDash val="solid"/>
+                      <a:round/>
+                      <a:headEnd type="none" w="med" len="med"/>
+                      <a:tailEnd type="none" w="med" len="med"/>
+                    </a:lnB>
+                    <a:solidFill>
+                      <a:srgbClr val="002855"/>
+                    </a:solidFill>
+                  </a:tcPr>
+                </a:tc>
+                <a:tc>
+                  <a:txBody>
+                    <a:bodyPr/>
+                    <a:lstStyle/>
+                    <a:p>
+                      <a:pPr indent="0" marL="0">
+                        <a:buNone/>
+                      </a:pPr>
+                      <a:r>
+                        <a:rPr lang="en-US" sz="1200" b="1" dirty="0">
+                          <a:solidFill>
+                            <a:srgbClr val="FFFFFF"/>
+                          </a:solidFill>
+                          <a:latin typeface="Arial" pitchFamily="34" charset="0"/>
+                          <a:ea typeface="Arial" pitchFamily="34" charset="-122"/>
+                          <a:cs typeface="Arial" pitchFamily="34" charset="-120"/>
+                        </a:rPr>
+                        <a:t>Definición</a:t>
+                      </a:r>
+                      <a:endParaRPr lang="en-US" sz="1200" dirty="0">
+                        <a:latin typeface="Arial" charset="0"/>
+                        <a:ea typeface="Arial" charset="0"/>
+                        <a:cs typeface="Arial" charset="0"/>
+                      </a:endParaRPr>
+                    </a:p>
+                  </a:txBody>
+                  <a:tcPr marL="54864" marR="54864" marT="54864" marB="54864" anchor="ctr">
+                    <a:lnL w="9525" cap="flat" cmpd="sng" algn="ctr">
+                      <a:solidFill>
+                        <a:srgbClr val="E2E2E6"/>
+                      </a:solidFill>
+                      <a:prstDash val="solid"/>
+                      <a:round/>
+                      <a:headEnd type="none" w="med" len="med"/>
+                      <a:tailEnd type="none" w="med" len="med"/>
+                    </a:lnL>
+                    <a:lnR w="9525" cap="flat" cmpd="sng" algn="ctr">
+                      <a:solidFill>
+                        <a:srgbClr val="E2E2E6"/>
+                      </a:solidFill>
+                      <a:prstDash val="solid"/>
+                      <a:round/>
+                      <a:headEnd type="none" w="med" len="med"/>
+                      <a:tailEnd type="none" w="med" len="med"/>
+                    </a:lnR>
+                    <a:lnT w="9525" cap="flat" cmpd="sng" algn="ctr">
+                      <a:solidFill>
+                        <a:srgbClr val="E2E2E6"/>
+                      </a:solidFill>
+                      <a:prstDash val="solid"/>
+                      <a:round/>
+                      <a:headEnd type="none" w="med" len="med"/>
+                      <a:tailEnd type="none" w="med" len="med"/>
+                    </a:lnT>
+                    <a:lnB w="9525" cap="flat" cmpd="sng" algn="ctr">
+                      <a:solidFill>
+                        <a:srgbClr val="E2E2E6"/>
+                      </a:solidFill>
+                      <a:prstDash val="solid"/>
+                      <a:round/>
+                      <a:headEnd type="none" w="med" len="med"/>
+                      <a:tailEnd type="none" w="med" len="med"/>
+                    </a:lnB>
+                    <a:solidFill>
+                      <a:srgbClr val="002855"/>
+                    </a:solidFill>
+                  </a:tcPr>
+                </a:tc>
+              </a:tr>
+              <a:tr h="0">
+                <a:tc>
+                  <a:txBody>
+                    <a:bodyPr/>
+                    <a:lstStyle/>
+                    <a:p>
+                      <a:pPr indent="0" marL="0">
+                        <a:buNone/>
+                      </a:pPr>
+                      <a:r>
+                        <a:rPr lang="en-US" sz="1200" b="1" dirty="0">
+                          <a:solidFill>
+                            <a:srgbClr val="002855"/>
+                          </a:solidFill>
+                          <a:latin typeface="Arial" pitchFamily="34" charset="0"/>
+                          <a:ea typeface="Arial" pitchFamily="34" charset="-122"/>
+                          <a:cs typeface="Arial" pitchFamily="34" charset="-120"/>
+                        </a:rPr>
+                        <a:t>PID</a:t>
+                      </a:r>
+                      <a:endParaRPr lang="en-US" sz="1200" dirty="0">
+                        <a:latin typeface="Arial" charset="0"/>
+                        <a:ea typeface="Arial" charset="0"/>
+                        <a:cs typeface="Arial" charset="0"/>
+                      </a:endParaRPr>
+                    </a:p>
+                  </a:txBody>
+                  <a:tcPr marL="54864" marR="54864" marT="54864" marB="54864" anchor="t">
+                    <a:lnL w="9525" cap="flat" cmpd="sng" algn="ctr">
+                      <a:solidFill>
+                        <a:srgbClr val="E2E2E6"/>
+                      </a:solidFill>
+                      <a:prstDash val="solid"/>
+                      <a:round/>
+                      <a:headEnd type="none" w="med" len="med"/>
+                      <a:tailEnd type="none" w="med" len="med"/>
+                    </a:lnL>
+                    <a:lnR w="9525" cap="flat" cmpd="sng" algn="ctr">
+                      <a:solidFill>
+                        <a:srgbClr val="E2E2E6"/>
+                      </a:solidFill>
+                      <a:prstDash val="solid"/>
+                      <a:round/>
+                      <a:headEnd type="none" w="med" len="med"/>
+                      <a:tailEnd type="none" w="med" len="med"/>
+                    </a:lnR>
+                    <a:lnT w="9525" cap="flat" cmpd="sng" algn="ctr">
+                      <a:solidFill>
+                        <a:srgbClr val="E2E2E6"/>
+                      </a:solidFill>
+                      <a:prstDash val="solid"/>
+                      <a:round/>
+                      <a:headEnd type="none" w="med" len="med"/>
+                      <a:tailEnd type="none" w="med" len="med"/>
+                    </a:lnT>
+                    <a:lnB w="9525" cap="flat" cmpd="sng" algn="ctr">
+                      <a:solidFill>
+                        <a:srgbClr val="E2E2E6"/>
+                      </a:solidFill>
+                      <a:prstDash val="solid"/>
+                      <a:round/>
+                      <a:headEnd type="none" w="med" len="med"/>
+                      <a:tailEnd type="none" w="med" len="med"/>
+                    </a:lnB>
+                    <a:solidFill>
+                      <a:srgbClr val="F4F6F8"/>
+                    </a:solidFill>
+                  </a:tcPr>
+                </a:tc>
+                <a:tc>
+                  <a:txBody>
+                    <a:bodyPr/>
+                    <a:lstStyle/>
+                    <a:p>
+                      <a:pPr indent="0" marL="0">
+                        <a:buNone/>
+                      </a:pPr>
+                      <a:r>
+                        <a:rPr lang="en-US" sz="1200" dirty="0">
+                          <a:solidFill>
+                            <a:srgbClr val="272425"/>
+                          </a:solidFill>
+                          <a:latin typeface="Arial" pitchFamily="34" charset="0"/>
+                          <a:ea typeface="Arial" pitchFamily="34" charset="-122"/>
+                          <a:cs typeface="Arial" pitchFamily="34" charset="-120"/>
+                        </a:rPr>
+                        <a:t>Documentación de inicio del proyecto: el contrato entre el gestor y la junta.</a:t>
+                      </a:r>
+                      <a:endParaRPr lang="en-US" sz="1200" dirty="0">
+                        <a:latin typeface="Arial" charset="0"/>
+                        <a:ea typeface="Arial" charset="0"/>
+                        <a:cs typeface="Arial" charset="0"/>
+                      </a:endParaRPr>
+                    </a:p>
+                  </a:txBody>
+                  <a:tcPr marL="54864" marR="54864" marT="54864" marB="54864" anchor="t">
+                    <a:lnL w="9525" cap="flat" cmpd="sng" algn="ctr">
+                      <a:solidFill>
+                        <a:srgbClr val="E2E2E6"/>
+                      </a:solidFill>
+                      <a:prstDash val="solid"/>
+                      <a:round/>
+                      <a:headEnd type="none" w="med" len="med"/>
+                      <a:tailEnd type="none" w="med" len="med"/>
+                    </a:lnL>
+                    <a:lnR w="9525" cap="flat" cmpd="sng" algn="ctr">
+                      <a:solidFill>
+                        <a:srgbClr val="E2E2E6"/>
+                      </a:solidFill>
+                      <a:prstDash val="solid"/>
+                      <a:round/>
+                      <a:headEnd type="none" w="med" len="med"/>
+                      <a:tailEnd type="none" w="med" len="med"/>
+                    </a:lnR>
+                    <a:lnT w="9525" cap="flat" cmpd="sng" algn="ctr">
+                      <a:solidFill>
+                        <a:srgbClr val="E2E2E6"/>
+                      </a:solidFill>
+                      <a:prstDash val="solid"/>
+                      <a:round/>
+                      <a:headEnd type="none" w="med" len="med"/>
+                      <a:tailEnd type="none" w="med" len="med"/>
+                    </a:lnT>
+                    <a:lnB w="9525" cap="flat" cmpd="sng" algn="ctr">
+                      <a:solidFill>
+                        <a:srgbClr val="E2E2E6"/>
+                      </a:solidFill>
+                      <a:prstDash val="solid"/>
+                      <a:round/>
+                      <a:headEnd type="none" w="med" len="med"/>
+                      <a:tailEnd type="none" w="med" len="med"/>
+                    </a:lnB>
+                    <a:solidFill>
+                      <a:srgbClr val="F4F6F8"/>
+                    </a:solidFill>
+                  </a:tcPr>
+                </a:tc>
+              </a:tr>
+              <a:tr h="0">
+                <a:tc>
+                  <a:txBody>
+                    <a:bodyPr/>
+                    <a:lstStyle/>
+                    <a:p>
+                      <a:pPr indent="0" marL="0">
+                        <a:buNone/>
+                      </a:pPr>
+                      <a:r>
+                        <a:rPr lang="en-US" sz="1200" b="1" dirty="0">
+                          <a:solidFill>
+                            <a:srgbClr val="002855"/>
+                          </a:solidFill>
+                          <a:latin typeface="Arial" pitchFamily="34" charset="0"/>
+                          <a:ea typeface="Arial" pitchFamily="34" charset="-122"/>
+                          <a:cs typeface="Arial" pitchFamily="34" charset="-120"/>
+                        </a:rPr>
                         <a:t>Presupuesto de cambio</a:t>
                       </a:r>
                       <a:endParaRPr lang="en-US" sz="1200" dirty="0">
@@ -31512,7 +31934,7 @@
                       <a:tailEnd type="none" w="med" len="med"/>
                     </a:lnB>
                     <a:solidFill>
-                      <a:srgbClr val="F4F6F8"/>
+                      <a:srgbClr val="FFFFFF"/>
                     </a:solidFill>
                   </a:tcPr>
                 </a:tc>
@@ -31580,7 +32002,7 @@
                       <a:tailEnd type="none" w="med" len="med"/>
                     </a:lnB>
                     <a:solidFill>
-                      <a:srgbClr val="F4F6F8"/>
+                      <a:srgbClr val="FFFFFF"/>
                     </a:solidFill>
                   </a:tcPr>
                 </a:tc>
@@ -31650,7 +32072,7 @@
                       <a:tailEnd type="none" w="med" len="med"/>
                     </a:lnB>
                     <a:solidFill>
-                      <a:srgbClr val="FFFFFF"/>
+                      <a:srgbClr val="F4F6F8"/>
                     </a:solidFill>
                   </a:tcPr>
                 </a:tc>
@@ -31718,7 +32140,7 @@
                       <a:tailEnd type="none" w="med" len="med"/>
                     </a:lnB>
                     <a:solidFill>
-                      <a:srgbClr val="FFFFFF"/>
+                      <a:srgbClr val="F4F6F8"/>
                     </a:solidFill>
                   </a:tcPr>
                 </a:tc>
@@ -31788,7 +32210,7 @@
                       <a:tailEnd type="none" w="med" len="med"/>
                     </a:lnB>
                     <a:solidFill>
-                      <a:srgbClr val="F4F6F8"/>
+                      <a:srgbClr val="FFFFFF"/>
                     </a:solidFill>
                   </a:tcPr>
                 </a:tc>
@@ -31856,7 +32278,7 @@
                       <a:tailEnd type="none" w="med" len="med"/>
                     </a:lnB>
                     <a:solidFill>
-                      <a:srgbClr val="F4F6F8"/>
+                      <a:srgbClr val="FFFFFF"/>
                     </a:solidFill>
                   </a:tcPr>
                 </a:tc>
@@ -31926,7 +32348,7 @@
                       <a:tailEnd type="none" w="med" len="med"/>
                     </a:lnB>
                     <a:solidFill>
-                      <a:srgbClr val="FFFFFF"/>
+                      <a:srgbClr val="F4F6F8"/>
                     </a:solidFill>
                   </a:tcPr>
                 </a:tc>
@@ -31994,7 +32416,175 @@
                       <a:tailEnd type="none" w="med" len="med"/>
                     </a:lnB>
                     <a:solidFill>
-                      <a:srgbClr val="FFFFFF"/>
+                      <a:srgbClr val="F4F6F8"/>
+                    </a:solidFill>
+                  </a:tcPr>
+                </a:tc>
+              </a:tr>
+            </a:tbl>
+          </a:graphicData>
+        </a:graphic>
+      </p:graphicFrame>
+      <p:graphicFrame>
+        <p:nvGraphicFramePr>
+          <p:cNvPr id="93" name="Table 1"/>
+          <p:cNvGraphicFramePr>
+            <a:graphicFrameLocks noGrp="1"/>
+          </p:cNvGraphicFramePr>
+          <p:nvPr>
+            <p:extLst>
+              <p:ext uri="{D42A27DB-BD31-4B8C-83A1-F6EECF244321}">
+                <p14:modId xmlns:p14="http://schemas.microsoft.com/office/powerpoint/2010/main" val="1579011935"/>
+              </p:ext>
+            </p:extLst>
+          </p:nvPr>
+        </p:nvGraphicFramePr>
+        <p:xfrm>
+          <a:off x="6245352" y="1280160"/>
+          <a:ext cx="5486400" cy="914400"/>
+        </p:xfrm>
+        <a:graphic>
+          <a:graphicData uri="http://schemas.openxmlformats.org/drawingml/2006/table">
+            <a:tbl>
+              <a:tblPr/>
+              <a:tblGrid>
+                <a:gridCol w="1965960"/>
+                <a:gridCol w="3520440"/>
+              </a:tblGrid>
+              <a:tr h="0">
+                <a:tc>
+                  <a:txBody>
+                    <a:bodyPr/>
+                    <a:lstStyle/>
+                    <a:p>
+                      <a:pPr indent="0" marL="0">
+                        <a:buNone/>
+                      </a:pPr>
+                      <a:r>
+                        <a:rPr lang="en-US" sz="1200" b="1" dirty="0">
+                          <a:solidFill>
+                            <a:srgbClr val="FFFFFF"/>
+                          </a:solidFill>
+                          <a:latin typeface="Arial" pitchFamily="34" charset="0"/>
+                          <a:ea typeface="Arial" pitchFamily="34" charset="-122"/>
+                          <a:cs typeface="Arial" pitchFamily="34" charset="-120"/>
+                        </a:rPr>
+                        <a:t>Término</a:t>
+                      </a:r>
+                      <a:endParaRPr lang="en-US" sz="1200" dirty="0">
+                        <a:latin typeface="Arial" charset="0"/>
+                        <a:ea typeface="Arial" charset="0"/>
+                        <a:cs typeface="Arial" charset="0"/>
+                      </a:endParaRPr>
+                    </a:p>
+                  </a:txBody>
+                  <a:tcPr marL="54864" marR="54864" marT="54864" marB="54864" anchor="ctr">
+                    <a:lnL w="9525" cap="flat" cmpd="sng" algn="ctr">
+                      <a:solidFill>
+                        <a:srgbClr val="E2E2E6"/>
+                      </a:solidFill>
+                      <a:prstDash val="solid"/>
+                      <a:round/>
+                      <a:headEnd type="none" w="med" len="med"/>
+                      <a:tailEnd type="none" w="med" len="med"/>
+                    </a:lnL>
+                    <a:lnR w="9525" cap="flat" cmpd="sng" algn="ctr">
+                      <a:solidFill>
+                        <a:srgbClr val="E2E2E6"/>
+                      </a:solidFill>
+                      <a:prstDash val="solid"/>
+                      <a:round/>
+                      <a:headEnd type="none" w="med" len="med"/>
+                      <a:tailEnd type="none" w="med" len="med"/>
+                    </a:lnR>
+                    <a:lnT w="9525" cap="flat" cmpd="sng" algn="ctr">
+                      <a:solidFill>
+                        <a:srgbClr val="E2E2E6"/>
+                      </a:solidFill>
+                      <a:prstDash val="solid"/>
+                      <a:round/>
+                      <a:headEnd type="none" w="med" len="med"/>
+                      <a:tailEnd type="none" w="med" len="med"/>
+                    </a:lnT>
+                    <a:lnB w="9525" cap="flat" cmpd="sng" algn="ctr">
+                      <a:solidFill>
+                        <a:srgbClr val="E2E2E6"/>
+                      </a:solidFill>
+                      <a:prstDash val="solid"/>
+                      <a:round/>
+                      <a:headEnd type="none" w="med" len="med"/>
+                      <a:tailEnd type="none" w="med" len="med"/>
+                    </a:lnB>
+                    <a:solidFill>
+                      <a:srgbClr val="002855"/>
+                    </a:solidFill>
+                  </a:tcPr>
+                </a:tc>
+                <a:tc>
+                  <a:txBody>
+                    <a:bodyPr/>
+                    <a:lstStyle/>
+                    <a:p>
+                      <a:pPr indent="0" marL="0">
+                        <a:buNone/>
+                      </a:pPr>
+                      <a:r>
+                        <a:rPr lang="en-US" sz="1200" b="1" dirty="0">
+                          <a:solidFill>
+                            <a:srgbClr val="FFFFFF"/>
+                          </a:solidFill>
+                          <a:latin typeface="Arial" pitchFamily="34" charset="0"/>
+                          <a:ea typeface="Arial" pitchFamily="34" charset="-122"/>
+                          <a:cs typeface="Arial" pitchFamily="34" charset="-120"/>
+                        </a:rPr>
+                        <a:t>Definición</a:t>
+                      </a:r>
+                      <a:endParaRPr lang="en-US" sz="1200" dirty="0">
+                        <a:latin typeface="Arial" charset="0"/>
+                        <a:ea typeface="Arial" charset="0"/>
+                        <a:cs typeface="Arial" charset="0"/>
+                      </a:endParaRPr>
+                    </a:p>
+                  </a:txBody>
+                  <a:tcPr marL="54864" marR="54864" marT="54864" marB="54864" anchor="ctr">
+                    <a:lnL w="9525" cap="flat" cmpd="sng" algn="ctr">
+                      <a:solidFill>
+                        <a:srgbClr val="E2E2E6"/>
+                      </a:solidFill>
+                      <a:prstDash val="solid"/>
+                      <a:round/>
+                      <a:headEnd type="none" w="med" len="med"/>
+                      <a:tailEnd type="none" w="med" len="med"/>
+                    </a:lnL>
+                    <a:lnR w="9525" cap="flat" cmpd="sng" algn="ctr">
+                      <a:solidFill>
+                        <a:srgbClr val="E2E2E6"/>
+                      </a:solidFill>
+                      <a:prstDash val="solid"/>
+                      <a:round/>
+                      <a:headEnd type="none" w="med" len="med"/>
+                      <a:tailEnd type="none" w="med" len="med"/>
+                    </a:lnR>
+                    <a:lnT w="9525" cap="flat" cmpd="sng" algn="ctr">
+                      <a:solidFill>
+                        <a:srgbClr val="E2E2E6"/>
+                      </a:solidFill>
+                      <a:prstDash val="solid"/>
+                      <a:round/>
+                      <a:headEnd type="none" w="med" len="med"/>
+                      <a:tailEnd type="none" w="med" len="med"/>
+                    </a:lnT>
+                    <a:lnB w="9525" cap="flat" cmpd="sng" algn="ctr">
+                      <a:solidFill>
+                        <a:srgbClr val="E2E2E6"/>
+                      </a:solidFill>
+                      <a:prstDash val="solid"/>
+                      <a:round/>
+                      <a:headEnd type="none" w="med" len="med"/>
+                      <a:tailEnd type="none" w="med" len="med"/>
+                    </a:lnB>
+                    <a:solidFill>
+                      <a:srgbClr val="002855"/>
                     </a:solidFill>
                   </a:tcPr>
                 </a:tc>
@@ -32017,7 +32607,7 @@
                           <a:ea typeface="Arial" pitchFamily="34" charset="-122"/>
                           <a:cs typeface="Arial" pitchFamily="34" charset="-120"/>
                         </a:rPr>
-                        <a:t>SUP-01…03 y REG-09</a:t>
+                        <a:t>SUP-01…03, REG-09 y STK-13</a:t>
                       </a:r>
                       <a:endParaRPr lang="en-US" sz="1200" dirty="0">
                         <a:latin typeface="Arial" charset="0"/>
@@ -32085,7 +32675,7 @@
                           <a:ea typeface="Arial" pitchFamily="34" charset="-122"/>
                           <a:cs typeface="Arial" pitchFamily="34" charset="-120"/>
                         </a:rPr>
-                        <a:t>Controles de sanidad: crítico sin experimento o fecha; fecha vencida sin resultado; invalidado sin tratar; riesgo abierto con la revisión vencida.</a:t>
+                        <a:t>Controles de sanidad: crítico sin experimento o fecha; fecha vencida sin resultado; invalidado sin tratar; riesgo abierto con la revisión vencida; requisito Must sin persona que lo pida, use o aproveche.</a:t>
                       </a:r>
                       <a:endParaRPr lang="en-US" sz="1200" dirty="0">
                         <a:latin typeface="Arial" charset="0"/>
@@ -32155,7 +32745,7 @@
                           <a:ea typeface="Arial" pitchFamily="34" charset="-122"/>
                           <a:cs typeface="Arial" pitchFamily="34" charset="-120"/>
                         </a:rPr>
-                        <a:t>Supuesto</a:t>
+                        <a:t>Supuesto y mapa de supuestos</a:t>
                       </a:r>
                       <a:endParaRPr lang="en-US" sz="1200" dirty="0">
                         <a:latin typeface="Arial" charset="0"/>
@@ -32223,7 +32813,7 @@
                           <a:ea typeface="Arial" pitchFamily="34" charset="-122"/>
                           <a:cs typeface="Arial" pitchFamily="34" charset="-120"/>
                         </a:rPr>
-                        <a:t>Algo que se da por cierto sin evidencia; se registra en supuestos.csv con criticidad y certeza.</a:t>
+                        <a:t>Supuesto: algo que se da por cierto sin evidencia, en supuestos.csv con criticidad y certeza. El mapa los ubica en criticidad × certeza: los críticos sin evidencia son hipótesis y se validan primero.</a:t>
                       </a:r>
                       <a:endParaRPr lang="en-US" sz="1200" dirty="0">
                         <a:latin typeface="Arial" charset="0"/>
@@ -32456,7 +33046,7 @@
             <a:pPr algn="r"/>
             <a:fld id="{F7021451-1387-4CA6-816F-3879F97B5CBC}" type="slidenum">
               <a:rPr b="0" lang="en-US"/>
-              <a:t>45</a:t>
+              <a:t>46</a:t>
             </a:fld>
             <a:endParaRPr lang="en-US"/>
           </a:p>
@@ -33396,7 +33986,7 @@
                 <a:ea typeface="Arial" pitchFamily="34" charset="-122"/>
                 <a:cs typeface="Arial" pitchFamily="34" charset="-120"/>
               </a:rPr>
-              <a:t>Ejecutiva Carmen Olivera · gestor Pablo Rinaldi</a:t>
+              <a:t>3 lecciones aprobadas de la red: adopción en mayores de 65, agenda (4 → 14 semanas), línea base</a:t>
             </a:r>
             <a:endParaRPr lang="en-US" sz="1600" dirty="0"/>
           </a:p>

--- a/docs/webinar/E2E-5/E2E-5-diapositivas.pptx
+++ b/docs/webinar/E2E-5/E2E-5-diapositivas.pptx
@@ -152,12 +152,12 @@
   <p:extLst>
     <p:ext uri="{521415D9-36F7-43E2-AB2F-B90AF26B5E84}">
       <p14:sectionLst xmlns:p14="http://schemas.microsoft.com/office/powerpoint/2010/main">
-        <p14:section name="Portada" id="{7dcd44dd-db12-1189-9e51-1052d42ed0a2}">
+        <p14:section name="Portada" id="{12abffa0-aa26-8226-8f2d-742df2f53cba}">
           <p14:sldIdLst>
             <p14:sldId id="256"/>
           </p14:sldIdLst>
         </p14:section>
-        <p14:section name="Clase 1 · ¿Vale la pena?" id="{91d5651e-44b9-6f06-ff7d-a0174ef16b43}">
+        <p14:section name="Clase 1 · ¿Vale la pena?" id="{3f6ccc39-0783-62fa-41a4-471baad6aa1a}">
           <p14:sldIdLst>
             <p14:sldId id="257"/>
             <p14:sldId id="258"/>
@@ -182,7 +182,7 @@
             <p14:sldId id="277"/>
           </p14:sldIdLst>
         </p14:section>
-        <p14:section name="Clase 2 · Diseñar el proyecto" id="{769d58cc-4d62-7660-4de4-b6063533edd2}">
+        <p14:section name="Clase 2 · Diseñar el proyecto" id="{d9f4bb1b-a0d2-1aa6-66b4-90f2c12624bf}">
           <p14:sldIdLst>
             <p14:sldId id="278"/>
             <p14:sldId id="279"/>
@@ -207,7 +207,7 @@
             <p14:sldId id="298"/>
           </p14:sldIdLst>
         </p14:section>
-        <p14:section name="Glosario" id="{fe8c2029-411e-4eb7-4176-18af0cf3151b}">
+        <p14:section name="Glosario" id="{35db151f-f1d7-0c9f-1a1e-77916a92b06a}">
           <p14:sldIdLst>
             <p14:sldId id="299"/>
             <p14:sldId id="300"/>
@@ -4809,7 +4809,7 @@
                   <a:srgbClr val="D6E4F0"/>
                 </a:solidFill>
               </a:rPr>
-              <a:t>pm-method 2.4.0 · Webinar E2E-5 · Clase 1</a:t>
+              <a:t>pm-method 2.5.0 · Webinar E2E-5 · Clase 1</a:t>
             </a:r>
             <a:endParaRPr lang="en-US" sz="1000" dirty="0"/>
           </a:p>
@@ -5049,7 +5049,7 @@
                   <a:srgbClr val="696969"/>
                 </a:solidFill>
               </a:rPr>
-              <a:t>pm-method 2.4.0 · Webinar E2E-5 · Clase 2</a:t>
+              <a:t>pm-method 2.5.0 · Webinar E2E-5 · Clase 2</a:t>
             </a:r>
             <a:endParaRPr lang="en-US" sz="1000" dirty="0"/>
           </a:p>
@@ -5267,7 +5267,7 @@
                   <a:srgbClr val="D6E4F0"/>
                 </a:solidFill>
               </a:rPr>
-              <a:t>pm-method 2.4.0 · Webinar E2E-5 · Clase 2</a:t>
+              <a:t>pm-method 2.5.0 · Webinar E2E-5 · Clase 2</a:t>
             </a:r>
             <a:endParaRPr lang="en-US" sz="1000" dirty="0"/>
           </a:p>
@@ -5485,7 +5485,7 @@
                   <a:srgbClr val="D6E4F0"/>
                 </a:solidFill>
               </a:rPr>
-              <a:t>pm-method 2.4.0 · Webinar E2E-5 · Clase 2</a:t>
+              <a:t>pm-method 2.5.0 · Webinar E2E-5 · Clase 2</a:t>
             </a:r>
             <a:endParaRPr lang="en-US" sz="1000" dirty="0"/>
           </a:p>
@@ -5703,7 +5703,7 @@
                   <a:srgbClr val="D6E4F0"/>
                 </a:solidFill>
               </a:rPr>
-              <a:t>pm-method 2.4.0 · Webinar E2E-5 · Clase 2</a:t>
+              <a:t>pm-method 2.5.0 · Webinar E2E-5 · Clase 2</a:t>
             </a:r>
             <a:endParaRPr lang="en-US" sz="1000" dirty="0"/>
           </a:p>
@@ -5879,7 +5879,7 @@
                   <a:srgbClr val="D6E4F0"/>
                 </a:solidFill>
               </a:rPr>
-              <a:t>pm-method 2.4.0 · Webinar E2E-5</a:t>
+              <a:t>pm-method 2.5.0 · Webinar E2E-5</a:t>
             </a:r>
             <a:endParaRPr lang="en-US" sz="1000" dirty="0"/>
           </a:p>
@@ -6074,7 +6074,7 @@
                   <a:srgbClr val="696969"/>
                 </a:solidFill>
               </a:rPr>
-              <a:t>pm-method 2.4.0 · Webinar E2E-5</a:t>
+              <a:t>pm-method 2.5.0 · Webinar E2E-5</a:t>
             </a:r>
             <a:endParaRPr lang="en-US" sz="1000" dirty="0"/>
           </a:p>
@@ -6292,7 +6292,7 @@
                   <a:srgbClr val="D6E4F0"/>
                 </a:solidFill>
               </a:rPr>
-              <a:t>pm-method 2.4.0 · Webinar E2E-5</a:t>
+              <a:t>pm-method 2.5.0 · Webinar E2E-5</a:t>
             </a:r>
             <a:endParaRPr lang="en-US" sz="1000" dirty="0"/>
           </a:p>
@@ -6510,7 +6510,7 @@
                   <a:srgbClr val="D6E4F0"/>
                 </a:solidFill>
               </a:rPr>
-              <a:t>pm-method 2.4.0 · Webinar E2E-5</a:t>
+              <a:t>pm-method 2.5.0 · Webinar E2E-5</a:t>
             </a:r>
             <a:endParaRPr lang="en-US" sz="1000" dirty="0"/>
           </a:p>
@@ -6728,7 +6728,7 @@
                   <a:srgbClr val="D6E4F0"/>
                 </a:solidFill>
               </a:rPr>
-              <a:t>pm-method 2.4.0 · Webinar E2E-5</a:t>
+              <a:t>pm-method 2.5.0 · Webinar E2E-5</a:t>
             </a:r>
             <a:endParaRPr lang="en-US" sz="1000" dirty="0"/>
           </a:p>
@@ -6968,7 +6968,7 @@
                   <a:srgbClr val="696969"/>
                 </a:solidFill>
               </a:rPr>
-              <a:t>pm-method 2.4.0 · Webinar E2E-5 · Clase 1</a:t>
+              <a:t>pm-method 2.5.0 · Webinar E2E-5 · Clase 1</a:t>
             </a:r>
             <a:endParaRPr lang="en-US" sz="1000" dirty="0"/>
           </a:p>
@@ -7186,7 +7186,7 @@
                   <a:srgbClr val="D6E4F0"/>
                 </a:solidFill>
               </a:rPr>
-              <a:t>pm-method 2.4.0 · Webinar E2E-5 · Clase 1</a:t>
+              <a:t>pm-method 2.5.0 · Webinar E2E-5 · Clase 1</a:t>
             </a:r>
             <a:endParaRPr lang="en-US" sz="1000" dirty="0"/>
           </a:p>
@@ -7404,7 +7404,7 @@
                   <a:srgbClr val="D6E4F0"/>
                 </a:solidFill>
               </a:rPr>
-              <a:t>pm-method 2.4.0 · Webinar E2E-5 · Clase 1</a:t>
+              <a:t>pm-method 2.5.0 · Webinar E2E-5 · Clase 1</a:t>
             </a:r>
             <a:endParaRPr lang="en-US" sz="1000" dirty="0"/>
           </a:p>
@@ -7848,7 +7848,7 @@
                 <a:ea typeface="Arial" pitchFamily="34" charset="-122"/>
                 <a:cs typeface="Arial" pitchFamily="34" charset="-120"/>
               </a:rPr>
-              <a:t>Webinar · pm-method 2.4.0 · E2E-5</a:t>
+              <a:t>Webinar · pm-method 2.5.0 · E2E-5</a:t>
             </a:r>
             <a:endParaRPr lang="en-US" sz="1600" dirty="0"/>
           </a:p>

--- a/docs/webinar/E2E-5/E2E-5-diapositivas.pptx
+++ b/docs/webinar/E2E-5/E2E-5-diapositivas.pptx
@@ -152,12 +152,12 @@
   <p:extLst>
     <p:ext uri="{521415D9-36F7-43E2-AB2F-B90AF26B5E84}">
       <p14:sectionLst xmlns:p14="http://schemas.microsoft.com/office/powerpoint/2010/main">
-        <p14:section name="Portada" id="{12abffa0-aa26-8226-8f2d-742df2f53cba}">
+        <p14:section name="Portada" id="{1d8e6716-6fc8-9d41-0519-9f2732d14a8e}">
           <p14:sldIdLst>
             <p14:sldId id="256"/>
           </p14:sldIdLst>
         </p14:section>
-        <p14:section name="Clase 1 · ¿Vale la pena?" id="{3f6ccc39-0783-62fa-41a4-471baad6aa1a}">
+        <p14:section name="Clase 1 · ¿Vale la pena?" id="{4cf8189a-adaa-3243-38db-b004364234a4}">
           <p14:sldIdLst>
             <p14:sldId id="257"/>
             <p14:sldId id="258"/>
@@ -182,7 +182,7 @@
             <p14:sldId id="277"/>
           </p14:sldIdLst>
         </p14:section>
-        <p14:section name="Clase 2 · Diseñar el proyecto" id="{d9f4bb1b-a0d2-1aa6-66b4-90f2c12624bf}">
+        <p14:section name="Clase 2 · Diseñar el proyecto" id="{d5008389-2a29-8503-d9c1-1d1dae4b603c}">
           <p14:sldIdLst>
             <p14:sldId id="278"/>
             <p14:sldId id="279"/>
@@ -207,7 +207,7 @@
             <p14:sldId id="298"/>
           </p14:sldIdLst>
         </p14:section>
-        <p14:section name="Glosario" id="{35db151f-f1d7-0c9f-1a1e-77916a92b06a}">
+        <p14:section name="Glosario" id="{83de67df-cd30-4a25-1a9b-7b1e02e50b09}">
           <p14:sldIdLst>
             <p14:sldId id="299"/>
             <p14:sldId id="300"/>
@@ -794,7 +794,7 @@
           <a:p>
             <a:r>
               <a:rPr lang="en-US" dirty="0"/>
-              <a:t>Con experimentos y fechas, la sanidad del 2026-11-05 queda en 0 avisos. Los resultados del 2026-12-07 se muestran con la evidencia: aparecen SUP-02 por S-003 vencido y SUP-03 por S-002 invalidado sin tratar.</a:t>
+              <a:t>Con experimentos y fechas, la sanidad del 2026-11-05 queda en 0 avisos. Los resultados del 2026-12-07 se muestran con la evidencia: aparecen SUP-02 por S-003 vencido y SUP-03 por S-002 invalidado sin tratar. Lo que vigila la sanidad: SUP-01, supuesto crítico sin experimento o sin fecha; SUP-02, fecha límite vencida sin resultado (S-003); SUP-03, invalidado sin decisión, riesgo, issue ni cambio (S-002). D-001 (el caso usa 13,5 %) y D-002 (prueba replanificada) la dejan en 0 avisos: a mano, la fecha vence y nadie se entera, o el resultado malo se archiva.</a:t>
             </a:r>
             <a:endParaRPr lang="en-US" dirty="0"/>
           </a:p>
@@ -882,7 +882,7 @@
           <a:p>
             <a:r>
               <a:rPr lang="en-US" dirty="0"/>
-              <a:t>Esto es lo que a mano se pierde: la fecha vence y nadie se entera, o el resultado malo se archiva. Acá cada corrida de sanidad lo muestra hasta que alguien decide.</a:t>
+              <a:t>Paso 4, en vivo o con la evidencia: pm-caso-de-negocio escribe los flujos en un CSV por concepto y corre inversion.py, que imprime las fórmulas, el VAN, la TIR, el repago y la sensibilidad. Opción 1: VAN 265.681 → 106.468, TIR 117,5 %, repago 0,83 años; opción 2: 431.782 → 272.569, TIR 54,3 %, repago 1,78 años; la opción 0 es la base (VAN 0). Las dos bajan lo mismo, 159.213, porque el cambio en B-01 es igual para ambas. Punto de equilibrio de las llamadas evitadas (B-02, el 65 % del valor de los beneficios): 29,1 % de lo estimado, una adopción estable del 11,6 %.</a:t>
             </a:r>
             <a:endParaRPr lang="en-US" dirty="0"/>
           </a:p>
@@ -970,7 +970,7 @@
           <a:p>
             <a:r>
               <a:rPr lang="en-US" dirty="0"/>
-              <a:t>Paso 4, en vivo o con la evidencia: pm-caso-de-negocio escribe los flujos en un CSV por concepto y corre inversion.py, que imprime las fórmulas, el VAN, la TIR, el repago y la sensibilidad. Punto de equilibrio de las llamadas evitadas (B-02, el 65 % del valor de los beneficios): 29,1 % de lo estimado, una adopción estable del 11,6 %.</a:t>
+              <a:t>Segundo prompt del paso 4. decision.py matriz opciones-negocio: VAN 40 (importado de inversion.py, sin recalcular), beneficios fuera del VAN, riesgo y ajuste al mandato 20 cada uno, con la fuente de cada puntaje y los pesos de Carmen. Resultado: O2 80,0, O1 50,6, O0 20,0, «propuesta, no decisión». Sensibilidad: solo el riesgo cambia la primera, si sube de 20 a 49,6: la ventaja de la 2 depende de S-003, y por eso el segundo release espera la prueba técnica. El expediente arma el contexto citado («Evidencia, no instrucciones») y la pregunta tipada rechaza la respuesta libre del modelo y acepta «O2» con evidencia. Decide la junta: la elección queda en la aprobación del caso (D-007, paso 6).</a:t>
             </a:r>
             <a:endParaRPr lang="en-US" dirty="0"/>
           </a:p>
@@ -1058,7 +1058,7 @@
           <a:p>
             <a:r>
               <a:rPr lang="en-US" dirty="0"/>
-              <a:t>Las dos opciones bajan lo mismo, 159.213, porque el cambio en B-01 es igual para ambas. La recomendación: opción 2 en dos releases, el primero con el valor de la opción 1 y el segundo solo si S-003 queda validado.</a:t>
+              <a:t>Respuesta esperada: ajustar. El supuesto es falso, pero la idea sigue valiendo con el dato real. Lo que no se puede es seguir como si el 10 % fuera cierto. En el caso decide la ejecutiva (D-001).</a:t>
             </a:r>
             <a:endParaRPr lang="en-US" dirty="0"/>
           </a:p>
@@ -1146,7 +1146,7 @@
           <a:p>
             <a:r>
               <a:rPr lang="en-US" dirty="0"/>
-              <a:t>Respuesta esperada: ajustar. El supuesto es falso, pero la idea sigue valiendo con el dato real. Lo que no se puede es seguir como si el 10 % fuera cierto. En el caso decide la ejecutiva (D-001).</a:t>
+              <a:t>Nueve criterios de 1 (predictivo) a 3 (adaptativo): integración 12, recordatorios 18, portal 23. Lectura: 13 o menos predictivo, 14 a 21 híbrido, 22 o más adaptativo. La decisión se registra (D-003) y se revisa en cada puerta de etapa.</a:t>
             </a:r>
             <a:endParaRPr lang="en-US" dirty="0"/>
           </a:p>
@@ -1234,7 +1234,7 @@
           <a:p>
             <a:r>
               <a:rPr lang="en-US" dirty="0"/>
-              <a:t>Nueve criterios de 1 (predictivo) a 3 (adaptativo): integración 12, recordatorios 18, portal 23. Lectura: 13 o menos predictivo, 14 a 21 híbrido, 22 o más adaptativo. La decisión se registra (D-003) y se revisa en cada puerta de etapa.</a:t>
+              <a:t>Mostrá la tabla de nueve criterios y el comando que registra pm-director: estado.py set enfoque_entrega=hibrido --por "Ejecutiva: Carmen Olivera". El mismo comando anota la decisión D-003 en decisiones.csv. Después, con la evidencia, la puerta autorizar-inicio del paso 6 (D-005).</a:t>
             </a:r>
             <a:endParaRPr lang="en-US" dirty="0"/>
           </a:p>
@@ -1322,7 +1322,7 @@
           <a:p>
             <a:r>
               <a:rPr lang="en-US" dirty="0"/>
-              <a:t>Mostrá la tabla de nueve criterios y el comando que registra pm-director: estado.py set enfoque_entrega=hibrido --por "Ejecutiva: Carmen Olivera". El mismo comando anota la decisión D-003 en decisiones.csv. Después, con la evidencia, la puerta autorizar-inicio del paso 6 (D-004).</a:t>
+              <a:t>Paso 5b, con la evidencia. Turnos en línea es a medida y se construye (23, adaptativo); recordatorios ya es producto y se compra (18, híbrido); el adaptador se escribe a medida pero depende de la agenda del proveedor, que tiene inercia (12, predictivo). La sanidad al 2026-12-09 marca MAP-02 (inercia sin riesgo) y MAP-03 (el dolor de cancelar solo llamando, sin tratamiento); se resuelven con R-001 en el paso 9 y con REQ-003 y REQ-005 en el paso 6.</a:t>
             </a:r>
             <a:endParaRPr lang="en-US" dirty="0"/>
           </a:p>
@@ -1410,7 +1410,7 @@
           <a:p>
             <a:r>
               <a:rPr lang="en-US" dirty="0"/>
-              <a:t>Paso 5b, con la evidencia. Turnos en línea es a medida y se construye (23, adaptativo); recordatorios ya es producto y se compra (18, híbrido); el adaptador se escribe a medida pero depende de la agenda del proveedor, que tiene inercia (12, predictivo). La sanidad al 2026-12-09 marca MAP-02 (inercia sin riesgo) y MAP-03 (el dolor de cancelar solo llamando, sin tratamiento); se resuelven con R-001 en el paso 9 y con REQ-003 y REQ-005 en el paso 6.</a:t>
+              <a:t>Seis pasos del recorrido actual, cada emoción con su fuente. Los dos peores momentos (−2) son olvidar el turno, con el ausentismo del 18 % como métrica, e intentar cancelar fuera de horario. La línea punteada es la emoción esperada con los arreglos; el carril de backstage muestra que nadie reasigna el turno perdido.</a:t>
             </a:r>
             <a:endParaRPr lang="en-US" dirty="0"/>
           </a:p>
@@ -1498,7 +1498,7 @@
           <a:p>
             <a:r>
               <a:rPr lang="en-US" dirty="0"/>
-              <a:t>Seis pasos del recorrido actual, cada emoción con su fuente. Los dos peores momentos (−2) son olvidar el turno, con el ausentismo del 18 % como métrica, e intentar cancelar fuera de horario. La línea punteada es la emoción esperada con los arreglos; el carril de backstage muestra que nadie reasigna el turno perdido.</a:t>
+              <a:t>Paso 5b, con la evidencia. decision.py matriz hacer-comprar-c2 --criterios hacer-o-comprar, con entregables:C2 en los ids: seis criterios (diferenciación 15, costo total 25, tiempo hasta disponible 20, dependencia del proveedor 15, capacidad interna 10, riesgo commodity 15) con la fuente de cada puntaje y los pesos de Carmen. O1 comprar 78,8, O3 tercerizar 52,3 (dominada por O1), O2 construir 28,7. La sección 10 del expediente trae C2 (producto 0,62, «comprar», sin inercia) y el paso P4 del recorrido (−2, Kano obligatorio): contexto, no criterio. Carmen elige O1 (D-004, nivel ejecutivo) y la decisión queda citada en C2 con mapas.py vincular; si C2 hubiera estado marcado construir, eso cerraría MAP-01.</a:t>
             </a:r>
             <a:endParaRPr lang="en-US" dirty="0"/>
           </a:p>
@@ -1586,7 +1586,7 @@
           <a:p>
             <a:r>
               <a:rPr lang="en-US" dirty="0"/>
-              <a:t>Clase 1 (90 minutos): ¿Vale la pena?. Objetivos: Partir de las lecciones aprobadas de otros proyectos y armar un mapa de supuestos para elegir dónde invertir primero en aprender; Diseñar un experimento barato con criterio previo y llevar el resultado al caso; Comparar opciones contra no hacer nada con VAN, TIR, repago y punto de equilibrio; Elegir el enfoque de entrega por entregable con criterios y contrastarlo con un mapa de Wardley.</a:t>
+              <a:t>Clase 1 (90 minutos): ¿Vale la pena?. Objetivos: Partir de las lecciones aprobadas de otros proyectos y armar un mapa de supuestos para elegir dónde invertir primero en aprender; Diseñar un experimento barato con criterio previo y llevar el resultado al caso; Comparar opciones contra no hacer nada con VAN, TIR, repago y punto de equilibrio, y con una matriz de pesos explícitos y su sensibilidad; Elegir el enfoque de entrega por entregable con criterios y contrastarlo con un mapa de Wardley.</a:t>
             </a:r>
             <a:endParaRPr lang="en-US" dirty="0"/>
           </a:p>
@@ -1938,7 +1938,7 @@
           <a:p>
             <a:r>
               <a:rPr lang="en-US" dirty="0"/>
-              <a:t>Clase 2 (90 minutos): Diseñar el proyecto. Objetivos: Definir beneficios con dueño, línea base y fecha; Separar contingencia, reserva de gestión y presupuesto de cambio; Adaptar la formalidad de la gestión al contexto; Mapear cada requisito a la persona de usuario que lo pide, lo usa o lo aprovecha (STK-13); Llevar el proyecto a autorizar-proyecto sin hipótesis ocultas: validar o aceptar por escrito (P-11).</a:t>
+              <a:t>Clase 2 (90 minutos): Diseñar el proyecto. Objetivos: Definir beneficios con dueño, línea base y fecha; Separar contingencia, reserva de gestión y presupuesto de cambio; Adaptar la formalidad de la gestión al contexto; Mapear cada requisito a la persona de usuario que lo pide, lo usa o lo aprovecha (STK-13); Llevar el proyecto a autorizar-proyecto sin hipótesis ocultas: validar o aceptar por escrito (P-11), con fecha de revisión (DEC-06).</a:t>
             </a:r>
             <a:endParaRPr lang="en-US" dirty="0"/>
           </a:p>
@@ -2642,7 +2642,7 @@
           <a:p>
             <a:r>
               <a:rPr lang="en-US" dirty="0"/>
-              <a:t>Es la regla de SPEC §1.10.6 que aplica pm-costos-presupuesto. La junta los fija con estado.py presupuesto (D-007) y desde ahí la sanidad vigila el consumo con CAM-03 y la autoridad con CAM-04.</a:t>
+              <a:t>Es la regla de SPEC §1.10.6 que aplica pm-costos-presupuesto. La junta los fija con estado.py presupuesto (D-008) y desde ahí la sanidad vigila el consumo con CAM-03 y la autoridad con CAM-04.</a:t>
             </a:r>
             <a:endParaRPr lang="en-US" dirty="0"/>
           </a:p>
@@ -3434,7 +3434,7 @@
           <a:p>
             <a:r>
               <a:rPr lang="en-US" dirty="0"/>
-              <a:t>Sanidad al 2027-01-14 en 0 avisos; verificación con 1 bloqueo (L-01: la lista, que se arma en la junta) y la condición P-11. Después del segundo prompt: S-003 validado, D-009 y el aviso P-11 con S-006 (D-009); la puerta queda aprobada (D-010) y el resumen dice Autorizado: sí.</a:t>
+              <a:t>Sanidad al 2027-01-14 en 0 avisos; verificación con 1 bloqueo (L-01: la lista, que se arma en la junta) y la condición P-11. Después del segundo prompt: S-003 validado, D-010 y el aviso P-11 con S-006 (D-010); la puerta queda aprobada (D-011) y el resumen dice Autorizado: sí. Con el tercer prompt, la revisión del enfoque en la puerta: D-021, nivel junta, reemplaza a D-003, y decision.py vigentes --tema «enfoque de entrega» muestra «cadena D-003 → D-021» (también con «delivery approach»): D-003 no se borra, queda como historia.</a:t>
             </a:r>
             <a:endParaRPr lang="en-US" dirty="0"/>
           </a:p>
@@ -3610,7 +3610,7 @@
           <a:p>
             <a:r>
               <a:rPr lang="en-US" dirty="0"/>
-              <a:t>VAN 263.229 con el presupuesto real (TIR 51,1 %), 4 de 4 supuestos críticos tratados (2 validados, 1 ajustado, 1 aceptado con D-009), presupuesto autorizado 179.340, enfoque híbrido, tolerancia de costo ±10 % y la puerta aprobada el 2027-01-15 con P-11 en aviso. La tarjeta de la puerta sale de puertas.py verificar --json. El tablero de mapas (g5-tablero-mapas.png, paso 14) cierra igual: 0 avisos MAP, la agenda con «inercia → R-001», cada dolor del paciente con su tratamiento y las lecciones L-002 y L-003 en accionada-proyecto entre los vínculos citados.</a:t>
+              <a:t>VAN 263.229 con el presupuesto real (TIR 51,1 %), 4 de 4 supuestos críticos tratados (2 validados, 1 ajustado, 1 aceptado con D-010), presupuesto autorizado 179.340, enfoque híbrido, tolerancia de costo ±10 % y la puerta aprobada el 2027-01-15 con P-11 en aviso. La tarjeta de la puerta sale de puertas.py verificar --json. El tablero de mapas (g5-tablero-mapas.png, paso 14) cierra igual: 0 avisos MAP, la agenda con «inercia → R-001», cada dolor del paciente con su tratamiento y las lecciones L-002 y L-003 en accionada-proyecto entre los vínculos citados.</a:t>
             </a:r>
             <a:endParaRPr lang="en-US" dirty="0"/>
           </a:p>
@@ -3698,7 +3698,7 @@
           <a:p>
             <a:r>
               <a:rPr lang="en-US" dirty="0"/>
-              <a:t>Prompt: «Corré la sanidad al 2027-02-01. ¿Qué tengo que decidir, escalar y desbloquear hoy?». pm-orquestador corre estado.py radar --corte 2027-02-01, de solo lectura: cada ítem con su regla, responsable y siguiente paso, en un orden reproducible. Escalar una excepción no corresponde: nada fuera de tolerancia ni presupuesto agotado; la opción es el highlight. Lo que la junta aceptó sigue bajo control continuo sin que nadie tenga que acordarse.</a:t>
+              <a:t>Prompt: «Corré la sanidad al 2027-02-01. ¿Qué tengo que decidir, escalar y desbloquear hoy? ¿Qué decisiones sobre S-006 siguen vigentes?». DEC-06 y SUP-02 cuentan lo mismo desde dos lados: la aceptación de la junta (D-010) pedía revisarse el 2027-01-29 y el dictamen no llegó; decision.py vigentes --ids S-006 muestra D-010 «VENCIDA: DEC-06». pm-orquestador corre estado.py radar --corte 2027-02-01, de solo lectura: cada ítem con su regla, responsable y siguiente paso, en un orden reproducible. Escalar una excepción no corresponde: nada fuera de tolerancia ni presupuesto agotado; la opción es el highlight. Lo que la junta aceptó sigue bajo control continuo sin que nadie tenga que acordarse.</a:t>
             </a:r>
             <a:endParaRPr lang="en-US" dirty="0"/>
           </a:p>
@@ -4809,7 +4809,7 @@
                   <a:srgbClr val="D6E4F0"/>
                 </a:solidFill>
               </a:rPr>
-              <a:t>pm-method 2.5.0 · Webinar E2E-5 · Clase 1</a:t>
+              <a:t>pm-method 2.6.0 · Webinar E2E-5 · Clase 1</a:t>
             </a:r>
             <a:endParaRPr lang="en-US" sz="1000" dirty="0"/>
           </a:p>
@@ -5049,7 +5049,7 @@
                   <a:srgbClr val="696969"/>
                 </a:solidFill>
               </a:rPr>
-              <a:t>pm-method 2.5.0 · Webinar E2E-5 · Clase 2</a:t>
+              <a:t>pm-method 2.6.0 · Webinar E2E-5 · Clase 2</a:t>
             </a:r>
             <a:endParaRPr lang="en-US" sz="1000" dirty="0"/>
           </a:p>
@@ -5267,7 +5267,7 @@
                   <a:srgbClr val="D6E4F0"/>
                 </a:solidFill>
               </a:rPr>
-              <a:t>pm-method 2.5.0 · Webinar E2E-5 · Clase 2</a:t>
+              <a:t>pm-method 2.6.0 · Webinar E2E-5 · Clase 2</a:t>
             </a:r>
             <a:endParaRPr lang="en-US" sz="1000" dirty="0"/>
           </a:p>
@@ -5485,7 +5485,7 @@
                   <a:srgbClr val="D6E4F0"/>
                 </a:solidFill>
               </a:rPr>
-              <a:t>pm-method 2.5.0 · Webinar E2E-5 · Clase 2</a:t>
+              <a:t>pm-method 2.6.0 · Webinar E2E-5 · Clase 2</a:t>
             </a:r>
             <a:endParaRPr lang="en-US" sz="1000" dirty="0"/>
           </a:p>
@@ -5703,7 +5703,7 @@
                   <a:srgbClr val="D6E4F0"/>
                 </a:solidFill>
               </a:rPr>
-              <a:t>pm-method 2.5.0 · Webinar E2E-5 · Clase 2</a:t>
+              <a:t>pm-method 2.6.0 · Webinar E2E-5 · Clase 2</a:t>
             </a:r>
             <a:endParaRPr lang="en-US" sz="1000" dirty="0"/>
           </a:p>
@@ -5879,7 +5879,7 @@
                   <a:srgbClr val="D6E4F0"/>
                 </a:solidFill>
               </a:rPr>
-              <a:t>pm-method 2.5.0 · Webinar E2E-5</a:t>
+              <a:t>pm-method 2.6.0 · Webinar E2E-5</a:t>
             </a:r>
             <a:endParaRPr lang="en-US" sz="1000" dirty="0"/>
           </a:p>
@@ -6074,7 +6074,7 @@
                   <a:srgbClr val="696969"/>
                 </a:solidFill>
               </a:rPr>
-              <a:t>pm-method 2.5.0 · Webinar E2E-5</a:t>
+              <a:t>pm-method 2.6.0 · Webinar E2E-5</a:t>
             </a:r>
             <a:endParaRPr lang="en-US" sz="1000" dirty="0"/>
           </a:p>
@@ -6292,7 +6292,7 @@
                   <a:srgbClr val="D6E4F0"/>
                 </a:solidFill>
               </a:rPr>
-              <a:t>pm-method 2.5.0 · Webinar E2E-5</a:t>
+              <a:t>pm-method 2.6.0 · Webinar E2E-5</a:t>
             </a:r>
             <a:endParaRPr lang="en-US" sz="1000" dirty="0"/>
           </a:p>
@@ -6510,7 +6510,7 @@
                   <a:srgbClr val="D6E4F0"/>
                 </a:solidFill>
               </a:rPr>
-              <a:t>pm-method 2.5.0 · Webinar E2E-5</a:t>
+              <a:t>pm-method 2.6.0 · Webinar E2E-5</a:t>
             </a:r>
             <a:endParaRPr lang="en-US" sz="1000" dirty="0"/>
           </a:p>
@@ -6728,7 +6728,7 @@
                   <a:srgbClr val="D6E4F0"/>
                 </a:solidFill>
               </a:rPr>
-              <a:t>pm-method 2.5.0 · Webinar E2E-5</a:t>
+              <a:t>pm-method 2.6.0 · Webinar E2E-5</a:t>
             </a:r>
             <a:endParaRPr lang="en-US" sz="1000" dirty="0"/>
           </a:p>
@@ -6968,7 +6968,7 @@
                   <a:srgbClr val="696969"/>
                 </a:solidFill>
               </a:rPr>
-              <a:t>pm-method 2.5.0 · Webinar E2E-5 · Clase 1</a:t>
+              <a:t>pm-method 2.6.0 · Webinar E2E-5 · Clase 1</a:t>
             </a:r>
             <a:endParaRPr lang="en-US" sz="1000" dirty="0"/>
           </a:p>
@@ -7186,7 +7186,7 @@
                   <a:srgbClr val="D6E4F0"/>
                 </a:solidFill>
               </a:rPr>
-              <a:t>pm-method 2.5.0 · Webinar E2E-5 · Clase 1</a:t>
+              <a:t>pm-method 2.6.0 · Webinar E2E-5 · Clase 1</a:t>
             </a:r>
             <a:endParaRPr lang="en-US" sz="1000" dirty="0"/>
           </a:p>
@@ -7404,7 +7404,7 @@
                   <a:srgbClr val="D6E4F0"/>
                 </a:solidFill>
               </a:rPr>
-              <a:t>pm-method 2.5.0 · Webinar E2E-5 · Clase 1</a:t>
+              <a:t>pm-method 2.6.0 · Webinar E2E-5 · Clase 1</a:t>
             </a:r>
             <a:endParaRPr lang="en-US" sz="1000" dirty="0"/>
           </a:p>
@@ -7848,7 +7848,7 @@
                 <a:ea typeface="Arial" pitchFamily="34" charset="-122"/>
                 <a:cs typeface="Arial" pitchFamily="34" charset="-120"/>
               </a:rPr>
-              <a:t>Webinar · pm-method 2.5.0 · E2E-5</a:t>
+              <a:t>Webinar · pm-method 2.6.0 · E2E-5</a:t>
             </a:r>
             <a:endParaRPr lang="en-US" sz="1600" dirty="0"/>
           </a:p>
@@ -9923,7 +9923,7 @@
               <a:buNone/>
             </a:pPr>
             <a:r>
-              <a:rPr lang="en-US" sz="2400" b="1" dirty="0">
+              <a:rPr lang="en-US" sz="2350" b="1" dirty="0">
                 <a:solidFill>
                   <a:srgbClr val="FFFFFF"/>
                 </a:solidFill>
@@ -9931,671 +9931,62 @@
                 <a:ea typeface="Arial" pitchFamily="34" charset="-122"/>
                 <a:cs typeface="Arial" pitchFamily="34" charset="-120"/>
               </a:rPr>
-              <a:t>Lo que vigila la sanidad</a:t>
+              <a:t>El piloto bajó el VAN; la opción 2 sigue siendo la mejor</a:t>
             </a:r>
             <a:endParaRPr lang="en-US" sz="2400" dirty="0"/>
           </a:p>
         </p:txBody>
       </p:sp>
-      <p:sp>
-        <p:nvSpPr>
-          <p:cNvPr id="3" name="Shape 1"/>
+      <p:pic>
+        <p:nvPicPr>
+          <p:cNvPr id="3" name="Image 0" descr="El piloto bajó el VAN; la opción 2 sigue siendo la mejor">    </p:cNvPr>
+          <p:cNvPicPr>
+            <a:picLocks noChangeAspect="1"/>
+          </p:cNvPicPr>
+          <p:nvPr/>
+        </p:nvPicPr>
+        <p:blipFill>
+          <a:blip r:embed="rId1"/>
+          <a:stretch>
+            <a:fillRect/>
+          </a:stretch>
+        </p:blipFill>
+        <p:spPr>
+          <a:xfrm>
+            <a:off x="1705356" y="1280160"/>
+            <a:ext cx="8778240" cy="4937760"/>
+          </a:xfrm>
+          <a:prstGeom prst="rect">
+            <a:avLst/>
+          </a:prstGeom>
+        </p:spPr>
+      </p:pic>
+      <p:sp>
+        <p:nvSpPr>
+          <p:cNvPr id="4" name="Shape 1"/>
           <p:cNvSpPr/>
           <p:nvPr/>
         </p:nvSpPr>
         <p:spPr>
           <a:xfrm>
-            <a:off x="457200" y="1280160"/>
-            <a:ext cx="11274552" cy="870509"/>
-          </a:xfrm>
-          <a:prstGeom prst="roundRect">
-            <a:avLst>
-              <a:gd name="adj" fmla="val 10504"/>
-            </a:avLst>
+            <a:off x="1705356" y="1280160"/>
+            <a:ext cx="8778240" cy="4937760"/>
+          </a:xfrm>
+          <a:prstGeom prst="rect">
+            <a:avLst/>
           </a:prstGeom>
           <a:solidFill>
-            <a:srgbClr val="E9F1F8"/>
+            <a:srgbClr val="FFFFFF">
+              <a:alpha val="0"/>
+            </a:srgbClr>
           </a:solidFill>
-          <a:ln w="12700">
+          <a:ln w="9525">
             <a:solidFill>
-              <a:srgbClr val="E9F1F8"/>
+              <a:srgbClr val="E2E2E6"/>
             </a:solidFill>
             <a:prstDash val="solid"/>
           </a:ln>
         </p:spPr>
-      </p:sp>
-      <p:sp>
-        <p:nvSpPr>
-          <p:cNvPr id="4" name="Shape 2"/>
-          <p:cNvSpPr/>
-          <p:nvPr/>
-        </p:nvSpPr>
-        <p:spPr>
-          <a:xfrm>
-            <a:off x="621792" y="1486814"/>
-            <a:ext cx="457200" cy="457200"/>
-          </a:xfrm>
-          <a:prstGeom prst="roundRect">
-            <a:avLst>
-              <a:gd name="adj" fmla="val 16000"/>
-            </a:avLst>
-          </a:prstGeom>
-          <a:solidFill>
-            <a:srgbClr val="00629B"/>
-          </a:solidFill>
-          <a:ln w="12700">
-            <a:solidFill>
-              <a:srgbClr val="00629B"/>
-            </a:solidFill>
-            <a:prstDash val="solid"/>
-          </a:ln>
-        </p:spPr>
-      </p:sp>
-      <p:sp>
-        <p:nvSpPr>
-          <p:cNvPr id="5" name="Text 3"/>
-          <p:cNvSpPr txBox="1"/>
-          <p:nvPr/>
-        </p:nvSpPr>
-        <p:spPr>
-          <a:xfrm>
-            <a:off x="621792" y="1486814"/>
-            <a:ext cx="457200" cy="457200"/>
-          </a:xfrm>
-          <a:prstGeom prst="rect">
-            <a:avLst/>
-          </a:prstGeom>
-          <a:noFill/>
-          <a:ln/>
-        </p:spPr>
-        <p:txBody>
-          <a:bodyPr wrap="square" lIns="0" tIns="0" rIns="0" bIns="0" rtlCol="0" anchor="ctr"/>
-          <a:lstStyle/>
-          <a:p>
-            <a:pPr algn="ctr" indent="0" marL="0">
-              <a:buNone/>
-            </a:pPr>
-            <a:r>
-              <a:rPr lang="en-US" sz="1600" b="1" dirty="0">
-                <a:solidFill>
-                  <a:srgbClr val="FFFFFF"/>
-                </a:solidFill>
-                <a:latin typeface="Arial" pitchFamily="34" charset="0"/>
-                <a:ea typeface="Arial" pitchFamily="34" charset="-122"/>
-                <a:cs typeface="Arial" pitchFamily="34" charset="-120"/>
-              </a:rPr>
-              <a:t>1</a:t>
-            </a:r>
-            <a:endParaRPr lang="en-US" sz="1600" dirty="0"/>
-          </a:p>
-        </p:txBody>
-      </p:sp>
-      <p:sp>
-        <p:nvSpPr>
-          <p:cNvPr id="6" name="Text 4"/>
-          <p:cNvSpPr txBox="1"/>
-          <p:nvPr/>
-        </p:nvSpPr>
-        <p:spPr>
-          <a:xfrm>
-            <a:off x="1280160" y="1335024"/>
-            <a:ext cx="10222992" cy="760781"/>
-          </a:xfrm>
-          <a:prstGeom prst="rect">
-            <a:avLst/>
-          </a:prstGeom>
-          <a:noFill/>
-          <a:ln/>
-        </p:spPr>
-        <p:txBody>
-          <a:bodyPr wrap="square" lIns="0" tIns="0" rIns="0" bIns="0" rtlCol="0" anchor="ctr"/>
-          <a:lstStyle/>
-          <a:p>
-            <a:pPr indent="0" marL="0">
-              <a:buNone/>
-            </a:pPr>
-            <a:r>
-              <a:rPr lang="en-US" sz="2000" dirty="0">
-                <a:solidFill>
-                  <a:srgbClr val="272425"/>
-                </a:solidFill>
-                <a:latin typeface="Arial" pitchFamily="34" charset="0"/>
-                <a:ea typeface="Arial" pitchFamily="34" charset="-122"/>
-                <a:cs typeface="Arial" pitchFamily="34" charset="-120"/>
-              </a:rPr>
-              <a:t>SUP-01: supuesto crítico sin experimento o sin fecha</a:t>
-            </a:r>
-            <a:endParaRPr lang="en-US" sz="1600" dirty="0"/>
-          </a:p>
-        </p:txBody>
-      </p:sp>
-      <p:sp>
-        <p:nvSpPr>
-          <p:cNvPr id="7" name="Shape 5"/>
-          <p:cNvSpPr/>
-          <p:nvPr/>
-        </p:nvSpPr>
-        <p:spPr>
-          <a:xfrm>
-            <a:off x="457200" y="2296973"/>
-            <a:ext cx="11274552" cy="870509"/>
-          </a:xfrm>
-          <a:prstGeom prst="roundRect">
-            <a:avLst>
-              <a:gd name="adj" fmla="val 10504"/>
-            </a:avLst>
-          </a:prstGeom>
-          <a:solidFill>
-            <a:srgbClr val="F4F6F8"/>
-          </a:solidFill>
-          <a:ln w="12700">
-            <a:solidFill>
-              <a:srgbClr val="F4F6F8"/>
-            </a:solidFill>
-            <a:prstDash val="solid"/>
-          </a:ln>
-        </p:spPr>
-      </p:sp>
-      <p:sp>
-        <p:nvSpPr>
-          <p:cNvPr id="8" name="Shape 6"/>
-          <p:cNvSpPr/>
-          <p:nvPr/>
-        </p:nvSpPr>
-        <p:spPr>
-          <a:xfrm>
-            <a:off x="621792" y="2503627"/>
-            <a:ext cx="457200" cy="457200"/>
-          </a:xfrm>
-          <a:prstGeom prst="roundRect">
-            <a:avLst>
-              <a:gd name="adj" fmla="val 16000"/>
-            </a:avLst>
-          </a:prstGeom>
-          <a:solidFill>
-            <a:srgbClr val="00629B"/>
-          </a:solidFill>
-          <a:ln w="12700">
-            <a:solidFill>
-              <a:srgbClr val="00629B"/>
-            </a:solidFill>
-            <a:prstDash val="solid"/>
-          </a:ln>
-        </p:spPr>
-      </p:sp>
-      <p:sp>
-        <p:nvSpPr>
-          <p:cNvPr id="9" name="Text 7"/>
-          <p:cNvSpPr txBox="1"/>
-          <p:nvPr/>
-        </p:nvSpPr>
-        <p:spPr>
-          <a:xfrm>
-            <a:off x="621792" y="2503627"/>
-            <a:ext cx="457200" cy="457200"/>
-          </a:xfrm>
-          <a:prstGeom prst="rect">
-            <a:avLst/>
-          </a:prstGeom>
-          <a:noFill/>
-          <a:ln/>
-        </p:spPr>
-        <p:txBody>
-          <a:bodyPr wrap="square" lIns="0" tIns="0" rIns="0" bIns="0" rtlCol="0" anchor="ctr"/>
-          <a:lstStyle/>
-          <a:p>
-            <a:pPr algn="ctr" indent="0" marL="0">
-              <a:buNone/>
-            </a:pPr>
-            <a:r>
-              <a:rPr lang="en-US" sz="1600" b="1" dirty="0">
-                <a:solidFill>
-                  <a:srgbClr val="FFFFFF"/>
-                </a:solidFill>
-                <a:latin typeface="Arial" pitchFamily="34" charset="0"/>
-                <a:ea typeface="Arial" pitchFamily="34" charset="-122"/>
-                <a:cs typeface="Arial" pitchFamily="34" charset="-120"/>
-              </a:rPr>
-              <a:t>2</a:t>
-            </a:r>
-            <a:endParaRPr lang="en-US" sz="1600" dirty="0"/>
-          </a:p>
-        </p:txBody>
-      </p:sp>
-      <p:sp>
-        <p:nvSpPr>
-          <p:cNvPr id="10" name="Text 8"/>
-          <p:cNvSpPr txBox="1"/>
-          <p:nvPr/>
-        </p:nvSpPr>
-        <p:spPr>
-          <a:xfrm>
-            <a:off x="1280160" y="2351837"/>
-            <a:ext cx="10222992" cy="760781"/>
-          </a:xfrm>
-          <a:prstGeom prst="rect">
-            <a:avLst/>
-          </a:prstGeom>
-          <a:noFill/>
-          <a:ln/>
-        </p:spPr>
-        <p:txBody>
-          <a:bodyPr wrap="square" lIns="0" tIns="0" rIns="0" bIns="0" rtlCol="0" anchor="ctr"/>
-          <a:lstStyle/>
-          <a:p>
-            <a:pPr indent="0" marL="0">
-              <a:buNone/>
-            </a:pPr>
-            <a:r>
-              <a:rPr lang="en-US" sz="2000" dirty="0">
-                <a:solidFill>
-                  <a:srgbClr val="272425"/>
-                </a:solidFill>
-                <a:latin typeface="Arial" pitchFamily="34" charset="0"/>
-                <a:ea typeface="Arial" pitchFamily="34" charset="-122"/>
-                <a:cs typeface="Arial" pitchFamily="34" charset="-120"/>
-              </a:rPr>
-              <a:t>SUP-02: fecha límite vencida sin resultado (S-003)</a:t>
-            </a:r>
-            <a:endParaRPr lang="en-US" sz="1600" dirty="0"/>
-          </a:p>
-        </p:txBody>
-      </p:sp>
-      <p:sp>
-        <p:nvSpPr>
-          <p:cNvPr id="11" name="Shape 9"/>
-          <p:cNvSpPr/>
-          <p:nvPr/>
-        </p:nvSpPr>
-        <p:spPr>
-          <a:xfrm>
-            <a:off x="457200" y="3313786"/>
-            <a:ext cx="11274552" cy="870509"/>
-          </a:xfrm>
-          <a:prstGeom prst="roundRect">
-            <a:avLst>
-              <a:gd name="adj" fmla="val 10504"/>
-            </a:avLst>
-          </a:prstGeom>
-          <a:solidFill>
-            <a:srgbClr val="E9F1F8"/>
-          </a:solidFill>
-          <a:ln w="12700">
-            <a:solidFill>
-              <a:srgbClr val="E9F1F8"/>
-            </a:solidFill>
-            <a:prstDash val="solid"/>
-          </a:ln>
-        </p:spPr>
-      </p:sp>
-      <p:sp>
-        <p:nvSpPr>
-          <p:cNvPr id="12" name="Shape 10"/>
-          <p:cNvSpPr/>
-          <p:nvPr/>
-        </p:nvSpPr>
-        <p:spPr>
-          <a:xfrm>
-            <a:off x="621792" y="3520440"/>
-            <a:ext cx="457200" cy="457200"/>
-          </a:xfrm>
-          <a:prstGeom prst="roundRect">
-            <a:avLst>
-              <a:gd name="adj" fmla="val 16000"/>
-            </a:avLst>
-          </a:prstGeom>
-          <a:solidFill>
-            <a:srgbClr val="00629B"/>
-          </a:solidFill>
-          <a:ln w="12700">
-            <a:solidFill>
-              <a:srgbClr val="00629B"/>
-            </a:solidFill>
-            <a:prstDash val="solid"/>
-          </a:ln>
-        </p:spPr>
-      </p:sp>
-      <p:sp>
-        <p:nvSpPr>
-          <p:cNvPr id="13" name="Text 11"/>
-          <p:cNvSpPr txBox="1"/>
-          <p:nvPr/>
-        </p:nvSpPr>
-        <p:spPr>
-          <a:xfrm>
-            <a:off x="621792" y="3520440"/>
-            <a:ext cx="457200" cy="457200"/>
-          </a:xfrm>
-          <a:prstGeom prst="rect">
-            <a:avLst/>
-          </a:prstGeom>
-          <a:noFill/>
-          <a:ln/>
-        </p:spPr>
-        <p:txBody>
-          <a:bodyPr wrap="square" lIns="0" tIns="0" rIns="0" bIns="0" rtlCol="0" anchor="ctr"/>
-          <a:lstStyle/>
-          <a:p>
-            <a:pPr algn="ctr" indent="0" marL="0">
-              <a:buNone/>
-            </a:pPr>
-            <a:r>
-              <a:rPr lang="en-US" sz="1600" b="1" dirty="0">
-                <a:solidFill>
-                  <a:srgbClr val="FFFFFF"/>
-                </a:solidFill>
-                <a:latin typeface="Arial" pitchFamily="34" charset="0"/>
-                <a:ea typeface="Arial" pitchFamily="34" charset="-122"/>
-                <a:cs typeface="Arial" pitchFamily="34" charset="-120"/>
-              </a:rPr>
-              <a:t>3</a:t>
-            </a:r>
-            <a:endParaRPr lang="en-US" sz="1600" dirty="0"/>
-          </a:p>
-        </p:txBody>
-      </p:sp>
-      <p:sp>
-        <p:nvSpPr>
-          <p:cNvPr id="14" name="Text 12"/>
-          <p:cNvSpPr txBox="1"/>
-          <p:nvPr/>
-        </p:nvSpPr>
-        <p:spPr>
-          <a:xfrm>
-            <a:off x="1280160" y="3368650"/>
-            <a:ext cx="10222992" cy="760781"/>
-          </a:xfrm>
-          <a:prstGeom prst="rect">
-            <a:avLst/>
-          </a:prstGeom>
-          <a:noFill/>
-          <a:ln/>
-        </p:spPr>
-        <p:txBody>
-          <a:bodyPr wrap="square" lIns="0" tIns="0" rIns="0" bIns="0" rtlCol="0" anchor="ctr"/>
-          <a:lstStyle/>
-          <a:p>
-            <a:pPr indent="0" marL="0">
-              <a:buNone/>
-            </a:pPr>
-            <a:r>
-              <a:rPr lang="en-US" sz="2000" dirty="0">
-                <a:solidFill>
-                  <a:srgbClr val="272425"/>
-                </a:solidFill>
-                <a:latin typeface="Arial" pitchFamily="34" charset="0"/>
-                <a:ea typeface="Arial" pitchFamily="34" charset="-122"/>
-                <a:cs typeface="Arial" pitchFamily="34" charset="-120"/>
-              </a:rPr>
-              <a:t>SUP-03: invalidado sin decisión, riesgo, issue ni cambio (S-002)</a:t>
-            </a:r>
-            <a:endParaRPr lang="en-US" sz="1600" dirty="0"/>
-          </a:p>
-        </p:txBody>
-      </p:sp>
-      <p:sp>
-        <p:nvSpPr>
-          <p:cNvPr id="15" name="Shape 13"/>
-          <p:cNvSpPr/>
-          <p:nvPr/>
-        </p:nvSpPr>
-        <p:spPr>
-          <a:xfrm>
-            <a:off x="457200" y="4330598"/>
-            <a:ext cx="11274552" cy="870509"/>
-          </a:xfrm>
-          <a:prstGeom prst="roundRect">
-            <a:avLst>
-              <a:gd name="adj" fmla="val 10504"/>
-            </a:avLst>
-          </a:prstGeom>
-          <a:solidFill>
-            <a:srgbClr val="F4F6F8"/>
-          </a:solidFill>
-          <a:ln w="12700">
-            <a:solidFill>
-              <a:srgbClr val="F4F6F8"/>
-            </a:solidFill>
-            <a:prstDash val="solid"/>
-          </a:ln>
-        </p:spPr>
-      </p:sp>
-      <p:sp>
-        <p:nvSpPr>
-          <p:cNvPr id="16" name="Shape 14"/>
-          <p:cNvSpPr/>
-          <p:nvPr/>
-        </p:nvSpPr>
-        <p:spPr>
-          <a:xfrm>
-            <a:off x="621792" y="4537253"/>
-            <a:ext cx="457200" cy="457200"/>
-          </a:xfrm>
-          <a:prstGeom prst="roundRect">
-            <a:avLst>
-              <a:gd name="adj" fmla="val 16000"/>
-            </a:avLst>
-          </a:prstGeom>
-          <a:solidFill>
-            <a:srgbClr val="00629B"/>
-          </a:solidFill>
-          <a:ln w="12700">
-            <a:solidFill>
-              <a:srgbClr val="00629B"/>
-            </a:solidFill>
-            <a:prstDash val="solid"/>
-          </a:ln>
-        </p:spPr>
-      </p:sp>
-      <p:sp>
-        <p:nvSpPr>
-          <p:cNvPr id="17" name="Text 15"/>
-          <p:cNvSpPr txBox="1"/>
-          <p:nvPr/>
-        </p:nvSpPr>
-        <p:spPr>
-          <a:xfrm>
-            <a:off x="621792" y="4537253"/>
-            <a:ext cx="457200" cy="457200"/>
-          </a:xfrm>
-          <a:prstGeom prst="rect">
-            <a:avLst/>
-          </a:prstGeom>
-          <a:noFill/>
-          <a:ln/>
-        </p:spPr>
-        <p:txBody>
-          <a:bodyPr wrap="square" lIns="0" tIns="0" rIns="0" bIns="0" rtlCol="0" anchor="ctr"/>
-          <a:lstStyle/>
-          <a:p>
-            <a:pPr algn="ctr" indent="0" marL="0">
-              <a:buNone/>
-            </a:pPr>
-            <a:r>
-              <a:rPr lang="en-US" sz="1600" b="1" dirty="0">
-                <a:solidFill>
-                  <a:srgbClr val="FFFFFF"/>
-                </a:solidFill>
-                <a:latin typeface="Arial" pitchFamily="34" charset="0"/>
-                <a:ea typeface="Arial" pitchFamily="34" charset="-122"/>
-                <a:cs typeface="Arial" pitchFamily="34" charset="-120"/>
-              </a:rPr>
-              <a:t>4</a:t>
-            </a:r>
-            <a:endParaRPr lang="en-US" sz="1600" dirty="0"/>
-          </a:p>
-        </p:txBody>
-      </p:sp>
-      <p:sp>
-        <p:nvSpPr>
-          <p:cNvPr id="18" name="Text 16"/>
-          <p:cNvSpPr txBox="1"/>
-          <p:nvPr/>
-        </p:nvSpPr>
-        <p:spPr>
-          <a:xfrm>
-            <a:off x="1280160" y="4385462"/>
-            <a:ext cx="10222992" cy="760781"/>
-          </a:xfrm>
-          <a:prstGeom prst="rect">
-            <a:avLst/>
-          </a:prstGeom>
-          <a:noFill/>
-          <a:ln/>
-        </p:spPr>
-        <p:txBody>
-          <a:bodyPr wrap="square" lIns="0" tIns="0" rIns="0" bIns="0" rtlCol="0" anchor="ctr"/>
-          <a:lstStyle/>
-          <a:p>
-            <a:pPr indent="0" marL="0">
-              <a:buNone/>
-            </a:pPr>
-            <a:r>
-              <a:rPr lang="en-US" sz="2000" dirty="0">
-                <a:solidFill>
-                  <a:srgbClr val="272425"/>
-                </a:solidFill>
-                <a:latin typeface="Arial" pitchFamily="34" charset="0"/>
-                <a:ea typeface="Arial" pitchFamily="34" charset="-122"/>
-                <a:cs typeface="Arial" pitchFamily="34" charset="-120"/>
-              </a:rPr>
-              <a:t>D-001: el caso usa 13,5 %; D-002: prueba replanificada</a:t>
-            </a:r>
-            <a:endParaRPr lang="en-US" sz="1600" dirty="0"/>
-          </a:p>
-        </p:txBody>
-      </p:sp>
-      <p:sp>
-        <p:nvSpPr>
-          <p:cNvPr id="19" name="Shape 17"/>
-          <p:cNvSpPr/>
-          <p:nvPr/>
-        </p:nvSpPr>
-        <p:spPr>
-          <a:xfrm>
-            <a:off x="457200" y="5347411"/>
-            <a:ext cx="11274552" cy="870509"/>
-          </a:xfrm>
-          <a:prstGeom prst="roundRect">
-            <a:avLst>
-              <a:gd name="adj" fmla="val 10504"/>
-            </a:avLst>
-          </a:prstGeom>
-          <a:solidFill>
-            <a:srgbClr val="E9F1F8"/>
-          </a:solidFill>
-          <a:ln w="12700">
-            <a:solidFill>
-              <a:srgbClr val="E9F1F8"/>
-            </a:solidFill>
-            <a:prstDash val="solid"/>
-          </a:ln>
-        </p:spPr>
-      </p:sp>
-      <p:sp>
-        <p:nvSpPr>
-          <p:cNvPr id="20" name="Shape 18"/>
-          <p:cNvSpPr/>
-          <p:nvPr/>
-        </p:nvSpPr>
-        <p:spPr>
-          <a:xfrm>
-            <a:off x="621792" y="5554066"/>
-            <a:ext cx="457200" cy="457200"/>
-          </a:xfrm>
-          <a:prstGeom prst="roundRect">
-            <a:avLst>
-              <a:gd name="adj" fmla="val 16000"/>
-            </a:avLst>
-          </a:prstGeom>
-          <a:solidFill>
-            <a:srgbClr val="00629B"/>
-          </a:solidFill>
-          <a:ln w="12700">
-            <a:solidFill>
-              <a:srgbClr val="00629B"/>
-            </a:solidFill>
-            <a:prstDash val="solid"/>
-          </a:ln>
-        </p:spPr>
-      </p:sp>
-      <p:sp>
-        <p:nvSpPr>
-          <p:cNvPr id="21" name="Text 19"/>
-          <p:cNvSpPr txBox="1"/>
-          <p:nvPr/>
-        </p:nvSpPr>
-        <p:spPr>
-          <a:xfrm>
-            <a:off x="621792" y="5554066"/>
-            <a:ext cx="457200" cy="457200"/>
-          </a:xfrm>
-          <a:prstGeom prst="rect">
-            <a:avLst/>
-          </a:prstGeom>
-          <a:noFill/>
-          <a:ln/>
-        </p:spPr>
-        <p:txBody>
-          <a:bodyPr wrap="square" lIns="0" tIns="0" rIns="0" bIns="0" rtlCol="0" anchor="ctr"/>
-          <a:lstStyle/>
-          <a:p>
-            <a:pPr algn="ctr" indent="0" marL="0">
-              <a:buNone/>
-            </a:pPr>
-            <a:r>
-              <a:rPr lang="en-US" sz="1600" b="1" dirty="0">
-                <a:solidFill>
-                  <a:srgbClr val="FFFFFF"/>
-                </a:solidFill>
-                <a:latin typeface="Arial" pitchFamily="34" charset="0"/>
-                <a:ea typeface="Arial" pitchFamily="34" charset="-122"/>
-                <a:cs typeface="Arial" pitchFamily="34" charset="-120"/>
-              </a:rPr>
-              <a:t>5</a:t>
-            </a:r>
-            <a:endParaRPr lang="en-US" sz="1600" dirty="0"/>
-          </a:p>
-        </p:txBody>
-      </p:sp>
-      <p:sp>
-        <p:nvSpPr>
-          <p:cNvPr id="22" name="Text 20"/>
-          <p:cNvSpPr txBox="1"/>
-          <p:nvPr/>
-        </p:nvSpPr>
-        <p:spPr>
-          <a:xfrm>
-            <a:off x="1280160" y="5402275"/>
-            <a:ext cx="10222992" cy="760781"/>
-          </a:xfrm>
-          <a:prstGeom prst="rect">
-            <a:avLst/>
-          </a:prstGeom>
-          <a:noFill/>
-          <a:ln/>
-        </p:spPr>
-        <p:txBody>
-          <a:bodyPr wrap="square" lIns="0" tIns="0" rIns="0" bIns="0" rtlCol="0" anchor="ctr"/>
-          <a:lstStyle/>
-          <a:p>
-            <a:pPr indent="0" marL="0">
-              <a:buNone/>
-            </a:pPr>
-            <a:r>
-              <a:rPr lang="en-US" sz="2000" dirty="0">
-                <a:solidFill>
-                  <a:srgbClr val="272425"/>
-                </a:solidFill>
-                <a:latin typeface="Arial" pitchFamily="34" charset="0"/>
-                <a:ea typeface="Arial" pitchFamily="34" charset="-122"/>
-                <a:cs typeface="Arial" pitchFamily="34" charset="-120"/>
-              </a:rPr>
-              <a:t>Después de las decisiones: 0 avisos</a:t>
-            </a:r>
-            <a:endParaRPr lang="en-US" sz="1600" dirty="0"/>
-          </a:p>
-        </p:txBody>
       </p:sp>
       <p:sp>
         <p:nvSpPr>
@@ -10702,1140 +10093,63 @@
                 <a:ea typeface="Arial" pitchFamily="34" charset="-122"/>
                 <a:cs typeface="Arial" pitchFamily="34" charset="-120"/>
               </a:rPr>
-              <a:t>Opciones contra no hacer nada (VAN a 5 años, r = 10 %)</a:t>
+              <a:t>La matriz: la 2 gana salvo que el riesgo pese 49,6</a:t>
             </a:r>
             <a:endParaRPr lang="en-US" sz="2400" dirty="0"/>
           </a:p>
         </p:txBody>
       </p:sp>
-      <p:graphicFrame>
-        <p:nvGraphicFramePr>
-          <p:cNvPr id="14" name="Table 0"/>
-          <p:cNvGraphicFramePr>
-            <a:graphicFrameLocks noGrp="1"/>
-          </p:cNvGraphicFramePr>
-          <p:nvPr>
-            <p:extLst>
-              <p:ext uri="{D42A27DB-BD31-4B8C-83A1-F6EECF244321}">
-                <p14:modId xmlns:p14="http://schemas.microsoft.com/office/powerpoint/2010/main" val="1579011935"/>
-              </p:ext>
-            </p:extLst>
-          </p:nvPr>
-        </p:nvGraphicFramePr>
-        <p:xfrm>
-          <a:off x="457200" y="1280160"/>
-          <a:ext cx="11274552" cy="914400"/>
-        </p:xfrm>
-        <a:graphic>
-          <a:graphicData uri="http://schemas.openxmlformats.org/drawingml/2006/table">
-            <a:tbl>
-              <a:tblPr/>
-              <a:tblGrid>
-                <a:gridCol w="3084547"/>
-                <a:gridCol w="2871820"/>
-                <a:gridCol w="3297275"/>
-                <a:gridCol w="2020910"/>
-              </a:tblGrid>
-              <a:tr h="0">
-                <a:tc>
-                  <a:txBody>
-                    <a:bodyPr/>
-                    <a:lstStyle/>
-                    <a:p>
-                      <a:pPr indent="0" marL="0">
-                        <a:buNone/>
-                      </a:pPr>
-                      <a:r>
-                        <a:rPr lang="en-US" sz="1800" b="1" dirty="0">
-                          <a:solidFill>
-                            <a:srgbClr val="FFFFFF"/>
-                          </a:solidFill>
-                          <a:latin typeface="Arial" pitchFamily="34" charset="0"/>
-                          <a:ea typeface="Arial" pitchFamily="34" charset="-122"/>
-                          <a:cs typeface="Arial" pitchFamily="34" charset="-120"/>
-                        </a:rPr>
-                        <a:t>Opción</a:t>
-                      </a:r>
-                      <a:endParaRPr lang="en-US" sz="1200" dirty="0">
-                        <a:latin typeface="Arial" charset="0"/>
-                        <a:ea typeface="Arial" charset="0"/>
-                        <a:cs typeface="Arial" charset="0"/>
-                      </a:endParaRPr>
-                    </a:p>
-                  </a:txBody>
-                  <a:tcPr marL="73152" marR="73152" marT="73152" marB="73152" anchor="ctr">
-                    <a:lnL w="9525" cap="flat" cmpd="sng" algn="ctr">
-                      <a:solidFill>
-                        <a:srgbClr val="E2E2E6"/>
-                      </a:solidFill>
-                      <a:prstDash val="solid"/>
-                      <a:round/>
-                      <a:headEnd type="none" w="med" len="med"/>
-                      <a:tailEnd type="none" w="med" len="med"/>
-                    </a:lnL>
-                    <a:lnR w="9525" cap="flat" cmpd="sng" algn="ctr">
-                      <a:solidFill>
-                        <a:srgbClr val="E2E2E6"/>
-                      </a:solidFill>
-                      <a:prstDash val="solid"/>
-                      <a:round/>
-                      <a:headEnd type="none" w="med" len="med"/>
-                      <a:tailEnd type="none" w="med" len="med"/>
-                    </a:lnR>
-                    <a:lnT w="9525" cap="flat" cmpd="sng" algn="ctr">
-                      <a:solidFill>
-                        <a:srgbClr val="E2E2E6"/>
-                      </a:solidFill>
-                      <a:prstDash val="solid"/>
-                      <a:round/>
-                      <a:headEnd type="none" w="med" len="med"/>
-                      <a:tailEnd type="none" w="med" len="med"/>
-                    </a:lnT>
-                    <a:lnB w="9525" cap="flat" cmpd="sng" algn="ctr">
-                      <a:solidFill>
-                        <a:srgbClr val="E2E2E6"/>
-                      </a:solidFill>
-                      <a:prstDash val="solid"/>
-                      <a:round/>
-                      <a:headEnd type="none" w="med" len="med"/>
-                      <a:tailEnd type="none" w="med" len="med"/>
-                    </a:lnB>
-                    <a:solidFill>
-                      <a:srgbClr val="002855"/>
-                    </a:solidFill>
-                  </a:tcPr>
-                </a:tc>
-                <a:tc>
-                  <a:txBody>
-                    <a:bodyPr/>
-                    <a:lstStyle/>
-                    <a:p>
-                      <a:pPr indent="0" marL="0">
-                        <a:buNone/>
-                      </a:pPr>
-                      <a:r>
-                        <a:rPr lang="en-US" sz="1800" b="1" dirty="0">
-                          <a:solidFill>
-                            <a:srgbClr val="FFFFFF"/>
-                          </a:solidFill>
-                          <a:latin typeface="Arial" pitchFamily="34" charset="0"/>
-                          <a:ea typeface="Arial" pitchFamily="34" charset="-122"/>
-                          <a:cs typeface="Arial" pitchFamily="34" charset="-120"/>
-                        </a:rPr>
-                        <a:t>VAN con supuestos iniciales</a:t>
-                      </a:r>
-                      <a:endParaRPr lang="en-US" sz="1200" dirty="0">
-                        <a:latin typeface="Arial" charset="0"/>
-                        <a:ea typeface="Arial" charset="0"/>
-                        <a:cs typeface="Arial" charset="0"/>
-                      </a:endParaRPr>
-                    </a:p>
-                  </a:txBody>
-                  <a:tcPr marL="73152" marR="73152" marT="73152" marB="73152" anchor="ctr">
-                    <a:lnL w="9525" cap="flat" cmpd="sng" algn="ctr">
-                      <a:solidFill>
-                        <a:srgbClr val="E2E2E6"/>
-                      </a:solidFill>
-                      <a:prstDash val="solid"/>
-                      <a:round/>
-                      <a:headEnd type="none" w="med" len="med"/>
-                      <a:tailEnd type="none" w="med" len="med"/>
-                    </a:lnL>
-                    <a:lnR w="9525" cap="flat" cmpd="sng" algn="ctr">
-                      <a:solidFill>
-                        <a:srgbClr val="E2E2E6"/>
-                      </a:solidFill>
-                      <a:prstDash val="solid"/>
-                      <a:round/>
-                      <a:headEnd type="none" w="med" len="med"/>
-                      <a:tailEnd type="none" w="med" len="med"/>
-                    </a:lnR>
-                    <a:lnT w="9525" cap="flat" cmpd="sng" algn="ctr">
-                      <a:solidFill>
-                        <a:srgbClr val="E2E2E6"/>
-                      </a:solidFill>
-                      <a:prstDash val="solid"/>
-                      <a:round/>
-                      <a:headEnd type="none" w="med" len="med"/>
-                      <a:tailEnd type="none" w="med" len="med"/>
-                    </a:lnT>
-                    <a:lnB w="9525" cap="flat" cmpd="sng" algn="ctr">
-                      <a:solidFill>
-                        <a:srgbClr val="E2E2E6"/>
-                      </a:solidFill>
-                      <a:prstDash val="solid"/>
-                      <a:round/>
-                      <a:headEnd type="none" w="med" len="med"/>
-                      <a:tailEnd type="none" w="med" len="med"/>
-                    </a:lnB>
-                    <a:solidFill>
-                      <a:srgbClr val="002855"/>
-                    </a:solidFill>
-                  </a:tcPr>
-                </a:tc>
-                <a:tc>
-                  <a:txBody>
-                    <a:bodyPr/>
-                    <a:lstStyle/>
-                    <a:p>
-                      <a:pPr indent="0" marL="0">
-                        <a:buNone/>
-                      </a:pPr>
-                      <a:r>
-                        <a:rPr lang="en-US" sz="1800" b="1" dirty="0">
-                          <a:solidFill>
-                            <a:srgbClr val="FFFFFF"/>
-                          </a:solidFill>
-                          <a:latin typeface="Arial" pitchFamily="34" charset="0"/>
-                          <a:ea typeface="Arial" pitchFamily="34" charset="-122"/>
-                          <a:cs typeface="Arial" pitchFamily="34" charset="-120"/>
-                        </a:rPr>
-                        <a:t>VAN después de los experimentos</a:t>
-                      </a:r>
-                      <a:endParaRPr lang="en-US" sz="1200" dirty="0">
-                        <a:latin typeface="Arial" charset="0"/>
-                        <a:ea typeface="Arial" charset="0"/>
-                        <a:cs typeface="Arial" charset="0"/>
-                      </a:endParaRPr>
-                    </a:p>
-                  </a:txBody>
-                  <a:tcPr marL="73152" marR="73152" marT="73152" marB="73152" anchor="ctr">
-                    <a:lnL w="9525" cap="flat" cmpd="sng" algn="ctr">
-                      <a:solidFill>
-                        <a:srgbClr val="E2E2E6"/>
-                      </a:solidFill>
-                      <a:prstDash val="solid"/>
-                      <a:round/>
-                      <a:headEnd type="none" w="med" len="med"/>
-                      <a:tailEnd type="none" w="med" len="med"/>
-                    </a:lnL>
-                    <a:lnR w="9525" cap="flat" cmpd="sng" algn="ctr">
-                      <a:solidFill>
-                        <a:srgbClr val="E2E2E6"/>
-                      </a:solidFill>
-                      <a:prstDash val="solid"/>
-                      <a:round/>
-                      <a:headEnd type="none" w="med" len="med"/>
-                      <a:tailEnd type="none" w="med" len="med"/>
-                    </a:lnR>
-                    <a:lnT w="9525" cap="flat" cmpd="sng" algn="ctr">
-                      <a:solidFill>
-                        <a:srgbClr val="E2E2E6"/>
-                      </a:solidFill>
-                      <a:prstDash val="solid"/>
-                      <a:round/>
-                      <a:headEnd type="none" w="med" len="med"/>
-                      <a:tailEnd type="none" w="med" len="med"/>
-                    </a:lnT>
-                    <a:lnB w="9525" cap="flat" cmpd="sng" algn="ctr">
-                      <a:solidFill>
-                        <a:srgbClr val="E2E2E6"/>
-                      </a:solidFill>
-                      <a:prstDash val="solid"/>
-                      <a:round/>
-                      <a:headEnd type="none" w="med" len="med"/>
-                      <a:tailEnd type="none" w="med" len="med"/>
-                    </a:lnB>
-                    <a:solidFill>
-                      <a:srgbClr val="002855"/>
-                    </a:solidFill>
-                  </a:tcPr>
-                </a:tc>
-                <a:tc>
-                  <a:txBody>
-                    <a:bodyPr/>
-                    <a:lstStyle/>
-                    <a:p>
-                      <a:pPr indent="0" marL="0">
-                        <a:buNone/>
-                      </a:pPr>
-                      <a:r>
-                        <a:rPr lang="en-US" sz="1800" b="1" dirty="0">
-                          <a:solidFill>
-                            <a:srgbClr val="FFFFFF"/>
-                          </a:solidFill>
-                          <a:latin typeface="Arial" pitchFamily="34" charset="0"/>
-                          <a:ea typeface="Arial" pitchFamily="34" charset="-122"/>
-                          <a:cs typeface="Arial" pitchFamily="34" charset="-120"/>
-                        </a:rPr>
-                        <a:t>TIR · repago</a:t>
-                      </a:r>
-                      <a:endParaRPr lang="en-US" sz="1200" dirty="0">
-                        <a:latin typeface="Arial" charset="0"/>
-                        <a:ea typeface="Arial" charset="0"/>
-                        <a:cs typeface="Arial" charset="0"/>
-                      </a:endParaRPr>
-                    </a:p>
-                  </a:txBody>
-                  <a:tcPr marL="73152" marR="73152" marT="73152" marB="73152" anchor="ctr">
-                    <a:lnL w="9525" cap="flat" cmpd="sng" algn="ctr">
-                      <a:solidFill>
-                        <a:srgbClr val="E2E2E6"/>
-                      </a:solidFill>
-                      <a:prstDash val="solid"/>
-                      <a:round/>
-                      <a:headEnd type="none" w="med" len="med"/>
-                      <a:tailEnd type="none" w="med" len="med"/>
-                    </a:lnL>
-                    <a:lnR w="9525" cap="flat" cmpd="sng" algn="ctr">
-                      <a:solidFill>
-                        <a:srgbClr val="E2E2E6"/>
-                      </a:solidFill>
-                      <a:prstDash val="solid"/>
-                      <a:round/>
-                      <a:headEnd type="none" w="med" len="med"/>
-                      <a:tailEnd type="none" w="med" len="med"/>
-                    </a:lnR>
-                    <a:lnT w="9525" cap="flat" cmpd="sng" algn="ctr">
-                      <a:solidFill>
-                        <a:srgbClr val="E2E2E6"/>
-                      </a:solidFill>
-                      <a:prstDash val="solid"/>
-                      <a:round/>
-                      <a:headEnd type="none" w="med" len="med"/>
-                      <a:tailEnd type="none" w="med" len="med"/>
-                    </a:lnT>
-                    <a:lnB w="9525" cap="flat" cmpd="sng" algn="ctr">
-                      <a:solidFill>
-                        <a:srgbClr val="E2E2E6"/>
-                      </a:solidFill>
-                      <a:prstDash val="solid"/>
-                      <a:round/>
-                      <a:headEnd type="none" w="med" len="med"/>
-                      <a:tailEnd type="none" w="med" len="med"/>
-                    </a:lnB>
-                    <a:solidFill>
-                      <a:srgbClr val="002855"/>
-                    </a:solidFill>
-                  </a:tcPr>
-                </a:tc>
-              </a:tr>
-              <a:tr h="0">
-                <a:tc>
-                  <a:txBody>
-                    <a:bodyPr/>
-                    <a:lstStyle/>
-                    <a:p>
-                      <a:pPr indent="0" marL="0">
-                        <a:buNone/>
-                      </a:pPr>
-                      <a:r>
-                        <a:rPr lang="en-US" sz="1800" b="1" dirty="0">
-                          <a:solidFill>
-                            <a:srgbClr val="002855"/>
-                          </a:solidFill>
-                          <a:latin typeface="Arial" pitchFamily="34" charset="0"/>
-                          <a:ea typeface="Arial" pitchFamily="34" charset="-122"/>
-                          <a:cs typeface="Arial" pitchFamily="34" charset="-120"/>
-                        </a:rPr>
-                        <a:t>0 · No hacer nada distinto</a:t>
-                      </a:r>
-                      <a:endParaRPr lang="en-US" sz="1200" dirty="0">
-                        <a:latin typeface="Arial" charset="0"/>
-                        <a:ea typeface="Arial" charset="0"/>
-                        <a:cs typeface="Arial" charset="0"/>
-                      </a:endParaRPr>
-                    </a:p>
-                  </a:txBody>
-                  <a:tcPr marL="73152" marR="73152" marT="73152" marB="73152" anchor="t">
-                    <a:lnL w="9525" cap="flat" cmpd="sng" algn="ctr">
-                      <a:solidFill>
-                        <a:srgbClr val="E2E2E6"/>
-                      </a:solidFill>
-                      <a:prstDash val="solid"/>
-                      <a:round/>
-                      <a:headEnd type="none" w="med" len="med"/>
-                      <a:tailEnd type="none" w="med" len="med"/>
-                    </a:lnL>
-                    <a:lnR w="9525" cap="flat" cmpd="sng" algn="ctr">
-                      <a:solidFill>
-                        <a:srgbClr val="E2E2E6"/>
-                      </a:solidFill>
-                      <a:prstDash val="solid"/>
-                      <a:round/>
-                      <a:headEnd type="none" w="med" len="med"/>
-                      <a:tailEnd type="none" w="med" len="med"/>
-                    </a:lnR>
-                    <a:lnT w="9525" cap="flat" cmpd="sng" algn="ctr">
-                      <a:solidFill>
-                        <a:srgbClr val="E2E2E6"/>
-                      </a:solidFill>
-                      <a:prstDash val="solid"/>
-                      <a:round/>
-                      <a:headEnd type="none" w="med" len="med"/>
-                      <a:tailEnd type="none" w="med" len="med"/>
-                    </a:lnT>
-                    <a:lnB w="9525" cap="flat" cmpd="sng" algn="ctr">
-                      <a:solidFill>
-                        <a:srgbClr val="E2E2E6"/>
-                      </a:solidFill>
-                      <a:prstDash val="solid"/>
-                      <a:round/>
-                      <a:headEnd type="none" w="med" len="med"/>
-                      <a:tailEnd type="none" w="med" len="med"/>
-                    </a:lnB>
-                    <a:solidFill>
-                      <a:srgbClr val="F4F6F8"/>
-                    </a:solidFill>
-                  </a:tcPr>
-                </a:tc>
-                <a:tc>
-                  <a:txBody>
-                    <a:bodyPr/>
-                    <a:lstStyle/>
-                    <a:p>
-                      <a:pPr indent="0" marL="0">
-                        <a:buNone/>
-                      </a:pPr>
-                      <a:r>
-                        <a:rPr lang="en-US" sz="1800" dirty="0">
-                          <a:solidFill>
-                            <a:srgbClr val="272425"/>
-                          </a:solidFill>
-                          <a:latin typeface="Arial" pitchFamily="34" charset="0"/>
-                          <a:ea typeface="Arial" pitchFamily="34" charset="-122"/>
-                          <a:cs typeface="Arial" pitchFamily="34" charset="-120"/>
-                        </a:rPr>
-                        <a:t>0 (base)</a:t>
-                      </a:r>
-                      <a:endParaRPr lang="en-US" sz="1200" dirty="0">
-                        <a:latin typeface="Arial" charset="0"/>
-                        <a:ea typeface="Arial" charset="0"/>
-                        <a:cs typeface="Arial" charset="0"/>
-                      </a:endParaRPr>
-                    </a:p>
-                  </a:txBody>
-                  <a:tcPr marL="73152" marR="73152" marT="73152" marB="73152" anchor="t">
-                    <a:lnL w="9525" cap="flat" cmpd="sng" algn="ctr">
-                      <a:solidFill>
-                        <a:srgbClr val="E2E2E6"/>
-                      </a:solidFill>
-                      <a:prstDash val="solid"/>
-                      <a:round/>
-                      <a:headEnd type="none" w="med" len="med"/>
-                      <a:tailEnd type="none" w="med" len="med"/>
-                    </a:lnL>
-                    <a:lnR w="9525" cap="flat" cmpd="sng" algn="ctr">
-                      <a:solidFill>
-                        <a:srgbClr val="E2E2E6"/>
-                      </a:solidFill>
-                      <a:prstDash val="solid"/>
-                      <a:round/>
-                      <a:headEnd type="none" w="med" len="med"/>
-                      <a:tailEnd type="none" w="med" len="med"/>
-                    </a:lnR>
-                    <a:lnT w="9525" cap="flat" cmpd="sng" algn="ctr">
-                      <a:solidFill>
-                        <a:srgbClr val="E2E2E6"/>
-                      </a:solidFill>
-                      <a:prstDash val="solid"/>
-                      <a:round/>
-                      <a:headEnd type="none" w="med" len="med"/>
-                      <a:tailEnd type="none" w="med" len="med"/>
-                    </a:lnT>
-                    <a:lnB w="9525" cap="flat" cmpd="sng" algn="ctr">
-                      <a:solidFill>
-                        <a:srgbClr val="E2E2E6"/>
-                      </a:solidFill>
-                      <a:prstDash val="solid"/>
-                      <a:round/>
-                      <a:headEnd type="none" w="med" len="med"/>
-                      <a:tailEnd type="none" w="med" len="med"/>
-                    </a:lnB>
-                    <a:solidFill>
-                      <a:srgbClr val="F4F6F8"/>
-                    </a:solidFill>
-                  </a:tcPr>
-                </a:tc>
-                <a:tc>
-                  <a:txBody>
-                    <a:bodyPr/>
-                    <a:lstStyle/>
-                    <a:p>
-                      <a:pPr indent="0" marL="0">
-                        <a:buNone/>
-                      </a:pPr>
-                      <a:r>
-                        <a:rPr lang="en-US" sz="1800" dirty="0">
-                          <a:solidFill>
-                            <a:srgbClr val="272425"/>
-                          </a:solidFill>
-                          <a:latin typeface="Arial" pitchFamily="34" charset="0"/>
-                          <a:ea typeface="Arial" pitchFamily="34" charset="-122"/>
-                          <a:cs typeface="Arial" pitchFamily="34" charset="-120"/>
-                        </a:rPr>
-                        <a:t>0 (base)</a:t>
-                      </a:r>
-                      <a:endParaRPr lang="en-US" sz="1200" dirty="0">
-                        <a:latin typeface="Arial" charset="0"/>
-                        <a:ea typeface="Arial" charset="0"/>
-                        <a:cs typeface="Arial" charset="0"/>
-                      </a:endParaRPr>
-                    </a:p>
-                  </a:txBody>
-                  <a:tcPr marL="73152" marR="73152" marT="73152" marB="73152" anchor="t">
-                    <a:lnL w="9525" cap="flat" cmpd="sng" algn="ctr">
-                      <a:solidFill>
-                        <a:srgbClr val="E2E2E6"/>
-                      </a:solidFill>
-                      <a:prstDash val="solid"/>
-                      <a:round/>
-                      <a:headEnd type="none" w="med" len="med"/>
-                      <a:tailEnd type="none" w="med" len="med"/>
-                    </a:lnL>
-                    <a:lnR w="9525" cap="flat" cmpd="sng" algn="ctr">
-                      <a:solidFill>
-                        <a:srgbClr val="E2E2E6"/>
-                      </a:solidFill>
-                      <a:prstDash val="solid"/>
-                      <a:round/>
-                      <a:headEnd type="none" w="med" len="med"/>
-                      <a:tailEnd type="none" w="med" len="med"/>
-                    </a:lnR>
-                    <a:lnT w="9525" cap="flat" cmpd="sng" algn="ctr">
-                      <a:solidFill>
-                        <a:srgbClr val="E2E2E6"/>
-                      </a:solidFill>
-                      <a:prstDash val="solid"/>
-                      <a:round/>
-                      <a:headEnd type="none" w="med" len="med"/>
-                      <a:tailEnd type="none" w="med" len="med"/>
-                    </a:lnT>
-                    <a:lnB w="9525" cap="flat" cmpd="sng" algn="ctr">
-                      <a:solidFill>
-                        <a:srgbClr val="E2E2E6"/>
-                      </a:solidFill>
-                      <a:prstDash val="solid"/>
-                      <a:round/>
-                      <a:headEnd type="none" w="med" len="med"/>
-                      <a:tailEnd type="none" w="med" len="med"/>
-                    </a:lnB>
-                    <a:solidFill>
-                      <a:srgbClr val="F4F6F8"/>
-                    </a:solidFill>
-                  </a:tcPr>
-                </a:tc>
-                <a:tc>
-                  <a:txBody>
-                    <a:bodyPr/>
-                    <a:lstStyle/>
-                    <a:p>
-                      <a:pPr indent="0" marL="0">
-                        <a:buNone/>
-                      </a:pPr>
-                      <a:r>
-                        <a:rPr lang="en-US" sz="1800" dirty="0">
-                          <a:solidFill>
-                            <a:srgbClr val="272425"/>
-                          </a:solidFill>
-                          <a:latin typeface="Arial" pitchFamily="34" charset="0"/>
-                          <a:ea typeface="Arial" pitchFamily="34" charset="-122"/>
-                          <a:cs typeface="Arial" pitchFamily="34" charset="-120"/>
-                        </a:rPr>
-                        <a:t>—</a:t>
-                      </a:r>
-                      <a:endParaRPr lang="en-US" sz="1200" dirty="0">
-                        <a:latin typeface="Arial" charset="0"/>
-                        <a:ea typeface="Arial" charset="0"/>
-                        <a:cs typeface="Arial" charset="0"/>
-                      </a:endParaRPr>
-                    </a:p>
-                  </a:txBody>
-                  <a:tcPr marL="73152" marR="73152" marT="73152" marB="73152" anchor="t">
-                    <a:lnL w="9525" cap="flat" cmpd="sng" algn="ctr">
-                      <a:solidFill>
-                        <a:srgbClr val="E2E2E6"/>
-                      </a:solidFill>
-                      <a:prstDash val="solid"/>
-                      <a:round/>
-                      <a:headEnd type="none" w="med" len="med"/>
-                      <a:tailEnd type="none" w="med" len="med"/>
-                    </a:lnL>
-                    <a:lnR w="9525" cap="flat" cmpd="sng" algn="ctr">
-                      <a:solidFill>
-                        <a:srgbClr val="E2E2E6"/>
-                      </a:solidFill>
-                      <a:prstDash val="solid"/>
-                      <a:round/>
-                      <a:headEnd type="none" w="med" len="med"/>
-                      <a:tailEnd type="none" w="med" len="med"/>
-                    </a:lnR>
-                    <a:lnT w="9525" cap="flat" cmpd="sng" algn="ctr">
-                      <a:solidFill>
-                        <a:srgbClr val="E2E2E6"/>
-                      </a:solidFill>
-                      <a:prstDash val="solid"/>
-                      <a:round/>
-                      <a:headEnd type="none" w="med" len="med"/>
-                      <a:tailEnd type="none" w="med" len="med"/>
-                    </a:lnT>
-                    <a:lnB w="9525" cap="flat" cmpd="sng" algn="ctr">
-                      <a:solidFill>
-                        <a:srgbClr val="E2E2E6"/>
-                      </a:solidFill>
-                      <a:prstDash val="solid"/>
-                      <a:round/>
-                      <a:headEnd type="none" w="med" len="med"/>
-                      <a:tailEnd type="none" w="med" len="med"/>
-                    </a:lnB>
-                    <a:solidFill>
-                      <a:srgbClr val="F4F6F8"/>
-                    </a:solidFill>
-                  </a:tcPr>
-                </a:tc>
-              </a:tr>
-              <a:tr h="0">
-                <a:tc>
-                  <a:txBody>
-                    <a:bodyPr/>
-                    <a:lstStyle/>
-                    <a:p>
-                      <a:pPr indent="0" marL="0">
-                        <a:buNone/>
-                      </a:pPr>
-                      <a:r>
-                        <a:rPr lang="en-US" sz="1800" b="1" dirty="0">
-                          <a:solidFill>
-                            <a:srgbClr val="002855"/>
-                          </a:solidFill>
-                          <a:latin typeface="Arial" pitchFamily="34" charset="0"/>
-                          <a:ea typeface="Arial" pitchFamily="34" charset="-122"/>
-                          <a:cs typeface="Arial" pitchFamily="34" charset="-120"/>
-                        </a:rPr>
-                        <a:t>1 · Mínimo: recordatorios</a:t>
-                      </a:r>
-                      <a:endParaRPr lang="en-US" sz="1200" dirty="0">
-                        <a:latin typeface="Arial" charset="0"/>
-                        <a:ea typeface="Arial" charset="0"/>
-                        <a:cs typeface="Arial" charset="0"/>
-                      </a:endParaRPr>
-                    </a:p>
-                  </a:txBody>
-                  <a:tcPr marL="73152" marR="73152" marT="73152" marB="73152" anchor="t">
-                    <a:lnL w="9525" cap="flat" cmpd="sng" algn="ctr">
-                      <a:solidFill>
-                        <a:srgbClr val="E2E2E6"/>
-                      </a:solidFill>
-                      <a:prstDash val="solid"/>
-                      <a:round/>
-                      <a:headEnd type="none" w="med" len="med"/>
-                      <a:tailEnd type="none" w="med" len="med"/>
-                    </a:lnL>
-                    <a:lnR w="9525" cap="flat" cmpd="sng" algn="ctr">
-                      <a:solidFill>
-                        <a:srgbClr val="E2E2E6"/>
-                      </a:solidFill>
-                      <a:prstDash val="solid"/>
-                      <a:round/>
-                      <a:headEnd type="none" w="med" len="med"/>
-                      <a:tailEnd type="none" w="med" len="med"/>
-                    </a:lnR>
-                    <a:lnT w="9525" cap="flat" cmpd="sng" algn="ctr">
-                      <a:solidFill>
-                        <a:srgbClr val="E2E2E6"/>
-                      </a:solidFill>
-                      <a:prstDash val="solid"/>
-                      <a:round/>
-                      <a:headEnd type="none" w="med" len="med"/>
-                      <a:tailEnd type="none" w="med" len="med"/>
-                    </a:lnT>
-                    <a:lnB w="9525" cap="flat" cmpd="sng" algn="ctr">
-                      <a:solidFill>
-                        <a:srgbClr val="E2E2E6"/>
-                      </a:solidFill>
-                      <a:prstDash val="solid"/>
-                      <a:round/>
-                      <a:headEnd type="none" w="med" len="med"/>
-                      <a:tailEnd type="none" w="med" len="med"/>
-                    </a:lnB>
-                    <a:solidFill>
-                      <a:srgbClr val="FFFFFF"/>
-                    </a:solidFill>
-                  </a:tcPr>
-                </a:tc>
-                <a:tc>
-                  <a:txBody>
-                    <a:bodyPr/>
-                    <a:lstStyle/>
-                    <a:p>
-                      <a:pPr indent="0" marL="0">
-                        <a:buNone/>
-                      </a:pPr>
-                      <a:r>
-                        <a:rPr lang="en-US" sz="1800" dirty="0">
-                          <a:solidFill>
-                            <a:srgbClr val="272425"/>
-                          </a:solidFill>
-                          <a:latin typeface="Arial" pitchFamily="34" charset="0"/>
-                          <a:ea typeface="Arial" pitchFamily="34" charset="-122"/>
-                          <a:cs typeface="Arial" pitchFamily="34" charset="-120"/>
-                        </a:rPr>
-                        <a:t>265.681</a:t>
-                      </a:r>
-                      <a:endParaRPr lang="en-US" sz="1200" dirty="0">
-                        <a:latin typeface="Arial" charset="0"/>
-                        <a:ea typeface="Arial" charset="0"/>
-                        <a:cs typeface="Arial" charset="0"/>
-                      </a:endParaRPr>
-                    </a:p>
-                  </a:txBody>
-                  <a:tcPr marL="73152" marR="73152" marT="73152" marB="73152" anchor="t">
-                    <a:lnL w="9525" cap="flat" cmpd="sng" algn="ctr">
-                      <a:solidFill>
-                        <a:srgbClr val="E2E2E6"/>
-                      </a:solidFill>
-                      <a:prstDash val="solid"/>
-                      <a:round/>
-                      <a:headEnd type="none" w="med" len="med"/>
-                      <a:tailEnd type="none" w="med" len="med"/>
-                    </a:lnL>
-                    <a:lnR w="9525" cap="flat" cmpd="sng" algn="ctr">
-                      <a:solidFill>
-                        <a:srgbClr val="E2E2E6"/>
-                      </a:solidFill>
-                      <a:prstDash val="solid"/>
-                      <a:round/>
-                      <a:headEnd type="none" w="med" len="med"/>
-                      <a:tailEnd type="none" w="med" len="med"/>
-                    </a:lnR>
-                    <a:lnT w="9525" cap="flat" cmpd="sng" algn="ctr">
-                      <a:solidFill>
-                        <a:srgbClr val="E2E2E6"/>
-                      </a:solidFill>
-                      <a:prstDash val="solid"/>
-                      <a:round/>
-                      <a:headEnd type="none" w="med" len="med"/>
-                      <a:tailEnd type="none" w="med" len="med"/>
-                    </a:lnT>
-                    <a:lnB w="9525" cap="flat" cmpd="sng" algn="ctr">
-                      <a:solidFill>
-                        <a:srgbClr val="E2E2E6"/>
-                      </a:solidFill>
-                      <a:prstDash val="solid"/>
-                      <a:round/>
-                      <a:headEnd type="none" w="med" len="med"/>
-                      <a:tailEnd type="none" w="med" len="med"/>
-                    </a:lnB>
-                    <a:solidFill>
-                      <a:srgbClr val="FFFFFF"/>
-                    </a:solidFill>
-                  </a:tcPr>
-                </a:tc>
-                <a:tc>
-                  <a:txBody>
-                    <a:bodyPr/>
-                    <a:lstStyle/>
-                    <a:p>
-                      <a:pPr indent="0" marL="0">
-                        <a:buNone/>
-                      </a:pPr>
-                      <a:r>
-                        <a:rPr lang="en-US" sz="1800" dirty="0">
-                          <a:solidFill>
-                            <a:srgbClr val="272425"/>
-                          </a:solidFill>
-                          <a:latin typeface="Arial" pitchFamily="34" charset="0"/>
-                          <a:ea typeface="Arial" pitchFamily="34" charset="-122"/>
-                          <a:cs typeface="Arial" pitchFamily="34" charset="-120"/>
-                        </a:rPr>
-                        <a:t>106.468</a:t>
-                      </a:r>
-                      <a:endParaRPr lang="en-US" sz="1200" dirty="0">
-                        <a:latin typeface="Arial" charset="0"/>
-                        <a:ea typeface="Arial" charset="0"/>
-                        <a:cs typeface="Arial" charset="0"/>
-                      </a:endParaRPr>
-                    </a:p>
-                  </a:txBody>
-                  <a:tcPr marL="73152" marR="73152" marT="73152" marB="73152" anchor="t">
-                    <a:lnL w="9525" cap="flat" cmpd="sng" algn="ctr">
-                      <a:solidFill>
-                        <a:srgbClr val="E2E2E6"/>
-                      </a:solidFill>
-                      <a:prstDash val="solid"/>
-                      <a:round/>
-                      <a:headEnd type="none" w="med" len="med"/>
-                      <a:tailEnd type="none" w="med" len="med"/>
-                    </a:lnL>
-                    <a:lnR w="9525" cap="flat" cmpd="sng" algn="ctr">
-                      <a:solidFill>
-                        <a:srgbClr val="E2E2E6"/>
-                      </a:solidFill>
-                      <a:prstDash val="solid"/>
-                      <a:round/>
-                      <a:headEnd type="none" w="med" len="med"/>
-                      <a:tailEnd type="none" w="med" len="med"/>
-                    </a:lnR>
-                    <a:lnT w="9525" cap="flat" cmpd="sng" algn="ctr">
-                      <a:solidFill>
-                        <a:srgbClr val="E2E2E6"/>
-                      </a:solidFill>
-                      <a:prstDash val="solid"/>
-                      <a:round/>
-                      <a:headEnd type="none" w="med" len="med"/>
-                      <a:tailEnd type="none" w="med" len="med"/>
-                    </a:lnT>
-                    <a:lnB w="9525" cap="flat" cmpd="sng" algn="ctr">
-                      <a:solidFill>
-                        <a:srgbClr val="E2E2E6"/>
-                      </a:solidFill>
-                      <a:prstDash val="solid"/>
-                      <a:round/>
-                      <a:headEnd type="none" w="med" len="med"/>
-                      <a:tailEnd type="none" w="med" len="med"/>
-                    </a:lnB>
-                    <a:solidFill>
-                      <a:srgbClr val="FFFFFF"/>
-                    </a:solidFill>
-                  </a:tcPr>
-                </a:tc>
-                <a:tc>
-                  <a:txBody>
-                    <a:bodyPr/>
-                    <a:lstStyle/>
-                    <a:p>
-                      <a:pPr indent="0" marL="0">
-                        <a:buNone/>
-                      </a:pPr>
-                      <a:r>
-                        <a:rPr lang="en-US" sz="1800" dirty="0">
-                          <a:solidFill>
-                            <a:srgbClr val="272425"/>
-                          </a:solidFill>
-                          <a:latin typeface="Arial" pitchFamily="34" charset="0"/>
-                          <a:ea typeface="Arial" pitchFamily="34" charset="-122"/>
-                          <a:cs typeface="Arial" pitchFamily="34" charset="-120"/>
-                        </a:rPr>
-                        <a:t>117,5 % · 0,83 años</a:t>
-                      </a:r>
-                      <a:endParaRPr lang="en-US" sz="1200" dirty="0">
-                        <a:latin typeface="Arial" charset="0"/>
-                        <a:ea typeface="Arial" charset="0"/>
-                        <a:cs typeface="Arial" charset="0"/>
-                      </a:endParaRPr>
-                    </a:p>
-                  </a:txBody>
-                  <a:tcPr marL="73152" marR="73152" marT="73152" marB="73152" anchor="t">
-                    <a:lnL w="9525" cap="flat" cmpd="sng" algn="ctr">
-                      <a:solidFill>
-                        <a:srgbClr val="E2E2E6"/>
-                      </a:solidFill>
-                      <a:prstDash val="solid"/>
-                      <a:round/>
-                      <a:headEnd type="none" w="med" len="med"/>
-                      <a:tailEnd type="none" w="med" len="med"/>
-                    </a:lnL>
-                    <a:lnR w="9525" cap="flat" cmpd="sng" algn="ctr">
-                      <a:solidFill>
-                        <a:srgbClr val="E2E2E6"/>
-                      </a:solidFill>
-                      <a:prstDash val="solid"/>
-                      <a:round/>
-                      <a:headEnd type="none" w="med" len="med"/>
-                      <a:tailEnd type="none" w="med" len="med"/>
-                    </a:lnR>
-                    <a:lnT w="9525" cap="flat" cmpd="sng" algn="ctr">
-                      <a:solidFill>
-                        <a:srgbClr val="E2E2E6"/>
-                      </a:solidFill>
-                      <a:prstDash val="solid"/>
-                      <a:round/>
-                      <a:headEnd type="none" w="med" len="med"/>
-                      <a:tailEnd type="none" w="med" len="med"/>
-                    </a:lnT>
-                    <a:lnB w="9525" cap="flat" cmpd="sng" algn="ctr">
-                      <a:solidFill>
-                        <a:srgbClr val="E2E2E6"/>
-                      </a:solidFill>
-                      <a:prstDash val="solid"/>
-                      <a:round/>
-                      <a:headEnd type="none" w="med" len="med"/>
-                      <a:tailEnd type="none" w="med" len="med"/>
-                    </a:lnB>
-                    <a:solidFill>
-                      <a:srgbClr val="FFFFFF"/>
-                    </a:solidFill>
-                  </a:tcPr>
-                </a:tc>
-              </a:tr>
-              <a:tr h="0">
-                <a:tc>
-                  <a:txBody>
-                    <a:bodyPr/>
-                    <a:lstStyle/>
-                    <a:p>
-                      <a:pPr indent="0" marL="0">
-                        <a:buNone/>
-                      </a:pPr>
-                      <a:r>
-                        <a:rPr lang="en-US" sz="1800" b="1" dirty="0">
-                          <a:solidFill>
-                            <a:srgbClr val="002855"/>
-                          </a:solidFill>
-                          <a:latin typeface="Arial" pitchFamily="34" charset="0"/>
-                          <a:ea typeface="Arial" pitchFamily="34" charset="-122"/>
-                          <a:cs typeface="Arial" pitchFamily="34" charset="-120"/>
-                        </a:rPr>
-                        <a:t>2 · Completo: turnos en línea</a:t>
-                      </a:r>
-                      <a:endParaRPr lang="en-US" sz="1200" dirty="0">
-                        <a:latin typeface="Arial" charset="0"/>
-                        <a:ea typeface="Arial" charset="0"/>
-                        <a:cs typeface="Arial" charset="0"/>
-                      </a:endParaRPr>
-                    </a:p>
-                  </a:txBody>
-                  <a:tcPr marL="73152" marR="73152" marT="73152" marB="73152" anchor="t">
-                    <a:lnL w="9525" cap="flat" cmpd="sng" algn="ctr">
-                      <a:solidFill>
-                        <a:srgbClr val="E2E2E6"/>
-                      </a:solidFill>
-                      <a:prstDash val="solid"/>
-                      <a:round/>
-                      <a:headEnd type="none" w="med" len="med"/>
-                      <a:tailEnd type="none" w="med" len="med"/>
-                    </a:lnL>
-                    <a:lnR w="9525" cap="flat" cmpd="sng" algn="ctr">
-                      <a:solidFill>
-                        <a:srgbClr val="E2E2E6"/>
-                      </a:solidFill>
-                      <a:prstDash val="solid"/>
-                      <a:round/>
-                      <a:headEnd type="none" w="med" len="med"/>
-                      <a:tailEnd type="none" w="med" len="med"/>
-                    </a:lnR>
-                    <a:lnT w="9525" cap="flat" cmpd="sng" algn="ctr">
-                      <a:solidFill>
-                        <a:srgbClr val="E2E2E6"/>
-                      </a:solidFill>
-                      <a:prstDash val="solid"/>
-                      <a:round/>
-                      <a:headEnd type="none" w="med" len="med"/>
-                      <a:tailEnd type="none" w="med" len="med"/>
-                    </a:lnT>
-                    <a:lnB w="9525" cap="flat" cmpd="sng" algn="ctr">
-                      <a:solidFill>
-                        <a:srgbClr val="E2E2E6"/>
-                      </a:solidFill>
-                      <a:prstDash val="solid"/>
-                      <a:round/>
-                      <a:headEnd type="none" w="med" len="med"/>
-                      <a:tailEnd type="none" w="med" len="med"/>
-                    </a:lnB>
-                    <a:solidFill>
-                      <a:srgbClr val="F4F6F8"/>
-                    </a:solidFill>
-                  </a:tcPr>
-                </a:tc>
-                <a:tc>
-                  <a:txBody>
-                    <a:bodyPr/>
-                    <a:lstStyle/>
-                    <a:p>
-                      <a:pPr indent="0" marL="0">
-                        <a:buNone/>
-                      </a:pPr>
-                      <a:r>
-                        <a:rPr lang="en-US" sz="1800" dirty="0">
-                          <a:solidFill>
-                            <a:srgbClr val="272425"/>
-                          </a:solidFill>
-                          <a:latin typeface="Arial" pitchFamily="34" charset="0"/>
-                          <a:ea typeface="Arial" pitchFamily="34" charset="-122"/>
-                          <a:cs typeface="Arial" pitchFamily="34" charset="-120"/>
-                        </a:rPr>
-                        <a:t>431.782</a:t>
-                      </a:r>
-                      <a:endParaRPr lang="en-US" sz="1200" dirty="0">
-                        <a:latin typeface="Arial" charset="0"/>
-                        <a:ea typeface="Arial" charset="0"/>
-                        <a:cs typeface="Arial" charset="0"/>
-                      </a:endParaRPr>
-                    </a:p>
-                  </a:txBody>
-                  <a:tcPr marL="73152" marR="73152" marT="73152" marB="73152" anchor="t">
-                    <a:lnL w="9525" cap="flat" cmpd="sng" algn="ctr">
-                      <a:solidFill>
-                        <a:srgbClr val="E2E2E6"/>
-                      </a:solidFill>
-                      <a:prstDash val="solid"/>
-                      <a:round/>
-                      <a:headEnd type="none" w="med" len="med"/>
-                      <a:tailEnd type="none" w="med" len="med"/>
-                    </a:lnL>
-                    <a:lnR w="9525" cap="flat" cmpd="sng" algn="ctr">
-                      <a:solidFill>
-                        <a:srgbClr val="E2E2E6"/>
-                      </a:solidFill>
-                      <a:prstDash val="solid"/>
-                      <a:round/>
-                      <a:headEnd type="none" w="med" len="med"/>
-                      <a:tailEnd type="none" w="med" len="med"/>
-                    </a:lnR>
-                    <a:lnT w="9525" cap="flat" cmpd="sng" algn="ctr">
-                      <a:solidFill>
-                        <a:srgbClr val="E2E2E6"/>
-                      </a:solidFill>
-                      <a:prstDash val="solid"/>
-                      <a:round/>
-                      <a:headEnd type="none" w="med" len="med"/>
-                      <a:tailEnd type="none" w="med" len="med"/>
-                    </a:lnT>
-                    <a:lnB w="9525" cap="flat" cmpd="sng" algn="ctr">
-                      <a:solidFill>
-                        <a:srgbClr val="E2E2E6"/>
-                      </a:solidFill>
-                      <a:prstDash val="solid"/>
-                      <a:round/>
-                      <a:headEnd type="none" w="med" len="med"/>
-                      <a:tailEnd type="none" w="med" len="med"/>
-                    </a:lnB>
-                    <a:solidFill>
-                      <a:srgbClr val="F4F6F8"/>
-                    </a:solidFill>
-                  </a:tcPr>
-                </a:tc>
-                <a:tc>
-                  <a:txBody>
-                    <a:bodyPr/>
-                    <a:lstStyle/>
-                    <a:p>
-                      <a:pPr indent="0" marL="0">
-                        <a:buNone/>
-                      </a:pPr>
-                      <a:r>
-                        <a:rPr lang="en-US" sz="1800" dirty="0">
-                          <a:solidFill>
-                            <a:srgbClr val="272425"/>
-                          </a:solidFill>
-                          <a:latin typeface="Arial" pitchFamily="34" charset="0"/>
-                          <a:ea typeface="Arial" pitchFamily="34" charset="-122"/>
-                          <a:cs typeface="Arial" pitchFamily="34" charset="-120"/>
-                        </a:rPr>
-                        <a:t>272.569</a:t>
-                      </a:r>
-                      <a:endParaRPr lang="en-US" sz="1200" dirty="0">
-                        <a:latin typeface="Arial" charset="0"/>
-                        <a:ea typeface="Arial" charset="0"/>
-                        <a:cs typeface="Arial" charset="0"/>
-                      </a:endParaRPr>
-                    </a:p>
-                  </a:txBody>
-                  <a:tcPr marL="73152" marR="73152" marT="73152" marB="73152" anchor="t">
-                    <a:lnL w="9525" cap="flat" cmpd="sng" algn="ctr">
-                      <a:solidFill>
-                        <a:srgbClr val="E2E2E6"/>
-                      </a:solidFill>
-                      <a:prstDash val="solid"/>
-                      <a:round/>
-                      <a:headEnd type="none" w="med" len="med"/>
-                      <a:tailEnd type="none" w="med" len="med"/>
-                    </a:lnL>
-                    <a:lnR w="9525" cap="flat" cmpd="sng" algn="ctr">
-                      <a:solidFill>
-                        <a:srgbClr val="E2E2E6"/>
-                      </a:solidFill>
-                      <a:prstDash val="solid"/>
-                      <a:round/>
-                      <a:headEnd type="none" w="med" len="med"/>
-                      <a:tailEnd type="none" w="med" len="med"/>
-                    </a:lnR>
-                    <a:lnT w="9525" cap="flat" cmpd="sng" algn="ctr">
-                      <a:solidFill>
-                        <a:srgbClr val="E2E2E6"/>
-                      </a:solidFill>
-                      <a:prstDash val="solid"/>
-                      <a:round/>
-                      <a:headEnd type="none" w="med" len="med"/>
-                      <a:tailEnd type="none" w="med" len="med"/>
-                    </a:lnT>
-                    <a:lnB w="9525" cap="flat" cmpd="sng" algn="ctr">
-                      <a:solidFill>
-                        <a:srgbClr val="E2E2E6"/>
-                      </a:solidFill>
-                      <a:prstDash val="solid"/>
-                      <a:round/>
-                      <a:headEnd type="none" w="med" len="med"/>
-                      <a:tailEnd type="none" w="med" len="med"/>
-                    </a:lnB>
-                    <a:solidFill>
-                      <a:srgbClr val="F4F6F8"/>
-                    </a:solidFill>
-                  </a:tcPr>
-                </a:tc>
-                <a:tc>
-                  <a:txBody>
-                    <a:bodyPr/>
-                    <a:lstStyle/>
-                    <a:p>
-                      <a:pPr indent="0" marL="0">
-                        <a:buNone/>
-                      </a:pPr>
-                      <a:r>
-                        <a:rPr lang="en-US" sz="1800" dirty="0">
-                          <a:solidFill>
-                            <a:srgbClr val="272425"/>
-                          </a:solidFill>
-                          <a:latin typeface="Arial" pitchFamily="34" charset="0"/>
-                          <a:ea typeface="Arial" pitchFamily="34" charset="-122"/>
-                          <a:cs typeface="Arial" pitchFamily="34" charset="-120"/>
-                        </a:rPr>
-                        <a:t>54,3 % · 1,78 años</a:t>
-                      </a:r>
-                      <a:endParaRPr lang="en-US" sz="1200" dirty="0">
-                        <a:latin typeface="Arial" charset="0"/>
-                        <a:ea typeface="Arial" charset="0"/>
-                        <a:cs typeface="Arial" charset="0"/>
-                      </a:endParaRPr>
-                    </a:p>
-                  </a:txBody>
-                  <a:tcPr marL="73152" marR="73152" marT="73152" marB="73152" anchor="t">
-                    <a:lnL w="9525" cap="flat" cmpd="sng" algn="ctr">
-                      <a:solidFill>
-                        <a:srgbClr val="E2E2E6"/>
-                      </a:solidFill>
-                      <a:prstDash val="solid"/>
-                      <a:round/>
-                      <a:headEnd type="none" w="med" len="med"/>
-                      <a:tailEnd type="none" w="med" len="med"/>
-                    </a:lnL>
-                    <a:lnR w="9525" cap="flat" cmpd="sng" algn="ctr">
-                      <a:solidFill>
-                        <a:srgbClr val="E2E2E6"/>
-                      </a:solidFill>
-                      <a:prstDash val="solid"/>
-                      <a:round/>
-                      <a:headEnd type="none" w="med" len="med"/>
-                      <a:tailEnd type="none" w="med" len="med"/>
-                    </a:lnR>
-                    <a:lnT w="9525" cap="flat" cmpd="sng" algn="ctr">
-                      <a:solidFill>
-                        <a:srgbClr val="E2E2E6"/>
-                      </a:solidFill>
-                      <a:prstDash val="solid"/>
-                      <a:round/>
-                      <a:headEnd type="none" w="med" len="med"/>
-                      <a:tailEnd type="none" w="med" len="med"/>
-                    </a:lnT>
-                    <a:lnB w="9525" cap="flat" cmpd="sng" algn="ctr">
-                      <a:solidFill>
-                        <a:srgbClr val="E2E2E6"/>
-                      </a:solidFill>
-                      <a:prstDash val="solid"/>
-                      <a:round/>
-                      <a:headEnd type="none" w="med" len="med"/>
-                      <a:tailEnd type="none" w="med" len="med"/>
-                    </a:lnB>
-                    <a:solidFill>
-                      <a:srgbClr val="F4F6F8"/>
-                    </a:solidFill>
-                  </a:tcPr>
-                </a:tc>
-              </a:tr>
-            </a:tbl>
-          </a:graphicData>
-        </a:graphic>
-      </p:graphicFrame>
+      <p:pic>
+        <p:nvPicPr>
+          <p:cNvPr id="3" name="Image 0" descr="La matriz: la 2 gana salvo que el riesgo pese 49,6">    </p:cNvPr>
+          <p:cNvPicPr>
+            <a:picLocks noChangeAspect="1"/>
+          </p:cNvPicPr>
+          <p:nvPr/>
+        </p:nvPicPr>
+        <p:blipFill>
+          <a:blip r:embed="rId1"/>
+          <a:stretch>
+            <a:fillRect/>
+          </a:stretch>
+        </p:blipFill>
+        <p:spPr>
+          <a:xfrm>
+            <a:off x="1705356" y="1280160"/>
+            <a:ext cx="8778240" cy="4937760"/>
+          </a:xfrm>
+          <a:prstGeom prst="rect">
+            <a:avLst/>
+          </a:prstGeom>
+        </p:spPr>
+      </p:pic>
+      <p:sp>
+        <p:nvSpPr>
+          <p:cNvPr id="4" name="Shape 1"/>
+          <p:cNvSpPr/>
+          <p:nvPr/>
+        </p:nvSpPr>
+        <p:spPr>
+          <a:xfrm>
+            <a:off x="1705356" y="1280160"/>
+            <a:ext cx="8778240" cy="4937760"/>
+          </a:xfrm>
+          <a:prstGeom prst="rect">
+            <a:avLst/>
+          </a:prstGeom>
+          <a:solidFill>
+            <a:srgbClr val="FFFFFF">
+              <a:alpha val="0"/>
+            </a:srgbClr>
+          </a:solidFill>
+          <a:ln w="9525">
+            <a:solidFill>
+              <a:srgbClr val="E2E2E6"/>
+            </a:solidFill>
+            <a:prstDash val="solid"/>
+          </a:ln>
+        </p:spPr>
+      </p:sp>
       <p:sp>
         <p:nvSpPr>
           <p:cNvPr id="25" name="Slide Number Placeholder 0"/>
@@ -11908,16 +10222,16 @@
       </p:grpSpPr>
       <p:sp>
         <p:nvSpPr>
-          <p:cNvPr id="2" name="Text 3"/>
+          <p:cNvPr id="2" name="Text 2"/>
           <p:cNvSpPr/>
           <p:nvPr>
-            <p:ph idx="103" type="title" hasCustomPrompt="1"/>
+            <p:ph idx="102" type="title" hasCustomPrompt="1"/>
           </p:nvPr>
         </p:nvSpPr>
         <p:spPr>
           <a:xfrm>
-            <a:off x="658368" y="365760"/>
-            <a:ext cx="9244584" cy="713232"/>
+            <a:off x="548640" y="365760"/>
+            <a:ext cx="9445752" cy="713232"/>
           </a:xfrm>
           <a:prstGeom prst="rect">
             <a:avLst/>
@@ -11933,7 +10247,71 @@
               <a:buNone/>
             </a:pPr>
             <a:r>
-              <a:rPr lang="en-US" sz="2350" b="1" dirty="0">
+              <a:rPr lang="en-US" sz="2200" b="1" dirty="0">
+                <a:solidFill>
+                  <a:srgbClr val="9FD0F0"/>
+                </a:solidFill>
+                <a:latin typeface="Arial" pitchFamily="34" charset="0"/>
+                <a:ea typeface="Arial" pitchFamily="34" charset="-122"/>
+                <a:cs typeface="Arial" pitchFamily="34" charset="-120"/>
+              </a:rPr>
+              <a:t>Discusión</a:t>
+            </a:r>
+            <a:endParaRPr lang="en-US" sz="2200" dirty="0"/>
+          </a:p>
+        </p:txBody>
+      </p:sp>
+      <p:sp>
+        <p:nvSpPr>
+          <p:cNvPr id="3" name="Shape 1"/>
+          <p:cNvSpPr/>
+          <p:nvPr/>
+        </p:nvSpPr>
+        <p:spPr>
+          <a:xfrm>
+            <a:off x="548640" y="3131820"/>
+            <a:ext cx="1188720" cy="1188720"/>
+          </a:xfrm>
+          <a:prstGeom prst="ellipse">
+            <a:avLst/>
+          </a:prstGeom>
+          <a:solidFill>
+            <a:srgbClr val="B5651D"/>
+          </a:solidFill>
+          <a:ln w="12700">
+            <a:solidFill>
+              <a:srgbClr val="B5651D"/>
+            </a:solidFill>
+            <a:prstDash val="solid"/>
+          </a:ln>
+        </p:spPr>
+      </p:sp>
+      <p:sp>
+        <p:nvSpPr>
+          <p:cNvPr id="4" name="Text 2"/>
+          <p:cNvSpPr txBox="1"/>
+          <p:nvPr/>
+        </p:nvSpPr>
+        <p:spPr>
+          <a:xfrm>
+            <a:off x="548640" y="3131820"/>
+            <a:ext cx="1188720" cy="1188720"/>
+          </a:xfrm>
+          <a:prstGeom prst="rect">
+            <a:avLst/>
+          </a:prstGeom>
+          <a:noFill/>
+          <a:ln/>
+        </p:spPr>
+        <p:txBody>
+          <a:bodyPr wrap="square" lIns="0" tIns="0" rIns="0" bIns="0" rtlCol="0" anchor="ctr"/>
+          <a:lstStyle/>
+          <a:p>
+            <a:pPr algn="ctr" indent="0" marL="0">
+              <a:buNone/>
+            </a:pPr>
+            <a:r>
+              <a:rPr lang="en-US" sz="5400" b="1" dirty="0">
                 <a:solidFill>
                   <a:srgbClr val="FFFFFF"/>
                 </a:solidFill>
@@ -11941,62 +10319,50 @@
                 <a:ea typeface="Arial" pitchFamily="34" charset="-122"/>
                 <a:cs typeface="Arial" pitchFamily="34" charset="-120"/>
               </a:rPr>
-              <a:t>El piloto bajó el VAN; la opción 2 sigue siendo la mejor</a:t>
+              <a:t>?</a:t>
             </a:r>
-            <a:endParaRPr lang="en-US" sz="2400" dirty="0"/>
-          </a:p>
-        </p:txBody>
-      </p:sp>
-      <p:pic>
-        <p:nvPicPr>
-          <p:cNvPr id="3" name="Image 0" descr="El piloto bajó el VAN; la opción 2 sigue siendo la mejor">    </p:cNvPr>
-          <p:cNvPicPr>
-            <a:picLocks noChangeAspect="1"/>
-          </p:cNvPicPr>
-          <p:nvPr/>
-        </p:nvPicPr>
-        <p:blipFill>
-          <a:blip r:embed="rId1"/>
-          <a:stretch>
-            <a:fillRect/>
-          </a:stretch>
-        </p:blipFill>
-        <p:spPr>
-          <a:xfrm>
-            <a:off x="1705356" y="1280160"/>
-            <a:ext cx="8778240" cy="4937760"/>
-          </a:xfrm>
-          <a:prstGeom prst="rect">
-            <a:avLst/>
-          </a:prstGeom>
-        </p:spPr>
-      </p:pic>
-      <p:sp>
-        <p:nvSpPr>
-          <p:cNvPr id="4" name="Shape 1"/>
-          <p:cNvSpPr/>
-          <p:nvPr/>
-        </p:nvSpPr>
-        <p:spPr>
-          <a:xfrm>
-            <a:off x="1705356" y="1280160"/>
-            <a:ext cx="8778240" cy="4937760"/>
-          </a:xfrm>
-          <a:prstGeom prst="rect">
-            <a:avLst/>
-          </a:prstGeom>
-          <a:solidFill>
-            <a:srgbClr val="FFFFFF">
-              <a:alpha val="0"/>
-            </a:srgbClr>
-          </a:solidFill>
-          <a:ln w="9525">
-            <a:solidFill>
-              <a:srgbClr val="E2E2E6"/>
-            </a:solidFill>
-            <a:prstDash val="solid"/>
-          </a:ln>
-        </p:spPr>
+            <a:endParaRPr lang="en-US" sz="5400" dirty="0"/>
+          </a:p>
+        </p:txBody>
+      </p:sp>
+      <p:sp>
+        <p:nvSpPr>
+          <p:cNvPr id="5" name="Text 3"/>
+          <p:cNvSpPr txBox="1"/>
+          <p:nvPr/>
+        </p:nvSpPr>
+        <p:spPr>
+          <a:xfrm>
+            <a:off x="2103120" y="1417320"/>
+            <a:ext cx="9537192" cy="4617720"/>
+          </a:xfrm>
+          <a:prstGeom prst="rect">
+            <a:avLst/>
+          </a:prstGeom>
+          <a:noFill/>
+          <a:ln/>
+        </p:spPr>
+        <p:txBody>
+          <a:bodyPr wrap="square" lIns="0" tIns="0" rIns="0" bIns="0" rtlCol="0" anchor="ctr"/>
+          <a:lstStyle/>
+          <a:p>
+            <a:pPr indent="0" marL="0">
+              <a:buNone/>
+            </a:pPr>
+            <a:r>
+              <a:rPr lang="en-US" sz="3200" b="1" dirty="0">
+                <a:solidFill>
+                  <a:srgbClr val="FFFFFF"/>
+                </a:solidFill>
+                <a:latin typeface="Arial" pitchFamily="34" charset="0"/>
+                <a:ea typeface="Arial" pitchFamily="34" charset="-122"/>
+                <a:cs typeface="Arial" pitchFamily="34" charset="-120"/>
+              </a:rPr>
+              <a:t>El piloto dio 13,5 % y el criterio era 12 %. ¿Abandonamos, ajustamos o seguimos?</a:t>
+            </a:r>
+            <a:endParaRPr lang="en-US" sz="1600" dirty="0"/>
+          </a:p>
+        </p:txBody>
       </p:sp>
       <p:sp>
         <p:nvSpPr>
@@ -12028,7 +10394,7 @@
             <a:lvl1pPr>
               <a:defRPr sz="1000">
                 <a:solidFill>
-                  <a:srgbClr val="696969"/>
+                  <a:srgbClr val="D6E4F0"/>
                 </a:solidFill>
               </a:defRPr>
             </a:lvl1pPr>
@@ -12070,16 +10436,16 @@
       </p:grpSpPr>
       <p:sp>
         <p:nvSpPr>
-          <p:cNvPr id="2" name="Text 2"/>
+          <p:cNvPr id="2" name="Text 3"/>
           <p:cNvSpPr/>
           <p:nvPr>
-            <p:ph idx="102" type="title" hasCustomPrompt="1"/>
+            <p:ph idx="103" type="title" hasCustomPrompt="1"/>
           </p:nvPr>
         </p:nvSpPr>
         <p:spPr>
           <a:xfrm>
-            <a:off x="548640" y="365760"/>
-            <a:ext cx="9445752" cy="713232"/>
+            <a:off x="658368" y="365760"/>
+            <a:ext cx="9244584" cy="713232"/>
           </a:xfrm>
           <a:prstGeom prst="rect">
             <a:avLst/>
@@ -12096,70 +10462,6 @@
             </a:pPr>
             <a:r>
               <a:rPr lang="en-US" sz="2200" b="1" dirty="0">
-                <a:solidFill>
-                  <a:srgbClr val="9FD0F0"/>
-                </a:solidFill>
-                <a:latin typeface="Arial" pitchFamily="34" charset="0"/>
-                <a:ea typeface="Arial" pitchFamily="34" charset="-122"/>
-                <a:cs typeface="Arial" pitchFamily="34" charset="-120"/>
-              </a:rPr>
-              <a:t>Discusión</a:t>
-            </a:r>
-            <a:endParaRPr lang="en-US" sz="2200" dirty="0"/>
-          </a:p>
-        </p:txBody>
-      </p:sp>
-      <p:sp>
-        <p:nvSpPr>
-          <p:cNvPr id="3" name="Shape 1"/>
-          <p:cNvSpPr/>
-          <p:nvPr/>
-        </p:nvSpPr>
-        <p:spPr>
-          <a:xfrm>
-            <a:off x="548640" y="3131820"/>
-            <a:ext cx="1188720" cy="1188720"/>
-          </a:xfrm>
-          <a:prstGeom prst="ellipse">
-            <a:avLst/>
-          </a:prstGeom>
-          <a:solidFill>
-            <a:srgbClr val="B5651D"/>
-          </a:solidFill>
-          <a:ln w="12700">
-            <a:solidFill>
-              <a:srgbClr val="B5651D"/>
-            </a:solidFill>
-            <a:prstDash val="solid"/>
-          </a:ln>
-        </p:spPr>
-      </p:sp>
-      <p:sp>
-        <p:nvSpPr>
-          <p:cNvPr id="4" name="Text 2"/>
-          <p:cNvSpPr txBox="1"/>
-          <p:nvPr/>
-        </p:nvSpPr>
-        <p:spPr>
-          <a:xfrm>
-            <a:off x="548640" y="3131820"/>
-            <a:ext cx="1188720" cy="1188720"/>
-          </a:xfrm>
-          <a:prstGeom prst="rect">
-            <a:avLst/>
-          </a:prstGeom>
-          <a:noFill/>
-          <a:ln/>
-        </p:spPr>
-        <p:txBody>
-          <a:bodyPr wrap="square" lIns="0" tIns="0" rIns="0" bIns="0" rtlCol="0" anchor="ctr"/>
-          <a:lstStyle/>
-          <a:p>
-            <a:pPr algn="ctr" indent="0" marL="0">
-              <a:buNone/>
-            </a:pPr>
-            <a:r>
-              <a:rPr lang="en-US" sz="5400" b="1" dirty="0">
                 <a:solidFill>
                   <a:srgbClr val="FFFFFF"/>
                 </a:solidFill>
@@ -12167,50 +10469,62 @@
                 <a:ea typeface="Arial" pitchFamily="34" charset="-122"/>
                 <a:cs typeface="Arial" pitchFamily="34" charset="-120"/>
               </a:rPr>
-              <a:t>?</a:t>
+              <a:t>Enfoque de entrega por entregable: híbrido por construcción</a:t>
             </a:r>
-            <a:endParaRPr lang="en-US" sz="5400" dirty="0"/>
-          </a:p>
-        </p:txBody>
-      </p:sp>
-      <p:sp>
-        <p:nvSpPr>
-          <p:cNvPr id="5" name="Text 3"/>
-          <p:cNvSpPr txBox="1"/>
-          <p:nvPr/>
-        </p:nvSpPr>
-        <p:spPr>
-          <a:xfrm>
-            <a:off x="2103120" y="1417320"/>
-            <a:ext cx="9537192" cy="4617720"/>
-          </a:xfrm>
-          <a:prstGeom prst="rect">
-            <a:avLst/>
-          </a:prstGeom>
-          <a:noFill/>
-          <a:ln/>
-        </p:spPr>
-        <p:txBody>
-          <a:bodyPr wrap="square" lIns="0" tIns="0" rIns="0" bIns="0" rtlCol="0" anchor="ctr"/>
-          <a:lstStyle/>
-          <a:p>
-            <a:pPr indent="0" marL="0">
-              <a:buNone/>
-            </a:pPr>
-            <a:r>
-              <a:rPr lang="en-US" sz="3200" b="1" dirty="0">
-                <a:solidFill>
-                  <a:srgbClr val="FFFFFF"/>
-                </a:solidFill>
-                <a:latin typeface="Arial" pitchFamily="34" charset="0"/>
-                <a:ea typeface="Arial" pitchFamily="34" charset="-122"/>
-                <a:cs typeface="Arial" pitchFamily="34" charset="-120"/>
-              </a:rPr>
-              <a:t>El piloto dio 13,5 % y el criterio era 12 %. ¿Abandonamos, ajustamos o seguimos?</a:t>
-            </a:r>
-            <a:endParaRPr lang="en-US" sz="1600" dirty="0"/>
-          </a:p>
-        </p:txBody>
+            <a:endParaRPr lang="en-US" sz="2400" dirty="0"/>
+          </a:p>
+        </p:txBody>
+      </p:sp>
+      <p:pic>
+        <p:nvPicPr>
+          <p:cNvPr id="3" name="Image 0" descr="Enfoque de entrega por entregable: híbrido por construcción">    </p:cNvPr>
+          <p:cNvPicPr>
+            <a:picLocks noChangeAspect="1"/>
+          </p:cNvPicPr>
+          <p:nvPr/>
+        </p:nvPicPr>
+        <p:blipFill>
+          <a:blip r:embed="rId1"/>
+          <a:stretch>
+            <a:fillRect/>
+          </a:stretch>
+        </p:blipFill>
+        <p:spPr>
+          <a:xfrm>
+            <a:off x="1705356" y="1280160"/>
+            <a:ext cx="8778240" cy="4937760"/>
+          </a:xfrm>
+          <a:prstGeom prst="rect">
+            <a:avLst/>
+          </a:prstGeom>
+        </p:spPr>
+      </p:pic>
+      <p:sp>
+        <p:nvSpPr>
+          <p:cNvPr id="4" name="Shape 1"/>
+          <p:cNvSpPr/>
+          <p:nvPr/>
+        </p:nvSpPr>
+        <p:spPr>
+          <a:xfrm>
+            <a:off x="1705356" y="1280160"/>
+            <a:ext cx="8778240" cy="4937760"/>
+          </a:xfrm>
+          <a:prstGeom prst="rect">
+            <a:avLst/>
+          </a:prstGeom>
+          <a:solidFill>
+            <a:srgbClr val="FFFFFF">
+              <a:alpha val="0"/>
+            </a:srgbClr>
+          </a:solidFill>
+          <a:ln w="9525">
+            <a:solidFill>
+              <a:srgbClr val="E2E2E6"/>
+            </a:solidFill>
+            <a:prstDash val="solid"/>
+          </a:ln>
+        </p:spPr>
       </p:sp>
       <p:sp>
         <p:nvSpPr>
@@ -12242,7 +10556,7 @@
             <a:lvl1pPr>
               <a:defRPr sz="1000">
                 <a:solidFill>
-                  <a:srgbClr val="D6E4F0"/>
+                  <a:srgbClr val="696969"/>
                 </a:solidFill>
               </a:defRPr>
             </a:lvl1pPr>
@@ -12309,7 +10623,7 @@
               <a:buNone/>
             </a:pPr>
             <a:r>
-              <a:rPr lang="en-US" sz="2200" b="1" dirty="0">
+              <a:rPr lang="en-US" sz="2400" b="1" dirty="0">
                 <a:solidFill>
                   <a:srgbClr val="FFFFFF"/>
                 </a:solidFill>
@@ -12317,62 +10631,116 @@
                 <a:ea typeface="Arial" pitchFamily="34" charset="-122"/>
                 <a:cs typeface="Arial" pitchFamily="34" charset="-120"/>
               </a:rPr>
-              <a:t>Enfoque de entrega por entregable: híbrido por construcción</a:t>
+              <a:t>En vivo · paso 5: elegir el enfoque con criterios</a:t>
             </a:r>
             <a:endParaRPr lang="en-US" sz="2400" dirty="0"/>
           </a:p>
         </p:txBody>
       </p:sp>
-      <p:pic>
-        <p:nvPicPr>
-          <p:cNvPr id="3" name="Image 0" descr="Enfoque de entrega por entregable: híbrido por construcción">    </p:cNvPr>
-          <p:cNvPicPr>
-            <a:picLocks noChangeAspect="1"/>
-          </p:cNvPicPr>
-          <p:nvPr/>
-        </p:nvPicPr>
-        <p:blipFill>
-          <a:blip r:embed="rId1"/>
-          <a:stretch>
-            <a:fillRect/>
-          </a:stretch>
-        </p:blipFill>
-        <p:spPr>
-          <a:xfrm>
-            <a:off x="1705356" y="1280160"/>
-            <a:ext cx="8778240" cy="4937760"/>
-          </a:xfrm>
-          <a:prstGeom prst="rect">
-            <a:avLst/>
-          </a:prstGeom>
-        </p:spPr>
-      </p:pic>
-      <p:sp>
-        <p:nvSpPr>
-          <p:cNvPr id="4" name="Shape 1"/>
+      <p:sp>
+        <p:nvSpPr>
+          <p:cNvPr id="3" name="Text 1"/>
+          <p:cNvSpPr txBox="1"/>
+          <p:nvPr/>
+        </p:nvSpPr>
+        <p:spPr>
+          <a:xfrm>
+            <a:off x="457200" y="1280160"/>
+            <a:ext cx="5486400" cy="292608"/>
+          </a:xfrm>
+          <a:prstGeom prst="rect">
+            <a:avLst/>
+          </a:prstGeom>
+          <a:noFill/>
+          <a:ln/>
+        </p:spPr>
+        <p:txBody>
+          <a:bodyPr wrap="square" lIns="0" tIns="0" rIns="0" bIns="0" rtlCol="0" anchor="t"/>
+          <a:lstStyle/>
+          <a:p>
+            <a:pPr indent="0" marL="0">
+              <a:buNone/>
+            </a:pPr>
+            <a:r>
+              <a:rPr lang="en-US" sz="1300" b="1" dirty="0">
+                <a:solidFill>
+                  <a:srgbClr val="696969"/>
+                </a:solidFill>
+                <a:latin typeface="Arial" pitchFamily="34" charset="0"/>
+                <a:ea typeface="Arial" pitchFamily="34" charset="-122"/>
+                <a:cs typeface="Arial" pitchFamily="34" charset="-120"/>
+              </a:rPr>
+              <a:t>Prompt · escribilo tal cual</a:t>
+            </a:r>
+            <a:endParaRPr lang="en-US" sz="1300" dirty="0"/>
+          </a:p>
+        </p:txBody>
+      </p:sp>
+      <p:sp>
+        <p:nvSpPr>
+          <p:cNvPr id="4" name="Shape 2"/>
           <p:cNvSpPr/>
           <p:nvPr/>
         </p:nvSpPr>
         <p:spPr>
           <a:xfrm>
-            <a:off x="1705356" y="1280160"/>
-            <a:ext cx="8778240" cy="4937760"/>
-          </a:xfrm>
-          <a:prstGeom prst="rect">
-            <a:avLst/>
+            <a:off x="457200" y="1627632"/>
+            <a:ext cx="11274552" cy="1472184"/>
+          </a:xfrm>
+          <a:prstGeom prst="roundRect">
+            <a:avLst>
+              <a:gd name="adj" fmla="val 4969"/>
+            </a:avLst>
           </a:prstGeom>
           <a:solidFill>
-            <a:srgbClr val="FFFFFF">
-              <a:alpha val="0"/>
-            </a:srgbClr>
+            <a:srgbClr val="0F2238"/>
           </a:solidFill>
-          <a:ln w="9525">
+          <a:ln w="12700">
             <a:solidFill>
-              <a:srgbClr val="E2E2E6"/>
+              <a:srgbClr val="0F2238"/>
             </a:solidFill>
             <a:prstDash val="solid"/>
           </a:ln>
         </p:spPr>
+      </p:sp>
+      <p:sp>
+        <p:nvSpPr>
+          <p:cNvPr id="5" name="Text 3"/>
+          <p:cNvSpPr txBox="1"/>
+          <p:nvPr/>
+        </p:nvSpPr>
+        <p:spPr>
+          <a:xfrm>
+            <a:off x="685800" y="1792224"/>
+            <a:ext cx="10817352" cy="1143000"/>
+          </a:xfrm>
+          <a:prstGeom prst="rect">
+            <a:avLst/>
+          </a:prstGeom>
+          <a:noFill/>
+          <a:ln/>
+        </p:spPr>
+        <p:txBody>
+          <a:bodyPr wrap="square" lIns="0" tIns="0" rIns="0" bIns="0" rtlCol="0" anchor="ctr"/>
+          <a:lstStyle/>
+          <a:p>
+            <a:pPr indent="0" marL="0">
+              <a:buNone/>
+            </a:pPr>
+            <a:r>
+              <a:rPr lang="en-US" sz="1800" dirty="0">
+                <a:solidFill>
+                  <a:srgbClr val="E8EEF5"/>
+                </a:solidFill>
+                <a:latin typeface="Courier New" pitchFamily="34" charset="0"/>
+                <a:ea typeface="Courier New" pitchFamily="34" charset="-122"/>
+                <a:cs typeface="Courier New" pitchFamily="34" charset="-120"/>
+              </a:rPr>
+              <a:t>Puntuá los nueve criterios de selección del enfoque para cada entregable: recordatorios y confirmación, turnos en línea (portal y app) e integración con la agenda clínica. Mostrame la tabla, la lectura de cada uno y tu recomendación para el proyecto. Si Carmen lo aprueba, registralo con fecha 2026-12-09.</a:t>
+            </a:r>
+            <a:endParaRPr lang="en-US" sz="1800" dirty="0"/>
+          </a:p>
+        </p:txBody>
       </p:sp>
       <p:sp>
         <p:nvSpPr>
@@ -12471,7 +10839,7 @@
               <a:buNone/>
             </a:pPr>
             <a:r>
-              <a:rPr lang="en-US" sz="2400" b="1" dirty="0">
+              <a:rPr lang="en-US" sz="2200" b="1" dirty="0">
                 <a:solidFill>
                   <a:srgbClr val="FFFFFF"/>
                 </a:solidFill>
@@ -12479,116 +10847,62 @@
                 <a:ea typeface="Arial" pitchFamily="34" charset="-122"/>
                 <a:cs typeface="Arial" pitchFamily="34" charset="-120"/>
               </a:rPr>
-              <a:t>En vivo · paso 5: elegir el enfoque con criterios</a:t>
+              <a:t>Mapa de valor: qué construir, qué comprar, dónde hay inercia</a:t>
             </a:r>
             <a:endParaRPr lang="en-US" sz="2400" dirty="0"/>
           </a:p>
         </p:txBody>
       </p:sp>
-      <p:sp>
-        <p:nvSpPr>
-          <p:cNvPr id="3" name="Text 1"/>
-          <p:cNvSpPr txBox="1"/>
-          <p:nvPr/>
-        </p:nvSpPr>
-        <p:spPr>
-          <a:xfrm>
-            <a:off x="457200" y="1280160"/>
-            <a:ext cx="5486400" cy="292608"/>
-          </a:xfrm>
-          <a:prstGeom prst="rect">
-            <a:avLst/>
-          </a:prstGeom>
-          <a:noFill/>
-          <a:ln/>
-        </p:spPr>
-        <p:txBody>
-          <a:bodyPr wrap="square" lIns="0" tIns="0" rIns="0" bIns="0" rtlCol="0" anchor="t"/>
-          <a:lstStyle/>
-          <a:p>
-            <a:pPr indent="0" marL="0">
-              <a:buNone/>
-            </a:pPr>
-            <a:r>
-              <a:rPr lang="en-US" sz="1300" b="1" dirty="0">
-                <a:solidFill>
-                  <a:srgbClr val="696969"/>
-                </a:solidFill>
-                <a:latin typeface="Arial" pitchFamily="34" charset="0"/>
-                <a:ea typeface="Arial" pitchFamily="34" charset="-122"/>
-                <a:cs typeface="Arial" pitchFamily="34" charset="-120"/>
-              </a:rPr>
-              <a:t>Prompt · escribilo tal cual</a:t>
-            </a:r>
-            <a:endParaRPr lang="en-US" sz="1300" dirty="0"/>
-          </a:p>
-        </p:txBody>
-      </p:sp>
-      <p:sp>
-        <p:nvSpPr>
-          <p:cNvPr id="4" name="Shape 2"/>
+      <p:pic>
+        <p:nvPicPr>
+          <p:cNvPr id="3" name="Image 0" descr="Mapa de valor: qué construir, qué comprar, dónde hay inercia">    </p:cNvPr>
+          <p:cNvPicPr>
+            <a:picLocks noChangeAspect="1"/>
+          </p:cNvPicPr>
+          <p:nvPr/>
+        </p:nvPicPr>
+        <p:blipFill>
+          <a:blip r:embed="rId1"/>
+          <a:stretch>
+            <a:fillRect/>
+          </a:stretch>
+        </p:blipFill>
+        <p:spPr>
+          <a:xfrm>
+            <a:off x="2215514" y="1280160"/>
+            <a:ext cx="7757924" cy="4937760"/>
+          </a:xfrm>
+          <a:prstGeom prst="rect">
+            <a:avLst/>
+          </a:prstGeom>
+        </p:spPr>
+      </p:pic>
+      <p:sp>
+        <p:nvSpPr>
+          <p:cNvPr id="4" name="Shape 1"/>
           <p:cNvSpPr/>
           <p:nvPr/>
         </p:nvSpPr>
         <p:spPr>
           <a:xfrm>
-            <a:off x="457200" y="1627632"/>
-            <a:ext cx="11274552" cy="1472184"/>
-          </a:xfrm>
-          <a:prstGeom prst="roundRect">
-            <a:avLst>
-              <a:gd name="adj" fmla="val 4969"/>
-            </a:avLst>
+            <a:off x="2215514" y="1280160"/>
+            <a:ext cx="7757924" cy="4937760"/>
+          </a:xfrm>
+          <a:prstGeom prst="rect">
+            <a:avLst/>
           </a:prstGeom>
           <a:solidFill>
-            <a:srgbClr val="0F2238"/>
+            <a:srgbClr val="FFFFFF">
+              <a:alpha val="0"/>
+            </a:srgbClr>
           </a:solidFill>
-          <a:ln w="12700">
+          <a:ln w="9525">
             <a:solidFill>
-              <a:srgbClr val="0F2238"/>
+              <a:srgbClr val="E2E2E6"/>
             </a:solidFill>
             <a:prstDash val="solid"/>
           </a:ln>
         </p:spPr>
-      </p:sp>
-      <p:sp>
-        <p:nvSpPr>
-          <p:cNvPr id="5" name="Text 3"/>
-          <p:cNvSpPr txBox="1"/>
-          <p:nvPr/>
-        </p:nvSpPr>
-        <p:spPr>
-          <a:xfrm>
-            <a:off x="685800" y="1792224"/>
-            <a:ext cx="10817352" cy="1143000"/>
-          </a:xfrm>
-          <a:prstGeom prst="rect">
-            <a:avLst/>
-          </a:prstGeom>
-          <a:noFill/>
-          <a:ln/>
-        </p:spPr>
-        <p:txBody>
-          <a:bodyPr wrap="square" lIns="0" tIns="0" rIns="0" bIns="0" rtlCol="0" anchor="ctr"/>
-          <a:lstStyle/>
-          <a:p>
-            <a:pPr indent="0" marL="0">
-              <a:buNone/>
-            </a:pPr>
-            <a:r>
-              <a:rPr lang="en-US" sz="1800" dirty="0">
-                <a:solidFill>
-                  <a:srgbClr val="E8EEF5"/>
-                </a:solidFill>
-                <a:latin typeface="Courier New" pitchFamily="34" charset="0"/>
-                <a:ea typeface="Courier New" pitchFamily="34" charset="-122"/>
-                <a:cs typeface="Courier New" pitchFamily="34" charset="-120"/>
-              </a:rPr>
-              <a:t>Puntuá los nueve criterios de selección del enfoque para cada entregable: recordatorios y confirmación, turnos en línea (portal y app) e integración con la agenda clínica. Mostrame la tabla, la lectura de cada uno y tu recomendación para el proyecto. Si Carmen lo aprueba, registralo con fecha 2026-12-09.</a:t>
-            </a:r>
-            <a:endParaRPr lang="en-US" sz="1800" dirty="0"/>
-          </a:p>
-        </p:txBody>
       </p:sp>
       <p:sp>
         <p:nvSpPr>
@@ -12687,7 +11001,7 @@
               <a:buNone/>
             </a:pPr>
             <a:r>
-              <a:rPr lang="en-US" sz="2200" b="1" dirty="0">
+              <a:rPr lang="en-US" sz="2400" b="1" dirty="0">
                 <a:solidFill>
                   <a:srgbClr val="FFFFFF"/>
                 </a:solidFill>
@@ -12695,7 +11009,7 @@
                 <a:ea typeface="Arial" pitchFamily="34" charset="-122"/>
                 <a:cs typeface="Arial" pitchFamily="34" charset="-120"/>
               </a:rPr>
-              <a:t>Mapa de valor: qué construir, qué comprar, dónde hay inercia</a:t>
+              <a:t>El recorrido del paciente: dónde duele hoy</a:t>
             </a:r>
             <a:endParaRPr lang="en-US" sz="2400" dirty="0"/>
           </a:p>
@@ -12703,7 +11017,7 @@
       </p:sp>
       <p:pic>
         <p:nvPicPr>
-          <p:cNvPr id="3" name="Image 0" descr="Mapa de valor: qué construir, qué comprar, dónde hay inercia">    </p:cNvPr>
+          <p:cNvPr id="3" name="Image 0" descr="El recorrido del paciente: dónde duele hoy">    </p:cNvPr>
           <p:cNvPicPr>
             <a:picLocks noChangeAspect="1"/>
           </p:cNvPicPr>
@@ -12717,8 +11031,8 @@
         </p:blipFill>
         <p:spPr>
           <a:xfrm>
-            <a:off x="2215514" y="1280160"/>
-            <a:ext cx="7757924" cy="4937760"/>
+            <a:off x="2927977" y="1280160"/>
+            <a:ext cx="6332999" cy="4937760"/>
           </a:xfrm>
           <a:prstGeom prst="rect">
             <a:avLst/>
@@ -12733,8 +11047,8 @@
         </p:nvSpPr>
         <p:spPr>
           <a:xfrm>
-            <a:off x="2215514" y="1280160"/>
-            <a:ext cx="7757924" cy="4937760"/>
+            <a:off x="2927977" y="1280160"/>
+            <a:ext cx="6332999" cy="4937760"/>
           </a:xfrm>
           <a:prstGeom prst="rect">
             <a:avLst/>
@@ -12849,7 +11163,7 @@
               <a:buNone/>
             </a:pPr>
             <a:r>
-              <a:rPr lang="en-US" sz="2400" b="1" dirty="0">
+              <a:rPr lang="en-US" sz="2200" b="1" dirty="0">
                 <a:solidFill>
                   <a:srgbClr val="FFFFFF"/>
                 </a:solidFill>
@@ -12857,7 +11171,7 @@
                 <a:ea typeface="Arial" pitchFamily="34" charset="-122"/>
                 <a:cs typeface="Arial" pitchFamily="34" charset="-120"/>
               </a:rPr>
-              <a:t>El recorrido del paciente: dónde duele hoy</a:t>
+              <a:t>Hacer o comprar de C2: comprar gana; construir solo con diferenciación ≥ 57,5</a:t>
             </a:r>
             <a:endParaRPr lang="en-US" sz="2400" dirty="0"/>
           </a:p>
@@ -12865,7 +11179,7 @@
       </p:sp>
       <p:pic>
         <p:nvPicPr>
-          <p:cNvPr id="3" name="Image 0" descr="El recorrido del paciente: dónde duele hoy">    </p:cNvPr>
+          <p:cNvPr id="3" name="Image 0" descr="Hacer o comprar de C2: comprar gana; construir solo con diferenciación ≥ 57,5">    </p:cNvPr>
           <p:cNvPicPr>
             <a:picLocks noChangeAspect="1"/>
           </p:cNvPicPr>
@@ -12879,8 +11193,8 @@
         </p:blipFill>
         <p:spPr>
           <a:xfrm>
-            <a:off x="2927977" y="1280160"/>
-            <a:ext cx="6332999" cy="4937760"/>
+            <a:off x="1705356" y="1280160"/>
+            <a:ext cx="8778240" cy="4937760"/>
           </a:xfrm>
           <a:prstGeom prst="rect">
             <a:avLst/>
@@ -12895,8 +11209,8 @@
         </p:nvSpPr>
         <p:spPr>
           <a:xfrm>
-            <a:off x="2927977" y="1280160"/>
-            <a:ext cx="6332999" cy="4937760"/>
+            <a:off x="1705356" y="1280160"/>
+            <a:ext cx="8778240" cy="4937760"/>
           </a:xfrm>
           <a:prstGeom prst="rect">
             <a:avLst/>
@@ -13412,7 +11726,7 @@
                 <a:ea typeface="Arial" pitchFamily="34" charset="-122"/>
                 <a:cs typeface="Arial" pitchFamily="34" charset="-120"/>
               </a:rPr>
-              <a:t>Comparar opciones contra no hacer nada con VAN, TIR, repago y punto de equilibrio</a:t>
+              <a:t>Comparar opciones contra no hacer nada con VAN, TIR, repago y punto de equilibrio, y con una matriz de pesos explícitos y su sensibilidad</a:t>
             </a:r>
             <a:endParaRPr lang="en-US" sz="1600" dirty="0"/>
           </a:p>
@@ -15764,7 +14078,7 @@
                 <a:ea typeface="Arial" pitchFamily="34" charset="-122"/>
                 <a:cs typeface="Arial" pitchFamily="34" charset="-120"/>
               </a:rPr>
-              <a:t>Las opciones se comparan contra no hacer nada, con la fórmula a la vista</a:t>
+              <a:t>Las opciones se comparan contra no hacer nada, con la fórmula y los pesos a la vista; la matriz recomienda, la junta decide</a:t>
             </a:r>
             <a:endParaRPr lang="en-US" sz="1600" dirty="0"/>
           </a:p>
@@ -16552,7 +14866,7 @@
                 <a:ea typeface="Arial" pitchFamily="34" charset="-122"/>
                 <a:cs typeface="Arial" pitchFamily="34" charset="-120"/>
               </a:rPr>
-              <a:t>Llevar el proyecto a autorizar-proyecto sin hipótesis ocultas: validar o aceptar por escrito (P-11)</a:t>
+              <a:t>Llevar el proyecto a autorizar-proyecto sin hipótesis ocultas: validar o aceptar por escrito (P-11), con fecha de revisión (DEC-06)</a:t>
             </a:r>
             <a:endParaRPr lang="en-US" sz="1600" dirty="0"/>
           </a:p>
@@ -22105,7 +20419,7 @@
                 <a:ea typeface="Arial" pitchFamily="34" charset="-122"/>
                 <a:cs typeface="Arial" pitchFamily="34" charset="-120"/>
               </a:rPr>
-              <a:t>Formalidad decidida por enfoque y escrita (D-008)</a:t>
+              <a:t>Formalidad decidida por enfoque y escrita (D-009)</a:t>
             </a:r>
             <a:endParaRPr lang="en-US" sz="1600" dirty="0"/>
           </a:p>
@@ -25534,7 +23848,7 @@
                 <a:ea typeface="Arial" pitchFamily="34" charset="-122"/>
                 <a:cs typeface="Arial" pitchFamily="34" charset="-120"/>
               </a:rPr>
-              <a:t>S-006: la junta lo acepta por escrito (D-009)</a:t>
+              <a:t>S-006: la junta lo acepta por escrito (D-010)</a:t>
             </a:r>
             <a:endParaRPr lang="en-US" sz="1600" dirty="0"/>
           </a:p>
@@ -26860,7 +25174,7 @@
                 <a:ea typeface="Arial" pitchFamily="34" charset="-122"/>
                 <a:cs typeface="Arial" pitchFamily="34" charset="-120"/>
               </a:rPr>
-              <a:t>Sanidad: SUP-02 por S-006 y REG-09 por R-001, R-002 y R-003</a:t>
+              <a:t>Sanidad, 5 avisos: DEC-06 (D-010 sin revisar), SUP-02 (S-006) y REG-09 (R-001 a R-003)</a:t>
             </a:r>
             <a:endParaRPr lang="en-US" sz="1600" dirty="0"/>
           </a:p>
@@ -27124,7 +25438,7 @@
                 <a:ea typeface="Arial" pitchFamily="34" charset="-122"/>
                 <a:cs typeface="Arial" pitchFamily="34" charset="-120"/>
               </a:rPr>
-              <a:t>Hoy: decidir S-006 (Carmen Olivera): seguir, cambiar o detener</a:t>
+              <a:t>Hoy: decidir S-006 (Carmen Olivera): confirmar D-010 con otra fecha o reemplazarla</a:t>
             </a:r>
             <a:endParaRPr lang="en-US" sz="1600" dirty="0"/>
           </a:p>
@@ -28173,7 +26487,7 @@
                 <a:ea typeface="Arial" pitchFamily="34" charset="-122"/>
                 <a:cs typeface="Arial" pitchFamily="34" charset="-120"/>
               </a:rPr>
-              <a:t>Nadie invierte sobre una hipótesis sin saberlo (P-11), y el radar dice qué decidir hoy</a:t>
+              <a:t>Nadie invierte sobre una hipótesis sin saberlo (P-11); lo aceptado tiene fecha de revisión (DEC-06) y el radar dice qué decidir hoy</a:t>
             </a:r>
             <a:endParaRPr lang="en-US" sz="1600" dirty="0"/>
           </a:p>

--- a/docs/webinar/E2E-5/E2E-5-diapositivas.pptx
+++ b/docs/webinar/E2E-5/E2E-5-diapositivas.pptx
@@ -152,12 +152,12 @@
   <p:extLst>
     <p:ext uri="{521415D9-36F7-43E2-AB2F-B90AF26B5E84}">
       <p14:sectionLst xmlns:p14="http://schemas.microsoft.com/office/powerpoint/2010/main">
-        <p14:section name="Portada" id="{1d8e6716-6fc8-9d41-0519-9f2732d14a8e}">
+        <p14:section name="Portada" id="{92776def-e49d-1bff-2d84-78f53b0742b2}">
           <p14:sldIdLst>
             <p14:sldId id="256"/>
           </p14:sldIdLst>
         </p14:section>
-        <p14:section name="Clase 1 · ¿Vale la pena?" id="{4cf8189a-adaa-3243-38db-b004364234a4}">
+        <p14:section name="Clase 1 · ¿Vale la pena?" id="{7b41b7a8-4a53-ed80-eb98-7e11a19eb9f4}">
           <p14:sldIdLst>
             <p14:sldId id="257"/>
             <p14:sldId id="258"/>
@@ -182,7 +182,7 @@
             <p14:sldId id="277"/>
           </p14:sldIdLst>
         </p14:section>
-        <p14:section name="Clase 2 · Diseñar el proyecto" id="{d5008389-2a29-8503-d9c1-1d1dae4b603c}">
+        <p14:section name="Clase 2 · Diseñar el proyecto" id="{e0f9f063-a36b-c2e5-41a3-e04a126fa21e}">
           <p14:sldIdLst>
             <p14:sldId id="278"/>
             <p14:sldId id="279"/>
@@ -207,7 +207,7 @@
             <p14:sldId id="298"/>
           </p14:sldIdLst>
         </p14:section>
-        <p14:section name="Glosario" id="{83de67df-cd30-4a25-1a9b-7b1e02e50b09}">
+        <p14:section name="Glosario" id="{dec42b19-528a-aae0-479d-2fb31ec9d023}">
           <p14:sldIdLst>
             <p14:sldId id="299"/>
             <p14:sldId id="300"/>
@@ -4809,7 +4809,7 @@
                   <a:srgbClr val="D6E4F0"/>
                 </a:solidFill>
               </a:rPr>
-              <a:t>pm-method 2.6.0 · Webinar E2E-5 · Clase 1</a:t>
+              <a:t>pm-method 2.7.0 · Webinar E2E-5 · Clase 1</a:t>
             </a:r>
             <a:endParaRPr lang="en-US" sz="1000" dirty="0"/>
           </a:p>
@@ -5049,7 +5049,7 @@
                   <a:srgbClr val="696969"/>
                 </a:solidFill>
               </a:rPr>
-              <a:t>pm-method 2.6.0 · Webinar E2E-5 · Clase 2</a:t>
+              <a:t>pm-method 2.7.0 · Webinar E2E-5 · Clase 2</a:t>
             </a:r>
             <a:endParaRPr lang="en-US" sz="1000" dirty="0"/>
           </a:p>
@@ -5267,7 +5267,7 @@
                   <a:srgbClr val="D6E4F0"/>
                 </a:solidFill>
               </a:rPr>
-              <a:t>pm-method 2.6.0 · Webinar E2E-5 · Clase 2</a:t>
+              <a:t>pm-method 2.7.0 · Webinar E2E-5 · Clase 2</a:t>
             </a:r>
             <a:endParaRPr lang="en-US" sz="1000" dirty="0"/>
           </a:p>
@@ -5485,7 +5485,7 @@
                   <a:srgbClr val="D6E4F0"/>
                 </a:solidFill>
               </a:rPr>
-              <a:t>pm-method 2.6.0 · Webinar E2E-5 · Clase 2</a:t>
+              <a:t>pm-method 2.7.0 · Webinar E2E-5 · Clase 2</a:t>
             </a:r>
             <a:endParaRPr lang="en-US" sz="1000" dirty="0"/>
           </a:p>
@@ -5703,7 +5703,7 @@
                   <a:srgbClr val="D6E4F0"/>
                 </a:solidFill>
               </a:rPr>
-              <a:t>pm-method 2.6.0 · Webinar E2E-5 · Clase 2</a:t>
+              <a:t>pm-method 2.7.0 · Webinar E2E-5 · Clase 2</a:t>
             </a:r>
             <a:endParaRPr lang="en-US" sz="1000" dirty="0"/>
           </a:p>
@@ -5879,7 +5879,7 @@
                   <a:srgbClr val="D6E4F0"/>
                 </a:solidFill>
               </a:rPr>
-              <a:t>pm-method 2.6.0 · Webinar E2E-5</a:t>
+              <a:t>pm-method 2.7.0 · Webinar E2E-5</a:t>
             </a:r>
             <a:endParaRPr lang="en-US" sz="1000" dirty="0"/>
           </a:p>
@@ -6074,7 +6074,7 @@
                   <a:srgbClr val="696969"/>
                 </a:solidFill>
               </a:rPr>
-              <a:t>pm-method 2.6.0 · Webinar E2E-5</a:t>
+              <a:t>pm-method 2.7.0 · Webinar E2E-5</a:t>
             </a:r>
             <a:endParaRPr lang="en-US" sz="1000" dirty="0"/>
           </a:p>
@@ -6292,7 +6292,7 @@
                   <a:srgbClr val="D6E4F0"/>
                 </a:solidFill>
               </a:rPr>
-              <a:t>pm-method 2.6.0 · Webinar E2E-5</a:t>
+              <a:t>pm-method 2.7.0 · Webinar E2E-5</a:t>
             </a:r>
             <a:endParaRPr lang="en-US" sz="1000" dirty="0"/>
           </a:p>
@@ -6510,7 +6510,7 @@
                   <a:srgbClr val="D6E4F0"/>
                 </a:solidFill>
               </a:rPr>
-              <a:t>pm-method 2.6.0 · Webinar E2E-5</a:t>
+              <a:t>pm-method 2.7.0 · Webinar E2E-5</a:t>
             </a:r>
             <a:endParaRPr lang="en-US" sz="1000" dirty="0"/>
           </a:p>
@@ -6728,7 +6728,7 @@
                   <a:srgbClr val="D6E4F0"/>
                 </a:solidFill>
               </a:rPr>
-              <a:t>pm-method 2.6.0 · Webinar E2E-5</a:t>
+              <a:t>pm-method 2.7.0 · Webinar E2E-5</a:t>
             </a:r>
             <a:endParaRPr lang="en-US" sz="1000" dirty="0"/>
           </a:p>
@@ -6968,7 +6968,7 @@
                   <a:srgbClr val="696969"/>
                 </a:solidFill>
               </a:rPr>
-              <a:t>pm-method 2.6.0 · Webinar E2E-5 · Clase 1</a:t>
+              <a:t>pm-method 2.7.0 · Webinar E2E-5 · Clase 1</a:t>
             </a:r>
             <a:endParaRPr lang="en-US" sz="1000" dirty="0"/>
           </a:p>
@@ -7186,7 +7186,7 @@
                   <a:srgbClr val="D6E4F0"/>
                 </a:solidFill>
               </a:rPr>
-              <a:t>pm-method 2.6.0 · Webinar E2E-5 · Clase 1</a:t>
+              <a:t>pm-method 2.7.0 · Webinar E2E-5 · Clase 1</a:t>
             </a:r>
             <a:endParaRPr lang="en-US" sz="1000" dirty="0"/>
           </a:p>
@@ -7404,7 +7404,7 @@
                   <a:srgbClr val="D6E4F0"/>
                 </a:solidFill>
               </a:rPr>
-              <a:t>pm-method 2.6.0 · Webinar E2E-5 · Clase 1</a:t>
+              <a:t>pm-method 2.7.0 · Webinar E2E-5 · Clase 1</a:t>
             </a:r>
             <a:endParaRPr lang="en-US" sz="1000" dirty="0"/>
           </a:p>
@@ -7848,7 +7848,7 @@
                 <a:ea typeface="Arial" pitchFamily="34" charset="-122"/>
                 <a:cs typeface="Arial" pitchFamily="34" charset="-120"/>
               </a:rPr>
-              <a:t>Webinar · pm-method 2.6.0 · E2E-5</a:t>
+              <a:t>Webinar · pm-method 2.7.0 · E2E-5</a:t>
             </a:r>
             <a:endParaRPr lang="en-US" sz="1600" dirty="0"/>
           </a:p>
